--- a/lecons/LSA/Geomorphology/13_LSA_GEOMO_L11_The_Impact_of_Weathering.pptx
+++ b/lecons/LSA/Geomorphology/13_LSA_GEOMO_L11_The_Impact_of_Weathering.pptx
@@ -59,9 +59,13 @@
     <p:sldId id="307" r:id="rId53"/>
     <p:sldId id="308" r:id="rId54"/>
     <p:sldId id="309" r:id="rId55"/>
+    <p:sldId id="310" r:id="rId56"/>
+    <p:sldId id="311" r:id="rId57"/>
+    <p:sldId id="312" r:id="rId58"/>
+    <p:sldId id="313" r:id="rId59"/>
   </p:sldIdLst>
   <p:notesMasterIdLst>
-    <p:notesMasterId r:id="rId56"/>
+    <p:notesMasterId r:id="rId60"/>
   </p:notesMasterIdLst>
   <p:sldSz cx="12192000" cy="6858000"/>
   <p:notesSz cx="6858000" cy="12192000"/>
@@ -643,7 +647,7 @@
           <a:p>
             <a:r>
               <a:rPr lang="en-US" dirty="0"/>
-              <a:t>Listen carefully to this situation from real life. Near Minim-Martap in the Adamawa, a company plans to mine bauxite formed by weathering. In the same region, heavy rains cause landslides on weathered slopes. Think about it, because I am going to ask you some questions.</a:t>
+              <a:t>Take your time to copy this part; we will continue together.</a:t>
             </a:r>
             <a:endParaRPr lang="en-US" dirty="0"/>
           </a:p>
@@ -731,7 +735,7 @@
           <a:p>
             <a:r>
               <a:rPr lang="en-US" dirty="0"/>
-              <a:t>Question 1: What is the problem in the situation? Think for a moment, then raise your hand to answer.</a:t>
+              <a:t>Listen carefully to this situation from real life. You help your family prepare a millet field near Garoua. As you dig, you feel the soft soil that will feed the crops. On the way home, you see cracks in the wall of an old building and potholes in the tarred road. You think: the same natural force that makes good soil for our farms also destroys the walls and roads we build. You ask: "How can weathering be both useful and harmful?" Think about it, because I am going to ask you some questions.</a:t>
             </a:r>
             <a:endParaRPr lang="en-US" dirty="0"/>
           </a:p>
@@ -819,7 +823,7 @@
           <a:p>
             <a:r>
               <a:rPr lang="en-US" dirty="0"/>
-              <a:t>Good. Weathering brings both riches and dangers.</a:t>
+              <a:t>Question 1: What is the problem in the situation? Think for a moment, then raise your hand to answer.</a:t>
             </a:r>
             <a:endParaRPr lang="en-US" dirty="0"/>
           </a:p>
@@ -907,7 +911,7 @@
           <a:p>
             <a:r>
               <a:rPr lang="en-US" dirty="0"/>
-              <a:t>Question 2: What resource comes from weathering here? Think for a moment, then raise your hand to answer.</a:t>
+              <a:t>Good. The learner does not understand the positive and negative impacts of weathering.</a:t>
             </a:r>
             <a:endParaRPr lang="en-US" dirty="0"/>
           </a:p>
@@ -995,7 +999,7 @@
           <a:p>
             <a:r>
               <a:rPr lang="en-US" dirty="0"/>
-              <a:t>Good. Bauxite (aluminium ore).</a:t>
+              <a:t>Question 2: What is the layer of loose weathered material called? Think for a moment, then raise your hand to answer.</a:t>
             </a:r>
             <a:endParaRPr lang="en-US" dirty="0"/>
           </a:p>
@@ -1083,7 +1087,7 @@
           <a:p>
             <a:r>
               <a:rPr lang="en-US" dirty="0"/>
-              <a:t>Question 3: What danger comes from it? Think for a moment, then raise your hand to answer.</a:t>
+              <a:t>Good. Regolith; its upper part is the soil.</a:t>
             </a:r>
             <a:endParaRPr lang="en-US" dirty="0"/>
           </a:p>
@@ -1171,7 +1175,7 @@
           <a:p>
             <a:r>
               <a:rPr lang="en-US" dirty="0"/>
-              <a:t>Good. Landslides on weathered slopes.</a:t>
+              <a:t>Question 3: Give one harmful effect of weathering. Think for a moment, then raise your hand to answer.</a:t>
             </a:r>
             <a:endParaRPr lang="en-US" dirty="0"/>
           </a:p>
@@ -1259,7 +1263,7 @@
           <a:p>
             <a:r>
               <a:rPr lang="en-US" dirty="0"/>
-              <a:t>From this situation, the action we are working towards in this lesson is the following: use the products of weathering sustainably and protect buildings from weathering.</a:t>
+              <a:t>Good. It damages buildings and roads.</a:t>
             </a:r>
             <a:endParaRPr lang="en-US" dirty="0"/>
           </a:p>
@@ -1347,7 +1351,7 @@
           <a:p>
             <a:r>
               <a:rPr lang="en-US" dirty="0"/>
-              <a:t>Why is this lesson important for you? This lesson helps us to use the products of weathering and reduce its dangers.</a:t>
+              <a:t>From this situation, the action we are working towards in this lesson is the following: protect farm soils from erosion and maintain buildings and roads regularly.</a:t>
             </a:r>
             <a:endParaRPr lang="en-US" dirty="0"/>
           </a:p>
@@ -1435,7 +1439,7 @@
           <a:p>
             <a:r>
               <a:rPr lang="en-US" dirty="0"/>
-              <a:t>Activity 1. Look carefully at this diagram: a soil profile. Observe every detail before I ask the question.</a:t>
+              <a:t>Why is this lesson important for you? This lesson shows the importance of weathering for farming, building and mining, and the costs it causes.</a:t>
             </a:r>
             <a:endParaRPr lang="en-US" dirty="0"/>
           </a:p>
@@ -1611,7 +1615,7 @@
           <a:p>
             <a:r>
               <a:rPr lang="en-US" dirty="0"/>
-              <a:t>Here is the question for Activity 1: How does weathering help agriculture? Take one minute to think and write your answer in your rough notebook.</a:t>
+              <a:t>Activity 1. Look carefully at this diagram: a soil profile. Observe every detail before I ask the question.</a:t>
             </a:r>
             <a:endParaRPr lang="en-US" dirty="0"/>
           </a:p>
@@ -1699,7 +1703,7 @@
           <a:p>
             <a:r>
               <a:rPr lang="en-US" dirty="0"/>
-              <a:t>Let us check the answer together. Weathered rock forms soil, which supports crops.</a:t>
+              <a:t>Here is the question for Activity 1: What lies at the bottom of the soil profile? Take one minute to think and write your answer in your rough notebook.</a:t>
             </a:r>
             <a:endParaRPr lang="en-US" dirty="0"/>
           </a:p>
@@ -1787,7 +1791,7 @@
           <a:p>
             <a:r>
               <a:rPr lang="en-US" dirty="0"/>
-              <a:t>Activity 2. Look carefully at this picture: a bauxite mine. Observe every detail before I ask the question.</a:t>
+              <a:t>Let us check the answer together. The hard rock (bedrock).</a:t>
             </a:r>
             <a:endParaRPr lang="en-US" dirty="0"/>
           </a:p>
@@ -1875,7 +1879,7 @@
           <a:p>
             <a:r>
               <a:rPr lang="en-US" dirty="0"/>
-              <a:t>Here is the question for Activity 2: Bauxite forms by deep chemical weathering. What metal is made from it? Take one minute to think and write your answer in your rough notebook.</a:t>
+              <a:t>Activity 2. Look carefully at this picture: bauxite. Observe every detail before I ask the question.</a:t>
             </a:r>
             <a:endParaRPr lang="en-US" dirty="0"/>
           </a:p>
@@ -1963,7 +1967,7 @@
           <a:p>
             <a:r>
               <a:rPr lang="en-US" dirty="0"/>
-              <a:t>Let us check the answer together. Aluminium.</a:t>
+              <a:t>Here is the question for Activity 2: Which metal is made from bauxite? Take one minute to think and write your answer in your rough notebook.</a:t>
             </a:r>
             <a:endParaRPr lang="en-US" dirty="0"/>
           </a:p>
@@ -2051,7 +2055,7 @@
           <a:p>
             <a:r>
               <a:rPr lang="en-US" dirty="0"/>
-              <a:t>Activity 3. Look carefully at this picture: laterite, a red weathered material used for roads and bricks. Observe every detail before I ask the question.</a:t>
+              <a:t>Let us check the answer together. Aluminium.</a:t>
             </a:r>
             <a:endParaRPr lang="en-US" dirty="0"/>
           </a:p>
@@ -2139,7 +2143,7 @@
           <a:p>
             <a:r>
               <a:rPr lang="en-US" dirty="0"/>
-              <a:t>Here is the question for Activity 3: Give two building materials that come from weathering. Take one minute to think and write your answer in your rough notebook.</a:t>
+              <a:t>Activity 3. Look carefully at this picture: a cotton field. Observe every detail before I ask the question.</a:t>
             </a:r>
             <a:endParaRPr lang="en-US" dirty="0"/>
           </a:p>
@@ -2227,7 +2231,7 @@
           <a:p>
             <a:r>
               <a:rPr lang="en-US" dirty="0"/>
-              <a:t>Let us check the answer together. Sand, gravel, clay and laterite.</a:t>
+              <a:t>Here is the question for Activity 3: Why is soil the most important product of weathering? Take one minute to think and write your answer in your rough notebook.</a:t>
             </a:r>
             <a:endParaRPr lang="en-US" dirty="0"/>
           </a:p>
@@ -2315,7 +2319,7 @@
           <a:p>
             <a:r>
               <a:rPr lang="en-US" dirty="0"/>
-              <a:t>Activity 4. Look carefully at this picture: a landslide on a road. Observe every detail before I ask the question.</a:t>
+              <a:t>Let us check the answer together. It supports all farming and ecosystems.</a:t>
             </a:r>
             <a:endParaRPr lang="en-US" dirty="0"/>
           </a:p>
@@ -2403,7 +2407,7 @@
           <a:p>
             <a:r>
               <a:rPr lang="en-US" dirty="0"/>
-              <a:t>Here is the question for Activity 4: Why do landslides happen on deeply weathered slopes? Take one minute to think and write your answer in your rough notebook.</a:t>
+              <a:t>Activity 4. Look carefully at this picture: landscape near Rhumsiki. Observe every detail before I ask the question.</a:t>
             </a:r>
             <a:endParaRPr lang="en-US" dirty="0"/>
           </a:p>
@@ -2491,7 +2495,7 @@
           <a:p>
             <a:r>
               <a:rPr lang="en-US" dirty="0"/>
-              <a:t>Our topic is Denudational Processes on Slopes, and the sub-topic is Weathering. The key notions we shall use today are: regolith, soil, bauxite, laterite, resource. At the end, you should be able to do this: learners are able to explain the positive and negative impacts of weathering.</a:t>
+              <a:t>Our topic is Denudational Processes on Slopes, and the sub-topic is Weathering. The key notions we shall use today are: regolith, soil, humus, construction materials, residual ores, bauxite, inselberg, leaching. At the end, you should be able to do this: learners are able to explain the value of weathering products and the damage weathering causes.</a:t>
             </a:r>
             <a:endParaRPr lang="en-US" dirty="0"/>
           </a:p>
@@ -2579,7 +2583,7 @@
           <a:p>
             <a:r>
               <a:rPr lang="en-US" dirty="0"/>
-              <a:t>Let us check the answer together. The weak weathered material slides when it is wet and heavy.</a:t>
+              <a:t>Here is the question for Activity 4: How can weathered landscapes help the economy? Take one minute to think and write your answer in your rough notebook.</a:t>
             </a:r>
             <a:endParaRPr lang="en-US" dirty="0"/>
           </a:p>
@@ -2667,7 +2671,7 @@
           <a:p>
             <a:r>
               <a:rPr lang="en-US" dirty="0"/>
-              <a:t>Activity 5. Look carefully at this picture: a weathered stone statue. Observe every detail before I ask the question.</a:t>
+              <a:t>Let us check the answer together. They attract tourists.</a:t>
             </a:r>
             <a:endParaRPr lang="en-US" dirty="0"/>
           </a:p>
@@ -2755,7 +2759,7 @@
           <a:p>
             <a:r>
               <a:rPr lang="en-US" dirty="0"/>
-              <a:t>Here is the question for Activity 5: How does weathering damage buildings and monuments? Take one minute to think and write your answer in your rough notebook.</a:t>
+              <a:t>Activity 5. Look carefully at this picture: a weathered old wall. Observe every detail before I ask the question.</a:t>
             </a:r>
             <a:endParaRPr lang="en-US" dirty="0"/>
           </a:p>
@@ -2843,7 +2847,7 @@
           <a:p>
             <a:r>
               <a:rPr lang="en-US" dirty="0"/>
-              <a:t>Let us check the answer together. Rain, salts and heat crack and dissolve the stone.</a:t>
+              <a:t>Here is the question for Activity 5: Give one negative effect of weathering. Take one minute to think and write your answer in your rough notebook.</a:t>
             </a:r>
             <a:endParaRPr lang="en-US" dirty="0"/>
           </a:p>
@@ -2931,7 +2935,7 @@
           <a:p>
             <a:r>
               <a:rPr lang="en-US" dirty="0"/>
-              <a:t>Now we are going to copy the board summary. Write the title and the headings neatly in your notebooks. I will give you enough time for each slide, so do not rush.</a:t>
+              <a:t>Let us check the answer together. Damage to buildings and roads, landslides or leaching of soils.</a:t>
             </a:r>
             <a:endParaRPr lang="en-US" dirty="0"/>
           </a:p>
@@ -3019,7 +3023,7 @@
           <a:p>
             <a:r>
               <a:rPr lang="en-US" dirty="0"/>
-              <a:t>Let us copy the definitions. The key terms of this lesson are defined as follows. On this slide we have Weathering products. Write each point on a new line, with the key term first, and explain it in your own words when we revise.</a:t>
+              <a:t>Now we are going to copy the board summary. Write the title and the headings neatly in your notebooks. I will give you enough time for each slide, so do not rush.</a:t>
             </a:r>
             <a:endParaRPr lang="en-US" dirty="0"/>
           </a:p>
@@ -3107,7 +3111,7 @@
           <a:p>
             <a:r>
               <a:rPr lang="en-US" dirty="0"/>
-              <a:t>Let us copy Products of Weathering as Resources. Weathering products have the following economic importance. On this slide we have Soil. Write each point on a new line, with the key term first, and explain it in your own words when we revise. When you finish, we go to the next slide.</a:t>
+              <a:t>Let us copy the definitions. The key terms of this lesson are defined as follows. On this slide we have Regolith. Write each point on a new line, with the key term first, and explain it in your own words when we revise. When you finish, we go to the next slide.</a:t>
             </a:r>
             <a:endParaRPr lang="en-US" dirty="0"/>
           </a:p>
@@ -3195,7 +3199,7 @@
           <a:p>
             <a:r>
               <a:rPr lang="en-US" dirty="0"/>
-              <a:t>We continue with Products of Weathering as Resources. On this slide we have Minerals. Write each point on a new line, with the key term first, and explain it in your own words when we revise. When you finish, we go to the next slide.</a:t>
+              <a:t>We continue with the definitions. On this slide we have Soil and Leaching. Write each point on a new line, with the key term first, and explain it in your own words when we revise.</a:t>
             </a:r>
             <a:endParaRPr lang="en-US" dirty="0"/>
           </a:p>
@@ -3283,7 +3287,7 @@
           <a:p>
             <a:r>
               <a:rPr lang="en-US" dirty="0"/>
-              <a:t>We continue with Products of Weathering as Resources. On this slide we have Building materials. Write each point on a new line, with the key term first, and explain it in your own words when we revise.</a:t>
+              <a:t>Let us copy Products of Weathering as a Resource. The products of weathering are useful resources as follows. Copy the point on Regolith on the left, then draw the diagram on the right: a soil profile. Give it a title and label it clearly.</a:t>
             </a:r>
             <a:endParaRPr lang="en-US" dirty="0"/>
           </a:p>
@@ -3371,7 +3375,7 @@
           <a:p>
             <a:r>
               <a:rPr lang="en-US" dirty="0"/>
-              <a:t>Let us copy Effects of Weathering on the Landscape. Weathering shapes the landscape as follows. On this slide we have Landforms. Write each point on a new line, with the key term first, and explain it in your own words when we revise. When you finish, we go to the next slide.</a:t>
+              <a:t>Copy the point on Soil for agriculture on the left, then draw the diagram on the right: a cotton field. Give it a title and label it clearly.</a:t>
             </a:r>
             <a:endParaRPr lang="en-US" dirty="0"/>
           </a:p>
@@ -3459,7 +3463,7 @@
           <a:p>
             <a:r>
               <a:rPr lang="en-US" dirty="0"/>
-              <a:t>Before we start the new lesson, let us correct the homework I gave you at the end of Lesson 10: Intensity and Factors of Weathering. The question was: List three useful materials that come from weathered rock (for example sand, clay, laterite). Take out your exercise books.</a:t>
+              <a:t>Before we start the new lesson, let us correct the homework I gave you at the end of Lesson 10: Intensity and Factors of Weathering. The question was: Define regolith. Take out your exercise books.</a:t>
             </a:r>
             <a:endParaRPr lang="en-US" dirty="0"/>
           </a:p>
@@ -3547,7 +3551,7 @@
           <a:p>
             <a:r>
               <a:rPr lang="en-US" dirty="0"/>
-              <a:t>We continue with Effects of Weathering on the Landscape. On this slide we have Slope instability. Write each point on a new line, with the key term first, and explain it in your own words when we revise.</a:t>
+              <a:t>We continue with Products of Weathering as a Resource. On this slide we have Construction materials. Write each point on a new line, with the key term first, and explain it in your own words when we revise.</a:t>
             </a:r>
             <a:endParaRPr lang="en-US" dirty="0"/>
           </a:p>
@@ -3635,7 +3639,7 @@
           <a:p>
             <a:r>
               <a:rPr lang="en-US" dirty="0"/>
-              <a:t>Let us copy Effects of Weathering on Man. Weathering affects man in the following ways. On this slide we have Positive effects. Write each point on a new line, with the key term first, and explain it in your own words when we revise. When you finish, we go to the next slide.</a:t>
+              <a:t>Copy the point on Mineral ores on the left, then draw the diagram on the right: bauxite. Give it a title and label it clearly.</a:t>
             </a:r>
             <a:endParaRPr lang="en-US" dirty="0"/>
           </a:p>
@@ -3723,7 +3727,7 @@
           <a:p>
             <a:r>
               <a:rPr lang="en-US" dirty="0"/>
-              <a:t>We continue with Effects of Weathering on Man. On this slide we have Negative effects. Write each point on a new line, with the key term first, and explain it in your own words when we revise.</a:t>
+              <a:t>Let us copy Positive Effects. Weathering has the following positive effects. On this slide we have Creation of soil. Write each point on a new line, with the key term first, and explain it in your own words when we revise.</a:t>
             </a:r>
             <a:endParaRPr lang="en-US" dirty="0"/>
           </a:p>
@@ -3811,7 +3815,7 @@
           <a:p>
             <a:r>
               <a:rPr lang="en-US" dirty="0"/>
-              <a:t>Now let us check what you have understood. Question 1: Give two resources formed by weathering. Answer in your exercise book.</a:t>
+              <a:t>Copy the point on Landscapes on the left, then draw the diagram on the right: landscape near Rhumsiki. Give it a title and label it clearly.</a:t>
             </a:r>
             <a:endParaRPr lang="en-US" dirty="0"/>
           </a:p>
@@ -3899,7 +3903,7 @@
           <a:p>
             <a:r>
               <a:rPr lang="en-US" dirty="0"/>
-              <a:t>The expected answer is: soil and bauxite (also laterite, clay). If you got it right, well done.</a:t>
+              <a:t>We continue with Positive Effects. On this slide we have Groundwater. Write each point on a new line, with the key term first, and explain it in your own words when we revise.</a:t>
             </a:r>
             <a:endParaRPr lang="en-US" dirty="0"/>
           </a:p>
@@ -3987,7 +3991,7 @@
           <a:p>
             <a:r>
               <a:rPr lang="en-US" dirty="0"/>
-              <a:t>Now let us check what you have understood. Question 2: Give one negative effect of weathering. Answer in your exercise book.</a:t>
+              <a:t>Let us copy Negative Effects. Weathering has the following negative effects. Copy the point on Damage to structures on the left, then draw the diagram on the right: a weathered wall. Give it a title and label it clearly.</a:t>
             </a:r>
             <a:endParaRPr lang="en-US" dirty="0"/>
           </a:p>
@@ -4075,7 +4079,7 @@
           <a:p>
             <a:r>
               <a:rPr lang="en-US" dirty="0"/>
-              <a:t>The expected answer is: landslides on weathered slopes. If you got it right, well done.</a:t>
+              <a:t>We continue with Negative Effects. On this slide we have Hazards and Leaching. Write each point on a new line, with the key term first, and explain it in your own words when we revise.</a:t>
             </a:r>
             <a:endParaRPr lang="en-US" dirty="0"/>
           </a:p>
@@ -4163,7 +4167,7 @@
           <a:p>
             <a:r>
               <a:rPr lang="en-US" dirty="0"/>
-              <a:t>For those who need more practice, fill in the blanks in your exercise book. The answers are: number 1, bauxite; number 2, laterite; number 3, landslides.</a:t>
+              <a:t>Now let us check what you have understood. Question 1: Give two economic uses of weathering products. Answer in your exercise book.</a:t>
             </a:r>
             <a:endParaRPr lang="en-US" dirty="0"/>
           </a:p>
@@ -4251,7 +4255,7 @@
           <a:p>
             <a:r>
               <a:rPr lang="en-US" dirty="0"/>
-              <a:t>For your homework: Look for signs of soil moving down a slope near your home (leaning posts, cracks). Write what you see. We shall correct it at the beginning of our next lesson.</a:t>
+              <a:t>The expected answer is: soils for farming, sand and gravel for building, clay for bricks, bauxite ore (any two). If you got it right, well done.</a:t>
             </a:r>
             <a:endParaRPr lang="en-US" dirty="0"/>
           </a:p>
@@ -4339,7 +4343,7 @@
           <a:p>
             <a:r>
               <a:rPr lang="en-US" dirty="0"/>
-              <a:t>Our next lesson will be on Lesson 12: Mass Wasting (Movement). Thank you for your attention, and see you next time.</a:t>
+              <a:t>Now let us check what you have understood. Question 2: Give one positive and one negative effect of weathering. Answer in your exercise book.</a:t>
             </a:r>
             <a:endParaRPr lang="en-US" dirty="0"/>
           </a:p>
@@ -4427,7 +4431,7 @@
           <a:p>
             <a:r>
               <a:rPr lang="en-US" dirty="0"/>
-              <a:t>Here is a good answer. Useful materials from weathered rock: sand for building, clay for bricks and pottery, laterite for roads, and bauxite for aluminium. Compare it with your own answer and correct your work in red.</a:t>
+              <a:t>Here is a good answer. Regolith is the layer of loose, weathered material covering the solid bedrock. Compare it with your own answer and correct your work in red.</a:t>
             </a:r>
             <a:endParaRPr lang="en-US" dirty="0"/>
           </a:p>
@@ -4515,7 +4519,7 @@
           <a:p>
             <a:r>
               <a:rPr lang="en-US" dirty="0"/>
-              <a:t>Let us play the bilingual game. I say a word in English, and you give me the French word. Then we do the reverse.</a:t>
+              <a:t>The expected answer is: positive: soil formation; negative: damage to buildings and roads. If you got it right, well done.</a:t>
             </a:r>
             <a:endParaRPr lang="en-US" dirty="0"/>
           </a:p>
@@ -4603,7 +4607,7 @@
           <a:p>
             <a:r>
               <a:rPr lang="en-US" dirty="0"/>
-              <a:t>I record this information in the official logbook of the class after the lesson.</a:t>
+              <a:t>For those who need more practice, fill in the blanks in your exercise book. The answers are: number 1, regolith; number 2, bauxite; number 3, leaching.</a:t>
             </a:r>
             <a:endParaRPr lang="en-US" dirty="0"/>
           </a:p>
@@ -4691,7 +4695,7 @@
           <a:p>
             <a:r>
               <a:rPr lang="en-US" dirty="0"/>
-              <a:t>I complete the second page of the logbook: the matter taught, the evaluation, the homework and the attendance.</a:t>
+              <a:t>For your homework: Define mass wasting. We shall correct it at the beginning of our next lesson.</a:t>
             </a:r>
             <a:endParaRPr lang="en-US" dirty="0"/>
           </a:p>
@@ -4779,7 +4783,7 @@
           <a:p>
             <a:r>
               <a:rPr lang="en-US" dirty="0"/>
-              <a:t>This slide is for me, the teacher: it gives the timing of the lesson and what to do if the projector is not available.</a:t>
+              <a:t>Our next lesson will be on Lesson 12: Mass Wasting (Movement). Thank you for your attention, and see you next time.</a:t>
             </a:r>
             <a:endParaRPr lang="en-US" dirty="0"/>
           </a:p>
@@ -4867,7 +4871,7 @@
           <a:p>
             <a:r>
               <a:rPr lang="en-US" dirty="0"/>
-              <a:t>These are the references and picture credits used to prepare this lesson.</a:t>
+              <a:t>Let us play the bilingual game. I say a word in English, and you give me the French word. Then we do the reverse.</a:t>
             </a:r>
             <a:endParaRPr lang="en-US" dirty="0"/>
           </a:p>
@@ -4891,6 +4895,358 @@
             <a:fld id="{F7021451-1387-4CA6-816F-3879F97B5CBC}" type="slidenum">
               <a:rPr lang="en-US"/>
               <a:t>54</a:t>
+            </a:fld>
+            <a:endParaRPr lang="en-US"/>
+          </a:p>
+        </p:txBody>
+      </p:sp>
+    </p:spTree>
+    <p:extLst>
+      <p:ext uri="{BB962C8B-B14F-4D97-AF65-F5344CB8AC3E}">
+        <p14:creationId xmlns:p14="http://schemas.microsoft.com/office/powerpoint/2010/main" val="1024086991"/>
+      </p:ext>
+    </p:extLst>
+  </p:cSld>
+  <p:clrMapOvr>
+    <a:masterClrMapping/>
+  </p:clrMapOvr>
+</p:notes>
+</file>
+
+<file path=ppt/notesSlides/notesSlide55.xml><?xml version="1.0" encoding="utf-8"?>
+<p:notes xmlns:a="http://schemas.openxmlformats.org/drawingml/2006/main" xmlns:r="http://schemas.openxmlformats.org/officeDocument/2006/relationships" xmlns:p="http://schemas.openxmlformats.org/presentationml/2006/main">
+  <p:cSld>
+    <p:spTree>
+      <p:nvGrpSpPr>
+        <p:cNvPr id="1" name=""/>
+        <p:cNvGrpSpPr/>
+        <p:nvPr/>
+      </p:nvGrpSpPr>
+      <p:grpSpPr>
+        <a:xfrm>
+          <a:off x="0" y="0"/>
+          <a:ext cx="0" cy="0"/>
+          <a:chOff x="0" y="0"/>
+          <a:chExt cx="0" cy="0"/>
+        </a:xfrm>
+      </p:grpSpPr>
+      <p:sp>
+        <p:nvSpPr>
+          <p:cNvPr id="2" name="Slide Image Placeholder 1"/>
+          <p:cNvSpPr>
+            <a:spLocks noGrp="1" noRot="1" noChangeAspect="1"/>
+          </p:cNvSpPr>
+          <p:nvPr>
+            <p:ph type="sldImg"/>
+          </p:nvPr>
+        </p:nvSpPr>
+        <p:spPr/>
+      </p:sp>
+      <p:sp>
+        <p:nvSpPr>
+          <p:cNvPr id="3" name="Notes Placeholder 2"/>
+          <p:cNvSpPr>
+            <a:spLocks noGrp="1"/>
+          </p:cNvSpPr>
+          <p:nvPr>
+            <p:ph type="body" idx="1"/>
+          </p:nvPr>
+        </p:nvSpPr>
+        <p:spPr/>
+        <p:txBody>
+          <a:bodyPr/>
+          <a:lstStyle/>
+          <a:p>
+            <a:r>
+              <a:rPr lang="en-US" dirty="0"/>
+              <a:t>I record this information in the official logbook of the class after the lesson.</a:t>
+            </a:r>
+            <a:endParaRPr lang="en-US" dirty="0"/>
+          </a:p>
+        </p:txBody>
+      </p:sp>
+      <p:sp>
+        <p:nvSpPr>
+          <p:cNvPr id="4" name="Slide Number Placeholder 3"/>
+          <p:cNvSpPr>
+            <a:spLocks noGrp="1"/>
+          </p:cNvSpPr>
+          <p:nvPr>
+            <p:ph type="sldNum" sz="quarter" idx="10"/>
+          </p:nvPr>
+        </p:nvSpPr>
+        <p:spPr/>
+        <p:txBody>
+          <a:bodyPr/>
+          <a:lstStyle/>
+          <a:p>
+            <a:fld id="{F7021451-1387-4CA6-816F-3879F97B5CBC}" type="slidenum">
+              <a:rPr lang="en-US"/>
+              <a:t>55</a:t>
+            </a:fld>
+            <a:endParaRPr lang="en-US"/>
+          </a:p>
+        </p:txBody>
+      </p:sp>
+    </p:spTree>
+    <p:extLst>
+      <p:ext uri="{BB962C8B-B14F-4D97-AF65-F5344CB8AC3E}">
+        <p14:creationId xmlns:p14="http://schemas.microsoft.com/office/powerpoint/2010/main" val="1024086991"/>
+      </p:ext>
+    </p:extLst>
+  </p:cSld>
+  <p:clrMapOvr>
+    <a:masterClrMapping/>
+  </p:clrMapOvr>
+</p:notes>
+</file>
+
+<file path=ppt/notesSlides/notesSlide56.xml><?xml version="1.0" encoding="utf-8"?>
+<p:notes xmlns:a="http://schemas.openxmlformats.org/drawingml/2006/main" xmlns:r="http://schemas.openxmlformats.org/officeDocument/2006/relationships" xmlns:p="http://schemas.openxmlformats.org/presentationml/2006/main">
+  <p:cSld>
+    <p:spTree>
+      <p:nvGrpSpPr>
+        <p:cNvPr id="1" name=""/>
+        <p:cNvGrpSpPr/>
+        <p:nvPr/>
+      </p:nvGrpSpPr>
+      <p:grpSpPr>
+        <a:xfrm>
+          <a:off x="0" y="0"/>
+          <a:ext cx="0" cy="0"/>
+          <a:chOff x="0" y="0"/>
+          <a:chExt cx="0" cy="0"/>
+        </a:xfrm>
+      </p:grpSpPr>
+      <p:sp>
+        <p:nvSpPr>
+          <p:cNvPr id="2" name="Slide Image Placeholder 1"/>
+          <p:cNvSpPr>
+            <a:spLocks noGrp="1" noRot="1" noChangeAspect="1"/>
+          </p:cNvSpPr>
+          <p:nvPr>
+            <p:ph type="sldImg"/>
+          </p:nvPr>
+        </p:nvSpPr>
+        <p:spPr/>
+      </p:sp>
+      <p:sp>
+        <p:nvSpPr>
+          <p:cNvPr id="3" name="Notes Placeholder 2"/>
+          <p:cNvSpPr>
+            <a:spLocks noGrp="1"/>
+          </p:cNvSpPr>
+          <p:nvPr>
+            <p:ph type="body" idx="1"/>
+          </p:nvPr>
+        </p:nvSpPr>
+        <p:spPr/>
+        <p:txBody>
+          <a:bodyPr/>
+          <a:lstStyle/>
+          <a:p>
+            <a:r>
+              <a:rPr lang="en-US" dirty="0"/>
+              <a:t>I complete the second page of the logbook: the matter taught, the evaluation, the homework and the attendance.</a:t>
+            </a:r>
+            <a:endParaRPr lang="en-US" dirty="0"/>
+          </a:p>
+        </p:txBody>
+      </p:sp>
+      <p:sp>
+        <p:nvSpPr>
+          <p:cNvPr id="4" name="Slide Number Placeholder 3"/>
+          <p:cNvSpPr>
+            <a:spLocks noGrp="1"/>
+          </p:cNvSpPr>
+          <p:nvPr>
+            <p:ph type="sldNum" sz="quarter" idx="10"/>
+          </p:nvPr>
+        </p:nvSpPr>
+        <p:spPr/>
+        <p:txBody>
+          <a:bodyPr/>
+          <a:lstStyle/>
+          <a:p>
+            <a:fld id="{F7021451-1387-4CA6-816F-3879F97B5CBC}" type="slidenum">
+              <a:rPr lang="en-US"/>
+              <a:t>56</a:t>
+            </a:fld>
+            <a:endParaRPr lang="en-US"/>
+          </a:p>
+        </p:txBody>
+      </p:sp>
+    </p:spTree>
+    <p:extLst>
+      <p:ext uri="{BB962C8B-B14F-4D97-AF65-F5344CB8AC3E}">
+        <p14:creationId xmlns:p14="http://schemas.microsoft.com/office/powerpoint/2010/main" val="1024086991"/>
+      </p:ext>
+    </p:extLst>
+  </p:cSld>
+  <p:clrMapOvr>
+    <a:masterClrMapping/>
+  </p:clrMapOvr>
+</p:notes>
+</file>
+
+<file path=ppt/notesSlides/notesSlide57.xml><?xml version="1.0" encoding="utf-8"?>
+<p:notes xmlns:a="http://schemas.openxmlformats.org/drawingml/2006/main" xmlns:r="http://schemas.openxmlformats.org/officeDocument/2006/relationships" xmlns:p="http://schemas.openxmlformats.org/presentationml/2006/main">
+  <p:cSld>
+    <p:spTree>
+      <p:nvGrpSpPr>
+        <p:cNvPr id="1" name=""/>
+        <p:cNvGrpSpPr/>
+        <p:nvPr/>
+      </p:nvGrpSpPr>
+      <p:grpSpPr>
+        <a:xfrm>
+          <a:off x="0" y="0"/>
+          <a:ext cx="0" cy="0"/>
+          <a:chOff x="0" y="0"/>
+          <a:chExt cx="0" cy="0"/>
+        </a:xfrm>
+      </p:grpSpPr>
+      <p:sp>
+        <p:nvSpPr>
+          <p:cNvPr id="2" name="Slide Image Placeholder 1"/>
+          <p:cNvSpPr>
+            <a:spLocks noGrp="1" noRot="1" noChangeAspect="1"/>
+          </p:cNvSpPr>
+          <p:nvPr>
+            <p:ph type="sldImg"/>
+          </p:nvPr>
+        </p:nvSpPr>
+        <p:spPr/>
+      </p:sp>
+      <p:sp>
+        <p:nvSpPr>
+          <p:cNvPr id="3" name="Notes Placeholder 2"/>
+          <p:cNvSpPr>
+            <a:spLocks noGrp="1"/>
+          </p:cNvSpPr>
+          <p:nvPr>
+            <p:ph type="body" idx="1"/>
+          </p:nvPr>
+        </p:nvSpPr>
+        <p:spPr/>
+        <p:txBody>
+          <a:bodyPr/>
+          <a:lstStyle/>
+          <a:p>
+            <a:r>
+              <a:rPr lang="en-US" dirty="0"/>
+              <a:t>This slide is for me, the teacher: it gives the timing of the lesson and what to do if the projector is not available.</a:t>
+            </a:r>
+            <a:endParaRPr lang="en-US" dirty="0"/>
+          </a:p>
+        </p:txBody>
+      </p:sp>
+      <p:sp>
+        <p:nvSpPr>
+          <p:cNvPr id="4" name="Slide Number Placeholder 3"/>
+          <p:cNvSpPr>
+            <a:spLocks noGrp="1"/>
+          </p:cNvSpPr>
+          <p:nvPr>
+            <p:ph type="sldNum" sz="quarter" idx="10"/>
+          </p:nvPr>
+        </p:nvSpPr>
+        <p:spPr/>
+        <p:txBody>
+          <a:bodyPr/>
+          <a:lstStyle/>
+          <a:p>
+            <a:fld id="{F7021451-1387-4CA6-816F-3879F97B5CBC}" type="slidenum">
+              <a:rPr lang="en-US"/>
+              <a:t>57</a:t>
+            </a:fld>
+            <a:endParaRPr lang="en-US"/>
+          </a:p>
+        </p:txBody>
+      </p:sp>
+    </p:spTree>
+    <p:extLst>
+      <p:ext uri="{BB962C8B-B14F-4D97-AF65-F5344CB8AC3E}">
+        <p14:creationId xmlns:p14="http://schemas.microsoft.com/office/powerpoint/2010/main" val="1024086991"/>
+      </p:ext>
+    </p:extLst>
+  </p:cSld>
+  <p:clrMapOvr>
+    <a:masterClrMapping/>
+  </p:clrMapOvr>
+</p:notes>
+</file>
+
+<file path=ppt/notesSlides/notesSlide58.xml><?xml version="1.0" encoding="utf-8"?>
+<p:notes xmlns:a="http://schemas.openxmlformats.org/drawingml/2006/main" xmlns:r="http://schemas.openxmlformats.org/officeDocument/2006/relationships" xmlns:p="http://schemas.openxmlformats.org/presentationml/2006/main">
+  <p:cSld>
+    <p:spTree>
+      <p:nvGrpSpPr>
+        <p:cNvPr id="1" name=""/>
+        <p:cNvGrpSpPr/>
+        <p:nvPr/>
+      </p:nvGrpSpPr>
+      <p:grpSpPr>
+        <a:xfrm>
+          <a:off x="0" y="0"/>
+          <a:ext cx="0" cy="0"/>
+          <a:chOff x="0" y="0"/>
+          <a:chExt cx="0" cy="0"/>
+        </a:xfrm>
+      </p:grpSpPr>
+      <p:sp>
+        <p:nvSpPr>
+          <p:cNvPr id="2" name="Slide Image Placeholder 1"/>
+          <p:cNvSpPr>
+            <a:spLocks noGrp="1" noRot="1" noChangeAspect="1"/>
+          </p:cNvSpPr>
+          <p:nvPr>
+            <p:ph type="sldImg"/>
+          </p:nvPr>
+        </p:nvSpPr>
+        <p:spPr/>
+      </p:sp>
+      <p:sp>
+        <p:nvSpPr>
+          <p:cNvPr id="3" name="Notes Placeholder 2"/>
+          <p:cNvSpPr>
+            <a:spLocks noGrp="1"/>
+          </p:cNvSpPr>
+          <p:nvPr>
+            <p:ph type="body" idx="1"/>
+          </p:nvPr>
+        </p:nvSpPr>
+        <p:spPr/>
+        <p:txBody>
+          <a:bodyPr/>
+          <a:lstStyle/>
+          <a:p>
+            <a:r>
+              <a:rPr lang="en-US" dirty="0"/>
+              <a:t>These are the references and picture credits used to prepare this lesson.</a:t>
+            </a:r>
+            <a:endParaRPr lang="en-US" dirty="0"/>
+          </a:p>
+        </p:txBody>
+      </p:sp>
+      <p:sp>
+        <p:nvSpPr>
+          <p:cNvPr id="4" name="Slide Number Placeholder 3"/>
+          <p:cNvSpPr>
+            <a:spLocks noGrp="1"/>
+          </p:cNvSpPr>
+          <p:nvPr>
+            <p:ph type="sldNum" sz="quarter" idx="10"/>
+          </p:nvPr>
+        </p:nvSpPr>
+        <p:spPr/>
+        <p:txBody>
+          <a:bodyPr/>
+          <a:lstStyle/>
+          <a:p>
+            <a:fld id="{F7021451-1387-4CA6-816F-3879F97B5CBC}" type="slidenum">
+              <a:rPr lang="en-US"/>
+              <a:t>58</a:t>
             </a:fld>
             <a:endParaRPr lang="en-US"/>
           </a:p>
@@ -5131,7 +5487,7 @@
           <a:p>
             <a:r>
               <a:rPr lang="en-US" dirty="0"/>
-              <a:t>By the end of this lesson, you should be able to do three things. Number 1: identify the products of weathering used as resources. Number 2: explain the effects of weathering on the landscape. Number 3: explain the effects of weathering on man.</a:t>
+              <a:t>By the end of this lesson, you should be able to do four things. Number 1: define regolith and soil. Number 2: explain the economic importance of weathering products. Number 3: explain the positive effects of weathering. Number 4: explain its negative effects.</a:t>
             </a:r>
             <a:endParaRPr lang="en-US" dirty="0"/>
           </a:p>
@@ -5219,7 +5575,7 @@
           <a:p>
             <a:r>
               <a:rPr lang="en-US" dirty="0"/>
-              <a:t>Let us first remember what you already know. Weathering is strong in hot, wet climates. It produces a regolith. Keep this in mind, because we shall build on it today.</a:t>
+              <a:t>Let us first remember what you already know. Climate controls weathering. Oxidation gives red soils. The North grows cotton, millet and sorghum. Keep this in mind, because we shall build on it today.</a:t>
             </a:r>
             <a:endParaRPr lang="en-US" dirty="0"/>
           </a:p>
@@ -6599,7 +6955,7 @@
         <p:spPr>
           <a:xfrm>
             <a:off x="0" y="658368"/>
-            <a:ext cx="5120640" cy="5833872"/>
+            <a:ext cx="3840480" cy="5833872"/>
           </a:xfrm>
           <a:prstGeom prst="rect">
             <a:avLst/>
@@ -6614,8 +6970,8 @@
         </p:nvSpPr>
         <p:spPr>
           <a:xfrm>
-            <a:off x="5349240" y="1005840"/>
-            <a:ext cx="6522415" cy="731520"/>
+            <a:off x="4069080" y="1005840"/>
+            <a:ext cx="7802575" cy="731520"/>
           </a:xfrm>
           <a:prstGeom prst="rect">
             <a:avLst/>
@@ -6655,8 +7011,8 @@
         </p:nvSpPr>
         <p:spPr>
           <a:xfrm>
-            <a:off x="5349240" y="1783080"/>
-            <a:ext cx="6522415" cy="4663440"/>
+            <a:off x="4069080" y="1783080"/>
+            <a:ext cx="7802575" cy="4663440"/>
           </a:xfrm>
           <a:prstGeom prst="rect">
             <a:avLst/>
@@ -6683,7 +7039,47 @@
                 <a:ea typeface="Times New Roman" pitchFamily="34" charset="-122"/>
                 <a:cs typeface="Times New Roman" pitchFamily="34" charset="-120"/>
               </a:rPr>
-              <a:t>Near Minim-Martap in the Adamawa, a company plans to mine bauxite formed by weathering. In the same region, heavy rains cause landslides on weathered slopes.</a:t>
+              <a:t>You help your family prepare a millet field near Garoua.</a:t>
+            </a:r>
+            <a:endParaRPr lang="en-US" sz="4000" dirty="0"/>
+          </a:p>
+          <a:p>
+            <a:pPr algn="l" indent="0" marL="0">
+              <a:spcAft>
+                <a:spcPts val="800"/>
+              </a:spcAft>
+              <a:buNone/>
+            </a:pPr>
+            <a:r>
+              <a:rPr lang="en-US" sz="4000" dirty="0">
+                <a:solidFill>
+                  <a:srgbClr val="111111"/>
+                </a:solidFill>
+                <a:latin typeface="Times New Roman" pitchFamily="34" charset="0"/>
+                <a:ea typeface="Times New Roman" pitchFamily="34" charset="-122"/>
+                <a:cs typeface="Times New Roman" pitchFamily="34" charset="-120"/>
+              </a:rPr>
+              <a:t>As you dig, you feel the soft soil that will feed the crops.</a:t>
+            </a:r>
+            <a:endParaRPr lang="en-US" sz="4000" dirty="0"/>
+          </a:p>
+          <a:p>
+            <a:pPr algn="l" indent="0" marL="0">
+              <a:spcAft>
+                <a:spcPts val="800"/>
+              </a:spcAft>
+              <a:buNone/>
+            </a:pPr>
+            <a:r>
+              <a:rPr lang="en-US" sz="4000" dirty="0">
+                <a:solidFill>
+                  <a:srgbClr val="111111"/>
+                </a:solidFill>
+                <a:latin typeface="Times New Roman" pitchFamily="34" charset="0"/>
+                <a:ea typeface="Times New Roman" pitchFamily="34" charset="-122"/>
+                <a:cs typeface="Times New Roman" pitchFamily="34" charset="-120"/>
+              </a:rPr>
+              <a:t>On the way home, you see cracks in the wall of an old building and potholes in the tarred road.</a:t>
             </a:r>
             <a:endParaRPr lang="en-US" sz="4000" dirty="0"/>
           </a:p>
@@ -6860,7 +7256,7 @@
                 <a:ea typeface="Times New Roman" pitchFamily="34" charset="-122"/>
                 <a:cs typeface="Times New Roman" pitchFamily="34" charset="-120"/>
               </a:rPr>
-              <a:t>Situation: Question 1</a:t>
+              <a:t>Situation in Real Life (continued)</a:t>
             </a:r>
             <a:endParaRPr lang="en-US" sz="3600" dirty="0"/>
           </a:p>
@@ -6902,7 +7298,27 @@
                 <a:ea typeface="Times New Roman" pitchFamily="34" charset="-122"/>
                 <a:cs typeface="Times New Roman" pitchFamily="34" charset="-120"/>
               </a:rPr>
-              <a:t>What is the problem in the situation?</a:t>
+              <a:t>You think: the same natural force that makes good soil for our farms also destroys the walls and roads we build.</a:t>
+            </a:r>
+            <a:endParaRPr lang="en-US" sz="4000" dirty="0"/>
+          </a:p>
+          <a:p>
+            <a:pPr algn="l" indent="0" marL="0">
+              <a:spcAft>
+                <a:spcPts val="800"/>
+              </a:spcAft>
+              <a:buNone/>
+            </a:pPr>
+            <a:r>
+              <a:rPr lang="en-US" sz="4000" dirty="0">
+                <a:solidFill>
+                  <a:srgbClr val="111111"/>
+                </a:solidFill>
+                <a:latin typeface="Times New Roman" pitchFamily="34" charset="0"/>
+                <a:ea typeface="Times New Roman" pitchFamily="34" charset="-122"/>
+                <a:cs typeface="Times New Roman" pitchFamily="34" charset="-120"/>
+              </a:rPr>
+              <a:t>You ask: "How can weathering be both useful and harmful?"</a:t>
             </a:r>
             <a:endParaRPr lang="en-US" sz="4000" dirty="0"/>
           </a:p>
@@ -7079,7 +7495,7 @@
                 <a:ea typeface="Times New Roman" pitchFamily="34" charset="-122"/>
                 <a:cs typeface="Times New Roman" pitchFamily="34" charset="-120"/>
               </a:rPr>
-              <a:t>Answer</a:t>
+              <a:t>Situation: Question 1</a:t>
             </a:r>
             <a:endParaRPr lang="en-US" sz="3600" dirty="0"/>
           </a:p>
@@ -7121,7 +7537,7 @@
                 <a:ea typeface="Times New Roman" pitchFamily="34" charset="-122"/>
                 <a:cs typeface="Times New Roman" pitchFamily="34" charset="-120"/>
               </a:rPr>
-              <a:t>Weathering brings both riches and dangers.</a:t>
+              <a:t>What is the problem in the situation?</a:t>
             </a:r>
             <a:endParaRPr lang="en-US" sz="4000" dirty="0"/>
           </a:p>
@@ -7298,7 +7714,7 @@
                 <a:ea typeface="Times New Roman" pitchFamily="34" charset="-122"/>
                 <a:cs typeface="Times New Roman" pitchFamily="34" charset="-120"/>
               </a:rPr>
-              <a:t>Situation: Question 2</a:t>
+              <a:t>Answer</a:t>
             </a:r>
             <a:endParaRPr lang="en-US" sz="3600" dirty="0"/>
           </a:p>
@@ -7340,7 +7756,7 @@
                 <a:ea typeface="Times New Roman" pitchFamily="34" charset="-122"/>
                 <a:cs typeface="Times New Roman" pitchFamily="34" charset="-120"/>
               </a:rPr>
-              <a:t>What resource comes from weathering here?</a:t>
+              <a:t>The learner does not understand the positive and negative impacts of weathering.</a:t>
             </a:r>
             <a:endParaRPr lang="en-US" sz="4000" dirty="0"/>
           </a:p>
@@ -7517,7 +7933,7 @@
                 <a:ea typeface="Times New Roman" pitchFamily="34" charset="-122"/>
                 <a:cs typeface="Times New Roman" pitchFamily="34" charset="-120"/>
               </a:rPr>
-              <a:t>Answer</a:t>
+              <a:t>Situation: Question 2</a:t>
             </a:r>
             <a:endParaRPr lang="en-US" sz="3600" dirty="0"/>
           </a:p>
@@ -7559,7 +7975,7 @@
                 <a:ea typeface="Times New Roman" pitchFamily="34" charset="-122"/>
                 <a:cs typeface="Times New Roman" pitchFamily="34" charset="-120"/>
               </a:rPr>
-              <a:t>Bauxite (aluminium ore).</a:t>
+              <a:t>What is the layer of loose weathered material called?</a:t>
             </a:r>
             <a:endParaRPr lang="en-US" sz="4000" dirty="0"/>
           </a:p>
@@ -7736,7 +8152,7 @@
                 <a:ea typeface="Times New Roman" pitchFamily="34" charset="-122"/>
                 <a:cs typeface="Times New Roman" pitchFamily="34" charset="-120"/>
               </a:rPr>
-              <a:t>Situation: Question 3</a:t>
+              <a:t>Answer</a:t>
             </a:r>
             <a:endParaRPr lang="en-US" sz="3600" dirty="0"/>
           </a:p>
@@ -7778,7 +8194,7 @@
                 <a:ea typeface="Times New Roman" pitchFamily="34" charset="-122"/>
                 <a:cs typeface="Times New Roman" pitchFamily="34" charset="-120"/>
               </a:rPr>
-              <a:t>What danger comes from it?</a:t>
+              <a:t>Regolith; its upper part is the soil.</a:t>
             </a:r>
             <a:endParaRPr lang="en-US" sz="4000" dirty="0"/>
           </a:p>
@@ -7955,7 +8371,7 @@
                 <a:ea typeface="Times New Roman" pitchFamily="34" charset="-122"/>
                 <a:cs typeface="Times New Roman" pitchFamily="34" charset="-120"/>
               </a:rPr>
-              <a:t>Possible Answer</a:t>
+              <a:t>Situation: Question 3</a:t>
             </a:r>
             <a:endParaRPr lang="en-US" sz="3600" dirty="0"/>
           </a:p>
@@ -7997,7 +8413,7 @@
                 <a:ea typeface="Times New Roman" pitchFamily="34" charset="-122"/>
                 <a:cs typeface="Times New Roman" pitchFamily="34" charset="-120"/>
               </a:rPr>
-              <a:t>Landslides on weathered slopes.</a:t>
+              <a:t>Give one harmful effect of weathering.</a:t>
             </a:r>
             <a:endParaRPr lang="en-US" sz="4000" dirty="0"/>
           </a:p>
@@ -8109,7 +8525,7 @@
                 <a:ea typeface="Calibri" pitchFamily="34" charset="-122"/>
                 <a:cs typeface="Calibri" pitchFamily="34" charset="-120"/>
               </a:rPr>
-              <a:t>ACTION TO TAKE</a:t>
+              <a:t>REAL-LIFE SITUATION</a:t>
             </a:r>
             <a:endParaRPr lang="en-US" sz="1400" dirty="0"/>
           </a:p>
@@ -8174,7 +8590,7 @@
                 <a:ea typeface="Times New Roman" pitchFamily="34" charset="-122"/>
                 <a:cs typeface="Times New Roman" pitchFamily="34" charset="-120"/>
               </a:rPr>
-              <a:t>Action to Take</a:t>
+              <a:t>Possible Answer</a:t>
             </a:r>
             <a:endParaRPr lang="en-US" sz="3600" dirty="0"/>
           </a:p>
@@ -8216,7 +8632,7 @@
                 <a:ea typeface="Times New Roman" pitchFamily="34" charset="-122"/>
                 <a:cs typeface="Times New Roman" pitchFamily="34" charset="-120"/>
               </a:rPr>
-              <a:t>Use the products of weathering sustainably and protect buildings from weathering.</a:t>
+              <a:t>It damages buildings and roads.</a:t>
             </a:r>
             <a:endParaRPr lang="en-US" sz="4000" dirty="0"/>
           </a:p>
@@ -8328,7 +8744,7 @@
                 <a:ea typeface="Calibri" pitchFamily="34" charset="-122"/>
                 <a:cs typeface="Calibri" pitchFamily="34" charset="-120"/>
               </a:rPr>
-              <a:t>JUSTIFICATION</a:t>
+              <a:t>ACTION TO TAKE</a:t>
             </a:r>
             <a:endParaRPr lang="en-US" sz="1400" dirty="0"/>
           </a:p>
@@ -8393,7 +8809,7 @@
                 <a:ea typeface="Times New Roman" pitchFamily="34" charset="-122"/>
                 <a:cs typeface="Times New Roman" pitchFamily="34" charset="-120"/>
               </a:rPr>
-              <a:t>Justification of the Lesson</a:t>
+              <a:t>Action to Take</a:t>
             </a:r>
             <a:endParaRPr lang="en-US" sz="3600" dirty="0"/>
           </a:p>
@@ -8435,7 +8851,7 @@
                 <a:ea typeface="Times New Roman" pitchFamily="34" charset="-122"/>
                 <a:cs typeface="Times New Roman" pitchFamily="34" charset="-120"/>
               </a:rPr>
-              <a:t>This lesson helps us to use the products of weathering and reduce its dangers.</a:t>
+              <a:t>Protect farm soils from erosion and maintain buildings and roads regularly.</a:t>
             </a:r>
             <a:endParaRPr lang="en-US" sz="4000" dirty="0"/>
           </a:p>
@@ -8547,54 +8963,15 @@
                 <a:ea typeface="Calibri" pitchFamily="34" charset="-122"/>
                 <a:cs typeface="Calibri" pitchFamily="34" charset="-120"/>
               </a:rPr>
-              <a:t>1. PRODUCTS AS RESOURCES: SOIL</a:t>
+              <a:t>JUSTIFICATION</a:t>
             </a:r>
             <a:endParaRPr lang="en-US" sz="1400" dirty="0"/>
-          </a:p>
-        </p:txBody>
-      </p:sp>
-      <p:sp>
-        <p:nvSpPr>
-          <p:cNvPr id="3" name="Text 1"/>
-          <p:cNvSpPr/>
-          <p:nvPr/>
-        </p:nvSpPr>
-        <p:spPr>
-          <a:xfrm>
-            <a:off x="457200" y="1005840"/>
-            <a:ext cx="11277295" cy="731520"/>
-          </a:xfrm>
-          <a:prstGeom prst="rect">
-            <a:avLst/>
-          </a:prstGeom>
-          <a:noFill/>
-          <a:ln/>
-        </p:spPr>
-        <p:txBody>
-          <a:bodyPr wrap="square" lIns="0" tIns="0" rIns="0" bIns="0" rtlCol="0" anchor="ctr"/>
-          <a:lstStyle/>
-          <a:p>
-            <a:pPr algn="ctr" indent="0" marL="0">
-              <a:buNone/>
-            </a:pPr>
-            <a:r>
-              <a:rPr lang="en-US" sz="3600" b="1" dirty="0">
-                <a:solidFill>
-                  <a:srgbClr val="990011"/>
-                </a:solidFill>
-                <a:latin typeface="Times New Roman" pitchFamily="34" charset="0"/>
-                <a:ea typeface="Times New Roman" pitchFamily="34" charset="-122"/>
-                <a:cs typeface="Times New Roman" pitchFamily="34" charset="-120"/>
-              </a:rPr>
-              <a:t>Activity 1</a:t>
-            </a:r>
-            <a:endParaRPr lang="en-US" sz="3600" dirty="0"/>
           </a:p>
         </p:txBody>
       </p:sp>
       <p:pic>
         <p:nvPicPr>
-          <p:cNvPr id="4" name="Image 0" descr="/home/claude/f4/img/v2/soil_profile_big.png">    </p:cNvPr>
+          <p:cNvPr id="3" name="Image 0" descr="/home/claude/f4/img/minesec_sheet.png">    </p:cNvPr>
           <p:cNvPicPr>
             <a:picLocks noChangeAspect="1"/>
           </p:cNvPicPr>
@@ -8608,8 +8985,8 @@
         </p:blipFill>
         <p:spPr>
           <a:xfrm>
-            <a:off x="629930" y="1783080"/>
-            <a:ext cx="10931835" cy="4270248"/>
+            <a:off x="0" y="658368"/>
+            <a:ext cx="5120640" cy="5833872"/>
           </a:xfrm>
           <a:prstGeom prst="rect">
             <a:avLst/>
@@ -8618,14 +8995,14 @@
       </p:pic>
       <p:sp>
         <p:nvSpPr>
-          <p:cNvPr id="5" name="Text 2"/>
+          <p:cNvPr id="4" name="Text 1"/>
           <p:cNvSpPr/>
           <p:nvPr/>
         </p:nvSpPr>
         <p:spPr>
           <a:xfrm>
-            <a:off x="457200" y="6089904"/>
-            <a:ext cx="11277295" cy="347472"/>
+            <a:off x="5349240" y="1005840"/>
+            <a:ext cx="6522415" cy="731520"/>
           </a:xfrm>
           <a:prstGeom prst="rect">
             <a:avLst/>
@@ -8634,24 +9011,68 @@
           <a:ln/>
         </p:spPr>
         <p:txBody>
-          <a:bodyPr wrap="square" lIns="0" tIns="0" rIns="0" bIns="0" rtlCol="0" anchor="ctr"/>
+          <a:bodyPr wrap="square" lIns="0" tIns="0" rIns="0" bIns="0" rtlCol="0" anchor="ctr">
+            <a:normAutofit/>
+          </a:bodyPr>
           <a:lstStyle/>
           <a:p>
             <a:pPr algn="ctr" indent="0" marL="0">
               <a:buNone/>
             </a:pPr>
             <a:r>
-              <a:rPr lang="en-US" sz="1800" i="1" dirty="0">
-                <a:solidFill>
-                  <a:srgbClr val="555555"/>
+              <a:rPr lang="en-US" sz="3600" b="1" dirty="0">
+                <a:solidFill>
+                  <a:srgbClr val="990011"/>
                 </a:solidFill>
                 <a:latin typeface="Times New Roman" pitchFamily="34" charset="0"/>
                 <a:ea typeface="Times New Roman" pitchFamily="34" charset="-122"/>
                 <a:cs typeface="Times New Roman" pitchFamily="34" charset="-120"/>
               </a:rPr>
-              <a:t>A soil profile.</a:t>
-            </a:r>
-            <a:endParaRPr lang="en-US" sz="1800" dirty="0"/>
+              <a:t>Justification of the Lesson</a:t>
+            </a:r>
+            <a:endParaRPr lang="en-US" sz="3600" dirty="0"/>
+          </a:p>
+        </p:txBody>
+      </p:sp>
+      <p:sp>
+        <p:nvSpPr>
+          <p:cNvPr id="5" name="Text 2"/>
+          <p:cNvSpPr/>
+          <p:nvPr/>
+        </p:nvSpPr>
+        <p:spPr>
+          <a:xfrm>
+            <a:off x="5349240" y="1783080"/>
+            <a:ext cx="6522415" cy="4663440"/>
+          </a:xfrm>
+          <a:prstGeom prst="rect">
+            <a:avLst/>
+          </a:prstGeom>
+          <a:noFill/>
+          <a:ln/>
+        </p:spPr>
+        <p:txBody>
+          <a:bodyPr wrap="square" lIns="0" tIns="0" rIns="0" bIns="0" rtlCol="0" anchor="t"/>
+          <a:lstStyle/>
+          <a:p>
+            <a:pPr algn="l" indent="0" marL="0">
+              <a:spcAft>
+                <a:spcPts val="800"/>
+              </a:spcAft>
+              <a:buNone/>
+            </a:pPr>
+            <a:r>
+              <a:rPr lang="en-US" sz="4000" dirty="0">
+                <a:solidFill>
+                  <a:srgbClr val="111111"/>
+                </a:solidFill>
+                <a:latin typeface="Times New Roman" pitchFamily="34" charset="0"/>
+                <a:ea typeface="Times New Roman" pitchFamily="34" charset="-122"/>
+                <a:cs typeface="Times New Roman" pitchFamily="34" charset="-120"/>
+              </a:rPr>
+              <a:t>This lesson shows the importance of weathering for farming, building and mining, and the costs it causes.</a:t>
+            </a:r>
+            <a:endParaRPr lang="en-US" sz="4000" dirty="0"/>
           </a:p>
         </p:txBody>
       </p:sp>
@@ -9356,15 +9777,54 @@
                 <a:ea typeface="Calibri" pitchFamily="34" charset="-122"/>
                 <a:cs typeface="Calibri" pitchFamily="34" charset="-120"/>
               </a:rPr>
-              <a:t>1. PRODUCTS AS RESOURCES: SOIL</a:t>
+              <a:t>1. PRODUCTS</a:t>
             </a:r>
             <a:endParaRPr lang="en-US" sz="1400" dirty="0"/>
+          </a:p>
+        </p:txBody>
+      </p:sp>
+      <p:sp>
+        <p:nvSpPr>
+          <p:cNvPr id="3" name="Text 1"/>
+          <p:cNvSpPr/>
+          <p:nvPr/>
+        </p:nvSpPr>
+        <p:spPr>
+          <a:xfrm>
+            <a:off x="457200" y="1005840"/>
+            <a:ext cx="11277295" cy="731520"/>
+          </a:xfrm>
+          <a:prstGeom prst="rect">
+            <a:avLst/>
+          </a:prstGeom>
+          <a:noFill/>
+          <a:ln/>
+        </p:spPr>
+        <p:txBody>
+          <a:bodyPr wrap="square" lIns="0" tIns="0" rIns="0" bIns="0" rtlCol="0" anchor="ctr"/>
+          <a:lstStyle/>
+          <a:p>
+            <a:pPr algn="ctr" indent="0" marL="0">
+              <a:buNone/>
+            </a:pPr>
+            <a:r>
+              <a:rPr lang="en-US" sz="3600" b="1" dirty="0">
+                <a:solidFill>
+                  <a:srgbClr val="990011"/>
+                </a:solidFill>
+                <a:latin typeface="Times New Roman" pitchFamily="34" charset="0"/>
+                <a:ea typeface="Times New Roman" pitchFamily="34" charset="-122"/>
+                <a:cs typeface="Times New Roman" pitchFamily="34" charset="-120"/>
+              </a:rPr>
+              <a:t>Activity 1</a:t>
+            </a:r>
+            <a:endParaRPr lang="en-US" sz="3600" dirty="0"/>
           </a:p>
         </p:txBody>
       </p:sp>
       <p:pic>
         <p:nvPicPr>
-          <p:cNvPr id="3" name="Image 0" descr="/home/claude/f4/img/minesec_sheet.png">    </p:cNvPr>
+          <p:cNvPr id="4" name="Image 0" descr="/home/claude/f4/img/v2/soil_profile_big.png">    </p:cNvPr>
           <p:cNvPicPr>
             <a:picLocks noChangeAspect="1"/>
           </p:cNvPicPr>
@@ -9378,8 +9838,8 @@
         </p:blipFill>
         <p:spPr>
           <a:xfrm>
-            <a:off x="0" y="658368"/>
-            <a:ext cx="5120640" cy="5833872"/>
+            <a:off x="629930" y="1783080"/>
+            <a:ext cx="10931835" cy="4270248"/>
           </a:xfrm>
           <a:prstGeom prst="rect">
             <a:avLst/>
@@ -9388,14 +9848,14 @@
       </p:pic>
       <p:sp>
         <p:nvSpPr>
-          <p:cNvPr id="4" name="Text 1"/>
+          <p:cNvPr id="5" name="Text 2"/>
           <p:cNvSpPr/>
           <p:nvPr/>
         </p:nvSpPr>
         <p:spPr>
           <a:xfrm>
-            <a:off x="5349240" y="1005840"/>
-            <a:ext cx="6522415" cy="731520"/>
+            <a:off x="457200" y="6089904"/>
+            <a:ext cx="11277295" cy="347472"/>
           </a:xfrm>
           <a:prstGeom prst="rect">
             <a:avLst/>
@@ -9404,68 +9864,24 @@
           <a:ln/>
         </p:spPr>
         <p:txBody>
-          <a:bodyPr wrap="square" lIns="0" tIns="0" rIns="0" bIns="0" rtlCol="0" anchor="ctr">
-            <a:normAutofit/>
-          </a:bodyPr>
+          <a:bodyPr wrap="square" lIns="0" tIns="0" rIns="0" bIns="0" rtlCol="0" anchor="ctr"/>
           <a:lstStyle/>
           <a:p>
             <a:pPr algn="ctr" indent="0" marL="0">
               <a:buNone/>
             </a:pPr>
             <a:r>
-              <a:rPr lang="en-US" sz="3600" b="1" dirty="0">
-                <a:solidFill>
-                  <a:srgbClr val="990011"/>
+              <a:rPr lang="en-US" sz="1800" i="1" dirty="0">
+                <a:solidFill>
+                  <a:srgbClr val="555555"/>
                 </a:solidFill>
                 <a:latin typeface="Times New Roman" pitchFamily="34" charset="0"/>
                 <a:ea typeface="Times New Roman" pitchFamily="34" charset="-122"/>
                 <a:cs typeface="Times New Roman" pitchFamily="34" charset="-120"/>
               </a:rPr>
-              <a:t>Activity 1: Question</a:t>
-            </a:r>
-            <a:endParaRPr lang="en-US" sz="3600" dirty="0"/>
-          </a:p>
-        </p:txBody>
-      </p:sp>
-      <p:sp>
-        <p:nvSpPr>
-          <p:cNvPr id="5" name="Text 2"/>
-          <p:cNvSpPr/>
-          <p:nvPr/>
-        </p:nvSpPr>
-        <p:spPr>
-          <a:xfrm>
-            <a:off x="5349240" y="1783080"/>
-            <a:ext cx="6522415" cy="4663440"/>
-          </a:xfrm>
-          <a:prstGeom prst="rect">
-            <a:avLst/>
-          </a:prstGeom>
-          <a:noFill/>
-          <a:ln/>
-        </p:spPr>
-        <p:txBody>
-          <a:bodyPr wrap="square" lIns="0" tIns="0" rIns="0" bIns="0" rtlCol="0" anchor="t"/>
-          <a:lstStyle/>
-          <a:p>
-            <a:pPr algn="l" indent="0" marL="0">
-              <a:spcAft>
-                <a:spcPts val="800"/>
-              </a:spcAft>
-              <a:buNone/>
-            </a:pPr>
-            <a:r>
-              <a:rPr lang="en-US" sz="4000" dirty="0">
-                <a:solidFill>
-                  <a:srgbClr val="111111"/>
-                </a:solidFill>
-                <a:latin typeface="Times New Roman" pitchFamily="34" charset="0"/>
-                <a:ea typeface="Times New Roman" pitchFamily="34" charset="-122"/>
-                <a:cs typeface="Times New Roman" pitchFamily="34" charset="-120"/>
-              </a:rPr>
-              <a:t>How does weathering help agriculture?</a:t>
-            </a:r>
-            <a:endParaRPr lang="en-US" sz="4000" dirty="0"/>
+              <a:t>A soil profile.</a:t>
+            </a:r>
+            <a:endParaRPr lang="en-US" sz="1800" dirty="0"/>
           </a:p>
         </p:txBody>
       </p:sp>
@@ -9575,7 +9991,7 @@
                 <a:ea typeface="Calibri" pitchFamily="34" charset="-122"/>
                 <a:cs typeface="Calibri" pitchFamily="34" charset="-120"/>
               </a:rPr>
-              <a:t>1. PRODUCTS AS RESOURCES: SOIL</a:t>
+              <a:t>1. PRODUCTS</a:t>
             </a:r>
             <a:endParaRPr lang="en-US" sz="1400" dirty="0"/>
           </a:p>
@@ -9640,7 +10056,7 @@
                 <a:ea typeface="Times New Roman" pitchFamily="34" charset="-122"/>
                 <a:cs typeface="Times New Roman" pitchFamily="34" charset="-120"/>
               </a:rPr>
-              <a:t>Activity 1: Answer</a:t>
+              <a:t>Activity 1: Question</a:t>
             </a:r>
             <a:endParaRPr lang="en-US" sz="3600" dirty="0"/>
           </a:p>
@@ -9682,7 +10098,7 @@
                 <a:ea typeface="Times New Roman" pitchFamily="34" charset="-122"/>
                 <a:cs typeface="Times New Roman" pitchFamily="34" charset="-120"/>
               </a:rPr>
-              <a:t>Weathered rock forms soil, which supports crops.</a:t>
+              <a:t>What lies at the bottom of the soil profile?</a:t>
             </a:r>
             <a:endParaRPr lang="en-US" sz="4000" dirty="0"/>
           </a:p>
@@ -9794,54 +10210,15 @@
                 <a:ea typeface="Calibri" pitchFamily="34" charset="-122"/>
                 <a:cs typeface="Calibri" pitchFamily="34" charset="-120"/>
               </a:rPr>
-              <a:t>1. PRODUCTS AS RESOURCES: MINERALS</a:t>
+              <a:t>1. PRODUCTS</a:t>
             </a:r>
             <a:endParaRPr lang="en-US" sz="1400" dirty="0"/>
-          </a:p>
-        </p:txBody>
-      </p:sp>
-      <p:sp>
-        <p:nvSpPr>
-          <p:cNvPr id="3" name="Text 1"/>
-          <p:cNvSpPr/>
-          <p:nvPr/>
-        </p:nvSpPr>
-        <p:spPr>
-          <a:xfrm>
-            <a:off x="457200" y="1005840"/>
-            <a:ext cx="11277295" cy="731520"/>
-          </a:xfrm>
-          <a:prstGeom prst="rect">
-            <a:avLst/>
-          </a:prstGeom>
-          <a:noFill/>
-          <a:ln/>
-        </p:spPr>
-        <p:txBody>
-          <a:bodyPr wrap="square" lIns="0" tIns="0" rIns="0" bIns="0" rtlCol="0" anchor="ctr"/>
-          <a:lstStyle/>
-          <a:p>
-            <a:pPr algn="ctr" indent="0" marL="0">
-              <a:buNone/>
-            </a:pPr>
-            <a:r>
-              <a:rPr lang="en-US" sz="3600" b="1" dirty="0">
-                <a:solidFill>
-                  <a:srgbClr val="990011"/>
-                </a:solidFill>
-                <a:latin typeface="Times New Roman" pitchFamily="34" charset="0"/>
-                <a:ea typeface="Times New Roman" pitchFamily="34" charset="-122"/>
-                <a:cs typeface="Times New Roman" pitchFamily="34" charset="-120"/>
-              </a:rPr>
-              <a:t>Activity 2</a:t>
-            </a:r>
-            <a:endParaRPr lang="en-US" sz="3600" dirty="0"/>
           </a:p>
         </p:txBody>
       </p:sp>
       <p:pic>
         <p:nvPicPr>
-          <p:cNvPr id="4" name="Image 0" descr="/home/claude/f4/img/v2/lsa_bauxite.jpg">    </p:cNvPr>
+          <p:cNvPr id="3" name="Image 0" descr="/home/claude/f4/img/minesec_sheet.png">    </p:cNvPr>
           <p:cNvPicPr>
             <a:picLocks noChangeAspect="1"/>
           </p:cNvPicPr>
@@ -9855,8 +10232,8 @@
         </p:blipFill>
         <p:spPr>
           <a:xfrm>
-            <a:off x="2246610" y="1783080"/>
-            <a:ext cx="7698475" cy="4270248"/>
+            <a:off x="0" y="658368"/>
+            <a:ext cx="5120640" cy="5833872"/>
           </a:xfrm>
           <a:prstGeom prst="rect">
             <a:avLst/>
@@ -9865,14 +10242,14 @@
       </p:pic>
       <p:sp>
         <p:nvSpPr>
-          <p:cNvPr id="5" name="Text 2"/>
+          <p:cNvPr id="4" name="Text 1"/>
           <p:cNvSpPr/>
           <p:nvPr/>
         </p:nvSpPr>
         <p:spPr>
           <a:xfrm>
-            <a:off x="457200" y="6089904"/>
-            <a:ext cx="11277295" cy="347472"/>
+            <a:off x="5349240" y="1005840"/>
+            <a:ext cx="6522415" cy="731520"/>
           </a:xfrm>
           <a:prstGeom prst="rect">
             <a:avLst/>
@@ -9881,24 +10258,68 @@
           <a:ln/>
         </p:spPr>
         <p:txBody>
-          <a:bodyPr wrap="square" lIns="0" tIns="0" rIns="0" bIns="0" rtlCol="0" anchor="ctr"/>
+          <a:bodyPr wrap="square" lIns="0" tIns="0" rIns="0" bIns="0" rtlCol="0" anchor="ctr">
+            <a:normAutofit/>
+          </a:bodyPr>
           <a:lstStyle/>
           <a:p>
             <a:pPr algn="ctr" indent="0" marL="0">
               <a:buNone/>
             </a:pPr>
             <a:r>
-              <a:rPr lang="en-US" sz="1800" i="1" dirty="0">
-                <a:solidFill>
-                  <a:srgbClr val="555555"/>
+              <a:rPr lang="en-US" sz="3600" b="1" dirty="0">
+                <a:solidFill>
+                  <a:srgbClr val="990011"/>
                 </a:solidFill>
                 <a:latin typeface="Times New Roman" pitchFamily="34" charset="0"/>
                 <a:ea typeface="Times New Roman" pitchFamily="34" charset="-122"/>
                 <a:cs typeface="Times New Roman" pitchFamily="34" charset="-120"/>
               </a:rPr>
-              <a:t>A bauxite mine.</a:t>
-            </a:r>
-            <a:endParaRPr lang="en-US" sz="1800" dirty="0"/>
+              <a:t>Activity 1: Answer</a:t>
+            </a:r>
+            <a:endParaRPr lang="en-US" sz="3600" dirty="0"/>
+          </a:p>
+        </p:txBody>
+      </p:sp>
+      <p:sp>
+        <p:nvSpPr>
+          <p:cNvPr id="5" name="Text 2"/>
+          <p:cNvSpPr/>
+          <p:nvPr/>
+        </p:nvSpPr>
+        <p:spPr>
+          <a:xfrm>
+            <a:off x="5349240" y="1783080"/>
+            <a:ext cx="6522415" cy="4663440"/>
+          </a:xfrm>
+          <a:prstGeom prst="rect">
+            <a:avLst/>
+          </a:prstGeom>
+          <a:noFill/>
+          <a:ln/>
+        </p:spPr>
+        <p:txBody>
+          <a:bodyPr wrap="square" lIns="0" tIns="0" rIns="0" bIns="0" rtlCol="0" anchor="t"/>
+          <a:lstStyle/>
+          <a:p>
+            <a:pPr algn="l" indent="0" marL="0">
+              <a:spcAft>
+                <a:spcPts val="800"/>
+              </a:spcAft>
+              <a:buNone/>
+            </a:pPr>
+            <a:r>
+              <a:rPr lang="en-US" sz="4000" dirty="0">
+                <a:solidFill>
+                  <a:srgbClr val="111111"/>
+                </a:solidFill>
+                <a:latin typeface="Times New Roman" pitchFamily="34" charset="0"/>
+                <a:ea typeface="Times New Roman" pitchFamily="34" charset="-122"/>
+                <a:cs typeface="Times New Roman" pitchFamily="34" charset="-120"/>
+              </a:rPr>
+              <a:t>The hard rock (bedrock).</a:t>
+            </a:r>
+            <a:endParaRPr lang="en-US" sz="4000" dirty="0"/>
           </a:p>
         </p:txBody>
       </p:sp>
@@ -10008,15 +10429,54 @@
                 <a:ea typeface="Calibri" pitchFamily="34" charset="-122"/>
                 <a:cs typeface="Calibri" pitchFamily="34" charset="-120"/>
               </a:rPr>
-              <a:t>1. PRODUCTS AS RESOURCES: MINERALS</a:t>
+              <a:t>1. PRODUCTS</a:t>
             </a:r>
             <a:endParaRPr lang="en-US" sz="1400" dirty="0"/>
+          </a:p>
+        </p:txBody>
+      </p:sp>
+      <p:sp>
+        <p:nvSpPr>
+          <p:cNvPr id="3" name="Text 1"/>
+          <p:cNvSpPr/>
+          <p:nvPr/>
+        </p:nvSpPr>
+        <p:spPr>
+          <a:xfrm>
+            <a:off x="457200" y="1005840"/>
+            <a:ext cx="11277295" cy="731520"/>
+          </a:xfrm>
+          <a:prstGeom prst="rect">
+            <a:avLst/>
+          </a:prstGeom>
+          <a:noFill/>
+          <a:ln/>
+        </p:spPr>
+        <p:txBody>
+          <a:bodyPr wrap="square" lIns="0" tIns="0" rIns="0" bIns="0" rtlCol="0" anchor="ctr"/>
+          <a:lstStyle/>
+          <a:p>
+            <a:pPr algn="ctr" indent="0" marL="0">
+              <a:buNone/>
+            </a:pPr>
+            <a:r>
+              <a:rPr lang="en-US" sz="3600" b="1" dirty="0">
+                <a:solidFill>
+                  <a:srgbClr val="990011"/>
+                </a:solidFill>
+                <a:latin typeface="Times New Roman" pitchFamily="34" charset="0"/>
+                <a:ea typeface="Times New Roman" pitchFamily="34" charset="-122"/>
+                <a:cs typeface="Times New Roman" pitchFamily="34" charset="-120"/>
+              </a:rPr>
+              <a:t>Activity 2</a:t>
+            </a:r>
+            <a:endParaRPr lang="en-US" sz="3600" dirty="0"/>
           </a:p>
         </p:txBody>
       </p:sp>
       <p:pic>
         <p:nvPicPr>
-          <p:cNvPr id="3" name="Image 0" descr="/home/claude/f4/img/minesec_sheet.png">    </p:cNvPr>
+          <p:cNvPr id="4" name="Image 0" descr="/home/claude/f4/img/v2/lsa_bauxite.jpg">    </p:cNvPr>
           <p:cNvPicPr>
             <a:picLocks noChangeAspect="1"/>
           </p:cNvPicPr>
@@ -10030,8 +10490,8 @@
         </p:blipFill>
         <p:spPr>
           <a:xfrm>
-            <a:off x="0" y="658368"/>
-            <a:ext cx="5120640" cy="5833872"/>
+            <a:off x="2246610" y="1783080"/>
+            <a:ext cx="7698475" cy="4270248"/>
           </a:xfrm>
           <a:prstGeom prst="rect">
             <a:avLst/>
@@ -10040,14 +10500,14 @@
       </p:pic>
       <p:sp>
         <p:nvSpPr>
-          <p:cNvPr id="4" name="Text 1"/>
+          <p:cNvPr id="5" name="Text 2"/>
           <p:cNvSpPr/>
           <p:nvPr/>
         </p:nvSpPr>
         <p:spPr>
           <a:xfrm>
-            <a:off x="5349240" y="1005840"/>
-            <a:ext cx="6522415" cy="731520"/>
+            <a:off x="457200" y="6089904"/>
+            <a:ext cx="11277295" cy="347472"/>
           </a:xfrm>
           <a:prstGeom prst="rect">
             <a:avLst/>
@@ -10056,68 +10516,24 @@
           <a:ln/>
         </p:spPr>
         <p:txBody>
-          <a:bodyPr wrap="square" lIns="0" tIns="0" rIns="0" bIns="0" rtlCol="0" anchor="ctr">
-            <a:normAutofit/>
-          </a:bodyPr>
+          <a:bodyPr wrap="square" lIns="0" tIns="0" rIns="0" bIns="0" rtlCol="0" anchor="ctr"/>
           <a:lstStyle/>
           <a:p>
             <a:pPr algn="ctr" indent="0" marL="0">
               <a:buNone/>
             </a:pPr>
             <a:r>
-              <a:rPr lang="en-US" sz="3600" b="1" dirty="0">
-                <a:solidFill>
-                  <a:srgbClr val="990011"/>
+              <a:rPr lang="en-US" sz="1800" i="1" dirty="0">
+                <a:solidFill>
+                  <a:srgbClr val="555555"/>
                 </a:solidFill>
                 <a:latin typeface="Times New Roman" pitchFamily="34" charset="0"/>
                 <a:ea typeface="Times New Roman" pitchFamily="34" charset="-122"/>
                 <a:cs typeface="Times New Roman" pitchFamily="34" charset="-120"/>
               </a:rPr>
-              <a:t>Activity 2: Question</a:t>
-            </a:r>
-            <a:endParaRPr lang="en-US" sz="3600" dirty="0"/>
-          </a:p>
-        </p:txBody>
-      </p:sp>
-      <p:sp>
-        <p:nvSpPr>
-          <p:cNvPr id="5" name="Text 2"/>
-          <p:cNvSpPr/>
-          <p:nvPr/>
-        </p:nvSpPr>
-        <p:spPr>
-          <a:xfrm>
-            <a:off x="5349240" y="1783080"/>
-            <a:ext cx="6522415" cy="4663440"/>
-          </a:xfrm>
-          <a:prstGeom prst="rect">
-            <a:avLst/>
-          </a:prstGeom>
-          <a:noFill/>
-          <a:ln/>
-        </p:spPr>
-        <p:txBody>
-          <a:bodyPr wrap="square" lIns="0" tIns="0" rIns="0" bIns="0" rtlCol="0" anchor="t"/>
-          <a:lstStyle/>
-          <a:p>
-            <a:pPr algn="l" indent="0" marL="0">
-              <a:spcAft>
-                <a:spcPts val="800"/>
-              </a:spcAft>
-              <a:buNone/>
-            </a:pPr>
-            <a:r>
-              <a:rPr lang="en-US" sz="4000" dirty="0">
-                <a:solidFill>
-                  <a:srgbClr val="111111"/>
-                </a:solidFill>
-                <a:latin typeface="Times New Roman" pitchFamily="34" charset="0"/>
-                <a:ea typeface="Times New Roman" pitchFamily="34" charset="-122"/>
-                <a:cs typeface="Times New Roman" pitchFamily="34" charset="-120"/>
-              </a:rPr>
-              <a:t>Bauxite forms by deep chemical weathering. What metal is made from it?</a:t>
-            </a:r>
-            <a:endParaRPr lang="en-US" sz="4000" dirty="0"/>
+              <a:t>Bauxite.</a:t>
+            </a:r>
+            <a:endParaRPr lang="en-US" sz="1800" dirty="0"/>
           </a:p>
         </p:txBody>
       </p:sp>
@@ -10227,7 +10643,7 @@
                 <a:ea typeface="Calibri" pitchFamily="34" charset="-122"/>
                 <a:cs typeface="Calibri" pitchFamily="34" charset="-120"/>
               </a:rPr>
-              <a:t>1. PRODUCTS AS RESOURCES: MINERALS</a:t>
+              <a:t>1. PRODUCTS</a:t>
             </a:r>
             <a:endParaRPr lang="en-US" sz="1400" dirty="0"/>
           </a:p>
@@ -10292,7 +10708,7 @@
                 <a:ea typeface="Times New Roman" pitchFamily="34" charset="-122"/>
                 <a:cs typeface="Times New Roman" pitchFamily="34" charset="-120"/>
               </a:rPr>
-              <a:t>Activity 2: Answer</a:t>
+              <a:t>Activity 2: Question</a:t>
             </a:r>
             <a:endParaRPr lang="en-US" sz="3600" dirty="0"/>
           </a:p>
@@ -10334,7 +10750,7 @@
                 <a:ea typeface="Times New Roman" pitchFamily="34" charset="-122"/>
                 <a:cs typeface="Times New Roman" pitchFamily="34" charset="-120"/>
               </a:rPr>
-              <a:t>Aluminium.</a:t>
+              <a:t>Which metal is made from bauxite?</a:t>
             </a:r>
             <a:endParaRPr lang="en-US" sz="4000" dirty="0"/>
           </a:p>
@@ -10446,54 +10862,15 @@
                 <a:ea typeface="Calibri" pitchFamily="34" charset="-122"/>
                 <a:cs typeface="Calibri" pitchFamily="34" charset="-120"/>
               </a:rPr>
-              <a:t>1. PRODUCTS AS RESOURCES: BUILDING MATERIALS</a:t>
+              <a:t>1. PRODUCTS</a:t>
             </a:r>
             <a:endParaRPr lang="en-US" sz="1400" dirty="0"/>
-          </a:p>
-        </p:txBody>
-      </p:sp>
-      <p:sp>
-        <p:nvSpPr>
-          <p:cNvPr id="3" name="Text 1"/>
-          <p:cNvSpPr/>
-          <p:nvPr/>
-        </p:nvSpPr>
-        <p:spPr>
-          <a:xfrm>
-            <a:off x="457200" y="1005840"/>
-            <a:ext cx="11277295" cy="731520"/>
-          </a:xfrm>
-          <a:prstGeom prst="rect">
-            <a:avLst/>
-          </a:prstGeom>
-          <a:noFill/>
-          <a:ln/>
-        </p:spPr>
-        <p:txBody>
-          <a:bodyPr wrap="square" lIns="0" tIns="0" rIns="0" bIns="0" rtlCol="0" anchor="ctr"/>
-          <a:lstStyle/>
-          <a:p>
-            <a:pPr algn="ctr" indent="0" marL="0">
-              <a:buNone/>
-            </a:pPr>
-            <a:r>
-              <a:rPr lang="en-US" sz="3600" b="1" dirty="0">
-                <a:solidFill>
-                  <a:srgbClr val="990011"/>
-                </a:solidFill>
-                <a:latin typeface="Times New Roman" pitchFamily="34" charset="0"/>
-                <a:ea typeface="Times New Roman" pitchFamily="34" charset="-122"/>
-                <a:cs typeface="Times New Roman" pitchFamily="34" charset="-120"/>
-              </a:rPr>
-              <a:t>Activity 3</a:t>
-            </a:r>
-            <a:endParaRPr lang="en-US" sz="3600" dirty="0"/>
           </a:p>
         </p:txBody>
       </p:sp>
       <p:pic>
         <p:nvPicPr>
-          <p:cNvPr id="4" name="Image 0" descr="/home/claude/f4/img/v2/f2t_laterite.jpg">    </p:cNvPr>
+          <p:cNvPr id="3" name="Image 0" descr="/home/claude/f4/img/minesec_sheet.png">    </p:cNvPr>
           <p:cNvPicPr>
             <a:picLocks noChangeAspect="1"/>
           </p:cNvPicPr>
@@ -10507,8 +10884,8 @@
         </p:blipFill>
         <p:spPr>
           <a:xfrm>
-            <a:off x="2248777" y="1783080"/>
-            <a:ext cx="7694141" cy="4270248"/>
+            <a:off x="0" y="658368"/>
+            <a:ext cx="5120640" cy="5833872"/>
           </a:xfrm>
           <a:prstGeom prst="rect">
             <a:avLst/>
@@ -10517,14 +10894,14 @@
       </p:pic>
       <p:sp>
         <p:nvSpPr>
-          <p:cNvPr id="5" name="Text 2"/>
+          <p:cNvPr id="4" name="Text 1"/>
           <p:cNvSpPr/>
           <p:nvPr/>
         </p:nvSpPr>
         <p:spPr>
           <a:xfrm>
-            <a:off x="457200" y="6089904"/>
-            <a:ext cx="11277295" cy="347472"/>
+            <a:off x="5349240" y="1005840"/>
+            <a:ext cx="6522415" cy="731520"/>
           </a:xfrm>
           <a:prstGeom prst="rect">
             <a:avLst/>
@@ -10533,24 +10910,68 @@
           <a:ln/>
         </p:spPr>
         <p:txBody>
-          <a:bodyPr wrap="square" lIns="0" tIns="0" rIns="0" bIns="0" rtlCol="0" anchor="ctr"/>
+          <a:bodyPr wrap="square" lIns="0" tIns="0" rIns="0" bIns="0" rtlCol="0" anchor="ctr">
+            <a:normAutofit/>
+          </a:bodyPr>
           <a:lstStyle/>
           <a:p>
             <a:pPr algn="ctr" indent="0" marL="0">
               <a:buNone/>
             </a:pPr>
             <a:r>
-              <a:rPr lang="en-US" sz="1800" i="1" dirty="0">
-                <a:solidFill>
-                  <a:srgbClr val="555555"/>
+              <a:rPr lang="en-US" sz="3600" b="1" dirty="0">
+                <a:solidFill>
+                  <a:srgbClr val="990011"/>
                 </a:solidFill>
                 <a:latin typeface="Times New Roman" pitchFamily="34" charset="0"/>
                 <a:ea typeface="Times New Roman" pitchFamily="34" charset="-122"/>
                 <a:cs typeface="Times New Roman" pitchFamily="34" charset="-120"/>
               </a:rPr>
-              <a:t>Laterite, a red weathered material used for roads and bricks.</a:t>
-            </a:r>
-            <a:endParaRPr lang="en-US" sz="1800" dirty="0"/>
+              <a:t>Activity 2: Answer</a:t>
+            </a:r>
+            <a:endParaRPr lang="en-US" sz="3600" dirty="0"/>
+          </a:p>
+        </p:txBody>
+      </p:sp>
+      <p:sp>
+        <p:nvSpPr>
+          <p:cNvPr id="5" name="Text 2"/>
+          <p:cNvSpPr/>
+          <p:nvPr/>
+        </p:nvSpPr>
+        <p:spPr>
+          <a:xfrm>
+            <a:off x="5349240" y="1783080"/>
+            <a:ext cx="6522415" cy="4663440"/>
+          </a:xfrm>
+          <a:prstGeom prst="rect">
+            <a:avLst/>
+          </a:prstGeom>
+          <a:noFill/>
+          <a:ln/>
+        </p:spPr>
+        <p:txBody>
+          <a:bodyPr wrap="square" lIns="0" tIns="0" rIns="0" bIns="0" rtlCol="0" anchor="t"/>
+          <a:lstStyle/>
+          <a:p>
+            <a:pPr algn="l" indent="0" marL="0">
+              <a:spcAft>
+                <a:spcPts val="800"/>
+              </a:spcAft>
+              <a:buNone/>
+            </a:pPr>
+            <a:r>
+              <a:rPr lang="en-US" sz="4000" dirty="0">
+                <a:solidFill>
+                  <a:srgbClr val="111111"/>
+                </a:solidFill>
+                <a:latin typeface="Times New Roman" pitchFamily="34" charset="0"/>
+                <a:ea typeface="Times New Roman" pitchFamily="34" charset="-122"/>
+                <a:cs typeface="Times New Roman" pitchFamily="34" charset="-120"/>
+              </a:rPr>
+              <a:t>Aluminium.</a:t>
+            </a:r>
+            <a:endParaRPr lang="en-US" sz="4000" dirty="0"/>
           </a:p>
         </p:txBody>
       </p:sp>
@@ -10660,15 +11081,54 @@
                 <a:ea typeface="Calibri" pitchFamily="34" charset="-122"/>
                 <a:cs typeface="Calibri" pitchFamily="34" charset="-120"/>
               </a:rPr>
-              <a:t>1. PRODUCTS AS RESOURCES: BUILDING MATERIALS</a:t>
+              <a:t>2. POSITIVE EFFECTS</a:t>
             </a:r>
             <a:endParaRPr lang="en-US" sz="1400" dirty="0"/>
+          </a:p>
+        </p:txBody>
+      </p:sp>
+      <p:sp>
+        <p:nvSpPr>
+          <p:cNvPr id="3" name="Text 1"/>
+          <p:cNvSpPr/>
+          <p:nvPr/>
+        </p:nvSpPr>
+        <p:spPr>
+          <a:xfrm>
+            <a:off x="457200" y="1005840"/>
+            <a:ext cx="11277295" cy="731520"/>
+          </a:xfrm>
+          <a:prstGeom prst="rect">
+            <a:avLst/>
+          </a:prstGeom>
+          <a:noFill/>
+          <a:ln/>
+        </p:spPr>
+        <p:txBody>
+          <a:bodyPr wrap="square" lIns="0" tIns="0" rIns="0" bIns="0" rtlCol="0" anchor="ctr"/>
+          <a:lstStyle/>
+          <a:p>
+            <a:pPr algn="ctr" indent="0" marL="0">
+              <a:buNone/>
+            </a:pPr>
+            <a:r>
+              <a:rPr lang="en-US" sz="3600" b="1" dirty="0">
+                <a:solidFill>
+                  <a:srgbClr val="990011"/>
+                </a:solidFill>
+                <a:latin typeface="Times New Roman" pitchFamily="34" charset="0"/>
+                <a:ea typeface="Times New Roman" pitchFamily="34" charset="-122"/>
+                <a:cs typeface="Times New Roman" pitchFamily="34" charset="-120"/>
+              </a:rPr>
+              <a:t>Activity 3</a:t>
+            </a:r>
+            <a:endParaRPr lang="en-US" sz="3600" dirty="0"/>
           </a:p>
         </p:txBody>
       </p:sp>
       <p:pic>
         <p:nvPicPr>
-          <p:cNvPr id="3" name="Image 0" descr="/home/claude/f4/img/minesec_sheet.png">    </p:cNvPr>
+          <p:cNvPr id="4" name="Image 0" descr="/home/claude/f4/img/v2/f2t_cotton_field.jpg">    </p:cNvPr>
           <p:cNvPicPr>
             <a:picLocks noChangeAspect="1"/>
           </p:cNvPicPr>
@@ -10682,8 +11142,8 @@
         </p:blipFill>
         <p:spPr>
           <a:xfrm>
-            <a:off x="0" y="658368"/>
-            <a:ext cx="5120640" cy="5833872"/>
+            <a:off x="2246610" y="1783080"/>
+            <a:ext cx="7698475" cy="4270248"/>
           </a:xfrm>
           <a:prstGeom prst="rect">
             <a:avLst/>
@@ -10692,14 +11152,14 @@
       </p:pic>
       <p:sp>
         <p:nvSpPr>
-          <p:cNvPr id="4" name="Text 1"/>
+          <p:cNvPr id="5" name="Text 2"/>
           <p:cNvSpPr/>
           <p:nvPr/>
         </p:nvSpPr>
         <p:spPr>
           <a:xfrm>
-            <a:off x="5349240" y="1005840"/>
-            <a:ext cx="6522415" cy="731520"/>
+            <a:off x="457200" y="6089904"/>
+            <a:ext cx="11277295" cy="347472"/>
           </a:xfrm>
           <a:prstGeom prst="rect">
             <a:avLst/>
@@ -10708,68 +11168,24 @@
           <a:ln/>
         </p:spPr>
         <p:txBody>
-          <a:bodyPr wrap="square" lIns="0" tIns="0" rIns="0" bIns="0" rtlCol="0" anchor="ctr">
-            <a:normAutofit/>
-          </a:bodyPr>
+          <a:bodyPr wrap="square" lIns="0" tIns="0" rIns="0" bIns="0" rtlCol="0" anchor="ctr"/>
           <a:lstStyle/>
           <a:p>
             <a:pPr algn="ctr" indent="0" marL="0">
               <a:buNone/>
             </a:pPr>
             <a:r>
-              <a:rPr lang="en-US" sz="3600" b="1" dirty="0">
-                <a:solidFill>
-                  <a:srgbClr val="990011"/>
+              <a:rPr lang="en-US" sz="1800" i="1" dirty="0">
+                <a:solidFill>
+                  <a:srgbClr val="555555"/>
                 </a:solidFill>
                 <a:latin typeface="Times New Roman" pitchFamily="34" charset="0"/>
                 <a:ea typeface="Times New Roman" pitchFamily="34" charset="-122"/>
                 <a:cs typeface="Times New Roman" pitchFamily="34" charset="-120"/>
               </a:rPr>
-              <a:t>Activity 3: Question</a:t>
-            </a:r>
-            <a:endParaRPr lang="en-US" sz="3600" dirty="0"/>
-          </a:p>
-        </p:txBody>
-      </p:sp>
-      <p:sp>
-        <p:nvSpPr>
-          <p:cNvPr id="5" name="Text 2"/>
-          <p:cNvSpPr/>
-          <p:nvPr/>
-        </p:nvSpPr>
-        <p:spPr>
-          <a:xfrm>
-            <a:off x="5349240" y="1783080"/>
-            <a:ext cx="6522415" cy="4663440"/>
-          </a:xfrm>
-          <a:prstGeom prst="rect">
-            <a:avLst/>
-          </a:prstGeom>
-          <a:noFill/>
-          <a:ln/>
-        </p:spPr>
-        <p:txBody>
-          <a:bodyPr wrap="square" lIns="0" tIns="0" rIns="0" bIns="0" rtlCol="0" anchor="t"/>
-          <a:lstStyle/>
-          <a:p>
-            <a:pPr algn="l" indent="0" marL="0">
-              <a:spcAft>
-                <a:spcPts val="800"/>
-              </a:spcAft>
-              <a:buNone/>
-            </a:pPr>
-            <a:r>
-              <a:rPr lang="en-US" sz="4000" dirty="0">
-                <a:solidFill>
-                  <a:srgbClr val="111111"/>
-                </a:solidFill>
-                <a:latin typeface="Times New Roman" pitchFamily="34" charset="0"/>
-                <a:ea typeface="Times New Roman" pitchFamily="34" charset="-122"/>
-                <a:cs typeface="Times New Roman" pitchFamily="34" charset="-120"/>
-              </a:rPr>
-              <a:t>Give two building materials that come from weathering.</a:t>
-            </a:r>
-            <a:endParaRPr lang="en-US" sz="4000" dirty="0"/>
+              <a:t>A cotton field.</a:t>
+            </a:r>
+            <a:endParaRPr lang="en-US" sz="1800" dirty="0"/>
           </a:p>
         </p:txBody>
       </p:sp>
@@ -10879,7 +11295,7 @@
                 <a:ea typeface="Calibri" pitchFamily="34" charset="-122"/>
                 <a:cs typeface="Calibri" pitchFamily="34" charset="-120"/>
               </a:rPr>
-              <a:t>1. PRODUCTS AS RESOURCES: BUILDING MATERIALS</a:t>
+              <a:t>2. POSITIVE EFFECTS</a:t>
             </a:r>
             <a:endParaRPr lang="en-US" sz="1400" dirty="0"/>
           </a:p>
@@ -10944,7 +11360,7 @@
                 <a:ea typeface="Times New Roman" pitchFamily="34" charset="-122"/>
                 <a:cs typeface="Times New Roman" pitchFamily="34" charset="-120"/>
               </a:rPr>
-              <a:t>Activity 3: Answer</a:t>
+              <a:t>Activity 3: Question</a:t>
             </a:r>
             <a:endParaRPr lang="en-US" sz="3600" dirty="0"/>
           </a:p>
@@ -10986,7 +11402,7 @@
                 <a:ea typeface="Times New Roman" pitchFamily="34" charset="-122"/>
                 <a:cs typeface="Times New Roman" pitchFamily="34" charset="-120"/>
               </a:rPr>
-              <a:t>Sand, gravel, clay and laterite.</a:t>
+              <a:t>Why is soil the most important product of weathering?</a:t>
             </a:r>
             <a:endParaRPr lang="en-US" sz="4000" dirty="0"/>
           </a:p>
@@ -11098,54 +11514,15 @@
                 <a:ea typeface="Calibri" pitchFamily="34" charset="-122"/>
                 <a:cs typeface="Calibri" pitchFamily="34" charset="-120"/>
               </a:rPr>
-              <a:t>2. EFFECTS ON THE LANDSCAPE</a:t>
+              <a:t>2. POSITIVE EFFECTS</a:t>
             </a:r>
             <a:endParaRPr lang="en-US" sz="1400" dirty="0"/>
-          </a:p>
-        </p:txBody>
-      </p:sp>
-      <p:sp>
-        <p:nvSpPr>
-          <p:cNvPr id="3" name="Text 1"/>
-          <p:cNvSpPr/>
-          <p:nvPr/>
-        </p:nvSpPr>
-        <p:spPr>
-          <a:xfrm>
-            <a:off x="457200" y="1005840"/>
-            <a:ext cx="11277295" cy="731520"/>
-          </a:xfrm>
-          <a:prstGeom prst="rect">
-            <a:avLst/>
-          </a:prstGeom>
-          <a:noFill/>
-          <a:ln/>
-        </p:spPr>
-        <p:txBody>
-          <a:bodyPr wrap="square" lIns="0" tIns="0" rIns="0" bIns="0" rtlCol="0" anchor="ctr"/>
-          <a:lstStyle/>
-          <a:p>
-            <a:pPr algn="ctr" indent="0" marL="0">
-              <a:buNone/>
-            </a:pPr>
-            <a:r>
-              <a:rPr lang="en-US" sz="3600" b="1" dirty="0">
-                <a:solidFill>
-                  <a:srgbClr val="990011"/>
-                </a:solidFill>
-                <a:latin typeface="Times New Roman" pitchFamily="34" charset="0"/>
-                <a:ea typeface="Times New Roman" pitchFamily="34" charset="-122"/>
-                <a:cs typeface="Times New Roman" pitchFamily="34" charset="-120"/>
-              </a:rPr>
-              <a:t>Activity 4</a:t>
-            </a:r>
-            <a:endParaRPr lang="en-US" sz="3600" dirty="0"/>
           </a:p>
         </p:txBody>
       </p:sp>
       <p:pic>
         <p:nvPicPr>
-          <p:cNvPr id="4" name="Image 0" descr="/home/claude/f4/img/v2/f4_landslide.jpg">    </p:cNvPr>
+          <p:cNvPr id="3" name="Image 0" descr="/home/claude/f4/img/minesec_sheet.png">    </p:cNvPr>
           <p:cNvPicPr>
             <a:picLocks noChangeAspect="1"/>
           </p:cNvPicPr>
@@ -11159,8 +11536,8 @@
         </p:blipFill>
         <p:spPr>
           <a:xfrm>
-            <a:off x="2246610" y="1783080"/>
-            <a:ext cx="7698475" cy="4270248"/>
+            <a:off x="0" y="658368"/>
+            <a:ext cx="5120640" cy="5833872"/>
           </a:xfrm>
           <a:prstGeom prst="rect">
             <a:avLst/>
@@ -11169,14 +11546,14 @@
       </p:pic>
       <p:sp>
         <p:nvSpPr>
-          <p:cNvPr id="5" name="Text 2"/>
+          <p:cNvPr id="4" name="Text 1"/>
           <p:cNvSpPr/>
           <p:nvPr/>
         </p:nvSpPr>
         <p:spPr>
           <a:xfrm>
-            <a:off x="457200" y="6089904"/>
-            <a:ext cx="11277295" cy="347472"/>
+            <a:off x="5349240" y="1005840"/>
+            <a:ext cx="6522415" cy="731520"/>
           </a:xfrm>
           <a:prstGeom prst="rect">
             <a:avLst/>
@@ -11185,24 +11562,68 @@
           <a:ln/>
         </p:spPr>
         <p:txBody>
-          <a:bodyPr wrap="square" lIns="0" tIns="0" rIns="0" bIns="0" rtlCol="0" anchor="ctr"/>
+          <a:bodyPr wrap="square" lIns="0" tIns="0" rIns="0" bIns="0" rtlCol="0" anchor="ctr">
+            <a:normAutofit/>
+          </a:bodyPr>
           <a:lstStyle/>
           <a:p>
             <a:pPr algn="ctr" indent="0" marL="0">
               <a:buNone/>
             </a:pPr>
             <a:r>
-              <a:rPr lang="en-US" sz="1800" i="1" dirty="0">
-                <a:solidFill>
-                  <a:srgbClr val="555555"/>
+              <a:rPr lang="en-US" sz="3600" b="1" dirty="0">
+                <a:solidFill>
+                  <a:srgbClr val="990011"/>
                 </a:solidFill>
                 <a:latin typeface="Times New Roman" pitchFamily="34" charset="0"/>
                 <a:ea typeface="Times New Roman" pitchFamily="34" charset="-122"/>
                 <a:cs typeface="Times New Roman" pitchFamily="34" charset="-120"/>
               </a:rPr>
-              <a:t>A landslide on a road.</a:t>
-            </a:r>
-            <a:endParaRPr lang="en-US" sz="1800" dirty="0"/>
+              <a:t>Activity 3: Answer</a:t>
+            </a:r>
+            <a:endParaRPr lang="en-US" sz="3600" dirty="0"/>
+          </a:p>
+        </p:txBody>
+      </p:sp>
+      <p:sp>
+        <p:nvSpPr>
+          <p:cNvPr id="5" name="Text 2"/>
+          <p:cNvSpPr/>
+          <p:nvPr/>
+        </p:nvSpPr>
+        <p:spPr>
+          <a:xfrm>
+            <a:off x="5349240" y="1783080"/>
+            <a:ext cx="6522415" cy="4663440"/>
+          </a:xfrm>
+          <a:prstGeom prst="rect">
+            <a:avLst/>
+          </a:prstGeom>
+          <a:noFill/>
+          <a:ln/>
+        </p:spPr>
+        <p:txBody>
+          <a:bodyPr wrap="square" lIns="0" tIns="0" rIns="0" bIns="0" rtlCol="0" anchor="t"/>
+          <a:lstStyle/>
+          <a:p>
+            <a:pPr algn="l" indent="0" marL="0">
+              <a:spcAft>
+                <a:spcPts val="800"/>
+              </a:spcAft>
+              <a:buNone/>
+            </a:pPr>
+            <a:r>
+              <a:rPr lang="en-US" sz="4000" dirty="0">
+                <a:solidFill>
+                  <a:srgbClr val="111111"/>
+                </a:solidFill>
+                <a:latin typeface="Times New Roman" pitchFamily="34" charset="0"/>
+                <a:ea typeface="Times New Roman" pitchFamily="34" charset="-122"/>
+                <a:cs typeface="Times New Roman" pitchFamily="34" charset="-120"/>
+              </a:rPr>
+              <a:t>It supports all farming and ecosystems.</a:t>
+            </a:r>
+            <a:endParaRPr lang="en-US" sz="4000" dirty="0"/>
           </a:p>
         </p:txBody>
       </p:sp>
@@ -11312,15 +11733,54 @@
                 <a:ea typeface="Calibri" pitchFamily="34" charset="-122"/>
                 <a:cs typeface="Calibri" pitchFamily="34" charset="-120"/>
               </a:rPr>
-              <a:t>2. EFFECTS ON THE LANDSCAPE</a:t>
+              <a:t>2. POSITIVE EFFECTS</a:t>
             </a:r>
             <a:endParaRPr lang="en-US" sz="1400" dirty="0"/>
+          </a:p>
+        </p:txBody>
+      </p:sp>
+      <p:sp>
+        <p:nvSpPr>
+          <p:cNvPr id="3" name="Text 1"/>
+          <p:cNvSpPr/>
+          <p:nvPr/>
+        </p:nvSpPr>
+        <p:spPr>
+          <a:xfrm>
+            <a:off x="457200" y="1005840"/>
+            <a:ext cx="11277295" cy="731520"/>
+          </a:xfrm>
+          <a:prstGeom prst="rect">
+            <a:avLst/>
+          </a:prstGeom>
+          <a:noFill/>
+          <a:ln/>
+        </p:spPr>
+        <p:txBody>
+          <a:bodyPr wrap="square" lIns="0" tIns="0" rIns="0" bIns="0" rtlCol="0" anchor="ctr"/>
+          <a:lstStyle/>
+          <a:p>
+            <a:pPr algn="ctr" indent="0" marL="0">
+              <a:buNone/>
+            </a:pPr>
+            <a:r>
+              <a:rPr lang="en-US" sz="3600" b="1" dirty="0">
+                <a:solidFill>
+                  <a:srgbClr val="990011"/>
+                </a:solidFill>
+                <a:latin typeface="Times New Roman" pitchFamily="34" charset="0"/>
+                <a:ea typeface="Times New Roman" pitchFamily="34" charset="-122"/>
+                <a:cs typeface="Times New Roman" pitchFamily="34" charset="-120"/>
+              </a:rPr>
+              <a:t>Activity 4</a:t>
+            </a:r>
+            <a:endParaRPr lang="en-US" sz="3600" dirty="0"/>
           </a:p>
         </p:txBody>
       </p:sp>
       <p:pic>
         <p:nvPicPr>
-          <p:cNvPr id="3" name="Image 0" descr="/home/claude/f4/img/minesec_sheet.png">    </p:cNvPr>
+          <p:cNvPr id="4" name="Image 0" descr="/home/claude/f4/img/v2/lsa_mandara.jpg">    </p:cNvPr>
           <p:cNvPicPr>
             <a:picLocks noChangeAspect="1"/>
           </p:cNvPicPr>
@@ -11334,8 +11794,8 @@
         </p:blipFill>
         <p:spPr>
           <a:xfrm>
-            <a:off x="0" y="658368"/>
-            <a:ext cx="5120640" cy="5833872"/>
+            <a:off x="274320" y="2383231"/>
+            <a:ext cx="11643055" cy="3069946"/>
           </a:xfrm>
           <a:prstGeom prst="rect">
             <a:avLst/>
@@ -11344,14 +11804,14 @@
       </p:pic>
       <p:sp>
         <p:nvSpPr>
-          <p:cNvPr id="4" name="Text 1"/>
+          <p:cNvPr id="5" name="Text 2"/>
           <p:cNvSpPr/>
           <p:nvPr/>
         </p:nvSpPr>
         <p:spPr>
           <a:xfrm>
-            <a:off x="5349240" y="1005840"/>
-            <a:ext cx="6522415" cy="731520"/>
+            <a:off x="457200" y="6089904"/>
+            <a:ext cx="11277295" cy="347472"/>
           </a:xfrm>
           <a:prstGeom prst="rect">
             <a:avLst/>
@@ -11360,68 +11820,24 @@
           <a:ln/>
         </p:spPr>
         <p:txBody>
-          <a:bodyPr wrap="square" lIns="0" tIns="0" rIns="0" bIns="0" rtlCol="0" anchor="ctr">
-            <a:normAutofit/>
-          </a:bodyPr>
+          <a:bodyPr wrap="square" lIns="0" tIns="0" rIns="0" bIns="0" rtlCol="0" anchor="ctr"/>
           <a:lstStyle/>
           <a:p>
             <a:pPr algn="ctr" indent="0" marL="0">
               <a:buNone/>
             </a:pPr>
             <a:r>
-              <a:rPr lang="en-US" sz="3600" b="1" dirty="0">
-                <a:solidFill>
-                  <a:srgbClr val="990011"/>
+              <a:rPr lang="en-US" sz="1800" i="1" dirty="0">
+                <a:solidFill>
+                  <a:srgbClr val="555555"/>
                 </a:solidFill>
                 <a:latin typeface="Times New Roman" pitchFamily="34" charset="0"/>
                 <a:ea typeface="Times New Roman" pitchFamily="34" charset="-122"/>
                 <a:cs typeface="Times New Roman" pitchFamily="34" charset="-120"/>
               </a:rPr>
-              <a:t>Activity 4: Question</a:t>
-            </a:r>
-            <a:endParaRPr lang="en-US" sz="3600" dirty="0"/>
-          </a:p>
-        </p:txBody>
-      </p:sp>
-      <p:sp>
-        <p:nvSpPr>
-          <p:cNvPr id="5" name="Text 2"/>
-          <p:cNvSpPr/>
-          <p:nvPr/>
-        </p:nvSpPr>
-        <p:spPr>
-          <a:xfrm>
-            <a:off x="5349240" y="1783080"/>
-            <a:ext cx="6522415" cy="4663440"/>
-          </a:xfrm>
-          <a:prstGeom prst="rect">
-            <a:avLst/>
-          </a:prstGeom>
-          <a:noFill/>
-          <a:ln/>
-        </p:spPr>
-        <p:txBody>
-          <a:bodyPr wrap="square" lIns="0" tIns="0" rIns="0" bIns="0" rtlCol="0" anchor="t"/>
-          <a:lstStyle/>
-          <a:p>
-            <a:pPr algn="l" indent="0" marL="0">
-              <a:spcAft>
-                <a:spcPts val="800"/>
-              </a:spcAft>
-              <a:buNone/>
-            </a:pPr>
-            <a:r>
-              <a:rPr lang="en-US" sz="4000" dirty="0">
-                <a:solidFill>
-                  <a:srgbClr val="111111"/>
-                </a:solidFill>
-                <a:latin typeface="Times New Roman" pitchFamily="34" charset="0"/>
-                <a:ea typeface="Times New Roman" pitchFamily="34" charset="-122"/>
-                <a:cs typeface="Times New Roman" pitchFamily="34" charset="-120"/>
-              </a:rPr>
-              <a:t>Why do landslides happen on deeply weathered slopes?</a:t>
-            </a:r>
-            <a:endParaRPr lang="en-US" sz="4000" dirty="0"/>
+              <a:t>Landscape near Rhumsiki.</a:t>
+            </a:r>
+            <a:endParaRPr lang="en-US" sz="1800" dirty="0"/>
           </a:p>
         </p:txBody>
       </p:sp>
@@ -12102,7 +12518,7 @@
                           <a:ea typeface="Calibri" pitchFamily="34" charset="-122"/>
                           <a:cs typeface="Calibri" pitchFamily="34" charset="-120"/>
                         </a:rPr>
-                        <a:t>Regolith, soil, bauxite, laterite, resource.</a:t>
+                        <a:t>Regolith, soil, humus, construction materials, residual ores, bauxite, inselberg, leaching.</a:t>
                       </a:r>
                       <a:endParaRPr lang="en-US" sz="1700" dirty="0">
                         <a:latin typeface="Calibri" charset="0"/>
@@ -12240,7 +12656,7 @@
                           <a:ea typeface="Calibri" pitchFamily="34" charset="-122"/>
                           <a:cs typeface="Calibri" pitchFamily="34" charset="-120"/>
                         </a:rPr>
-                        <a:t>Products of weathering as resources and their economic importance; effects on the landscape and on man.</a:t>
+                        <a:t>Products of weathering as a resource (regolith, soil, materials, ores); positive and negative effects of weathering on the landscape and on man.</a:t>
                       </a:r>
                       <a:endParaRPr lang="en-US" sz="1700" dirty="0">
                         <a:latin typeface="Calibri" charset="0"/>
@@ -12378,7 +12794,7 @@
                           <a:ea typeface="Calibri" pitchFamily="34" charset="-122"/>
                           <a:cs typeface="Calibri" pitchFamily="34" charset="-120"/>
                         </a:rPr>
-                        <a:t>Learners are able to explain the positive and negative impacts of weathering.</a:t>
+                        <a:t>Learners are able to explain the value of weathering products and the damage weathering causes.</a:t>
                       </a:r>
                       <a:endParaRPr lang="en-US" sz="1700" dirty="0">
                         <a:latin typeface="Calibri" charset="0"/>
@@ -12540,7 +12956,7 @@
                 <a:ea typeface="Calibri" pitchFamily="34" charset="-122"/>
                 <a:cs typeface="Calibri" pitchFamily="34" charset="-120"/>
               </a:rPr>
-              <a:t>2. EFFECTS ON THE LANDSCAPE</a:t>
+              <a:t>2. POSITIVE EFFECTS</a:t>
             </a:r>
             <a:endParaRPr lang="en-US" sz="1400" dirty="0"/>
           </a:p>
@@ -12605,7 +13021,7 @@
                 <a:ea typeface="Times New Roman" pitchFamily="34" charset="-122"/>
                 <a:cs typeface="Times New Roman" pitchFamily="34" charset="-120"/>
               </a:rPr>
-              <a:t>Activity 4: Answer</a:t>
+              <a:t>Activity 4: Question</a:t>
             </a:r>
             <a:endParaRPr lang="en-US" sz="3600" dirty="0"/>
           </a:p>
@@ -12647,7 +13063,7 @@
                 <a:ea typeface="Times New Roman" pitchFamily="34" charset="-122"/>
                 <a:cs typeface="Times New Roman" pitchFamily="34" charset="-120"/>
               </a:rPr>
-              <a:t>The weak weathered material slides when it is wet and heavy.</a:t>
+              <a:t>How can weathered landscapes help the economy?</a:t>
             </a:r>
             <a:endParaRPr lang="en-US" sz="4000" dirty="0"/>
           </a:p>
@@ -12759,54 +13175,15 @@
                 <a:ea typeface="Calibri" pitchFamily="34" charset="-122"/>
                 <a:cs typeface="Calibri" pitchFamily="34" charset="-120"/>
               </a:rPr>
-              <a:t>3. EFFECTS ON MAN</a:t>
+              <a:t>2. POSITIVE EFFECTS</a:t>
             </a:r>
             <a:endParaRPr lang="en-US" sz="1400" dirty="0"/>
-          </a:p>
-        </p:txBody>
-      </p:sp>
-      <p:sp>
-        <p:nvSpPr>
-          <p:cNvPr id="3" name="Text 1"/>
-          <p:cNvSpPr/>
-          <p:nvPr/>
-        </p:nvSpPr>
-        <p:spPr>
-          <a:xfrm>
-            <a:off x="457200" y="1005840"/>
-            <a:ext cx="11277295" cy="731520"/>
-          </a:xfrm>
-          <a:prstGeom prst="rect">
-            <a:avLst/>
-          </a:prstGeom>
-          <a:noFill/>
-          <a:ln/>
-        </p:spPr>
-        <p:txBody>
-          <a:bodyPr wrap="square" lIns="0" tIns="0" rIns="0" bIns="0" rtlCol="0" anchor="ctr"/>
-          <a:lstStyle/>
-          <a:p>
-            <a:pPr algn="ctr" indent="0" marL="0">
-              <a:buNone/>
-            </a:pPr>
-            <a:r>
-              <a:rPr lang="en-US" sz="3600" b="1" dirty="0">
-                <a:solidFill>
-                  <a:srgbClr val="990011"/>
-                </a:solidFill>
-                <a:latin typeface="Times New Roman" pitchFamily="34" charset="0"/>
-                <a:ea typeface="Times New Roman" pitchFamily="34" charset="-122"/>
-                <a:cs typeface="Times New Roman" pitchFamily="34" charset="-120"/>
-              </a:rPr>
-              <a:t>Activity 5</a:t>
-            </a:r>
-            <a:endParaRPr lang="en-US" sz="3600" dirty="0"/>
           </a:p>
         </p:txBody>
       </p:sp>
       <p:pic>
         <p:nvPicPr>
-          <p:cNvPr id="4" name="Image 0" descr="/home/claude/f4/img/v2/lsa_weathered.jpg">    </p:cNvPr>
+          <p:cNvPr id="3" name="Image 0" descr="/home/claude/f4/img/minesec_sheet.png">    </p:cNvPr>
           <p:cNvPicPr>
             <a:picLocks noChangeAspect="1"/>
           </p:cNvPicPr>
@@ -12820,8 +13197,8 @@
         </p:blipFill>
         <p:spPr>
           <a:xfrm>
-            <a:off x="2246610" y="1783080"/>
-            <a:ext cx="7698475" cy="4270248"/>
+            <a:off x="0" y="658368"/>
+            <a:ext cx="5120640" cy="5833872"/>
           </a:xfrm>
           <a:prstGeom prst="rect">
             <a:avLst/>
@@ -12830,14 +13207,14 @@
       </p:pic>
       <p:sp>
         <p:nvSpPr>
-          <p:cNvPr id="5" name="Text 2"/>
+          <p:cNvPr id="4" name="Text 1"/>
           <p:cNvSpPr/>
           <p:nvPr/>
         </p:nvSpPr>
         <p:spPr>
           <a:xfrm>
-            <a:off x="457200" y="6089904"/>
-            <a:ext cx="11277295" cy="347472"/>
+            <a:off x="5349240" y="1005840"/>
+            <a:ext cx="6522415" cy="731520"/>
           </a:xfrm>
           <a:prstGeom prst="rect">
             <a:avLst/>
@@ -12846,24 +13223,68 @@
           <a:ln/>
         </p:spPr>
         <p:txBody>
-          <a:bodyPr wrap="square" lIns="0" tIns="0" rIns="0" bIns="0" rtlCol="0" anchor="ctr"/>
+          <a:bodyPr wrap="square" lIns="0" tIns="0" rIns="0" bIns="0" rtlCol="0" anchor="ctr">
+            <a:normAutofit/>
+          </a:bodyPr>
           <a:lstStyle/>
           <a:p>
             <a:pPr algn="ctr" indent="0" marL="0">
               <a:buNone/>
             </a:pPr>
             <a:r>
-              <a:rPr lang="en-US" sz="1800" i="1" dirty="0">
-                <a:solidFill>
-                  <a:srgbClr val="555555"/>
+              <a:rPr lang="en-US" sz="3600" b="1" dirty="0">
+                <a:solidFill>
+                  <a:srgbClr val="990011"/>
                 </a:solidFill>
                 <a:latin typeface="Times New Roman" pitchFamily="34" charset="0"/>
                 <a:ea typeface="Times New Roman" pitchFamily="34" charset="-122"/>
                 <a:cs typeface="Times New Roman" pitchFamily="34" charset="-120"/>
               </a:rPr>
-              <a:t>A weathered stone statue.</a:t>
-            </a:r>
-            <a:endParaRPr lang="en-US" sz="1800" dirty="0"/>
+              <a:t>Activity 4: Answer</a:t>
+            </a:r>
+            <a:endParaRPr lang="en-US" sz="3600" dirty="0"/>
+          </a:p>
+        </p:txBody>
+      </p:sp>
+      <p:sp>
+        <p:nvSpPr>
+          <p:cNvPr id="5" name="Text 2"/>
+          <p:cNvSpPr/>
+          <p:nvPr/>
+        </p:nvSpPr>
+        <p:spPr>
+          <a:xfrm>
+            <a:off x="5349240" y="1783080"/>
+            <a:ext cx="6522415" cy="4663440"/>
+          </a:xfrm>
+          <a:prstGeom prst="rect">
+            <a:avLst/>
+          </a:prstGeom>
+          <a:noFill/>
+          <a:ln/>
+        </p:spPr>
+        <p:txBody>
+          <a:bodyPr wrap="square" lIns="0" tIns="0" rIns="0" bIns="0" rtlCol="0" anchor="t"/>
+          <a:lstStyle/>
+          <a:p>
+            <a:pPr algn="l" indent="0" marL="0">
+              <a:spcAft>
+                <a:spcPts val="800"/>
+              </a:spcAft>
+              <a:buNone/>
+            </a:pPr>
+            <a:r>
+              <a:rPr lang="en-US" sz="4000" dirty="0">
+                <a:solidFill>
+                  <a:srgbClr val="111111"/>
+                </a:solidFill>
+                <a:latin typeface="Times New Roman" pitchFamily="34" charset="0"/>
+                <a:ea typeface="Times New Roman" pitchFamily="34" charset="-122"/>
+                <a:cs typeface="Times New Roman" pitchFamily="34" charset="-120"/>
+              </a:rPr>
+              <a:t>They attract tourists.</a:t>
+            </a:r>
+            <a:endParaRPr lang="en-US" sz="4000" dirty="0"/>
           </a:p>
         </p:txBody>
       </p:sp>
@@ -12973,15 +13394,54 @@
                 <a:ea typeface="Calibri" pitchFamily="34" charset="-122"/>
                 <a:cs typeface="Calibri" pitchFamily="34" charset="-120"/>
               </a:rPr>
-              <a:t>3. EFFECTS ON MAN</a:t>
+              <a:t>3. NEGATIVE EFFECTS</a:t>
             </a:r>
             <a:endParaRPr lang="en-US" sz="1400" dirty="0"/>
+          </a:p>
+        </p:txBody>
+      </p:sp>
+      <p:sp>
+        <p:nvSpPr>
+          <p:cNvPr id="3" name="Text 1"/>
+          <p:cNvSpPr/>
+          <p:nvPr/>
+        </p:nvSpPr>
+        <p:spPr>
+          <a:xfrm>
+            <a:off x="457200" y="1005840"/>
+            <a:ext cx="11277295" cy="731520"/>
+          </a:xfrm>
+          <a:prstGeom prst="rect">
+            <a:avLst/>
+          </a:prstGeom>
+          <a:noFill/>
+          <a:ln/>
+        </p:spPr>
+        <p:txBody>
+          <a:bodyPr wrap="square" lIns="0" tIns="0" rIns="0" bIns="0" rtlCol="0" anchor="ctr"/>
+          <a:lstStyle/>
+          <a:p>
+            <a:pPr algn="ctr" indent="0" marL="0">
+              <a:buNone/>
+            </a:pPr>
+            <a:r>
+              <a:rPr lang="en-US" sz="3600" b="1" dirty="0">
+                <a:solidFill>
+                  <a:srgbClr val="990011"/>
+                </a:solidFill>
+                <a:latin typeface="Times New Roman" pitchFamily="34" charset="0"/>
+                <a:ea typeface="Times New Roman" pitchFamily="34" charset="-122"/>
+                <a:cs typeface="Times New Roman" pitchFamily="34" charset="-120"/>
+              </a:rPr>
+              <a:t>Activity 5</a:t>
+            </a:r>
+            <a:endParaRPr lang="en-US" sz="3600" dirty="0"/>
           </a:p>
         </p:txBody>
       </p:sp>
       <p:pic>
         <p:nvPicPr>
-          <p:cNvPr id="3" name="Image 0" descr="/home/claude/f4/img/minesec_sheet.png">    </p:cNvPr>
+          <p:cNvPr id="4" name="Image 0" descr="/home/claude/f4/img/v2/f4_oldwall.jpg">    </p:cNvPr>
           <p:cNvPicPr>
             <a:picLocks noChangeAspect="1"/>
           </p:cNvPicPr>
@@ -12995,8 +13455,8 @@
         </p:blipFill>
         <p:spPr>
           <a:xfrm>
-            <a:off x="0" y="658368"/>
-            <a:ext cx="5120640" cy="5833872"/>
+            <a:off x="2246610" y="1783080"/>
+            <a:ext cx="7698475" cy="4270248"/>
           </a:xfrm>
           <a:prstGeom prst="rect">
             <a:avLst/>
@@ -13005,14 +13465,14 @@
       </p:pic>
       <p:sp>
         <p:nvSpPr>
-          <p:cNvPr id="4" name="Text 1"/>
+          <p:cNvPr id="5" name="Text 2"/>
           <p:cNvSpPr/>
           <p:nvPr/>
         </p:nvSpPr>
         <p:spPr>
           <a:xfrm>
-            <a:off x="5349240" y="1005840"/>
-            <a:ext cx="6522415" cy="731520"/>
+            <a:off x="457200" y="6089904"/>
+            <a:ext cx="11277295" cy="347472"/>
           </a:xfrm>
           <a:prstGeom prst="rect">
             <a:avLst/>
@@ -13021,68 +13481,24 @@
           <a:ln/>
         </p:spPr>
         <p:txBody>
-          <a:bodyPr wrap="square" lIns="0" tIns="0" rIns="0" bIns="0" rtlCol="0" anchor="ctr">
-            <a:normAutofit/>
-          </a:bodyPr>
+          <a:bodyPr wrap="square" lIns="0" tIns="0" rIns="0" bIns="0" rtlCol="0" anchor="ctr"/>
           <a:lstStyle/>
           <a:p>
             <a:pPr algn="ctr" indent="0" marL="0">
               <a:buNone/>
             </a:pPr>
             <a:r>
-              <a:rPr lang="en-US" sz="3600" b="1" dirty="0">
-                <a:solidFill>
-                  <a:srgbClr val="990011"/>
+              <a:rPr lang="en-US" sz="1800" i="1" dirty="0">
+                <a:solidFill>
+                  <a:srgbClr val="555555"/>
                 </a:solidFill>
                 <a:latin typeface="Times New Roman" pitchFamily="34" charset="0"/>
                 <a:ea typeface="Times New Roman" pitchFamily="34" charset="-122"/>
                 <a:cs typeface="Times New Roman" pitchFamily="34" charset="-120"/>
               </a:rPr>
-              <a:t>Activity 5: Question</a:t>
-            </a:r>
-            <a:endParaRPr lang="en-US" sz="3600" dirty="0"/>
-          </a:p>
-        </p:txBody>
-      </p:sp>
-      <p:sp>
-        <p:nvSpPr>
-          <p:cNvPr id="5" name="Text 2"/>
-          <p:cNvSpPr/>
-          <p:nvPr/>
-        </p:nvSpPr>
-        <p:spPr>
-          <a:xfrm>
-            <a:off x="5349240" y="1783080"/>
-            <a:ext cx="6522415" cy="4663440"/>
-          </a:xfrm>
-          <a:prstGeom prst="rect">
-            <a:avLst/>
-          </a:prstGeom>
-          <a:noFill/>
-          <a:ln/>
-        </p:spPr>
-        <p:txBody>
-          <a:bodyPr wrap="square" lIns="0" tIns="0" rIns="0" bIns="0" rtlCol="0" anchor="t"/>
-          <a:lstStyle/>
-          <a:p>
-            <a:pPr algn="l" indent="0" marL="0">
-              <a:spcAft>
-                <a:spcPts val="800"/>
-              </a:spcAft>
-              <a:buNone/>
-            </a:pPr>
-            <a:r>
-              <a:rPr lang="en-US" sz="4000" dirty="0">
-                <a:solidFill>
-                  <a:srgbClr val="111111"/>
-                </a:solidFill>
-                <a:latin typeface="Times New Roman" pitchFamily="34" charset="0"/>
-                <a:ea typeface="Times New Roman" pitchFamily="34" charset="-122"/>
-                <a:cs typeface="Times New Roman" pitchFamily="34" charset="-120"/>
-              </a:rPr>
-              <a:t>How does weathering damage buildings and monuments?</a:t>
-            </a:r>
-            <a:endParaRPr lang="en-US" sz="4000" dirty="0"/>
+              <a:t>A weathered old wall.</a:t>
+            </a:r>
+            <a:endParaRPr lang="en-US" sz="1800" dirty="0"/>
           </a:p>
         </p:txBody>
       </p:sp>
@@ -13192,7 +13608,7 @@
                 <a:ea typeface="Calibri" pitchFamily="34" charset="-122"/>
                 <a:cs typeface="Calibri" pitchFamily="34" charset="-120"/>
               </a:rPr>
-              <a:t>3. EFFECTS ON MAN</a:t>
+              <a:t>3. NEGATIVE EFFECTS</a:t>
             </a:r>
             <a:endParaRPr lang="en-US" sz="1400" dirty="0"/>
           </a:p>
@@ -13257,7 +13673,7 @@
                 <a:ea typeface="Times New Roman" pitchFamily="34" charset="-122"/>
                 <a:cs typeface="Times New Roman" pitchFamily="34" charset="-120"/>
               </a:rPr>
-              <a:t>Activity 5: Answer</a:t>
+              <a:t>Activity 5: Question</a:t>
             </a:r>
             <a:endParaRPr lang="en-US" sz="3600" dirty="0"/>
           </a:p>
@@ -13299,7 +13715,7 @@
                 <a:ea typeface="Times New Roman" pitchFamily="34" charset="-122"/>
                 <a:cs typeface="Times New Roman" pitchFamily="34" charset="-120"/>
               </a:rPr>
-              <a:t>Rain, salts and heat crack and dissolve the stone.</a:t>
+              <a:t>Give one negative effect of weathering.</a:t>
             </a:r>
             <a:endParaRPr lang="en-US" sz="4000" dirty="0"/>
           </a:p>
@@ -13411,7 +13827,7 @@
                 <a:ea typeface="Calibri" pitchFamily="34" charset="-122"/>
                 <a:cs typeface="Calibri" pitchFamily="34" charset="-120"/>
               </a:rPr>
-              <a:t>BOARD SUMMARY</a:t>
+              <a:t>3. NEGATIVE EFFECTS</a:t>
             </a:r>
             <a:endParaRPr lang="en-US" sz="1400" dirty="0"/>
           </a:p>
@@ -13476,7 +13892,7 @@
                 <a:ea typeface="Times New Roman" pitchFamily="34" charset="-122"/>
                 <a:cs typeface="Times New Roman" pitchFamily="34" charset="-120"/>
               </a:rPr>
-              <a:t>Board Summary</a:t>
+              <a:t>Activity 5: Answer</a:t>
             </a:r>
             <a:endParaRPr lang="en-US" sz="3600" dirty="0"/>
           </a:p>
@@ -13510,7 +13926,7 @@
               <a:buNone/>
             </a:pPr>
             <a:r>
-              <a:rPr lang="en-US" sz="4000" b="1" dirty="0">
+              <a:rPr lang="en-US" sz="4000" dirty="0">
                 <a:solidFill>
                   <a:srgbClr val="111111"/>
                 </a:solidFill>
@@ -13518,47 +13934,7 @@
                 <a:ea typeface="Times New Roman" pitchFamily="34" charset="-122"/>
                 <a:cs typeface="Times New Roman" pitchFamily="34" charset="-120"/>
               </a:rPr>
-              <a:t>Topic: Denudational Processes on Slopes</a:t>
-            </a:r>
-            <a:endParaRPr lang="en-US" sz="4000" dirty="0"/>
-          </a:p>
-          <a:p>
-            <a:pPr algn="l" indent="0" marL="0">
-              <a:spcAft>
-                <a:spcPts val="800"/>
-              </a:spcAft>
-              <a:buNone/>
-            </a:pPr>
-            <a:r>
-              <a:rPr lang="en-US" sz="4000" b="1" dirty="0">
-                <a:solidFill>
-                  <a:srgbClr val="111111"/>
-                </a:solidFill>
-                <a:latin typeface="Times New Roman" pitchFamily="34" charset="0"/>
-                <a:ea typeface="Times New Roman" pitchFamily="34" charset="-122"/>
-                <a:cs typeface="Times New Roman" pitchFamily="34" charset="-120"/>
-              </a:rPr>
-              <a:t>Sub-topic: Weathering</a:t>
-            </a:r>
-            <a:endParaRPr lang="en-US" sz="4000" dirty="0"/>
-          </a:p>
-          <a:p>
-            <a:pPr algn="l" indent="0" marL="0">
-              <a:spcAft>
-                <a:spcPts val="800"/>
-              </a:spcAft>
-              <a:buNone/>
-            </a:pPr>
-            <a:r>
-              <a:rPr lang="en-US" sz="4000" b="1" dirty="0">
-                <a:solidFill>
-                  <a:srgbClr val="990011"/>
-                </a:solidFill>
-                <a:latin typeface="Times New Roman" pitchFamily="34" charset="0"/>
-                <a:ea typeface="Times New Roman" pitchFamily="34" charset="-122"/>
-                <a:cs typeface="Times New Roman" pitchFamily="34" charset="-120"/>
-              </a:rPr>
-              <a:t>Lesson 11: The Impact of Weathering</a:t>
+              <a:t>Damage to buildings and roads, landslides or leaching of soils.</a:t>
             </a:r>
             <a:endParaRPr lang="en-US" sz="4000" dirty="0"/>
           </a:p>
@@ -13735,7 +14111,7 @@
                 <a:ea typeface="Times New Roman" pitchFamily="34" charset="-122"/>
                 <a:cs typeface="Times New Roman" pitchFamily="34" charset="-120"/>
               </a:rPr>
-              <a:t>DEFINITIONS</a:t>
+              <a:t>Board Summary</a:t>
             </a:r>
             <a:endParaRPr lang="en-US" sz="3600" dirty="0"/>
           </a:p>
@@ -13769,7 +14145,7 @@
               <a:buNone/>
             </a:pPr>
             <a:r>
-              <a:rPr lang="en-US" sz="4000" i="1" dirty="0">
+              <a:rPr lang="en-US" sz="4000" b="1" dirty="0">
                 <a:solidFill>
                   <a:srgbClr val="111111"/>
                 </a:solidFill>
@@ -13777,7 +14153,7 @@
                 <a:ea typeface="Times New Roman" pitchFamily="34" charset="-122"/>
                 <a:cs typeface="Times New Roman" pitchFamily="34" charset="-120"/>
               </a:rPr>
-              <a:t>The key terms of this lesson are defined as follows:</a:t>
+              <a:t>Topic: Denudational Processes on Slopes</a:t>
             </a:r>
             <a:endParaRPr lang="en-US" sz="4000" dirty="0"/>
           </a:p>
@@ -13797,8 +14173,11 @@
                 <a:ea typeface="Times New Roman" pitchFamily="34" charset="-122"/>
                 <a:cs typeface="Times New Roman" pitchFamily="34" charset="-120"/>
               </a:rPr>
-              <a:t>Weathering products: </a:t>
-            </a:r>
+              <a:t>Sub-topic: Weathering</a:t>
+            </a:r>
+            <a:endParaRPr lang="en-US" sz="4000" dirty="0"/>
+          </a:p>
+          <a:p>
             <a:pPr algn="l" indent="0" marL="0">
               <a:spcAft>
                 <a:spcPts val="800"/>
@@ -13806,15 +14185,15 @@
               <a:buNone/>
             </a:pPr>
             <a:r>
-              <a:rPr lang="en-US" sz="4000" dirty="0">
-                <a:solidFill>
-                  <a:srgbClr val="111111"/>
+              <a:rPr lang="en-US" sz="4000" b="1" dirty="0">
+                <a:solidFill>
+                  <a:srgbClr val="990011"/>
                 </a:solidFill>
                 <a:latin typeface="Times New Roman" pitchFamily="34" charset="0"/>
                 <a:ea typeface="Times New Roman" pitchFamily="34" charset="-122"/>
                 <a:cs typeface="Times New Roman" pitchFamily="34" charset="-120"/>
               </a:rPr>
-              <a:t>They are the materials produced by the breakdown of rocks, such as regolith, rock fragments and soil.</a:t>
+              <a:t>Lesson 11: The Impact of Weathering</a:t>
             </a:r>
             <a:endParaRPr lang="en-US" sz="4000" dirty="0"/>
           </a:p>
@@ -13949,7 +14328,7 @@
         <p:spPr>
           <a:xfrm>
             <a:off x="0" y="658368"/>
-            <a:ext cx="3840480" cy="5833872"/>
+            <a:ext cx="5120640" cy="5833872"/>
           </a:xfrm>
           <a:prstGeom prst="rect">
             <a:avLst/>
@@ -13964,8 +14343,8 @@
         </p:nvSpPr>
         <p:spPr>
           <a:xfrm>
-            <a:off x="4069080" y="1005840"/>
-            <a:ext cx="7802575" cy="731520"/>
+            <a:off x="5349240" y="1005840"/>
+            <a:ext cx="6522415" cy="731520"/>
           </a:xfrm>
           <a:prstGeom prst="rect">
             <a:avLst/>
@@ -13991,7 +14370,7 @@
                 <a:ea typeface="Times New Roman" pitchFamily="34" charset="-122"/>
                 <a:cs typeface="Times New Roman" pitchFamily="34" charset="-120"/>
               </a:rPr>
-              <a:t>1. Products of Weathering as Resources</a:t>
+              <a:t>DEFINITIONS</a:t>
             </a:r>
             <a:endParaRPr lang="en-US" sz="3600" dirty="0"/>
           </a:p>
@@ -14005,8 +14384,8 @@
         </p:nvSpPr>
         <p:spPr>
           <a:xfrm>
-            <a:off x="4069080" y="1783080"/>
-            <a:ext cx="7802575" cy="4663440"/>
+            <a:off x="5349240" y="1783080"/>
+            <a:ext cx="6522415" cy="4663440"/>
           </a:xfrm>
           <a:prstGeom prst="rect">
             <a:avLst/>
@@ -14033,7 +14412,7 @@
                 <a:ea typeface="Times New Roman" pitchFamily="34" charset="-122"/>
                 <a:cs typeface="Times New Roman" pitchFamily="34" charset="-120"/>
               </a:rPr>
-              <a:t>Weathering products have the following economic importance:</a:t>
+              <a:t>The key terms of this lesson are defined as follows:</a:t>
             </a:r>
             <a:endParaRPr lang="en-US" sz="4000" dirty="0"/>
           </a:p>
@@ -14053,7 +14432,7 @@
                 <a:ea typeface="Times New Roman" pitchFamily="34" charset="-122"/>
                 <a:cs typeface="Times New Roman" pitchFamily="34" charset="-120"/>
               </a:rPr>
-              <a:t>Soil: </a:t>
+              <a:t>Regolith: </a:t>
             </a:r>
             <a:pPr algn="l" indent="0" marL="0">
               <a:spcAft>
@@ -14070,7 +14449,7 @@
                 <a:ea typeface="Times New Roman" pitchFamily="34" charset="-122"/>
                 <a:cs typeface="Times New Roman" pitchFamily="34" charset="-120"/>
               </a:rPr>
-              <a:t>Weathering produces the mineral part of soil, which supports farming and forests. Deep tropical soils support cocoa, coffee and food crops.</a:t>
+              <a:t>It is the layer of loose, weathered rock, gravel, sand and clay covering the bedrock.</a:t>
             </a:r>
             <a:endParaRPr lang="en-US" sz="4000" dirty="0"/>
           </a:p>
@@ -14247,7 +14626,7 @@
                 <a:ea typeface="Times New Roman" pitchFamily="34" charset="-122"/>
                 <a:cs typeface="Times New Roman" pitchFamily="34" charset="-120"/>
               </a:rPr>
-              <a:t>1. Products of Weathering as Resources (continued)</a:t>
+              <a:t>DEFINITIONS (continued)</a:t>
             </a:r>
             <a:endParaRPr lang="en-US" sz="3600" dirty="0"/>
           </a:p>
@@ -14289,7 +14668,7 @@
                 <a:ea typeface="Times New Roman" pitchFamily="34" charset="-122"/>
                 <a:cs typeface="Times New Roman" pitchFamily="34" charset="-120"/>
               </a:rPr>
-              <a:t>Minerals: </a:t>
+              <a:t>Soil: </a:t>
             </a:r>
             <a:pPr algn="l" indent="0" marL="0">
               <a:spcAft>
@@ -14306,7 +14685,44 @@
                 <a:ea typeface="Times New Roman" pitchFamily="34" charset="-122"/>
                 <a:cs typeface="Times New Roman" pitchFamily="34" charset="-120"/>
               </a:rPr>
-              <a:t>Deep chemical weathering concentrates bauxite (Minim-Martap, Fongo-Tongo) and iron ore. These are important resources for industry.</a:t>
+              <a:t>It is the upper part of the regolith, mixed with water, air and humus, which supports plants.</a:t>
+            </a:r>
+            <a:endParaRPr lang="en-US" sz="4000" dirty="0"/>
+          </a:p>
+          <a:p>
+            <a:pPr algn="l" indent="0" marL="0">
+              <a:spcAft>
+                <a:spcPts val="800"/>
+              </a:spcAft>
+              <a:buNone/>
+            </a:pPr>
+            <a:r>
+              <a:rPr lang="en-US" sz="4000" b="1" dirty="0">
+                <a:solidFill>
+                  <a:srgbClr val="111111"/>
+                </a:solidFill>
+                <a:latin typeface="Times New Roman" pitchFamily="34" charset="0"/>
+                <a:ea typeface="Times New Roman" pitchFamily="34" charset="-122"/>
+                <a:cs typeface="Times New Roman" pitchFamily="34" charset="-120"/>
+              </a:rPr>
+              <a:t>Leaching: </a:t>
+            </a:r>
+            <a:pPr algn="l" indent="0" marL="0">
+              <a:spcAft>
+                <a:spcPts val="800"/>
+              </a:spcAft>
+              <a:buNone/>
+            </a:pPr>
+            <a:r>
+              <a:rPr lang="en-US" sz="4000" dirty="0">
+                <a:solidFill>
+                  <a:srgbClr val="111111"/>
+                </a:solidFill>
+                <a:latin typeface="Times New Roman" pitchFamily="34" charset="0"/>
+                <a:ea typeface="Times New Roman" pitchFamily="34" charset="-122"/>
+                <a:cs typeface="Times New Roman" pitchFamily="34" charset="-120"/>
+              </a:rPr>
+              <a:t>It is the washing of nutrients down the soil, out of reach of plant roots.</a:t>
             </a:r>
             <a:endParaRPr lang="en-US" sz="4000" dirty="0"/>
           </a:p>
@@ -14424,9 +14840,129 @@
           </a:p>
         </p:txBody>
       </p:sp>
+      <p:sp>
+        <p:nvSpPr>
+          <p:cNvPr id="3" name="Text 1"/>
+          <p:cNvSpPr/>
+          <p:nvPr/>
+        </p:nvSpPr>
+        <p:spPr>
+          <a:xfrm>
+            <a:off x="365760" y="1005840"/>
+            <a:ext cx="11460175" cy="731520"/>
+          </a:xfrm>
+          <a:prstGeom prst="rect">
+            <a:avLst/>
+          </a:prstGeom>
+          <a:noFill/>
+          <a:ln/>
+        </p:spPr>
+        <p:txBody>
+          <a:bodyPr wrap="square" lIns="0" tIns="0" rIns="0" bIns="0" rtlCol="0" anchor="ctr">
+            <a:normAutofit/>
+          </a:bodyPr>
+          <a:lstStyle/>
+          <a:p>
+            <a:pPr algn="ctr" indent="0" marL="0">
+              <a:buNone/>
+            </a:pPr>
+            <a:r>
+              <a:rPr lang="en-US" sz="3600" b="1" dirty="0">
+                <a:solidFill>
+                  <a:srgbClr val="990011"/>
+                </a:solidFill>
+                <a:latin typeface="Times New Roman" pitchFamily="34" charset="0"/>
+                <a:ea typeface="Times New Roman" pitchFamily="34" charset="-122"/>
+                <a:cs typeface="Times New Roman" pitchFamily="34" charset="-120"/>
+              </a:rPr>
+              <a:t>1. Products of Weathering as a Resource</a:t>
+            </a:r>
+            <a:endParaRPr lang="en-US" sz="3600" dirty="0"/>
+          </a:p>
+        </p:txBody>
+      </p:sp>
+      <p:sp>
+        <p:nvSpPr>
+          <p:cNvPr id="4" name="Text 2"/>
+          <p:cNvSpPr/>
+          <p:nvPr/>
+        </p:nvSpPr>
+        <p:spPr>
+          <a:xfrm>
+            <a:off x="365760" y="1783080"/>
+            <a:ext cx="4846320" cy="4617720"/>
+          </a:xfrm>
+          <a:prstGeom prst="rect">
+            <a:avLst/>
+          </a:prstGeom>
+          <a:noFill/>
+          <a:ln/>
+        </p:spPr>
+        <p:txBody>
+          <a:bodyPr wrap="square" lIns="0" tIns="0" rIns="0" bIns="0" rtlCol="0" anchor="t"/>
+          <a:lstStyle/>
+          <a:p>
+            <a:pPr algn="l" indent="0" marL="0">
+              <a:spcAft>
+                <a:spcPts val="800"/>
+              </a:spcAft>
+              <a:buNone/>
+            </a:pPr>
+            <a:r>
+              <a:rPr lang="en-US" sz="3600" i="1" dirty="0">
+                <a:solidFill>
+                  <a:srgbClr val="111111"/>
+                </a:solidFill>
+                <a:latin typeface="Times New Roman" pitchFamily="34" charset="0"/>
+                <a:ea typeface="Times New Roman" pitchFamily="34" charset="-122"/>
+                <a:cs typeface="Times New Roman" pitchFamily="34" charset="-120"/>
+              </a:rPr>
+              <a:t>The products of weathering are useful resources as follows:</a:t>
+            </a:r>
+            <a:endParaRPr lang="en-US" sz="3600" dirty="0"/>
+          </a:p>
+          <a:p>
+            <a:pPr algn="l" indent="0" marL="0">
+              <a:spcAft>
+                <a:spcPts val="800"/>
+              </a:spcAft>
+              <a:buNone/>
+            </a:pPr>
+            <a:r>
+              <a:rPr lang="en-US" sz="3600" b="1" dirty="0">
+                <a:solidFill>
+                  <a:srgbClr val="111111"/>
+                </a:solidFill>
+                <a:latin typeface="Times New Roman" pitchFamily="34" charset="0"/>
+                <a:ea typeface="Times New Roman" pitchFamily="34" charset="-122"/>
+                <a:cs typeface="Times New Roman" pitchFamily="34" charset="-120"/>
+              </a:rPr>
+              <a:t>Regolith: </a:t>
+            </a:r>
+            <a:pPr algn="l" indent="0" marL="0">
+              <a:spcAft>
+                <a:spcPts val="800"/>
+              </a:spcAft>
+              <a:buNone/>
+            </a:pPr>
+            <a:r>
+              <a:rPr lang="en-US" sz="3600" dirty="0">
+                <a:solidFill>
+                  <a:srgbClr val="111111"/>
+                </a:solidFill>
+                <a:latin typeface="Times New Roman" pitchFamily="34" charset="0"/>
+                <a:ea typeface="Times New Roman" pitchFamily="34" charset="-122"/>
+                <a:cs typeface="Times New Roman" pitchFamily="34" charset="-120"/>
+              </a:rPr>
+              <a:t>It is a few centimetres to hundreds of metres thick.</a:t>
+            </a:r>
+            <a:endParaRPr lang="en-US" sz="3600" dirty="0"/>
+          </a:p>
+        </p:txBody>
+      </p:sp>
       <p:pic>
         <p:nvPicPr>
-          <p:cNvPr id="3" name="Image 0" descr="/home/claude/f4/img/minesec_sheet.png">    </p:cNvPr>
+          <p:cNvPr id="5" name="Image 0" descr="/home/claude/f4/img/v2/soil_profile_big.png">    </p:cNvPr>
           <p:cNvPicPr>
             <a:picLocks noChangeAspect="1"/>
           </p:cNvPicPr>
@@ -14440,8 +14976,8 @@
         </p:blipFill>
         <p:spPr>
           <a:xfrm>
-            <a:off x="0" y="658368"/>
-            <a:ext cx="5120640" cy="5833872"/>
+            <a:off x="5349240" y="2617506"/>
+            <a:ext cx="6659575" cy="2601397"/>
           </a:xfrm>
           <a:prstGeom prst="rect">
             <a:avLst/>
@@ -14450,14 +14986,14 @@
       </p:pic>
       <p:sp>
         <p:nvSpPr>
-          <p:cNvPr id="4" name="Text 1"/>
+          <p:cNvPr id="6" name="Text 3"/>
           <p:cNvSpPr/>
           <p:nvPr/>
         </p:nvSpPr>
         <p:spPr>
           <a:xfrm>
-            <a:off x="5349240" y="1005840"/>
-            <a:ext cx="6522415" cy="731520"/>
+            <a:off x="5349240" y="6089904"/>
+            <a:ext cx="6659575" cy="347472"/>
           </a:xfrm>
           <a:prstGeom prst="rect">
             <a:avLst/>
@@ -14466,85 +15002,24 @@
           <a:ln/>
         </p:spPr>
         <p:txBody>
-          <a:bodyPr wrap="square" lIns="0" tIns="0" rIns="0" bIns="0" rtlCol="0" anchor="ctr">
-            <a:normAutofit/>
-          </a:bodyPr>
+          <a:bodyPr wrap="square" lIns="0" tIns="0" rIns="0" bIns="0" rtlCol="0" anchor="ctr"/>
           <a:lstStyle/>
           <a:p>
             <a:pPr algn="ctr" indent="0" marL="0">
               <a:buNone/>
             </a:pPr>
             <a:r>
-              <a:rPr lang="en-US" sz="3600" b="1" dirty="0">
-                <a:solidFill>
-                  <a:srgbClr val="990011"/>
+              <a:rPr lang="en-US" sz="1600" i="1" dirty="0">
+                <a:solidFill>
+                  <a:srgbClr val="555555"/>
                 </a:solidFill>
                 <a:latin typeface="Times New Roman" pitchFamily="34" charset="0"/>
                 <a:ea typeface="Times New Roman" pitchFamily="34" charset="-122"/>
                 <a:cs typeface="Times New Roman" pitchFamily="34" charset="-120"/>
               </a:rPr>
-              <a:t>1. Products of Weathering as Resources (continued)</a:t>
-            </a:r>
-            <a:endParaRPr lang="en-US" sz="3600" dirty="0"/>
-          </a:p>
-        </p:txBody>
-      </p:sp>
-      <p:sp>
-        <p:nvSpPr>
-          <p:cNvPr id="5" name="Text 2"/>
-          <p:cNvSpPr/>
-          <p:nvPr/>
-        </p:nvSpPr>
-        <p:spPr>
-          <a:xfrm>
-            <a:off x="5349240" y="1783080"/>
-            <a:ext cx="6522415" cy="4663440"/>
-          </a:xfrm>
-          <a:prstGeom prst="rect">
-            <a:avLst/>
-          </a:prstGeom>
-          <a:noFill/>
-          <a:ln/>
-        </p:spPr>
-        <p:txBody>
-          <a:bodyPr wrap="square" lIns="0" tIns="0" rIns="0" bIns="0" rtlCol="0" anchor="t"/>
-          <a:lstStyle/>
-          <a:p>
-            <a:pPr algn="l" indent="0" marL="0">
-              <a:spcAft>
-                <a:spcPts val="800"/>
-              </a:spcAft>
-              <a:buNone/>
-            </a:pPr>
-            <a:r>
-              <a:rPr lang="en-US" sz="4000" b="1" dirty="0">
-                <a:solidFill>
-                  <a:srgbClr val="111111"/>
-                </a:solidFill>
-                <a:latin typeface="Times New Roman" pitchFamily="34" charset="0"/>
-                <a:ea typeface="Times New Roman" pitchFamily="34" charset="-122"/>
-                <a:cs typeface="Times New Roman" pitchFamily="34" charset="-120"/>
-              </a:rPr>
-              <a:t>Building materials: </a:t>
-            </a:r>
-            <a:pPr algn="l" indent="0" marL="0">
-              <a:spcAft>
-                <a:spcPts val="800"/>
-              </a:spcAft>
-              <a:buNone/>
-            </a:pPr>
-            <a:r>
-              <a:rPr lang="en-US" sz="4000" dirty="0">
-                <a:solidFill>
-                  <a:srgbClr val="111111"/>
-                </a:solidFill>
-                <a:latin typeface="Times New Roman" pitchFamily="34" charset="0"/>
-                <a:ea typeface="Times New Roman" pitchFamily="34" charset="-122"/>
-                <a:cs typeface="Times New Roman" pitchFamily="34" charset="-120"/>
-              </a:rPr>
-              <a:t>Sand, gravel, clay and laterite are used for roads, bricks and houses. Kaolin is used for pottery and paper.</a:t>
-            </a:r>
-            <a:endParaRPr lang="en-US" sz="4000" dirty="0"/>
+              <a:t>Illustration: a soil profile</a:t>
+            </a:r>
+            <a:endParaRPr lang="en-US" sz="1600" dirty="0"/>
           </a:p>
         </p:txBody>
       </p:sp>
@@ -14660,9 +15135,109 @@
           </a:p>
         </p:txBody>
       </p:sp>
+      <p:sp>
+        <p:nvSpPr>
+          <p:cNvPr id="3" name="Text 1"/>
+          <p:cNvSpPr/>
+          <p:nvPr/>
+        </p:nvSpPr>
+        <p:spPr>
+          <a:xfrm>
+            <a:off x="365760" y="1005840"/>
+            <a:ext cx="11460175" cy="731520"/>
+          </a:xfrm>
+          <a:prstGeom prst="rect">
+            <a:avLst/>
+          </a:prstGeom>
+          <a:noFill/>
+          <a:ln/>
+        </p:spPr>
+        <p:txBody>
+          <a:bodyPr wrap="square" lIns="0" tIns="0" rIns="0" bIns="0" rtlCol="0" anchor="ctr">
+            <a:normAutofit/>
+          </a:bodyPr>
+          <a:lstStyle/>
+          <a:p>
+            <a:pPr algn="ctr" indent="0" marL="0">
+              <a:buNone/>
+            </a:pPr>
+            <a:r>
+              <a:rPr lang="en-US" sz="3600" b="1" dirty="0">
+                <a:solidFill>
+                  <a:srgbClr val="990011"/>
+                </a:solidFill>
+                <a:latin typeface="Times New Roman" pitchFamily="34" charset="0"/>
+                <a:ea typeface="Times New Roman" pitchFamily="34" charset="-122"/>
+                <a:cs typeface="Times New Roman" pitchFamily="34" charset="-120"/>
+              </a:rPr>
+              <a:t>1. Products of Weathering as a Resource</a:t>
+            </a:r>
+            <a:endParaRPr lang="en-US" sz="3600" dirty="0"/>
+          </a:p>
+        </p:txBody>
+      </p:sp>
+      <p:sp>
+        <p:nvSpPr>
+          <p:cNvPr id="4" name="Text 2"/>
+          <p:cNvSpPr/>
+          <p:nvPr/>
+        </p:nvSpPr>
+        <p:spPr>
+          <a:xfrm>
+            <a:off x="365760" y="1783080"/>
+            <a:ext cx="4846320" cy="4617720"/>
+          </a:xfrm>
+          <a:prstGeom prst="rect">
+            <a:avLst/>
+          </a:prstGeom>
+          <a:noFill/>
+          <a:ln/>
+        </p:spPr>
+        <p:txBody>
+          <a:bodyPr wrap="square" lIns="0" tIns="0" rIns="0" bIns="0" rtlCol="0" anchor="t"/>
+          <a:lstStyle/>
+          <a:p>
+            <a:pPr algn="l" indent="0" marL="0">
+              <a:spcAft>
+                <a:spcPts val="800"/>
+              </a:spcAft>
+              <a:buNone/>
+            </a:pPr>
+            <a:r>
+              <a:rPr lang="en-US" sz="3600" b="1" dirty="0">
+                <a:solidFill>
+                  <a:srgbClr val="111111"/>
+                </a:solidFill>
+                <a:latin typeface="Times New Roman" pitchFamily="34" charset="0"/>
+                <a:ea typeface="Times New Roman" pitchFamily="34" charset="-122"/>
+                <a:cs typeface="Times New Roman" pitchFamily="34" charset="-120"/>
+              </a:rPr>
+              <a:t>Soil for agriculture: </a:t>
+            </a:r>
+            <a:pPr algn="l" indent="0" marL="0">
+              <a:spcAft>
+                <a:spcPts val="800"/>
+              </a:spcAft>
+              <a:buNone/>
+            </a:pPr>
+            <a:r>
+              <a:rPr lang="en-US" sz="3600" dirty="0">
+                <a:solidFill>
+                  <a:srgbClr val="111111"/>
+                </a:solidFill>
+                <a:latin typeface="Times New Roman" pitchFamily="34" charset="0"/>
+                <a:ea typeface="Times New Roman" pitchFamily="34" charset="-122"/>
+                <a:cs typeface="Times New Roman" pitchFamily="34" charset="-120"/>
+              </a:rPr>
+              <a:t>The North grows cotton, millet, sorghum and groundnuts on soils made by weathering.</a:t>
+            </a:r>
+            <a:endParaRPr lang="en-US" sz="3600" dirty="0"/>
+          </a:p>
+        </p:txBody>
+      </p:sp>
       <p:pic>
         <p:nvPicPr>
-          <p:cNvPr id="3" name="Image 0" descr="/home/claude/f4/img/minesec_sheet.png">    </p:cNvPr>
+          <p:cNvPr id="5" name="Image 0" descr="/home/claude/f4/img/v2/f2t_cotton_field.jpg">    </p:cNvPr>
           <p:cNvPicPr>
             <a:picLocks noChangeAspect="1"/>
           </p:cNvPicPr>
@@ -14676,8 +15251,8 @@
         </p:blipFill>
         <p:spPr>
           <a:xfrm>
-            <a:off x="0" y="658368"/>
-            <a:ext cx="5120640" cy="5833872"/>
+            <a:off x="5349240" y="2071212"/>
+            <a:ext cx="6659575" cy="3693983"/>
           </a:xfrm>
           <a:prstGeom prst="rect">
             <a:avLst/>
@@ -14686,14 +15261,14 @@
       </p:pic>
       <p:sp>
         <p:nvSpPr>
-          <p:cNvPr id="4" name="Text 1"/>
+          <p:cNvPr id="6" name="Text 3"/>
           <p:cNvSpPr/>
           <p:nvPr/>
         </p:nvSpPr>
         <p:spPr>
           <a:xfrm>
-            <a:off x="5349240" y="1005840"/>
-            <a:ext cx="6522415" cy="731520"/>
+            <a:off x="5349240" y="6089904"/>
+            <a:ext cx="6659575" cy="347472"/>
           </a:xfrm>
           <a:prstGeom prst="rect">
             <a:avLst/>
@@ -14702,105 +15277,24 @@
           <a:ln/>
         </p:spPr>
         <p:txBody>
-          <a:bodyPr wrap="square" lIns="0" tIns="0" rIns="0" bIns="0" rtlCol="0" anchor="ctr">
-            <a:normAutofit/>
-          </a:bodyPr>
+          <a:bodyPr wrap="square" lIns="0" tIns="0" rIns="0" bIns="0" rtlCol="0" anchor="ctr"/>
           <a:lstStyle/>
           <a:p>
             <a:pPr algn="ctr" indent="0" marL="0">
               <a:buNone/>
             </a:pPr>
             <a:r>
-              <a:rPr lang="en-US" sz="3600" b="1" dirty="0">
-                <a:solidFill>
-                  <a:srgbClr val="990011"/>
+              <a:rPr lang="en-US" sz="1600" i="1" dirty="0">
+                <a:solidFill>
+                  <a:srgbClr val="555555"/>
                 </a:solidFill>
                 <a:latin typeface="Times New Roman" pitchFamily="34" charset="0"/>
                 <a:ea typeface="Times New Roman" pitchFamily="34" charset="-122"/>
                 <a:cs typeface="Times New Roman" pitchFamily="34" charset="-120"/>
               </a:rPr>
-              <a:t>2. Effects of Weathering on the Landscape</a:t>
-            </a:r>
-            <a:endParaRPr lang="en-US" sz="3600" dirty="0"/>
-          </a:p>
-        </p:txBody>
-      </p:sp>
-      <p:sp>
-        <p:nvSpPr>
-          <p:cNvPr id="5" name="Text 2"/>
-          <p:cNvSpPr/>
-          <p:nvPr/>
-        </p:nvSpPr>
-        <p:spPr>
-          <a:xfrm>
-            <a:off x="5349240" y="1783080"/>
-            <a:ext cx="6522415" cy="4663440"/>
-          </a:xfrm>
-          <a:prstGeom prst="rect">
-            <a:avLst/>
-          </a:prstGeom>
-          <a:noFill/>
-          <a:ln/>
-        </p:spPr>
-        <p:txBody>
-          <a:bodyPr wrap="square" lIns="0" tIns="0" rIns="0" bIns="0" rtlCol="0" anchor="t"/>
-          <a:lstStyle/>
-          <a:p>
-            <a:pPr algn="l" indent="0" marL="0">
-              <a:spcAft>
-                <a:spcPts val="800"/>
-              </a:spcAft>
-              <a:buNone/>
-            </a:pPr>
-            <a:r>
-              <a:rPr lang="en-US" sz="4000" i="1" dirty="0">
-                <a:solidFill>
-                  <a:srgbClr val="111111"/>
-                </a:solidFill>
-                <a:latin typeface="Times New Roman" pitchFamily="34" charset="0"/>
-                <a:ea typeface="Times New Roman" pitchFamily="34" charset="-122"/>
-                <a:cs typeface="Times New Roman" pitchFamily="34" charset="-120"/>
-              </a:rPr>
-              <a:t>Weathering shapes the landscape as follows:</a:t>
-            </a:r>
-            <a:endParaRPr lang="en-US" sz="4000" dirty="0"/>
-          </a:p>
-          <a:p>
-            <a:pPr algn="l" indent="0" marL="0">
-              <a:spcAft>
-                <a:spcPts val="800"/>
-              </a:spcAft>
-              <a:buNone/>
-            </a:pPr>
-            <a:r>
-              <a:rPr lang="en-US" sz="4000" b="1" dirty="0">
-                <a:solidFill>
-                  <a:srgbClr val="111111"/>
-                </a:solidFill>
-                <a:latin typeface="Times New Roman" pitchFamily="34" charset="0"/>
-                <a:ea typeface="Times New Roman" pitchFamily="34" charset="-122"/>
-                <a:cs typeface="Times New Roman" pitchFamily="34" charset="-120"/>
-              </a:rPr>
-              <a:t>Landforms: </a:t>
-            </a:r>
-            <a:pPr algn="l" indent="0" marL="0">
-              <a:spcAft>
-                <a:spcPts val="800"/>
-              </a:spcAft>
-              <a:buNone/>
-            </a:pPr>
-            <a:r>
-              <a:rPr lang="en-US" sz="4000" dirty="0">
-                <a:solidFill>
-                  <a:srgbClr val="111111"/>
-                </a:solidFill>
-                <a:latin typeface="Times New Roman" pitchFamily="34" charset="0"/>
-                <a:ea typeface="Times New Roman" pitchFamily="34" charset="-122"/>
-                <a:cs typeface="Times New Roman" pitchFamily="34" charset="-120"/>
-              </a:rPr>
-              <a:t>It forms inselbergs, tors, scree slopes and karst features. In the North, granite domes stand above plains.</a:t>
-            </a:r>
-            <a:endParaRPr lang="en-US" sz="4000" dirty="0"/>
+              <a:t>Illustration: a cotton field</a:t>
+            </a:r>
+            <a:endParaRPr lang="en-US" sz="1600" dirty="0"/>
           </a:p>
         </p:txBody>
       </p:sp>
@@ -15037,7 +15531,7 @@
                 <a:ea typeface="Times New Roman" pitchFamily="34" charset="-122"/>
                 <a:cs typeface="Times New Roman" pitchFamily="34" charset="-120"/>
               </a:rPr>
-              <a:t>List three useful materials that come from weathered rock (for example sand, clay, laterite).</a:t>
+              <a:t>Define regolith.</a:t>
             </a:r>
             <a:endParaRPr lang="en-US" sz="4000" dirty="0"/>
           </a:p>
@@ -15214,7 +15708,7 @@
                 <a:ea typeface="Times New Roman" pitchFamily="34" charset="-122"/>
                 <a:cs typeface="Times New Roman" pitchFamily="34" charset="-120"/>
               </a:rPr>
-              <a:t>2. Effects of Weathering on the Landscape (continued)</a:t>
+              <a:t>1. Products of Weathering as a Resource</a:t>
             </a:r>
             <a:endParaRPr lang="en-US" sz="3600" dirty="0"/>
           </a:p>
@@ -15256,7 +15750,7 @@
                 <a:ea typeface="Times New Roman" pitchFamily="34" charset="-122"/>
                 <a:cs typeface="Times New Roman" pitchFamily="34" charset="-120"/>
               </a:rPr>
-              <a:t>Slope instability: </a:t>
+              <a:t>Construction materials: </a:t>
             </a:r>
             <a:pPr algn="l" indent="0" marL="0">
               <a:spcAft>
@@ -15273,7 +15767,7 @@
                 <a:ea typeface="Times New Roman" pitchFamily="34" charset="-122"/>
                 <a:cs typeface="Times New Roman" pitchFamily="34" charset="-120"/>
               </a:rPr>
-              <a:t>Deep regolith on steep slopes becomes unstable when wet. This causes landslides, as in the Western Highlands.</a:t>
+              <a:t>Sand and gravel make concrete and roads, and clay makes bricks.</a:t>
             </a:r>
             <a:endParaRPr lang="en-US" sz="4000" dirty="0"/>
           </a:p>
@@ -15391,9 +15885,109 @@
           </a:p>
         </p:txBody>
       </p:sp>
+      <p:sp>
+        <p:nvSpPr>
+          <p:cNvPr id="3" name="Text 1"/>
+          <p:cNvSpPr/>
+          <p:nvPr/>
+        </p:nvSpPr>
+        <p:spPr>
+          <a:xfrm>
+            <a:off x="365760" y="1005840"/>
+            <a:ext cx="11460175" cy="731520"/>
+          </a:xfrm>
+          <a:prstGeom prst="rect">
+            <a:avLst/>
+          </a:prstGeom>
+          <a:noFill/>
+          <a:ln/>
+        </p:spPr>
+        <p:txBody>
+          <a:bodyPr wrap="square" lIns="0" tIns="0" rIns="0" bIns="0" rtlCol="0" anchor="ctr">
+            <a:normAutofit/>
+          </a:bodyPr>
+          <a:lstStyle/>
+          <a:p>
+            <a:pPr algn="ctr" indent="0" marL="0">
+              <a:buNone/>
+            </a:pPr>
+            <a:r>
+              <a:rPr lang="en-US" sz="3600" b="1" dirty="0">
+                <a:solidFill>
+                  <a:srgbClr val="990011"/>
+                </a:solidFill>
+                <a:latin typeface="Times New Roman" pitchFamily="34" charset="0"/>
+                <a:ea typeface="Times New Roman" pitchFamily="34" charset="-122"/>
+                <a:cs typeface="Times New Roman" pitchFamily="34" charset="-120"/>
+              </a:rPr>
+              <a:t>1. Products of Weathering as a Resource</a:t>
+            </a:r>
+            <a:endParaRPr lang="en-US" sz="3600" dirty="0"/>
+          </a:p>
+        </p:txBody>
+      </p:sp>
+      <p:sp>
+        <p:nvSpPr>
+          <p:cNvPr id="4" name="Text 2"/>
+          <p:cNvSpPr/>
+          <p:nvPr/>
+        </p:nvSpPr>
+        <p:spPr>
+          <a:xfrm>
+            <a:off x="365760" y="1783080"/>
+            <a:ext cx="4846320" cy="4617720"/>
+          </a:xfrm>
+          <a:prstGeom prst="rect">
+            <a:avLst/>
+          </a:prstGeom>
+          <a:noFill/>
+          <a:ln/>
+        </p:spPr>
+        <p:txBody>
+          <a:bodyPr wrap="square" lIns="0" tIns="0" rIns="0" bIns="0" rtlCol="0" anchor="t"/>
+          <a:lstStyle/>
+          <a:p>
+            <a:pPr algn="l" indent="0" marL="0">
+              <a:spcAft>
+                <a:spcPts val="800"/>
+              </a:spcAft>
+              <a:buNone/>
+            </a:pPr>
+            <a:r>
+              <a:rPr lang="en-US" sz="3600" b="1" dirty="0">
+                <a:solidFill>
+                  <a:srgbClr val="111111"/>
+                </a:solidFill>
+                <a:latin typeface="Times New Roman" pitchFamily="34" charset="0"/>
+                <a:ea typeface="Times New Roman" pitchFamily="34" charset="-122"/>
+                <a:cs typeface="Times New Roman" pitchFamily="34" charset="-120"/>
+              </a:rPr>
+              <a:t>Mineral ores: </a:t>
+            </a:r>
+            <a:pPr algn="l" indent="0" marL="0">
+              <a:spcAft>
+                <a:spcPts val="800"/>
+              </a:spcAft>
+              <a:buNone/>
+            </a:pPr>
+            <a:r>
+              <a:rPr lang="en-US" sz="3600" dirty="0">
+                <a:solidFill>
+                  <a:srgbClr val="111111"/>
+                </a:solidFill>
+                <a:latin typeface="Times New Roman" pitchFamily="34" charset="0"/>
+                <a:ea typeface="Times New Roman" pitchFamily="34" charset="-122"/>
+                <a:cs typeface="Times New Roman" pitchFamily="34" charset="-120"/>
+              </a:rPr>
+              <a:t>Chemical weathering removes unwanted minerals and concentrates bauxite and iron, like the bauxite of Minim-Martap and Fongo-Tongo.</a:t>
+            </a:r>
+            <a:endParaRPr lang="en-US" sz="3600" dirty="0"/>
+          </a:p>
+        </p:txBody>
+      </p:sp>
       <p:pic>
         <p:nvPicPr>
-          <p:cNvPr id="3" name="Image 0" descr="/home/claude/f4/img/minesec_sheet.png">    </p:cNvPr>
+          <p:cNvPr id="5" name="Image 0" descr="/home/claude/f4/img/v2/lsa_bauxite.jpg">    </p:cNvPr>
           <p:cNvPicPr>
             <a:picLocks noChangeAspect="1"/>
           </p:cNvPicPr>
@@ -15407,8 +16001,8 @@
         </p:blipFill>
         <p:spPr>
           <a:xfrm>
-            <a:off x="0" y="658368"/>
-            <a:ext cx="5120640" cy="5833872"/>
+            <a:off x="5349240" y="2071212"/>
+            <a:ext cx="6659575" cy="3693983"/>
           </a:xfrm>
           <a:prstGeom prst="rect">
             <a:avLst/>
@@ -15417,14 +16011,14 @@
       </p:pic>
       <p:sp>
         <p:nvSpPr>
-          <p:cNvPr id="4" name="Text 1"/>
+          <p:cNvPr id="6" name="Text 3"/>
           <p:cNvSpPr/>
           <p:nvPr/>
         </p:nvSpPr>
         <p:spPr>
           <a:xfrm>
-            <a:off x="5349240" y="1005840"/>
-            <a:ext cx="6522415" cy="731520"/>
+            <a:off x="5349240" y="6089904"/>
+            <a:ext cx="6659575" cy="347472"/>
           </a:xfrm>
           <a:prstGeom prst="rect">
             <a:avLst/>
@@ -15433,105 +16027,24 @@
           <a:ln/>
         </p:spPr>
         <p:txBody>
-          <a:bodyPr wrap="square" lIns="0" tIns="0" rIns="0" bIns="0" rtlCol="0" anchor="ctr">
-            <a:normAutofit/>
-          </a:bodyPr>
+          <a:bodyPr wrap="square" lIns="0" tIns="0" rIns="0" bIns="0" rtlCol="0" anchor="ctr"/>
           <a:lstStyle/>
           <a:p>
             <a:pPr algn="ctr" indent="0" marL="0">
               <a:buNone/>
             </a:pPr>
             <a:r>
-              <a:rPr lang="en-US" sz="3600" b="1" dirty="0">
-                <a:solidFill>
-                  <a:srgbClr val="990011"/>
+              <a:rPr lang="en-US" sz="1600" i="1" dirty="0">
+                <a:solidFill>
+                  <a:srgbClr val="555555"/>
                 </a:solidFill>
                 <a:latin typeface="Times New Roman" pitchFamily="34" charset="0"/>
                 <a:ea typeface="Times New Roman" pitchFamily="34" charset="-122"/>
                 <a:cs typeface="Times New Roman" pitchFamily="34" charset="-120"/>
               </a:rPr>
-              <a:t>3. Effects of Weathering on Man</a:t>
-            </a:r>
-            <a:endParaRPr lang="en-US" sz="3600" dirty="0"/>
-          </a:p>
-        </p:txBody>
-      </p:sp>
-      <p:sp>
-        <p:nvSpPr>
-          <p:cNvPr id="5" name="Text 2"/>
-          <p:cNvSpPr/>
-          <p:nvPr/>
-        </p:nvSpPr>
-        <p:spPr>
-          <a:xfrm>
-            <a:off x="5349240" y="1783080"/>
-            <a:ext cx="6522415" cy="4663440"/>
-          </a:xfrm>
-          <a:prstGeom prst="rect">
-            <a:avLst/>
-          </a:prstGeom>
-          <a:noFill/>
-          <a:ln/>
-        </p:spPr>
-        <p:txBody>
-          <a:bodyPr wrap="square" lIns="0" tIns="0" rIns="0" bIns="0" rtlCol="0" anchor="t"/>
-          <a:lstStyle/>
-          <a:p>
-            <a:pPr algn="l" indent="0" marL="0">
-              <a:spcAft>
-                <a:spcPts val="800"/>
-              </a:spcAft>
-              <a:buNone/>
-            </a:pPr>
-            <a:r>
-              <a:rPr lang="en-US" sz="4000" i="1" dirty="0">
-                <a:solidFill>
-                  <a:srgbClr val="111111"/>
-                </a:solidFill>
-                <a:latin typeface="Times New Roman" pitchFamily="34" charset="0"/>
-                <a:ea typeface="Times New Roman" pitchFamily="34" charset="-122"/>
-                <a:cs typeface="Times New Roman" pitchFamily="34" charset="-120"/>
-              </a:rPr>
-              <a:t>Weathering affects man in the following ways:</a:t>
-            </a:r>
-            <a:endParaRPr lang="en-US" sz="4000" dirty="0"/>
-          </a:p>
-          <a:p>
-            <a:pPr algn="l" indent="0" marL="0">
-              <a:spcAft>
-                <a:spcPts val="800"/>
-              </a:spcAft>
-              <a:buNone/>
-            </a:pPr>
-            <a:r>
-              <a:rPr lang="en-US" sz="4000" b="1" dirty="0">
-                <a:solidFill>
-                  <a:srgbClr val="111111"/>
-                </a:solidFill>
-                <a:latin typeface="Times New Roman" pitchFamily="34" charset="0"/>
-                <a:ea typeface="Times New Roman" pitchFamily="34" charset="-122"/>
-                <a:cs typeface="Times New Roman" pitchFamily="34" charset="-120"/>
-              </a:rPr>
-              <a:t>Positive effects: </a:t>
-            </a:r>
-            <a:pPr algn="l" indent="0" marL="0">
-              <a:spcAft>
-                <a:spcPts val="800"/>
-              </a:spcAft>
-              <a:buNone/>
-            </a:pPr>
-            <a:r>
-              <a:rPr lang="en-US" sz="4000" dirty="0">
-                <a:solidFill>
-                  <a:srgbClr val="111111"/>
-                </a:solidFill>
-                <a:latin typeface="Times New Roman" pitchFamily="34" charset="0"/>
-                <a:ea typeface="Times New Roman" pitchFamily="34" charset="-122"/>
-                <a:cs typeface="Times New Roman" pitchFamily="34" charset="-120"/>
-              </a:rPr>
-              <a:t>It provides soils, minerals and building materials. It also creates tourist landscapes such as the Rhumsiki peaks.</a:t>
-            </a:r>
-            <a:endParaRPr lang="en-US" sz="4000" dirty="0"/>
+              <a:t>Illustration: bauxite</a:t>
+            </a:r>
+            <a:endParaRPr lang="en-US" sz="1600" dirty="0"/>
           </a:p>
         </p:txBody>
       </p:sp>
@@ -15706,7 +16219,7 @@
                 <a:ea typeface="Times New Roman" pitchFamily="34" charset="-122"/>
                 <a:cs typeface="Times New Roman" pitchFamily="34" charset="-120"/>
               </a:rPr>
-              <a:t>3. Effects of Weathering on Man (continued)</a:t>
+              <a:t>2. Effects of Weathering on the Landscape and Man</a:t>
             </a:r>
             <a:endParaRPr lang="en-US" sz="3600" dirty="0"/>
           </a:p>
@@ -15720,8 +16233,47 @@
         </p:nvSpPr>
         <p:spPr>
           <a:xfrm>
-            <a:off x="5349240" y="1783080"/>
-            <a:ext cx="6522415" cy="4663440"/>
+            <a:off x="5349240" y="1737360"/>
+            <a:ext cx="6522415" cy="457200"/>
+          </a:xfrm>
+          <a:prstGeom prst="rect">
+            <a:avLst/>
+          </a:prstGeom>
+          <a:noFill/>
+          <a:ln/>
+        </p:spPr>
+        <p:txBody>
+          <a:bodyPr wrap="square" lIns="0" tIns="0" rIns="0" bIns="0" rtlCol="0" anchor="ctr"/>
+          <a:lstStyle/>
+          <a:p>
+            <a:pPr algn="l" indent="0" marL="0">
+              <a:buNone/>
+            </a:pPr>
+            <a:r>
+              <a:rPr lang="en-US" sz="3200" b="1" dirty="0">
+                <a:solidFill>
+                  <a:srgbClr val="990011"/>
+                </a:solidFill>
+                <a:latin typeface="Times New Roman" pitchFamily="34" charset="0"/>
+                <a:ea typeface="Times New Roman" pitchFamily="34" charset="-122"/>
+                <a:cs typeface="Times New Roman" pitchFamily="34" charset="-120"/>
+              </a:rPr>
+              <a:t>A) Positive Effects</a:t>
+            </a:r>
+            <a:endParaRPr lang="en-US" sz="3200" dirty="0"/>
+          </a:p>
+        </p:txBody>
+      </p:sp>
+      <p:sp>
+        <p:nvSpPr>
+          <p:cNvPr id="6" name="Text 3"/>
+          <p:cNvSpPr/>
+          <p:nvPr/>
+        </p:nvSpPr>
+        <p:spPr>
+          <a:xfrm>
+            <a:off x="5349240" y="2240280"/>
+            <a:ext cx="6522415" cy="4206240"/>
           </a:xfrm>
           <a:prstGeom prst="rect">
             <a:avLst/>
@@ -15740,7 +16292,7 @@
               <a:buNone/>
             </a:pPr>
             <a:r>
-              <a:rPr lang="en-US" sz="4000" b="1" dirty="0">
+              <a:rPr lang="en-US" sz="4000" i="1" dirty="0">
                 <a:solidFill>
                   <a:srgbClr val="111111"/>
                 </a:solidFill>
@@ -15748,8 +16300,11 @@
                 <a:ea typeface="Times New Roman" pitchFamily="34" charset="-122"/>
                 <a:cs typeface="Times New Roman" pitchFamily="34" charset="-120"/>
               </a:rPr>
-              <a:t>Negative effects: </a:t>
-            </a:r>
+              <a:t>Weathering has the following positive effects:</a:t>
+            </a:r>
+            <a:endParaRPr lang="en-US" sz="4000" dirty="0"/>
+          </a:p>
+          <a:p>
             <a:pPr algn="l" indent="0" marL="0">
               <a:spcAft>
                 <a:spcPts val="800"/>
@@ -15757,7 +16312,7 @@
               <a:buNone/>
             </a:pPr>
             <a:r>
-              <a:rPr lang="en-US" sz="4000" dirty="0">
+              <a:rPr lang="en-US" sz="4000" b="1" dirty="0">
                 <a:solidFill>
                   <a:srgbClr val="111111"/>
                 </a:solidFill>
@@ -15765,7 +16320,24 @@
                 <a:ea typeface="Times New Roman" pitchFamily="34" charset="-122"/>
                 <a:cs typeface="Times New Roman" pitchFamily="34" charset="-120"/>
               </a:rPr>
-              <a:t>It damages buildings, monuments and roads, and loosens slopes. Laterite crusts (hardpans) make farming difficult.</a:t>
+              <a:t>Creation of soil: </a:t>
+            </a:r>
+            <a:pPr algn="l" indent="0" marL="0">
+              <a:spcAft>
+                <a:spcPts val="800"/>
+              </a:spcAft>
+              <a:buNone/>
+            </a:pPr>
+            <a:r>
+              <a:rPr lang="en-US" sz="4000" dirty="0">
+                <a:solidFill>
+                  <a:srgbClr val="111111"/>
+                </a:solidFill>
+                <a:latin typeface="Times New Roman" pitchFamily="34" charset="0"/>
+                <a:ea typeface="Times New Roman" pitchFamily="34" charset="-122"/>
+                <a:cs typeface="Times New Roman" pitchFamily="34" charset="-120"/>
+              </a:rPr>
+              <a:t>It is the most important benefit, the basis of farming and land ecosystems.</a:t>
             </a:r>
             <a:endParaRPr lang="en-US" sz="4000" dirty="0"/>
           </a:p>
@@ -15877,15 +16449,156 @@
                 <a:ea typeface="Calibri" pitchFamily="34" charset="-122"/>
                 <a:cs typeface="Calibri" pitchFamily="34" charset="-120"/>
               </a:rPr>
-              <a:t>FORMATIVE EVALUATION</a:t>
+              <a:t>BOARD SUMMARY</a:t>
             </a:r>
             <a:endParaRPr lang="en-US" sz="1400" dirty="0"/>
+          </a:p>
+        </p:txBody>
+      </p:sp>
+      <p:sp>
+        <p:nvSpPr>
+          <p:cNvPr id="3" name="Text 1"/>
+          <p:cNvSpPr/>
+          <p:nvPr/>
+        </p:nvSpPr>
+        <p:spPr>
+          <a:xfrm>
+            <a:off x="365760" y="1005840"/>
+            <a:ext cx="11460175" cy="731520"/>
+          </a:xfrm>
+          <a:prstGeom prst="rect">
+            <a:avLst/>
+          </a:prstGeom>
+          <a:noFill/>
+          <a:ln/>
+        </p:spPr>
+        <p:txBody>
+          <a:bodyPr wrap="square" lIns="0" tIns="0" rIns="0" bIns="0" rtlCol="0" anchor="ctr">
+            <a:normAutofit/>
+          </a:bodyPr>
+          <a:lstStyle/>
+          <a:p>
+            <a:pPr algn="ctr" indent="0" marL="0">
+              <a:buNone/>
+            </a:pPr>
+            <a:r>
+              <a:rPr lang="en-US" sz="3600" b="1" dirty="0">
+                <a:solidFill>
+                  <a:srgbClr val="990011"/>
+                </a:solidFill>
+                <a:latin typeface="Times New Roman" pitchFamily="34" charset="0"/>
+                <a:ea typeface="Times New Roman" pitchFamily="34" charset="-122"/>
+                <a:cs typeface="Times New Roman" pitchFamily="34" charset="-120"/>
+              </a:rPr>
+              <a:t>2. Effects of Weathering on the Landscape and Man</a:t>
+            </a:r>
+            <a:endParaRPr lang="en-US" sz="3600" dirty="0"/>
+          </a:p>
+        </p:txBody>
+      </p:sp>
+      <p:sp>
+        <p:nvSpPr>
+          <p:cNvPr id="4" name="Text 2"/>
+          <p:cNvSpPr/>
+          <p:nvPr/>
+        </p:nvSpPr>
+        <p:spPr>
+          <a:xfrm>
+            <a:off x="365760" y="1737360"/>
+            <a:ext cx="5120640" cy="457200"/>
+          </a:xfrm>
+          <a:prstGeom prst="rect">
+            <a:avLst/>
+          </a:prstGeom>
+          <a:noFill/>
+          <a:ln/>
+        </p:spPr>
+        <p:txBody>
+          <a:bodyPr wrap="square" lIns="0" tIns="0" rIns="0" bIns="0" rtlCol="0" anchor="ctr">
+            <a:normAutofit/>
+          </a:bodyPr>
+          <a:lstStyle/>
+          <a:p>
+            <a:pPr algn="l" indent="0" marL="0">
+              <a:buNone/>
+            </a:pPr>
+            <a:r>
+              <a:rPr lang="en-US" sz="3000" b="1" dirty="0">
+                <a:solidFill>
+                  <a:srgbClr val="990011"/>
+                </a:solidFill>
+                <a:latin typeface="Times New Roman" pitchFamily="34" charset="0"/>
+                <a:ea typeface="Times New Roman" pitchFamily="34" charset="-122"/>
+                <a:cs typeface="Times New Roman" pitchFamily="34" charset="-120"/>
+              </a:rPr>
+              <a:t>A) Positive Effects</a:t>
+            </a:r>
+            <a:endParaRPr lang="en-US" sz="3000" dirty="0"/>
+          </a:p>
+        </p:txBody>
+      </p:sp>
+      <p:sp>
+        <p:nvSpPr>
+          <p:cNvPr id="5" name="Text 3"/>
+          <p:cNvSpPr/>
+          <p:nvPr/>
+        </p:nvSpPr>
+        <p:spPr>
+          <a:xfrm>
+            <a:off x="365760" y="2240280"/>
+            <a:ext cx="4846320" cy="4160520"/>
+          </a:xfrm>
+          <a:prstGeom prst="rect">
+            <a:avLst/>
+          </a:prstGeom>
+          <a:noFill/>
+          <a:ln/>
+        </p:spPr>
+        <p:txBody>
+          <a:bodyPr wrap="square" lIns="0" tIns="0" rIns="0" bIns="0" rtlCol="0" anchor="t"/>
+          <a:lstStyle/>
+          <a:p>
+            <a:pPr algn="l" indent="0" marL="0">
+              <a:spcAft>
+                <a:spcPts val="800"/>
+              </a:spcAft>
+              <a:buNone/>
+            </a:pPr>
+            <a:r>
+              <a:rPr lang="en-US" sz="3600" b="1" dirty="0">
+                <a:solidFill>
+                  <a:srgbClr val="111111"/>
+                </a:solidFill>
+                <a:latin typeface="Times New Roman" pitchFamily="34" charset="0"/>
+                <a:ea typeface="Times New Roman" pitchFamily="34" charset="-122"/>
+                <a:cs typeface="Times New Roman" pitchFamily="34" charset="-120"/>
+              </a:rPr>
+              <a:t>Landscapes: </a:t>
+            </a:r>
+            <a:pPr algn="l" indent="0" marL="0">
+              <a:spcAft>
+                <a:spcPts val="800"/>
+              </a:spcAft>
+              <a:buNone/>
+            </a:pPr>
+            <a:r>
+              <a:rPr lang="en-US" sz="3600" dirty="0">
+                <a:solidFill>
+                  <a:srgbClr val="111111"/>
+                </a:solidFill>
+                <a:latin typeface="Times New Roman" pitchFamily="34" charset="0"/>
+                <a:ea typeface="Times New Roman" pitchFamily="34" charset="-122"/>
+                <a:cs typeface="Times New Roman" pitchFamily="34" charset="-120"/>
+              </a:rPr>
+              <a:t>Weathering carves inselbergs, domes and arches that attract tourists, like the landscapes of Rhumsiki.</a:t>
+            </a:r>
+            <a:endParaRPr lang="en-US" sz="3600" dirty="0"/>
           </a:p>
         </p:txBody>
       </p:sp>
       <p:pic>
         <p:nvPicPr>
-          <p:cNvPr id="3" name="Image 0" descr="/home/claude/f4/img/minesec_sheet.png">    </p:cNvPr>
+          <p:cNvPr id="6" name="Image 0" descr="/home/claude/f4/img/v2/lsa_mandara.jpg">    </p:cNvPr>
           <p:cNvPicPr>
             <a:picLocks noChangeAspect="1"/>
           </p:cNvPicPr>
@@ -15899,8 +16612,8 @@
         </p:blipFill>
         <p:spPr>
           <a:xfrm>
-            <a:off x="0" y="658368"/>
-            <a:ext cx="5120640" cy="5833872"/>
+            <a:off x="5349240" y="3040233"/>
+            <a:ext cx="6659575" cy="1755943"/>
           </a:xfrm>
           <a:prstGeom prst="rect">
             <a:avLst/>
@@ -15909,14 +16622,14 @@
       </p:pic>
       <p:sp>
         <p:nvSpPr>
-          <p:cNvPr id="4" name="Text 1"/>
+          <p:cNvPr id="7" name="Text 4"/>
           <p:cNvSpPr/>
           <p:nvPr/>
         </p:nvSpPr>
         <p:spPr>
           <a:xfrm>
-            <a:off x="5349240" y="1005840"/>
-            <a:ext cx="6522415" cy="731520"/>
+            <a:off x="5349240" y="6089904"/>
+            <a:ext cx="6659575" cy="347472"/>
           </a:xfrm>
           <a:prstGeom prst="rect">
             <a:avLst/>
@@ -15925,68 +16638,24 @@
           <a:ln/>
         </p:spPr>
         <p:txBody>
-          <a:bodyPr wrap="square" lIns="0" tIns="0" rIns="0" bIns="0" rtlCol="0" anchor="ctr">
-            <a:normAutofit/>
-          </a:bodyPr>
+          <a:bodyPr wrap="square" lIns="0" tIns="0" rIns="0" bIns="0" rtlCol="0" anchor="ctr"/>
           <a:lstStyle/>
           <a:p>
             <a:pPr algn="ctr" indent="0" marL="0">
               <a:buNone/>
             </a:pPr>
             <a:r>
-              <a:rPr lang="en-US" sz="3600" b="1" dirty="0">
-                <a:solidFill>
-                  <a:srgbClr val="990011"/>
+              <a:rPr lang="en-US" sz="1600" i="1" dirty="0">
+                <a:solidFill>
+                  <a:srgbClr val="555555"/>
                 </a:solidFill>
                 <a:latin typeface="Times New Roman" pitchFamily="34" charset="0"/>
                 <a:ea typeface="Times New Roman" pitchFamily="34" charset="-122"/>
                 <a:cs typeface="Times New Roman" pitchFamily="34" charset="-120"/>
               </a:rPr>
-              <a:t>Evaluation 1</a:t>
-            </a:r>
-            <a:endParaRPr lang="en-US" sz="3600" dirty="0"/>
-          </a:p>
-        </p:txBody>
-      </p:sp>
-      <p:sp>
-        <p:nvSpPr>
-          <p:cNvPr id="5" name="Text 2"/>
-          <p:cNvSpPr/>
-          <p:nvPr/>
-        </p:nvSpPr>
-        <p:spPr>
-          <a:xfrm>
-            <a:off x="5349240" y="1783080"/>
-            <a:ext cx="6522415" cy="4663440"/>
-          </a:xfrm>
-          <a:prstGeom prst="rect">
-            <a:avLst/>
-          </a:prstGeom>
-          <a:noFill/>
-          <a:ln/>
-        </p:spPr>
-        <p:txBody>
-          <a:bodyPr wrap="square" lIns="0" tIns="0" rIns="0" bIns="0" rtlCol="0" anchor="t"/>
-          <a:lstStyle/>
-          <a:p>
-            <a:pPr algn="l" indent="0" marL="0">
-              <a:spcAft>
-                <a:spcPts val="800"/>
-              </a:spcAft>
-              <a:buNone/>
-            </a:pPr>
-            <a:r>
-              <a:rPr lang="en-US" sz="4000" dirty="0">
-                <a:solidFill>
-                  <a:srgbClr val="111111"/>
-                </a:solidFill>
-                <a:latin typeface="Times New Roman" pitchFamily="34" charset="0"/>
-                <a:ea typeface="Times New Roman" pitchFamily="34" charset="-122"/>
-                <a:cs typeface="Times New Roman" pitchFamily="34" charset="-120"/>
-              </a:rPr>
-              <a:t>Give two resources formed by weathering.</a:t>
-            </a:r>
-            <a:endParaRPr lang="en-US" sz="4000" dirty="0"/>
+              <a:t>Illustration: landscape near Rhumsiki</a:t>
+            </a:r>
+            <a:endParaRPr lang="en-US" sz="1600" dirty="0"/>
           </a:p>
         </p:txBody>
       </p:sp>
@@ -16096,7 +16765,7 @@
                 <a:ea typeface="Calibri" pitchFamily="34" charset="-122"/>
                 <a:cs typeface="Calibri" pitchFamily="34" charset="-120"/>
               </a:rPr>
-              <a:t>FORMATIVE EVALUATION</a:t>
+              <a:t>BOARD SUMMARY</a:t>
             </a:r>
             <a:endParaRPr lang="en-US" sz="1400" dirty="0"/>
           </a:p>
@@ -16161,7 +16830,7 @@
                 <a:ea typeface="Times New Roman" pitchFamily="34" charset="-122"/>
                 <a:cs typeface="Times New Roman" pitchFamily="34" charset="-120"/>
               </a:rPr>
-              <a:t>Expected Answer</a:t>
+              <a:t>2. Effects of Weathering on the Landscape and Man</a:t>
             </a:r>
             <a:endParaRPr lang="en-US" sz="3600" dirty="0"/>
           </a:p>
@@ -16175,8 +16844,47 @@
         </p:nvSpPr>
         <p:spPr>
           <a:xfrm>
-            <a:off x="5349240" y="1783080"/>
-            <a:ext cx="6522415" cy="4663440"/>
+            <a:off x="5349240" y="1737360"/>
+            <a:ext cx="6522415" cy="457200"/>
+          </a:xfrm>
+          <a:prstGeom prst="rect">
+            <a:avLst/>
+          </a:prstGeom>
+          <a:noFill/>
+          <a:ln/>
+        </p:spPr>
+        <p:txBody>
+          <a:bodyPr wrap="square" lIns="0" tIns="0" rIns="0" bIns="0" rtlCol="0" anchor="ctr"/>
+          <a:lstStyle/>
+          <a:p>
+            <a:pPr algn="l" indent="0" marL="0">
+              <a:buNone/>
+            </a:pPr>
+            <a:r>
+              <a:rPr lang="en-US" sz="3200" b="1" dirty="0">
+                <a:solidFill>
+                  <a:srgbClr val="990011"/>
+                </a:solidFill>
+                <a:latin typeface="Times New Roman" pitchFamily="34" charset="0"/>
+                <a:ea typeface="Times New Roman" pitchFamily="34" charset="-122"/>
+                <a:cs typeface="Times New Roman" pitchFamily="34" charset="-120"/>
+              </a:rPr>
+              <a:t>A) Positive Effects</a:t>
+            </a:r>
+            <a:endParaRPr lang="en-US" sz="3200" dirty="0"/>
+          </a:p>
+        </p:txBody>
+      </p:sp>
+      <p:sp>
+        <p:nvSpPr>
+          <p:cNvPr id="6" name="Text 3"/>
+          <p:cNvSpPr/>
+          <p:nvPr/>
+        </p:nvSpPr>
+        <p:spPr>
+          <a:xfrm>
+            <a:off x="5349240" y="2240280"/>
+            <a:ext cx="6522415" cy="4206240"/>
           </a:xfrm>
           <a:prstGeom prst="rect">
             <a:avLst/>
@@ -16195,7 +16903,7 @@
               <a:buNone/>
             </a:pPr>
             <a:r>
-              <a:rPr lang="en-US" sz="4000" dirty="0">
+              <a:rPr lang="en-US" sz="4000" b="1" dirty="0">
                 <a:solidFill>
                   <a:srgbClr val="111111"/>
                 </a:solidFill>
@@ -16203,7 +16911,24 @@
                 <a:ea typeface="Times New Roman" pitchFamily="34" charset="-122"/>
                 <a:cs typeface="Times New Roman" pitchFamily="34" charset="-120"/>
               </a:rPr>
-              <a:t>Soil and bauxite (also laterite, clay).</a:t>
+              <a:t>Groundwater: </a:t>
+            </a:r>
+            <a:pPr algn="l" indent="0" marL="0">
+              <a:spcAft>
+                <a:spcPts val="800"/>
+              </a:spcAft>
+              <a:buNone/>
+            </a:pPr>
+            <a:r>
+              <a:rPr lang="en-US" sz="4000" dirty="0">
+                <a:solidFill>
+                  <a:srgbClr val="111111"/>
+                </a:solidFill>
+                <a:latin typeface="Times New Roman" pitchFamily="34" charset="0"/>
+                <a:ea typeface="Times New Roman" pitchFamily="34" charset="-122"/>
+                <a:cs typeface="Times New Roman" pitchFamily="34" charset="-120"/>
+              </a:rPr>
+              <a:t>The regolith stores rainwater like a sponge, which feeds wells and boreholes.</a:t>
             </a:r>
             <a:endParaRPr lang="en-US" sz="4000" dirty="0"/>
           </a:p>
@@ -16315,15 +17040,176 @@
                 <a:ea typeface="Calibri" pitchFamily="34" charset="-122"/>
                 <a:cs typeface="Calibri" pitchFamily="34" charset="-120"/>
               </a:rPr>
-              <a:t>FORMATIVE EVALUATION</a:t>
+              <a:t>BOARD SUMMARY</a:t>
             </a:r>
             <a:endParaRPr lang="en-US" sz="1400" dirty="0"/>
+          </a:p>
+        </p:txBody>
+      </p:sp>
+      <p:sp>
+        <p:nvSpPr>
+          <p:cNvPr id="3" name="Text 1"/>
+          <p:cNvSpPr/>
+          <p:nvPr/>
+        </p:nvSpPr>
+        <p:spPr>
+          <a:xfrm>
+            <a:off x="365760" y="1005840"/>
+            <a:ext cx="11460175" cy="731520"/>
+          </a:xfrm>
+          <a:prstGeom prst="rect">
+            <a:avLst/>
+          </a:prstGeom>
+          <a:noFill/>
+          <a:ln/>
+        </p:spPr>
+        <p:txBody>
+          <a:bodyPr wrap="square" lIns="0" tIns="0" rIns="0" bIns="0" rtlCol="0" anchor="ctr">
+            <a:normAutofit/>
+          </a:bodyPr>
+          <a:lstStyle/>
+          <a:p>
+            <a:pPr algn="ctr" indent="0" marL="0">
+              <a:buNone/>
+            </a:pPr>
+            <a:r>
+              <a:rPr lang="en-US" sz="3600" b="1" dirty="0">
+                <a:solidFill>
+                  <a:srgbClr val="990011"/>
+                </a:solidFill>
+                <a:latin typeface="Times New Roman" pitchFamily="34" charset="0"/>
+                <a:ea typeface="Times New Roman" pitchFamily="34" charset="-122"/>
+                <a:cs typeface="Times New Roman" pitchFamily="34" charset="-120"/>
+              </a:rPr>
+              <a:t>2. Effects of Weathering on the Landscape and Man</a:t>
+            </a:r>
+            <a:endParaRPr lang="en-US" sz="3600" dirty="0"/>
+          </a:p>
+        </p:txBody>
+      </p:sp>
+      <p:sp>
+        <p:nvSpPr>
+          <p:cNvPr id="4" name="Text 2"/>
+          <p:cNvSpPr/>
+          <p:nvPr/>
+        </p:nvSpPr>
+        <p:spPr>
+          <a:xfrm>
+            <a:off x="365760" y="1737360"/>
+            <a:ext cx="5120640" cy="457200"/>
+          </a:xfrm>
+          <a:prstGeom prst="rect">
+            <a:avLst/>
+          </a:prstGeom>
+          <a:noFill/>
+          <a:ln/>
+        </p:spPr>
+        <p:txBody>
+          <a:bodyPr wrap="square" lIns="0" tIns="0" rIns="0" bIns="0" rtlCol="0" anchor="ctr">
+            <a:normAutofit/>
+          </a:bodyPr>
+          <a:lstStyle/>
+          <a:p>
+            <a:pPr algn="l" indent="0" marL="0">
+              <a:buNone/>
+            </a:pPr>
+            <a:r>
+              <a:rPr lang="en-US" sz="3000" b="1" dirty="0">
+                <a:solidFill>
+                  <a:srgbClr val="990011"/>
+                </a:solidFill>
+                <a:latin typeface="Times New Roman" pitchFamily="34" charset="0"/>
+                <a:ea typeface="Times New Roman" pitchFamily="34" charset="-122"/>
+                <a:cs typeface="Times New Roman" pitchFamily="34" charset="-120"/>
+              </a:rPr>
+              <a:t>B) Negative Effects</a:t>
+            </a:r>
+            <a:endParaRPr lang="en-US" sz="3000" dirty="0"/>
+          </a:p>
+        </p:txBody>
+      </p:sp>
+      <p:sp>
+        <p:nvSpPr>
+          <p:cNvPr id="5" name="Text 3"/>
+          <p:cNvSpPr/>
+          <p:nvPr/>
+        </p:nvSpPr>
+        <p:spPr>
+          <a:xfrm>
+            <a:off x="365760" y="2240280"/>
+            <a:ext cx="4846320" cy="4160520"/>
+          </a:xfrm>
+          <a:prstGeom prst="rect">
+            <a:avLst/>
+          </a:prstGeom>
+          <a:noFill/>
+          <a:ln/>
+        </p:spPr>
+        <p:txBody>
+          <a:bodyPr wrap="square" lIns="0" tIns="0" rIns="0" bIns="0" rtlCol="0" anchor="t"/>
+          <a:lstStyle/>
+          <a:p>
+            <a:pPr algn="l" indent="0" marL="0">
+              <a:spcAft>
+                <a:spcPts val="800"/>
+              </a:spcAft>
+              <a:buNone/>
+            </a:pPr>
+            <a:r>
+              <a:rPr lang="en-US" sz="3000" i="1" dirty="0">
+                <a:solidFill>
+                  <a:srgbClr val="111111"/>
+                </a:solidFill>
+                <a:latin typeface="Times New Roman" pitchFamily="34" charset="0"/>
+                <a:ea typeface="Times New Roman" pitchFamily="34" charset="-122"/>
+                <a:cs typeface="Times New Roman" pitchFamily="34" charset="-120"/>
+              </a:rPr>
+              <a:t>Weathering has the following negative effects:</a:t>
+            </a:r>
+            <a:endParaRPr lang="en-US" sz="3000" dirty="0"/>
+          </a:p>
+          <a:p>
+            <a:pPr algn="l" indent="0" marL="0">
+              <a:spcAft>
+                <a:spcPts val="800"/>
+              </a:spcAft>
+              <a:buNone/>
+            </a:pPr>
+            <a:r>
+              <a:rPr lang="en-US" sz="3000" b="1" dirty="0">
+                <a:solidFill>
+                  <a:srgbClr val="111111"/>
+                </a:solidFill>
+                <a:latin typeface="Times New Roman" pitchFamily="34" charset="0"/>
+                <a:ea typeface="Times New Roman" pitchFamily="34" charset="-122"/>
+                <a:cs typeface="Times New Roman" pitchFamily="34" charset="-120"/>
+              </a:rPr>
+              <a:t>Damage to structures: </a:t>
+            </a:r>
+            <a:pPr algn="l" indent="0" marL="0">
+              <a:spcAft>
+                <a:spcPts val="800"/>
+              </a:spcAft>
+              <a:buNone/>
+            </a:pPr>
+            <a:r>
+              <a:rPr lang="en-US" sz="3000" dirty="0">
+                <a:solidFill>
+                  <a:srgbClr val="111111"/>
+                </a:solidFill>
+                <a:latin typeface="Times New Roman" pitchFamily="34" charset="0"/>
+                <a:ea typeface="Times New Roman" pitchFamily="34" charset="-122"/>
+                <a:cs typeface="Times New Roman" pitchFamily="34" charset="-120"/>
+              </a:rPr>
+              <a:t>It cracks walls, makes potholes and weakens bridges and monuments, which are costly to repair.</a:t>
+            </a:r>
+            <a:endParaRPr lang="en-US" sz="3000" dirty="0"/>
           </a:p>
         </p:txBody>
       </p:sp>
       <p:pic>
         <p:nvPicPr>
-          <p:cNvPr id="3" name="Image 0" descr="/home/claude/f4/img/minesec_sheet.png">    </p:cNvPr>
+          <p:cNvPr id="6" name="Image 0" descr="/home/claude/f4/img/v2/f4_oldwall.jpg">    </p:cNvPr>
           <p:cNvPicPr>
             <a:picLocks noChangeAspect="1"/>
           </p:cNvPicPr>
@@ -16337,8 +17223,8 @@
         </p:blipFill>
         <p:spPr>
           <a:xfrm>
-            <a:off x="0" y="658368"/>
-            <a:ext cx="5120640" cy="5833872"/>
+            <a:off x="5349240" y="2071212"/>
+            <a:ext cx="6659575" cy="3693983"/>
           </a:xfrm>
           <a:prstGeom prst="rect">
             <a:avLst/>
@@ -16347,14 +17233,14 @@
       </p:pic>
       <p:sp>
         <p:nvSpPr>
-          <p:cNvPr id="4" name="Text 1"/>
+          <p:cNvPr id="7" name="Text 4"/>
           <p:cNvSpPr/>
           <p:nvPr/>
         </p:nvSpPr>
         <p:spPr>
           <a:xfrm>
-            <a:off x="5349240" y="1005840"/>
-            <a:ext cx="6522415" cy="731520"/>
+            <a:off x="5349240" y="6089904"/>
+            <a:ext cx="6659575" cy="347472"/>
           </a:xfrm>
           <a:prstGeom prst="rect">
             <a:avLst/>
@@ -16363,68 +17249,24 @@
           <a:ln/>
         </p:spPr>
         <p:txBody>
-          <a:bodyPr wrap="square" lIns="0" tIns="0" rIns="0" bIns="0" rtlCol="0" anchor="ctr">
-            <a:normAutofit/>
-          </a:bodyPr>
+          <a:bodyPr wrap="square" lIns="0" tIns="0" rIns="0" bIns="0" rtlCol="0" anchor="ctr"/>
           <a:lstStyle/>
           <a:p>
             <a:pPr algn="ctr" indent="0" marL="0">
               <a:buNone/>
             </a:pPr>
             <a:r>
-              <a:rPr lang="en-US" sz="3600" b="1" dirty="0">
-                <a:solidFill>
-                  <a:srgbClr val="990011"/>
+              <a:rPr lang="en-US" sz="1600" i="1" dirty="0">
+                <a:solidFill>
+                  <a:srgbClr val="555555"/>
                 </a:solidFill>
                 <a:latin typeface="Times New Roman" pitchFamily="34" charset="0"/>
                 <a:ea typeface="Times New Roman" pitchFamily="34" charset="-122"/>
                 <a:cs typeface="Times New Roman" pitchFamily="34" charset="-120"/>
               </a:rPr>
-              <a:t>Evaluation 2</a:t>
-            </a:r>
-            <a:endParaRPr lang="en-US" sz="3600" dirty="0"/>
-          </a:p>
-        </p:txBody>
-      </p:sp>
-      <p:sp>
-        <p:nvSpPr>
-          <p:cNvPr id="5" name="Text 2"/>
-          <p:cNvSpPr/>
-          <p:nvPr/>
-        </p:nvSpPr>
-        <p:spPr>
-          <a:xfrm>
-            <a:off x="5349240" y="1783080"/>
-            <a:ext cx="6522415" cy="4663440"/>
-          </a:xfrm>
-          <a:prstGeom prst="rect">
-            <a:avLst/>
-          </a:prstGeom>
-          <a:noFill/>
-          <a:ln/>
-        </p:spPr>
-        <p:txBody>
-          <a:bodyPr wrap="square" lIns="0" tIns="0" rIns="0" bIns="0" rtlCol="0" anchor="t"/>
-          <a:lstStyle/>
-          <a:p>
-            <a:pPr algn="l" indent="0" marL="0">
-              <a:spcAft>
-                <a:spcPts val="800"/>
-              </a:spcAft>
-              <a:buNone/>
-            </a:pPr>
-            <a:r>
-              <a:rPr lang="en-US" sz="4000" dirty="0">
-                <a:solidFill>
-                  <a:srgbClr val="111111"/>
-                </a:solidFill>
-                <a:latin typeface="Times New Roman" pitchFamily="34" charset="0"/>
-                <a:ea typeface="Times New Roman" pitchFamily="34" charset="-122"/>
-                <a:cs typeface="Times New Roman" pitchFamily="34" charset="-120"/>
-              </a:rPr>
-              <a:t>Give one negative effect of weathering.</a:t>
-            </a:r>
-            <a:endParaRPr lang="en-US" sz="4000" dirty="0"/>
+              <a:t>Illustration: a weathered wall</a:t>
+            </a:r>
+            <a:endParaRPr lang="en-US" sz="1600" dirty="0"/>
           </a:p>
         </p:txBody>
       </p:sp>
@@ -16534,7 +17376,7 @@
                 <a:ea typeface="Calibri" pitchFamily="34" charset="-122"/>
                 <a:cs typeface="Calibri" pitchFamily="34" charset="-120"/>
               </a:rPr>
-              <a:t>FORMATIVE EVALUATION</a:t>
+              <a:t>BOARD SUMMARY</a:t>
             </a:r>
             <a:endParaRPr lang="en-US" sz="1400" dirty="0"/>
           </a:p>
@@ -16599,7 +17441,7 @@
                 <a:ea typeface="Times New Roman" pitchFamily="34" charset="-122"/>
                 <a:cs typeface="Times New Roman" pitchFamily="34" charset="-120"/>
               </a:rPr>
-              <a:t>Expected Answer</a:t>
+              <a:t>2. Effects of Weathering on the Landscape and Man</a:t>
             </a:r>
             <a:endParaRPr lang="en-US" sz="3600" dirty="0"/>
           </a:p>
@@ -16613,8 +17455,47 @@
         </p:nvSpPr>
         <p:spPr>
           <a:xfrm>
-            <a:off x="5349240" y="1783080"/>
-            <a:ext cx="6522415" cy="4663440"/>
+            <a:off x="5349240" y="1737360"/>
+            <a:ext cx="6522415" cy="457200"/>
+          </a:xfrm>
+          <a:prstGeom prst="rect">
+            <a:avLst/>
+          </a:prstGeom>
+          <a:noFill/>
+          <a:ln/>
+        </p:spPr>
+        <p:txBody>
+          <a:bodyPr wrap="square" lIns="0" tIns="0" rIns="0" bIns="0" rtlCol="0" anchor="ctr"/>
+          <a:lstStyle/>
+          <a:p>
+            <a:pPr algn="l" indent="0" marL="0">
+              <a:buNone/>
+            </a:pPr>
+            <a:r>
+              <a:rPr lang="en-US" sz="3200" b="1" dirty="0">
+                <a:solidFill>
+                  <a:srgbClr val="990011"/>
+                </a:solidFill>
+                <a:latin typeface="Times New Roman" pitchFamily="34" charset="0"/>
+                <a:ea typeface="Times New Roman" pitchFamily="34" charset="-122"/>
+                <a:cs typeface="Times New Roman" pitchFamily="34" charset="-120"/>
+              </a:rPr>
+              <a:t>B) Negative Effects</a:t>
+            </a:r>
+            <a:endParaRPr lang="en-US" sz="3200" dirty="0"/>
+          </a:p>
+        </p:txBody>
+      </p:sp>
+      <p:sp>
+        <p:nvSpPr>
+          <p:cNvPr id="6" name="Text 3"/>
+          <p:cNvSpPr/>
+          <p:nvPr/>
+        </p:nvSpPr>
+        <p:spPr>
+          <a:xfrm>
+            <a:off x="5349240" y="2240280"/>
+            <a:ext cx="6522415" cy="4206240"/>
           </a:xfrm>
           <a:prstGeom prst="rect">
             <a:avLst/>
@@ -16633,7 +17514,7 @@
               <a:buNone/>
             </a:pPr>
             <a:r>
-              <a:rPr lang="en-US" sz="4000" dirty="0">
+              <a:rPr lang="en-US" sz="4000" b="1" dirty="0">
                 <a:solidFill>
                   <a:srgbClr val="111111"/>
                 </a:solidFill>
@@ -16641,7 +17522,61 @@
                 <a:ea typeface="Times New Roman" pitchFamily="34" charset="-122"/>
                 <a:cs typeface="Times New Roman" pitchFamily="34" charset="-120"/>
               </a:rPr>
-              <a:t>Landslides on weathered slopes.</a:t>
+              <a:t>Hazards: </a:t>
+            </a:r>
+            <a:pPr algn="l" indent="0" marL="0">
+              <a:spcAft>
+                <a:spcPts val="800"/>
+              </a:spcAft>
+              <a:buNone/>
+            </a:pPr>
+            <a:r>
+              <a:rPr lang="en-US" sz="4000" dirty="0">
+                <a:solidFill>
+                  <a:srgbClr val="111111"/>
+                </a:solidFill>
+                <a:latin typeface="Times New Roman" pitchFamily="34" charset="0"/>
+                <a:ea typeface="Times New Roman" pitchFamily="34" charset="-122"/>
+                <a:cs typeface="Times New Roman" pitchFamily="34" charset="-120"/>
+              </a:rPr>
+              <a:t>Weathered rocks on steep slopes cause landslides and rockfalls.</a:t>
+            </a:r>
+            <a:endParaRPr lang="en-US" sz="4000" dirty="0"/>
+          </a:p>
+          <a:p>
+            <a:pPr algn="l" indent="0" marL="0">
+              <a:spcAft>
+                <a:spcPts val="800"/>
+              </a:spcAft>
+              <a:buNone/>
+            </a:pPr>
+            <a:r>
+              <a:rPr lang="en-US" sz="4000" b="1" dirty="0">
+                <a:solidFill>
+                  <a:srgbClr val="111111"/>
+                </a:solidFill>
+                <a:latin typeface="Times New Roman" pitchFamily="34" charset="0"/>
+                <a:ea typeface="Times New Roman" pitchFamily="34" charset="-122"/>
+                <a:cs typeface="Times New Roman" pitchFamily="34" charset="-120"/>
+              </a:rPr>
+              <a:t>Leaching: </a:t>
+            </a:r>
+            <a:pPr algn="l" indent="0" marL="0">
+              <a:spcAft>
+                <a:spcPts val="800"/>
+              </a:spcAft>
+              <a:buNone/>
+            </a:pPr>
+            <a:r>
+              <a:rPr lang="en-US" sz="4000" dirty="0">
+                <a:solidFill>
+                  <a:srgbClr val="111111"/>
+                </a:solidFill>
+                <a:latin typeface="Times New Roman" pitchFamily="34" charset="0"/>
+                <a:ea typeface="Times New Roman" pitchFamily="34" charset="-122"/>
+                <a:cs typeface="Times New Roman" pitchFamily="34" charset="-120"/>
+              </a:rPr>
+              <a:t>Heavy rain washes nutrients deep into the soil and reduces fertility.</a:t>
             </a:r>
             <a:endParaRPr lang="en-US" sz="4000" dirty="0"/>
           </a:p>
@@ -16753,7 +17688,7 @@
                 <a:ea typeface="Calibri" pitchFamily="34" charset="-122"/>
                 <a:cs typeface="Calibri" pitchFamily="34" charset="-120"/>
               </a:rPr>
-              <a:t>REMEDIATION</a:t>
+              <a:t>FORMATIVE EVALUATION</a:t>
             </a:r>
             <a:endParaRPr lang="en-US" sz="1400" dirty="0"/>
           </a:p>
@@ -16776,7 +17711,7 @@
         <p:spPr>
           <a:xfrm>
             <a:off x="0" y="658368"/>
-            <a:ext cx="3840480" cy="5833872"/>
+            <a:ext cx="5120640" cy="5833872"/>
           </a:xfrm>
           <a:prstGeom prst="rect">
             <a:avLst/>
@@ -16791,8 +17726,8 @@
         </p:nvSpPr>
         <p:spPr>
           <a:xfrm>
-            <a:off x="4069080" y="1005840"/>
-            <a:ext cx="7802575" cy="731520"/>
+            <a:off x="5349240" y="1005840"/>
+            <a:ext cx="6522415" cy="731520"/>
           </a:xfrm>
           <a:prstGeom prst="rect">
             <a:avLst/>
@@ -16818,7 +17753,7 @@
                 <a:ea typeface="Times New Roman" pitchFamily="34" charset="-122"/>
                 <a:cs typeface="Times New Roman" pitchFamily="34" charset="-120"/>
               </a:rPr>
-              <a:t>Remediation</a:t>
+              <a:t>Evaluation 1</a:t>
             </a:r>
             <a:endParaRPr lang="en-US" sz="3600" dirty="0"/>
           </a:p>
@@ -16832,8 +17767,8 @@
         </p:nvSpPr>
         <p:spPr>
           <a:xfrm>
-            <a:off x="4069080" y="1783080"/>
-            <a:ext cx="7802575" cy="4663440"/>
+            <a:off x="5349240" y="1783080"/>
+            <a:ext cx="6522415" cy="4663440"/>
           </a:xfrm>
           <a:prstGeom prst="rect">
             <a:avLst/>
@@ -16852,7 +17787,7 @@
               <a:buNone/>
             </a:pPr>
             <a:r>
-              <a:rPr lang="en-US" sz="4000" b="1" dirty="0">
+              <a:rPr lang="en-US" sz="4000" dirty="0">
                 <a:solidFill>
                   <a:srgbClr val="111111"/>
                 </a:solidFill>
@@ -16860,73 +17795,7 @@
                 <a:ea typeface="Times New Roman" pitchFamily="34" charset="-122"/>
                 <a:cs typeface="Times New Roman" pitchFamily="34" charset="-120"/>
               </a:rPr>
-              <a:t>Fill in the blanks:</a:t>
-            </a:r>
-            <a:endParaRPr lang="en-US" sz="4000" dirty="0"/>
-          </a:p>
-          <a:p>
-            <a:pPr algn="l" marL="342900" indent="-342900">
-              <a:spcAft>
-                <a:spcPts val="800"/>
-              </a:spcAft>
-              <a:buSzPct val="100000"/>
-              <a:buFont typeface="+mj-lt"/>
-              <a:buAutoNum type="arabicPeriod" startAt="1"/>
-            </a:pPr>
-            <a:r>
-              <a:rPr lang="en-US" sz="4000" dirty="0">
-                <a:solidFill>
-                  <a:srgbClr val="111111"/>
-                </a:solidFill>
-                <a:latin typeface="Times New Roman" pitchFamily="34" charset="0"/>
-                <a:ea typeface="Times New Roman" pitchFamily="34" charset="-122"/>
-                <a:cs typeface="Times New Roman" pitchFamily="34" charset="-120"/>
-              </a:rPr>
-              <a:t>Aluminium is made from ______.</a:t>
-            </a:r>
-            <a:endParaRPr lang="en-US" sz="4000" dirty="0"/>
-          </a:p>
-          <a:p>
-            <a:pPr algn="l" marL="342900" indent="-342900">
-              <a:spcAft>
-                <a:spcPts val="800"/>
-              </a:spcAft>
-              <a:buSzPct val="100000"/>
-              <a:buFont typeface="+mj-lt"/>
-              <a:buAutoNum type="arabicPeriod" startAt="1"/>
-            </a:pPr>
-            <a:r>
-              <a:rPr lang="en-US" sz="4000" dirty="0">
-                <a:solidFill>
-                  <a:srgbClr val="111111"/>
-                </a:solidFill>
-                <a:latin typeface="Times New Roman" pitchFamily="34" charset="0"/>
-                <a:ea typeface="Times New Roman" pitchFamily="34" charset="-122"/>
-                <a:cs typeface="Times New Roman" pitchFamily="34" charset="-120"/>
-              </a:rPr>
-              <a:t>A hard red iron-rich layer is ______.</a:t>
-            </a:r>
-            <a:endParaRPr lang="en-US" sz="4000" dirty="0"/>
-          </a:p>
-          <a:p>
-            <a:pPr algn="l" marL="342900" indent="-342900">
-              <a:spcAft>
-                <a:spcPts val="800"/>
-              </a:spcAft>
-              <a:buSzPct val="100000"/>
-              <a:buFont typeface="+mj-lt"/>
-              <a:buAutoNum type="arabicPeriod" startAt="1"/>
-            </a:pPr>
-            <a:r>
-              <a:rPr lang="en-US" sz="4000" dirty="0">
-                <a:solidFill>
-                  <a:srgbClr val="111111"/>
-                </a:solidFill>
-                <a:latin typeface="Times New Roman" pitchFamily="34" charset="0"/>
-                <a:ea typeface="Times New Roman" pitchFamily="34" charset="-122"/>
-                <a:cs typeface="Times New Roman" pitchFamily="34" charset="-120"/>
-              </a:rPr>
-              <a:t>Weathered slopes can cause ______ after heavy rain.</a:t>
+              <a:t>Give two economic uses of weathering products.</a:t>
             </a:r>
             <a:endParaRPr lang="en-US" sz="4000" dirty="0"/>
           </a:p>
@@ -17038,7 +17907,7 @@
                 <a:ea typeface="Calibri" pitchFamily="34" charset="-122"/>
                 <a:cs typeface="Calibri" pitchFamily="34" charset="-120"/>
               </a:rPr>
-              <a:t>HOMEWORK</a:t>
+              <a:t>FORMATIVE EVALUATION</a:t>
             </a:r>
             <a:endParaRPr lang="en-US" sz="1400" dirty="0"/>
           </a:p>
@@ -17103,7 +17972,7 @@
                 <a:ea typeface="Times New Roman" pitchFamily="34" charset="-122"/>
                 <a:cs typeface="Times New Roman" pitchFamily="34" charset="-120"/>
               </a:rPr>
-              <a:t>Homework</a:t>
+              <a:t>Expected Answer</a:t>
             </a:r>
             <a:endParaRPr lang="en-US" sz="3600" dirty="0"/>
           </a:p>
@@ -17145,7 +18014,7 @@
                 <a:ea typeface="Times New Roman" pitchFamily="34" charset="-122"/>
                 <a:cs typeface="Times New Roman" pitchFamily="34" charset="-120"/>
               </a:rPr>
-              <a:t>Look for signs of soil moving down a slope near your home (leaning posts, cracks). Write what you see.</a:t>
+              <a:t>Soils for farming, sand and gravel for building, clay for bricks, bauxite ore (any two).</a:t>
             </a:r>
             <a:endParaRPr lang="en-US" sz="4000" dirty="0"/>
           </a:p>
@@ -17257,7 +18126,7 @@
                 <a:ea typeface="Calibri" pitchFamily="34" charset="-122"/>
                 <a:cs typeface="Calibri" pitchFamily="34" charset="-120"/>
               </a:rPr>
-              <a:t>NEXT LESSON</a:t>
+              <a:t>FORMATIVE EVALUATION</a:t>
             </a:r>
             <a:endParaRPr lang="en-US" sz="1400" dirty="0"/>
           </a:p>
@@ -17322,7 +18191,7 @@
                 <a:ea typeface="Times New Roman" pitchFamily="34" charset="-122"/>
                 <a:cs typeface="Times New Roman" pitchFamily="34" charset="-120"/>
               </a:rPr>
-              <a:t>Next Lesson</a:t>
+              <a:t>Evaluation 2</a:t>
             </a:r>
             <a:endParaRPr lang="en-US" sz="3600" dirty="0"/>
           </a:p>
@@ -17346,17 +18215,17 @@
           <a:ln/>
         </p:spPr>
         <p:txBody>
-          <a:bodyPr wrap="square" lIns="0" tIns="0" rIns="0" bIns="0" rtlCol="0" anchor="ctr"/>
-          <a:lstStyle/>
-          <a:p>
-            <a:pPr algn="ctr" indent="0" marL="0">
+          <a:bodyPr wrap="square" lIns="0" tIns="0" rIns="0" bIns="0" rtlCol="0" anchor="t"/>
+          <a:lstStyle/>
+          <a:p>
+            <a:pPr algn="l" indent="0" marL="0">
               <a:spcAft>
                 <a:spcPts val="800"/>
               </a:spcAft>
               <a:buNone/>
             </a:pPr>
             <a:r>
-              <a:rPr lang="en-US" sz="4000" b="1" dirty="0">
+              <a:rPr lang="en-US" sz="4000" dirty="0">
                 <a:solidFill>
                   <a:srgbClr val="111111"/>
                 </a:solidFill>
@@ -17364,27 +18233,7 @@
                 <a:ea typeface="Times New Roman" pitchFamily="34" charset="-122"/>
                 <a:cs typeface="Times New Roman" pitchFamily="34" charset="-120"/>
               </a:rPr>
-              <a:t>Our next lesson will be on:</a:t>
-            </a:r>
-            <a:endParaRPr lang="en-US" sz="4000" dirty="0"/>
-          </a:p>
-          <a:p>
-            <a:pPr algn="ctr" indent="0" marL="0">
-              <a:spcAft>
-                <a:spcPts val="800"/>
-              </a:spcAft>
-              <a:buNone/>
-            </a:pPr>
-            <a:r>
-              <a:rPr lang="en-US" sz="4000" b="1" dirty="0">
-                <a:solidFill>
-                  <a:srgbClr val="990011"/>
-                </a:solidFill>
-                <a:latin typeface="Times New Roman" pitchFamily="34" charset="0"/>
-                <a:ea typeface="Times New Roman" pitchFamily="34" charset="-122"/>
-                <a:cs typeface="Times New Roman" pitchFamily="34" charset="-120"/>
-              </a:rPr>
-              <a:t>Lesson 12: Mass Wasting (Movement)</a:t>
+              <a:t>Give one positive and one negative effect of weathering.</a:t>
             </a:r>
             <a:endParaRPr lang="en-US" sz="4000" dirty="0"/>
           </a:p>
@@ -17603,7 +18452,7 @@
                 <a:ea typeface="Times New Roman" pitchFamily="34" charset="-122"/>
                 <a:cs typeface="Times New Roman" pitchFamily="34" charset="-120"/>
               </a:rPr>
-              <a:t>Useful materials from weathered rock: sand for building, clay for bricks and pottery, laterite for roads, and bauxite for aluminium.</a:t>
+              <a:t>Regolith is the layer of loose, weathered material covering the solid bedrock.</a:t>
             </a:r>
             <a:endParaRPr lang="en-US" sz="4000" dirty="0"/>
           </a:p>
@@ -17715,6 +18564,968 @@
                 <a:ea typeface="Calibri" pitchFamily="34" charset="-122"/>
                 <a:cs typeface="Calibri" pitchFamily="34" charset="-120"/>
               </a:rPr>
+              <a:t>FORMATIVE EVALUATION</a:t>
+            </a:r>
+            <a:endParaRPr lang="en-US" sz="1400" dirty="0"/>
+          </a:p>
+        </p:txBody>
+      </p:sp>
+      <p:pic>
+        <p:nvPicPr>
+          <p:cNvPr id="3" name="Image 0" descr="/home/claude/f4/img/minesec_sheet.png">    </p:cNvPr>
+          <p:cNvPicPr>
+            <a:picLocks noChangeAspect="1"/>
+          </p:cNvPicPr>
+          <p:nvPr/>
+        </p:nvPicPr>
+        <p:blipFill>
+          <a:blip r:embed="rId1"/>
+          <a:stretch>
+            <a:fillRect/>
+          </a:stretch>
+        </p:blipFill>
+        <p:spPr>
+          <a:xfrm>
+            <a:off x="0" y="658368"/>
+            <a:ext cx="5120640" cy="5833872"/>
+          </a:xfrm>
+          <a:prstGeom prst="rect">
+            <a:avLst/>
+          </a:prstGeom>
+        </p:spPr>
+      </p:pic>
+      <p:sp>
+        <p:nvSpPr>
+          <p:cNvPr id="4" name="Text 1"/>
+          <p:cNvSpPr/>
+          <p:nvPr/>
+        </p:nvSpPr>
+        <p:spPr>
+          <a:xfrm>
+            <a:off x="5349240" y="1005840"/>
+            <a:ext cx="6522415" cy="731520"/>
+          </a:xfrm>
+          <a:prstGeom prst="rect">
+            <a:avLst/>
+          </a:prstGeom>
+          <a:noFill/>
+          <a:ln/>
+        </p:spPr>
+        <p:txBody>
+          <a:bodyPr wrap="square" lIns="0" tIns="0" rIns="0" bIns="0" rtlCol="0" anchor="ctr">
+            <a:normAutofit/>
+          </a:bodyPr>
+          <a:lstStyle/>
+          <a:p>
+            <a:pPr algn="ctr" indent="0" marL="0">
+              <a:buNone/>
+            </a:pPr>
+            <a:r>
+              <a:rPr lang="en-US" sz="3600" b="1" dirty="0">
+                <a:solidFill>
+                  <a:srgbClr val="990011"/>
+                </a:solidFill>
+                <a:latin typeface="Times New Roman" pitchFamily="34" charset="0"/>
+                <a:ea typeface="Times New Roman" pitchFamily="34" charset="-122"/>
+                <a:cs typeface="Times New Roman" pitchFamily="34" charset="-120"/>
+              </a:rPr>
+              <a:t>Expected Answer</a:t>
+            </a:r>
+            <a:endParaRPr lang="en-US" sz="3600" dirty="0"/>
+          </a:p>
+        </p:txBody>
+      </p:sp>
+      <p:sp>
+        <p:nvSpPr>
+          <p:cNvPr id="5" name="Text 2"/>
+          <p:cNvSpPr/>
+          <p:nvPr/>
+        </p:nvSpPr>
+        <p:spPr>
+          <a:xfrm>
+            <a:off x="5349240" y="1783080"/>
+            <a:ext cx="6522415" cy="4663440"/>
+          </a:xfrm>
+          <a:prstGeom prst="rect">
+            <a:avLst/>
+          </a:prstGeom>
+          <a:noFill/>
+          <a:ln/>
+        </p:spPr>
+        <p:txBody>
+          <a:bodyPr wrap="square" lIns="0" tIns="0" rIns="0" bIns="0" rtlCol="0" anchor="t"/>
+          <a:lstStyle/>
+          <a:p>
+            <a:pPr algn="l" indent="0" marL="0">
+              <a:spcAft>
+                <a:spcPts val="800"/>
+              </a:spcAft>
+              <a:buNone/>
+            </a:pPr>
+            <a:r>
+              <a:rPr lang="en-US" sz="4000" dirty="0">
+                <a:solidFill>
+                  <a:srgbClr val="111111"/>
+                </a:solidFill>
+                <a:latin typeface="Times New Roman" pitchFamily="34" charset="0"/>
+                <a:ea typeface="Times New Roman" pitchFamily="34" charset="-122"/>
+                <a:cs typeface="Times New Roman" pitchFamily="34" charset="-120"/>
+              </a:rPr>
+              <a:t>Positive: soil formation; negative: damage to buildings and roads.</a:t>
+            </a:r>
+            <a:endParaRPr lang="en-US" sz="4000" dirty="0"/>
+          </a:p>
+        </p:txBody>
+      </p:sp>
+      <p:sp>
+        <p:nvSpPr>
+          <p:cNvPr id="25" name="Slide Number Placeholder 0"/>
+          <p:cNvSpPr>
+            <a:spLocks noGrp="1"/>
+          </p:cNvSpPr>
+          <p:nvPr>
+            <p:ph type="sldNum" sz="quarter" idx="4294967295"/>
+          </p:nvPr>
+        </p:nvSpPr>
+        <p:spPr>
+          <a:xfrm>
+            <a:off x="27432" y="91440"/>
+            <a:ext cx="585216" cy="475488"/>
+          </a:xfrm>
+          <a:prstGeom prst="rect">
+            <a:avLst/>
+          </a:prstGeom>
+          <a:extLst>
+            <a:ext uri="{C572A759-6A51-4108-AA02-DFA0A04FC94B}">
+              <ma14:wrappingTextBoxFlag xmlns:ma14="http://schemas.microsoft.com/office/mac/drawingml/2011/main" val="0"/>
+            </a:ext>
+          </a:extLst>
+        </p:spPr>
+        <p:txBody>
+          <a:bodyPr/>
+          <a:lstStyle>
+            <a:lvl1pPr>
+              <a:defRPr sz="2000">
+                <a:solidFill>
+                  <a:srgbClr val="FFFFFF"/>
+                </a:solidFill>
+                <a:latin typeface="Calibri"/>
+                <a:ea typeface="Calibri"/>
+                <a:cs typeface="Calibri"/>
+              </a:defRPr>
+            </a:lvl1pPr>
+          </a:lstStyle>
+          <a:p>
+            <a:pPr algn="ctr"/>
+            <a:fld id="{F7021451-1387-4CA6-816F-3879F97B5CBC}" type="slidenum">
+              <a:rPr b="1" lang="en-US"/>
+              <a:t>50</a:t>
+            </a:fld>
+            <a:endParaRPr lang="en-US"/>
+          </a:p>
+        </p:txBody>
+      </p:sp>
+    </p:spTree>
+  </p:cSld>
+  <p:clrMapOvr>
+    <a:masterClrMapping/>
+  </p:clrMapOvr>
+</p:sld>
+</file>
+
+<file path=ppt/slides/slide51.xml><?xml version="1.0" encoding="utf-8"?>
+<p:sld xmlns:a="http://schemas.openxmlformats.org/drawingml/2006/main" xmlns:r="http://schemas.openxmlformats.org/officeDocument/2006/relationships" xmlns:p="http://schemas.openxmlformats.org/presentationml/2006/main">
+  <p:cSld name="Slide 51">
+    <p:spTree>
+      <p:nvGrpSpPr>
+        <p:cNvPr id="1" name=""/>
+        <p:cNvGrpSpPr/>
+        <p:nvPr/>
+      </p:nvGrpSpPr>
+      <p:grpSpPr>
+        <a:xfrm>
+          <a:off x="0" y="0"/>
+          <a:ext cx="0" cy="0"/>
+          <a:chOff x="0" y="0"/>
+          <a:chExt cx="0" cy="0"/>
+        </a:xfrm>
+      </p:grpSpPr>
+      <p:sp>
+        <p:nvSpPr>
+          <p:cNvPr id="2" name="Text 0"/>
+          <p:cNvSpPr/>
+          <p:nvPr/>
+        </p:nvSpPr>
+        <p:spPr>
+          <a:xfrm>
+            <a:off x="457200" y="713232"/>
+            <a:ext cx="11368735" cy="274320"/>
+          </a:xfrm>
+          <a:prstGeom prst="rect">
+            <a:avLst/>
+          </a:prstGeom>
+          <a:noFill/>
+          <a:ln/>
+        </p:spPr>
+        <p:txBody>
+          <a:bodyPr wrap="square" lIns="0" tIns="0" rIns="0" bIns="0" rtlCol="0" anchor="ctr"/>
+          <a:lstStyle/>
+          <a:p>
+            <a:pPr algn="r" indent="0" marL="0">
+              <a:buNone/>
+            </a:pPr>
+            <a:r>
+              <a:rPr lang="en-US" sz="1400" b="1" dirty="0">
+                <a:solidFill>
+                  <a:srgbClr val="1C3F6E"/>
+                </a:solidFill>
+                <a:latin typeface="Calibri" pitchFamily="34" charset="0"/>
+                <a:ea typeface="Calibri" pitchFamily="34" charset="-122"/>
+                <a:cs typeface="Calibri" pitchFamily="34" charset="-120"/>
+              </a:rPr>
+              <a:t>REMEDIATION</a:t>
+            </a:r>
+            <a:endParaRPr lang="en-US" sz="1400" dirty="0"/>
+          </a:p>
+        </p:txBody>
+      </p:sp>
+      <p:pic>
+        <p:nvPicPr>
+          <p:cNvPr id="3" name="Image 0" descr="/home/claude/f4/img/minesec_sheet.png">    </p:cNvPr>
+          <p:cNvPicPr>
+            <a:picLocks noChangeAspect="1"/>
+          </p:cNvPicPr>
+          <p:nvPr/>
+        </p:nvPicPr>
+        <p:blipFill>
+          <a:blip r:embed="rId1"/>
+          <a:stretch>
+            <a:fillRect/>
+          </a:stretch>
+        </p:blipFill>
+        <p:spPr>
+          <a:xfrm>
+            <a:off x="0" y="658368"/>
+            <a:ext cx="3840480" cy="5833872"/>
+          </a:xfrm>
+          <a:prstGeom prst="rect">
+            <a:avLst/>
+          </a:prstGeom>
+        </p:spPr>
+      </p:pic>
+      <p:sp>
+        <p:nvSpPr>
+          <p:cNvPr id="4" name="Text 1"/>
+          <p:cNvSpPr/>
+          <p:nvPr/>
+        </p:nvSpPr>
+        <p:spPr>
+          <a:xfrm>
+            <a:off x="4069080" y="1005840"/>
+            <a:ext cx="7802575" cy="731520"/>
+          </a:xfrm>
+          <a:prstGeom prst="rect">
+            <a:avLst/>
+          </a:prstGeom>
+          <a:noFill/>
+          <a:ln/>
+        </p:spPr>
+        <p:txBody>
+          <a:bodyPr wrap="square" lIns="0" tIns="0" rIns="0" bIns="0" rtlCol="0" anchor="ctr">
+            <a:normAutofit/>
+          </a:bodyPr>
+          <a:lstStyle/>
+          <a:p>
+            <a:pPr algn="ctr" indent="0" marL="0">
+              <a:buNone/>
+            </a:pPr>
+            <a:r>
+              <a:rPr lang="en-US" sz="3600" b="1" dirty="0">
+                <a:solidFill>
+                  <a:srgbClr val="990011"/>
+                </a:solidFill>
+                <a:latin typeface="Times New Roman" pitchFamily="34" charset="0"/>
+                <a:ea typeface="Times New Roman" pitchFamily="34" charset="-122"/>
+                <a:cs typeface="Times New Roman" pitchFamily="34" charset="-120"/>
+              </a:rPr>
+              <a:t>Remediation</a:t>
+            </a:r>
+            <a:endParaRPr lang="en-US" sz="3600" dirty="0"/>
+          </a:p>
+        </p:txBody>
+      </p:sp>
+      <p:sp>
+        <p:nvSpPr>
+          <p:cNvPr id="5" name="Text 2"/>
+          <p:cNvSpPr/>
+          <p:nvPr/>
+        </p:nvSpPr>
+        <p:spPr>
+          <a:xfrm>
+            <a:off x="4069080" y="1783080"/>
+            <a:ext cx="7802575" cy="4663440"/>
+          </a:xfrm>
+          <a:prstGeom prst="rect">
+            <a:avLst/>
+          </a:prstGeom>
+          <a:noFill/>
+          <a:ln/>
+        </p:spPr>
+        <p:txBody>
+          <a:bodyPr wrap="square" lIns="0" tIns="0" rIns="0" bIns="0" rtlCol="0" anchor="t"/>
+          <a:lstStyle/>
+          <a:p>
+            <a:pPr algn="l" indent="0" marL="0">
+              <a:spcAft>
+                <a:spcPts val="800"/>
+              </a:spcAft>
+              <a:buNone/>
+            </a:pPr>
+            <a:r>
+              <a:rPr lang="en-US" sz="4000" b="1" dirty="0">
+                <a:solidFill>
+                  <a:srgbClr val="111111"/>
+                </a:solidFill>
+                <a:latin typeface="Times New Roman" pitchFamily="34" charset="0"/>
+                <a:ea typeface="Times New Roman" pitchFamily="34" charset="-122"/>
+                <a:cs typeface="Times New Roman" pitchFamily="34" charset="-120"/>
+              </a:rPr>
+              <a:t>Fill in the blanks:</a:t>
+            </a:r>
+            <a:endParaRPr lang="en-US" sz="4000" dirty="0"/>
+          </a:p>
+          <a:p>
+            <a:pPr algn="l" marL="342900" indent="-342900">
+              <a:spcAft>
+                <a:spcPts val="800"/>
+              </a:spcAft>
+              <a:buSzPct val="100000"/>
+              <a:buFont typeface="+mj-lt"/>
+              <a:buAutoNum type="arabicPeriod" startAt="1"/>
+            </a:pPr>
+            <a:r>
+              <a:rPr lang="en-US" sz="4000" dirty="0">
+                <a:solidFill>
+                  <a:srgbClr val="111111"/>
+                </a:solidFill>
+                <a:latin typeface="Times New Roman" pitchFamily="34" charset="0"/>
+                <a:ea typeface="Times New Roman" pitchFamily="34" charset="-122"/>
+                <a:cs typeface="Times New Roman" pitchFamily="34" charset="-120"/>
+              </a:rPr>
+              <a:t>The loose layer above the bedrock is the ______.</a:t>
+            </a:r>
+            <a:endParaRPr lang="en-US" sz="4000" dirty="0"/>
+          </a:p>
+          <a:p>
+            <a:pPr algn="l" marL="342900" indent="-342900">
+              <a:spcAft>
+                <a:spcPts val="800"/>
+              </a:spcAft>
+              <a:buSzPct val="100000"/>
+              <a:buFont typeface="+mj-lt"/>
+              <a:buAutoNum type="arabicPeriod" startAt="1"/>
+            </a:pPr>
+            <a:r>
+              <a:rPr lang="en-US" sz="4000" dirty="0">
+                <a:solidFill>
+                  <a:srgbClr val="111111"/>
+                </a:solidFill>
+                <a:latin typeface="Times New Roman" pitchFamily="34" charset="0"/>
+                <a:ea typeface="Times New Roman" pitchFamily="34" charset="-122"/>
+                <a:cs typeface="Times New Roman" pitchFamily="34" charset="-120"/>
+              </a:rPr>
+              <a:t>Aluminium comes from ______.</a:t>
+            </a:r>
+            <a:endParaRPr lang="en-US" sz="4000" dirty="0"/>
+          </a:p>
+          <a:p>
+            <a:pPr algn="l" marL="342900" indent="-342900">
+              <a:spcAft>
+                <a:spcPts val="800"/>
+              </a:spcAft>
+              <a:buSzPct val="100000"/>
+              <a:buFont typeface="+mj-lt"/>
+              <a:buAutoNum type="arabicPeriod" startAt="1"/>
+            </a:pPr>
+            <a:r>
+              <a:rPr lang="en-US" sz="4000" dirty="0">
+                <a:solidFill>
+                  <a:srgbClr val="111111"/>
+                </a:solidFill>
+                <a:latin typeface="Times New Roman" pitchFamily="34" charset="0"/>
+                <a:ea typeface="Times New Roman" pitchFamily="34" charset="-122"/>
+                <a:cs typeface="Times New Roman" pitchFamily="34" charset="-120"/>
+              </a:rPr>
+              <a:t>The washing of nutrients down the soil is ______.</a:t>
+            </a:r>
+            <a:endParaRPr lang="en-US" sz="4000" dirty="0"/>
+          </a:p>
+        </p:txBody>
+      </p:sp>
+      <p:sp>
+        <p:nvSpPr>
+          <p:cNvPr id="25" name="Slide Number Placeholder 0"/>
+          <p:cNvSpPr>
+            <a:spLocks noGrp="1"/>
+          </p:cNvSpPr>
+          <p:nvPr>
+            <p:ph type="sldNum" sz="quarter" idx="4294967295"/>
+          </p:nvPr>
+        </p:nvSpPr>
+        <p:spPr>
+          <a:xfrm>
+            <a:off x="27432" y="91440"/>
+            <a:ext cx="585216" cy="475488"/>
+          </a:xfrm>
+          <a:prstGeom prst="rect">
+            <a:avLst/>
+          </a:prstGeom>
+          <a:extLst>
+            <a:ext uri="{C572A759-6A51-4108-AA02-DFA0A04FC94B}">
+              <ma14:wrappingTextBoxFlag xmlns:ma14="http://schemas.microsoft.com/office/mac/drawingml/2011/main" val="0"/>
+            </a:ext>
+          </a:extLst>
+        </p:spPr>
+        <p:txBody>
+          <a:bodyPr/>
+          <a:lstStyle>
+            <a:lvl1pPr>
+              <a:defRPr sz="2000">
+                <a:solidFill>
+                  <a:srgbClr val="FFFFFF"/>
+                </a:solidFill>
+                <a:latin typeface="Calibri"/>
+                <a:ea typeface="Calibri"/>
+                <a:cs typeface="Calibri"/>
+              </a:defRPr>
+            </a:lvl1pPr>
+          </a:lstStyle>
+          <a:p>
+            <a:pPr algn="ctr"/>
+            <a:fld id="{F7021451-1387-4CA6-816F-3879F97B5CBC}" type="slidenum">
+              <a:rPr b="1" lang="en-US"/>
+              <a:t>51</a:t>
+            </a:fld>
+            <a:endParaRPr lang="en-US"/>
+          </a:p>
+        </p:txBody>
+      </p:sp>
+    </p:spTree>
+  </p:cSld>
+  <p:clrMapOvr>
+    <a:masterClrMapping/>
+  </p:clrMapOvr>
+</p:sld>
+</file>
+
+<file path=ppt/slides/slide52.xml><?xml version="1.0" encoding="utf-8"?>
+<p:sld xmlns:a="http://schemas.openxmlformats.org/drawingml/2006/main" xmlns:r="http://schemas.openxmlformats.org/officeDocument/2006/relationships" xmlns:p="http://schemas.openxmlformats.org/presentationml/2006/main">
+  <p:cSld name="Slide 52">
+    <p:spTree>
+      <p:nvGrpSpPr>
+        <p:cNvPr id="1" name=""/>
+        <p:cNvGrpSpPr/>
+        <p:nvPr/>
+      </p:nvGrpSpPr>
+      <p:grpSpPr>
+        <a:xfrm>
+          <a:off x="0" y="0"/>
+          <a:ext cx="0" cy="0"/>
+          <a:chOff x="0" y="0"/>
+          <a:chExt cx="0" cy="0"/>
+        </a:xfrm>
+      </p:grpSpPr>
+      <p:sp>
+        <p:nvSpPr>
+          <p:cNvPr id="2" name="Text 0"/>
+          <p:cNvSpPr/>
+          <p:nvPr/>
+        </p:nvSpPr>
+        <p:spPr>
+          <a:xfrm>
+            <a:off x="457200" y="713232"/>
+            <a:ext cx="11368735" cy="274320"/>
+          </a:xfrm>
+          <a:prstGeom prst="rect">
+            <a:avLst/>
+          </a:prstGeom>
+          <a:noFill/>
+          <a:ln/>
+        </p:spPr>
+        <p:txBody>
+          <a:bodyPr wrap="square" lIns="0" tIns="0" rIns="0" bIns="0" rtlCol="0" anchor="ctr"/>
+          <a:lstStyle/>
+          <a:p>
+            <a:pPr algn="r" indent="0" marL="0">
+              <a:buNone/>
+            </a:pPr>
+            <a:r>
+              <a:rPr lang="en-US" sz="1400" b="1" dirty="0">
+                <a:solidFill>
+                  <a:srgbClr val="1C3F6E"/>
+                </a:solidFill>
+                <a:latin typeface="Calibri" pitchFamily="34" charset="0"/>
+                <a:ea typeface="Calibri" pitchFamily="34" charset="-122"/>
+                <a:cs typeface="Calibri" pitchFamily="34" charset="-120"/>
+              </a:rPr>
+              <a:t>HOMEWORK</a:t>
+            </a:r>
+            <a:endParaRPr lang="en-US" sz="1400" dirty="0"/>
+          </a:p>
+        </p:txBody>
+      </p:sp>
+      <p:pic>
+        <p:nvPicPr>
+          <p:cNvPr id="3" name="Image 0" descr="/home/claude/f4/img/minesec_sheet.png">    </p:cNvPr>
+          <p:cNvPicPr>
+            <a:picLocks noChangeAspect="1"/>
+          </p:cNvPicPr>
+          <p:nvPr/>
+        </p:nvPicPr>
+        <p:blipFill>
+          <a:blip r:embed="rId1"/>
+          <a:stretch>
+            <a:fillRect/>
+          </a:stretch>
+        </p:blipFill>
+        <p:spPr>
+          <a:xfrm>
+            <a:off x="0" y="658368"/>
+            <a:ext cx="5120640" cy="5833872"/>
+          </a:xfrm>
+          <a:prstGeom prst="rect">
+            <a:avLst/>
+          </a:prstGeom>
+        </p:spPr>
+      </p:pic>
+      <p:sp>
+        <p:nvSpPr>
+          <p:cNvPr id="4" name="Text 1"/>
+          <p:cNvSpPr/>
+          <p:nvPr/>
+        </p:nvSpPr>
+        <p:spPr>
+          <a:xfrm>
+            <a:off x="5349240" y="1005840"/>
+            <a:ext cx="6522415" cy="731520"/>
+          </a:xfrm>
+          <a:prstGeom prst="rect">
+            <a:avLst/>
+          </a:prstGeom>
+          <a:noFill/>
+          <a:ln/>
+        </p:spPr>
+        <p:txBody>
+          <a:bodyPr wrap="square" lIns="0" tIns="0" rIns="0" bIns="0" rtlCol="0" anchor="ctr">
+            <a:normAutofit/>
+          </a:bodyPr>
+          <a:lstStyle/>
+          <a:p>
+            <a:pPr algn="ctr" indent="0" marL="0">
+              <a:buNone/>
+            </a:pPr>
+            <a:r>
+              <a:rPr lang="en-US" sz="3600" b="1" dirty="0">
+                <a:solidFill>
+                  <a:srgbClr val="990011"/>
+                </a:solidFill>
+                <a:latin typeface="Times New Roman" pitchFamily="34" charset="0"/>
+                <a:ea typeface="Times New Roman" pitchFamily="34" charset="-122"/>
+                <a:cs typeface="Times New Roman" pitchFamily="34" charset="-120"/>
+              </a:rPr>
+              <a:t>Homework</a:t>
+            </a:r>
+            <a:endParaRPr lang="en-US" sz="3600" dirty="0"/>
+          </a:p>
+        </p:txBody>
+      </p:sp>
+      <p:sp>
+        <p:nvSpPr>
+          <p:cNvPr id="5" name="Text 2"/>
+          <p:cNvSpPr/>
+          <p:nvPr/>
+        </p:nvSpPr>
+        <p:spPr>
+          <a:xfrm>
+            <a:off x="5349240" y="1783080"/>
+            <a:ext cx="6522415" cy="4663440"/>
+          </a:xfrm>
+          <a:prstGeom prst="rect">
+            <a:avLst/>
+          </a:prstGeom>
+          <a:noFill/>
+          <a:ln/>
+        </p:spPr>
+        <p:txBody>
+          <a:bodyPr wrap="square" lIns="0" tIns="0" rIns="0" bIns="0" rtlCol="0" anchor="t"/>
+          <a:lstStyle/>
+          <a:p>
+            <a:pPr algn="l" indent="0" marL="0">
+              <a:spcAft>
+                <a:spcPts val="800"/>
+              </a:spcAft>
+              <a:buNone/>
+            </a:pPr>
+            <a:r>
+              <a:rPr lang="en-US" sz="4000" dirty="0">
+                <a:solidFill>
+                  <a:srgbClr val="111111"/>
+                </a:solidFill>
+                <a:latin typeface="Times New Roman" pitchFamily="34" charset="0"/>
+                <a:ea typeface="Times New Roman" pitchFamily="34" charset="-122"/>
+                <a:cs typeface="Times New Roman" pitchFamily="34" charset="-120"/>
+              </a:rPr>
+              <a:t>Define mass wasting.</a:t>
+            </a:r>
+            <a:endParaRPr lang="en-US" sz="4000" dirty="0"/>
+          </a:p>
+        </p:txBody>
+      </p:sp>
+      <p:sp>
+        <p:nvSpPr>
+          <p:cNvPr id="25" name="Slide Number Placeholder 0"/>
+          <p:cNvSpPr>
+            <a:spLocks noGrp="1"/>
+          </p:cNvSpPr>
+          <p:nvPr>
+            <p:ph type="sldNum" sz="quarter" idx="4294967295"/>
+          </p:nvPr>
+        </p:nvSpPr>
+        <p:spPr>
+          <a:xfrm>
+            <a:off x="27432" y="91440"/>
+            <a:ext cx="585216" cy="475488"/>
+          </a:xfrm>
+          <a:prstGeom prst="rect">
+            <a:avLst/>
+          </a:prstGeom>
+          <a:extLst>
+            <a:ext uri="{C572A759-6A51-4108-AA02-DFA0A04FC94B}">
+              <ma14:wrappingTextBoxFlag xmlns:ma14="http://schemas.microsoft.com/office/mac/drawingml/2011/main" val="0"/>
+            </a:ext>
+          </a:extLst>
+        </p:spPr>
+        <p:txBody>
+          <a:bodyPr/>
+          <a:lstStyle>
+            <a:lvl1pPr>
+              <a:defRPr sz="2000">
+                <a:solidFill>
+                  <a:srgbClr val="FFFFFF"/>
+                </a:solidFill>
+                <a:latin typeface="Calibri"/>
+                <a:ea typeface="Calibri"/>
+                <a:cs typeface="Calibri"/>
+              </a:defRPr>
+            </a:lvl1pPr>
+          </a:lstStyle>
+          <a:p>
+            <a:pPr algn="ctr"/>
+            <a:fld id="{F7021451-1387-4CA6-816F-3879F97B5CBC}" type="slidenum">
+              <a:rPr b="1" lang="en-US"/>
+              <a:t>52</a:t>
+            </a:fld>
+            <a:endParaRPr lang="en-US"/>
+          </a:p>
+        </p:txBody>
+      </p:sp>
+    </p:spTree>
+  </p:cSld>
+  <p:clrMapOvr>
+    <a:masterClrMapping/>
+  </p:clrMapOvr>
+</p:sld>
+</file>
+
+<file path=ppt/slides/slide53.xml><?xml version="1.0" encoding="utf-8"?>
+<p:sld xmlns:a="http://schemas.openxmlformats.org/drawingml/2006/main" xmlns:r="http://schemas.openxmlformats.org/officeDocument/2006/relationships" xmlns:p="http://schemas.openxmlformats.org/presentationml/2006/main">
+  <p:cSld name="Slide 53">
+    <p:spTree>
+      <p:nvGrpSpPr>
+        <p:cNvPr id="1" name=""/>
+        <p:cNvGrpSpPr/>
+        <p:nvPr/>
+      </p:nvGrpSpPr>
+      <p:grpSpPr>
+        <a:xfrm>
+          <a:off x="0" y="0"/>
+          <a:ext cx="0" cy="0"/>
+          <a:chOff x="0" y="0"/>
+          <a:chExt cx="0" cy="0"/>
+        </a:xfrm>
+      </p:grpSpPr>
+      <p:sp>
+        <p:nvSpPr>
+          <p:cNvPr id="2" name="Text 0"/>
+          <p:cNvSpPr/>
+          <p:nvPr/>
+        </p:nvSpPr>
+        <p:spPr>
+          <a:xfrm>
+            <a:off x="457200" y="713232"/>
+            <a:ext cx="11368735" cy="274320"/>
+          </a:xfrm>
+          <a:prstGeom prst="rect">
+            <a:avLst/>
+          </a:prstGeom>
+          <a:noFill/>
+          <a:ln/>
+        </p:spPr>
+        <p:txBody>
+          <a:bodyPr wrap="square" lIns="0" tIns="0" rIns="0" bIns="0" rtlCol="0" anchor="ctr"/>
+          <a:lstStyle/>
+          <a:p>
+            <a:pPr algn="r" indent="0" marL="0">
+              <a:buNone/>
+            </a:pPr>
+            <a:r>
+              <a:rPr lang="en-US" sz="1400" b="1" dirty="0">
+                <a:solidFill>
+                  <a:srgbClr val="1C3F6E"/>
+                </a:solidFill>
+                <a:latin typeface="Calibri" pitchFamily="34" charset="0"/>
+                <a:ea typeface="Calibri" pitchFamily="34" charset="-122"/>
+                <a:cs typeface="Calibri" pitchFamily="34" charset="-120"/>
+              </a:rPr>
+              <a:t>NEXT LESSON</a:t>
+            </a:r>
+            <a:endParaRPr lang="en-US" sz="1400" dirty="0"/>
+          </a:p>
+        </p:txBody>
+      </p:sp>
+      <p:pic>
+        <p:nvPicPr>
+          <p:cNvPr id="3" name="Image 0" descr="/home/claude/f4/img/minesec_sheet.png">    </p:cNvPr>
+          <p:cNvPicPr>
+            <a:picLocks noChangeAspect="1"/>
+          </p:cNvPicPr>
+          <p:nvPr/>
+        </p:nvPicPr>
+        <p:blipFill>
+          <a:blip r:embed="rId1"/>
+          <a:stretch>
+            <a:fillRect/>
+          </a:stretch>
+        </p:blipFill>
+        <p:spPr>
+          <a:xfrm>
+            <a:off x="0" y="658368"/>
+            <a:ext cx="5120640" cy="5833872"/>
+          </a:xfrm>
+          <a:prstGeom prst="rect">
+            <a:avLst/>
+          </a:prstGeom>
+        </p:spPr>
+      </p:pic>
+      <p:sp>
+        <p:nvSpPr>
+          <p:cNvPr id="4" name="Text 1"/>
+          <p:cNvSpPr/>
+          <p:nvPr/>
+        </p:nvSpPr>
+        <p:spPr>
+          <a:xfrm>
+            <a:off x="5349240" y="1005840"/>
+            <a:ext cx="6522415" cy="731520"/>
+          </a:xfrm>
+          <a:prstGeom prst="rect">
+            <a:avLst/>
+          </a:prstGeom>
+          <a:noFill/>
+          <a:ln/>
+        </p:spPr>
+        <p:txBody>
+          <a:bodyPr wrap="square" lIns="0" tIns="0" rIns="0" bIns="0" rtlCol="0" anchor="ctr">
+            <a:normAutofit/>
+          </a:bodyPr>
+          <a:lstStyle/>
+          <a:p>
+            <a:pPr algn="ctr" indent="0" marL="0">
+              <a:buNone/>
+            </a:pPr>
+            <a:r>
+              <a:rPr lang="en-US" sz="3600" b="1" dirty="0">
+                <a:solidFill>
+                  <a:srgbClr val="990011"/>
+                </a:solidFill>
+                <a:latin typeface="Times New Roman" pitchFamily="34" charset="0"/>
+                <a:ea typeface="Times New Roman" pitchFamily="34" charset="-122"/>
+                <a:cs typeface="Times New Roman" pitchFamily="34" charset="-120"/>
+              </a:rPr>
+              <a:t>Next Lesson</a:t>
+            </a:r>
+            <a:endParaRPr lang="en-US" sz="3600" dirty="0"/>
+          </a:p>
+        </p:txBody>
+      </p:sp>
+      <p:sp>
+        <p:nvSpPr>
+          <p:cNvPr id="5" name="Text 2"/>
+          <p:cNvSpPr/>
+          <p:nvPr/>
+        </p:nvSpPr>
+        <p:spPr>
+          <a:xfrm>
+            <a:off x="5349240" y="1783080"/>
+            <a:ext cx="6522415" cy="4663440"/>
+          </a:xfrm>
+          <a:prstGeom prst="rect">
+            <a:avLst/>
+          </a:prstGeom>
+          <a:noFill/>
+          <a:ln/>
+        </p:spPr>
+        <p:txBody>
+          <a:bodyPr wrap="square" lIns="0" tIns="0" rIns="0" bIns="0" rtlCol="0" anchor="ctr"/>
+          <a:lstStyle/>
+          <a:p>
+            <a:pPr algn="ctr" indent="0" marL="0">
+              <a:spcAft>
+                <a:spcPts val="800"/>
+              </a:spcAft>
+              <a:buNone/>
+            </a:pPr>
+            <a:r>
+              <a:rPr lang="en-US" sz="4000" b="1" dirty="0">
+                <a:solidFill>
+                  <a:srgbClr val="111111"/>
+                </a:solidFill>
+                <a:latin typeface="Times New Roman" pitchFamily="34" charset="0"/>
+                <a:ea typeface="Times New Roman" pitchFamily="34" charset="-122"/>
+                <a:cs typeface="Times New Roman" pitchFamily="34" charset="-120"/>
+              </a:rPr>
+              <a:t>Our next lesson will be on:</a:t>
+            </a:r>
+            <a:endParaRPr lang="en-US" sz="4000" dirty="0"/>
+          </a:p>
+          <a:p>
+            <a:pPr algn="ctr" indent="0" marL="0">
+              <a:spcAft>
+                <a:spcPts val="800"/>
+              </a:spcAft>
+              <a:buNone/>
+            </a:pPr>
+            <a:r>
+              <a:rPr lang="en-US" sz="4000" b="1" dirty="0">
+                <a:solidFill>
+                  <a:srgbClr val="990011"/>
+                </a:solidFill>
+                <a:latin typeface="Times New Roman" pitchFamily="34" charset="0"/>
+                <a:ea typeface="Times New Roman" pitchFamily="34" charset="-122"/>
+                <a:cs typeface="Times New Roman" pitchFamily="34" charset="-120"/>
+              </a:rPr>
+              <a:t>Lesson 12: Mass Wasting (Movement)</a:t>
+            </a:r>
+            <a:endParaRPr lang="en-US" sz="4000" dirty="0"/>
+          </a:p>
+        </p:txBody>
+      </p:sp>
+      <p:sp>
+        <p:nvSpPr>
+          <p:cNvPr id="25" name="Slide Number Placeholder 0"/>
+          <p:cNvSpPr>
+            <a:spLocks noGrp="1"/>
+          </p:cNvSpPr>
+          <p:nvPr>
+            <p:ph type="sldNum" sz="quarter" idx="4294967295"/>
+          </p:nvPr>
+        </p:nvSpPr>
+        <p:spPr>
+          <a:xfrm>
+            <a:off x="27432" y="91440"/>
+            <a:ext cx="585216" cy="475488"/>
+          </a:xfrm>
+          <a:prstGeom prst="rect">
+            <a:avLst/>
+          </a:prstGeom>
+          <a:extLst>
+            <a:ext uri="{C572A759-6A51-4108-AA02-DFA0A04FC94B}">
+              <ma14:wrappingTextBoxFlag xmlns:ma14="http://schemas.microsoft.com/office/mac/drawingml/2011/main" val="0"/>
+            </a:ext>
+          </a:extLst>
+        </p:spPr>
+        <p:txBody>
+          <a:bodyPr/>
+          <a:lstStyle>
+            <a:lvl1pPr>
+              <a:defRPr sz="2000">
+                <a:solidFill>
+                  <a:srgbClr val="FFFFFF"/>
+                </a:solidFill>
+                <a:latin typeface="Calibri"/>
+                <a:ea typeface="Calibri"/>
+                <a:cs typeface="Calibri"/>
+              </a:defRPr>
+            </a:lvl1pPr>
+          </a:lstStyle>
+          <a:p>
+            <a:pPr algn="ctr"/>
+            <a:fld id="{F7021451-1387-4CA6-816F-3879F97B5CBC}" type="slidenum">
+              <a:rPr b="1" lang="en-US"/>
+              <a:t>53</a:t>
+            </a:fld>
+            <a:endParaRPr lang="en-US"/>
+          </a:p>
+        </p:txBody>
+      </p:sp>
+    </p:spTree>
+  </p:cSld>
+  <p:clrMapOvr>
+    <a:masterClrMapping/>
+  </p:clrMapOvr>
+</p:sld>
+</file>
+
+<file path=ppt/slides/slide54.xml><?xml version="1.0" encoding="utf-8"?>
+<p:sld xmlns:a="http://schemas.openxmlformats.org/drawingml/2006/main" xmlns:r="http://schemas.openxmlformats.org/officeDocument/2006/relationships" xmlns:p="http://schemas.openxmlformats.org/presentationml/2006/main">
+  <p:cSld name="Slide 54">
+    <p:spTree>
+      <p:nvGrpSpPr>
+        <p:cNvPr id="1" name=""/>
+        <p:cNvGrpSpPr/>
+        <p:nvPr/>
+      </p:nvGrpSpPr>
+      <p:grpSpPr>
+        <a:xfrm>
+          <a:off x="0" y="0"/>
+          <a:ext cx="0" cy="0"/>
+          <a:chOff x="0" y="0"/>
+          <a:chExt cx="0" cy="0"/>
+        </a:xfrm>
+      </p:grpSpPr>
+      <p:sp>
+        <p:nvSpPr>
+          <p:cNvPr id="2" name="Text 0"/>
+          <p:cNvSpPr/>
+          <p:nvPr/>
+        </p:nvSpPr>
+        <p:spPr>
+          <a:xfrm>
+            <a:off x="457200" y="713232"/>
+            <a:ext cx="11368735" cy="274320"/>
+          </a:xfrm>
+          <a:prstGeom prst="rect">
+            <a:avLst/>
+          </a:prstGeom>
+          <a:noFill/>
+          <a:ln/>
+        </p:spPr>
+        <p:txBody>
+          <a:bodyPr wrap="square" lIns="0" tIns="0" rIns="0" bIns="0" rtlCol="0" anchor="ctr"/>
+          <a:lstStyle/>
+          <a:p>
+            <a:pPr algn="r" indent="0" marL="0">
+              <a:buNone/>
+            </a:pPr>
+            <a:r>
+              <a:rPr lang="en-US" sz="1400" b="1" dirty="0">
+                <a:solidFill>
+                  <a:srgbClr val="1C3F6E"/>
+                </a:solidFill>
+                <a:latin typeface="Calibri" pitchFamily="34" charset="0"/>
+                <a:ea typeface="Calibri" pitchFamily="34" charset="-122"/>
+                <a:cs typeface="Calibri" pitchFamily="34" charset="-120"/>
+              </a:rPr>
               <a:t>BILINGUAL GAME</a:t>
             </a:r>
             <a:endParaRPr lang="en-US" sz="1400" dirty="0"/>
@@ -17762,7 +19573,7 @@
       </p:sp>
       <p:graphicFrame>
         <p:nvGraphicFramePr>
-          <p:cNvPr id="51" name="Table 0"/>
+          <p:cNvPr id="55" name="Table 0"/>
           <p:cNvGraphicFramePr>
             <a:graphicFrameLocks noGrp="1"/>
           </p:cNvGraphicFramePr>
@@ -17942,7 +19753,7 @@
                           <a:ea typeface="Calibri" pitchFamily="34" charset="-122"/>
                           <a:cs typeface="Calibri" pitchFamily="34" charset="-120"/>
                         </a:rPr>
-                        <a:t>Bauxite</a:t>
+                        <a:t>Weathering</a:t>
                       </a:r>
                       <a:endParaRPr lang="en-US" sz="2200" dirty="0">
                         <a:latin typeface="Calibri" charset="0"/>
@@ -18010,7 +19821,7 @@
                           <a:ea typeface="Calibri" pitchFamily="34" charset="-122"/>
                           <a:cs typeface="Calibri" pitchFamily="34" charset="-120"/>
                         </a:rPr>
-                        <a:t>La bauxite</a:t>
+                        <a:t>L'altération</a:t>
                       </a:r>
                       <a:endParaRPr lang="en-US" sz="2200" dirty="0">
                         <a:latin typeface="Calibri" charset="0"/>
@@ -18080,7 +19891,7 @@
                           <a:ea typeface="Calibri" pitchFamily="34" charset="-122"/>
                           <a:cs typeface="Calibri" pitchFamily="34" charset="-120"/>
                         </a:rPr>
-                        <a:t>Laterite</a:t>
+                        <a:t>Soil</a:t>
                       </a:r>
                       <a:endParaRPr lang="en-US" sz="2200" dirty="0">
                         <a:latin typeface="Calibri" charset="0"/>
@@ -18148,7 +19959,7 @@
                           <a:ea typeface="Calibri" pitchFamily="34" charset="-122"/>
                           <a:cs typeface="Calibri" pitchFamily="34" charset="-120"/>
                         </a:rPr>
-                        <a:t>La latérite</a:t>
+                        <a:t>Le sol</a:t>
                       </a:r>
                       <a:endParaRPr lang="en-US" sz="2200" dirty="0">
                         <a:latin typeface="Calibri" charset="0"/>
@@ -18218,7 +20029,7 @@
                           <a:ea typeface="Calibri" pitchFamily="34" charset="-122"/>
                           <a:cs typeface="Calibri" pitchFamily="34" charset="-120"/>
                         </a:rPr>
-                        <a:t>Soil</a:t>
+                        <a:t>Regolith</a:t>
                       </a:r>
                       <a:endParaRPr lang="en-US" sz="2200" dirty="0">
                         <a:latin typeface="Calibri" charset="0"/>
@@ -18286,7 +20097,7 @@
                           <a:ea typeface="Calibri" pitchFamily="34" charset="-122"/>
                           <a:cs typeface="Calibri" pitchFamily="34" charset="-120"/>
                         </a:rPr>
-                        <a:t>Le sol</a:t>
+                        <a:t>Le régolithe</a:t>
                       </a:r>
                       <a:endParaRPr lang="en-US" sz="2200" dirty="0">
                         <a:latin typeface="Calibri" charset="0"/>
@@ -18356,7 +20167,7 @@
                           <a:ea typeface="Calibri" pitchFamily="34" charset="-122"/>
                           <a:cs typeface="Calibri" pitchFamily="34" charset="-120"/>
                         </a:rPr>
-                        <a:t>Quarry</a:t>
+                        <a:t>Landscape</a:t>
                       </a:r>
                       <a:endParaRPr lang="en-US" sz="2200" dirty="0">
                         <a:latin typeface="Calibri" charset="0"/>
@@ -18424,7 +20235,7 @@
                           <a:ea typeface="Calibri" pitchFamily="34" charset="-122"/>
                           <a:cs typeface="Calibri" pitchFamily="34" charset="-120"/>
                         </a:rPr>
-                        <a:t>La carrière</a:t>
+                        <a:t>Le paysage</a:t>
                       </a:r>
                       <a:endParaRPr lang="en-US" sz="2200" dirty="0">
                         <a:latin typeface="Calibri" charset="0"/>
@@ -18494,7 +20305,7 @@
                           <a:ea typeface="Calibri" pitchFamily="34" charset="-122"/>
                           <a:cs typeface="Calibri" pitchFamily="34" charset="-120"/>
                         </a:rPr>
-                        <a:t>Landslide</a:t>
+                        <a:t>Resource</a:t>
                       </a:r>
                       <a:endParaRPr lang="en-US" sz="2200" dirty="0">
                         <a:latin typeface="Calibri" charset="0"/>
@@ -18562,7 +20373,7 @@
                           <a:ea typeface="Calibri" pitchFamily="34" charset="-122"/>
                           <a:cs typeface="Calibri" pitchFamily="34" charset="-120"/>
                         </a:rPr>
-                        <a:t>Le glissement de terrain</a:t>
+                        <a:t>La ressource</a:t>
                       </a:r>
                       <a:endParaRPr lang="en-US" sz="2200" dirty="0">
                         <a:latin typeface="Calibri" charset="0"/>
@@ -18798,7 +20609,7 @@
             <a:pPr algn="ctr"/>
             <a:fld id="{F7021451-1387-4CA6-816F-3879F97B5CBC}" type="slidenum">
               <a:rPr b="1" lang="en-US"/>
-              <a:t>50</a:t>
+              <a:t>54</a:t>
             </a:fld>
             <a:endParaRPr lang="en-US"/>
           </a:p>
@@ -18812,9 +20623,9 @@
 </p:sld>
 </file>
 
-<file path=ppt/slides/slide51.xml><?xml version="1.0" encoding="utf-8"?>
+<file path=ppt/slides/slide55.xml><?xml version="1.0" encoding="utf-8"?>
 <p:sld xmlns:a="http://schemas.openxmlformats.org/drawingml/2006/main" xmlns:r="http://schemas.openxmlformats.org/officeDocument/2006/relationships" xmlns:p="http://schemas.openxmlformats.org/presentationml/2006/main">
-  <p:cSld name="Slide 51">
+  <p:cSld name="Slide 55">
     <p:spTree>
       <p:nvGrpSpPr>
         <p:cNvPr id="1" name=""/>
@@ -18909,7 +20720,7 @@
       </p:sp>
       <p:graphicFrame>
         <p:nvGraphicFramePr>
-          <p:cNvPr id="52" name="Table 0"/>
+          <p:cNvPr id="56" name="Table 0"/>
           <p:cNvGraphicFramePr>
             <a:graphicFrameLocks noGrp="1"/>
           </p:cNvGraphicFramePr>
@@ -19295,7 +21106,7 @@
                           <a:ea typeface="Calibri" pitchFamily="34" charset="-122"/>
                           <a:cs typeface="Calibri" pitchFamily="34" charset="-120"/>
                         </a:rPr>
-                        <a:t>Identify the products of weathering used as resources. Explain the effects of weathering on the landscape. Explain the effects of weathering on man.</a:t>
+                        <a:t>Define regolith and soil. Explain the economic importance of weathering products. Explain the positive effects of weathering. Explain its negative effects.</a:t>
                       </a:r>
                       <a:endParaRPr lang="en-US" sz="1600" dirty="0">
                         <a:latin typeface="Calibri" charset="0"/>
@@ -19433,7 +21244,7 @@
                           <a:ea typeface="Calibri" pitchFamily="34" charset="-122"/>
                           <a:cs typeface="Calibri" pitchFamily="34" charset="-120"/>
                         </a:rPr>
-                        <a:t>Learners are able to explain the positive and negative impacts of weathering.</a:t>
+                        <a:t>Learners are able to explain the value of weathering products and the damage weathering causes.</a:t>
                       </a:r>
                       <a:endParaRPr lang="en-US" sz="1600" dirty="0">
                         <a:latin typeface="Calibri" charset="0"/>
@@ -19531,7 +21342,7 @@
             <a:pPr algn="ctr"/>
             <a:fld id="{F7021451-1387-4CA6-816F-3879F97B5CBC}" type="slidenum">
               <a:rPr b="1" lang="en-US"/>
-              <a:t>51</a:t>
+              <a:t>55</a:t>
             </a:fld>
             <a:endParaRPr lang="en-US"/>
           </a:p>
@@ -19545,9 +21356,9 @@
 </p:sld>
 </file>
 
-<file path=ppt/slides/slide52.xml><?xml version="1.0" encoding="utf-8"?>
+<file path=ppt/slides/slide56.xml><?xml version="1.0" encoding="utf-8"?>
 <p:sld xmlns:a="http://schemas.openxmlformats.org/drawingml/2006/main" xmlns:r="http://schemas.openxmlformats.org/officeDocument/2006/relationships" xmlns:p="http://schemas.openxmlformats.org/presentationml/2006/main">
-  <p:cSld name="Slide 52">
+  <p:cSld name="Slide 56">
     <p:spTree>
       <p:nvGrpSpPr>
         <p:cNvPr id="1" name=""/>
@@ -19642,7 +21453,7 @@
       </p:sp>
       <p:graphicFrame>
         <p:nvGraphicFramePr>
-          <p:cNvPr id="53" name="Table 0"/>
+          <p:cNvPr id="57" name="Table 0"/>
           <p:cNvGraphicFramePr>
             <a:graphicFrameLocks noGrp="1"/>
           </p:cNvGraphicFramePr>
@@ -19752,7 +21563,7 @@
                           <a:ea typeface="Calibri" pitchFamily="34" charset="-122"/>
                           <a:cs typeface="Calibri" pitchFamily="34" charset="-120"/>
                         </a:rPr>
-                        <a:t>DEFINITIONS; Products of Weathering as Resources; Effects of Weathering on the Landscape; Effects of Weathering on Man.</a:t>
+                        <a:t>DEFINITIONS; Products of Weathering as a Resource; Positive Effects; Negative Effects.</a:t>
                       </a:r>
                       <a:endParaRPr lang="en-US" sz="1600" dirty="0">
                         <a:latin typeface="Calibri" charset="0"/>
@@ -20028,7 +21839,7 @@
                           <a:ea typeface="Calibri" pitchFamily="34" charset="-122"/>
                           <a:cs typeface="Calibri" pitchFamily="34" charset="-120"/>
                         </a:rPr>
-                        <a:t>Look for signs of soil moving down a slope near your home (leaning posts, cracks). Write what you see.</a:t>
+                        <a:t>Define mass wasting.</a:t>
                       </a:r>
                       <a:endParaRPr lang="en-US" sz="1600" dirty="0">
                         <a:latin typeface="Calibri" charset="0"/>
@@ -20402,7 +22213,7 @@
             <a:pPr algn="ctr"/>
             <a:fld id="{F7021451-1387-4CA6-816F-3879F97B5CBC}" type="slidenum">
               <a:rPr b="1" lang="en-US"/>
-              <a:t>52</a:t>
+              <a:t>56</a:t>
             </a:fld>
             <a:endParaRPr lang="en-US"/>
           </a:p>
@@ -20416,9 +22227,9 @@
 </p:sld>
 </file>
 
-<file path=ppt/slides/slide53.xml><?xml version="1.0" encoding="utf-8"?>
+<file path=ppt/slides/slide57.xml><?xml version="1.0" encoding="utf-8"?>
 <p:sld xmlns:a="http://schemas.openxmlformats.org/drawingml/2006/main" xmlns:r="http://schemas.openxmlformats.org/officeDocument/2006/relationships" xmlns:p="http://schemas.openxmlformats.org/presentationml/2006/main">
-  <p:cSld name="Slide 53">
+  <p:cSld name="Slide 57">
     <p:spTree>
       <p:nvGrpSpPr>
         <p:cNvPr id="1" name=""/>
@@ -20595,7 +22406,7 @@
                 <a:ea typeface="Calibri" pitchFamily="34" charset="-122"/>
                 <a:cs typeface="Calibri" pitchFamily="34" charset="-120"/>
               </a:rPr>
-              <a:t>Without the projector (Activity 1): dig a small hole and show the layers.</a:t>
+              <a:t>Without the projector (Activity 1): draw a soil profile.</a:t>
             </a:r>
             <a:endParaRPr lang="en-US" sz="2000" dirty="0"/>
           </a:p>
@@ -20616,7 +22427,7 @@
                 <a:ea typeface="Calibri" pitchFamily="34" charset="-122"/>
                 <a:cs typeface="Calibri" pitchFamily="34" charset="-120"/>
               </a:rPr>
-              <a:t>Without the projector (Activity 2): show an aluminium pot.</a:t>
+              <a:t>Without the projector (Activity 2): name the bauxite of Minim-Martap.</a:t>
             </a:r>
             <a:endParaRPr lang="en-US" sz="2000" dirty="0"/>
           </a:p>
@@ -20637,7 +22448,7 @@
                 <a:ea typeface="Calibri" pitchFamily="34" charset="-122"/>
                 <a:cs typeface="Calibri" pitchFamily="34" charset="-120"/>
               </a:rPr>
-              <a:t>Without the projector (Activity 3): ask what materials are used to build houses in your area.</a:t>
+              <a:t>Without the projector (Activity 3): name crops of the North.</a:t>
             </a:r>
             <a:endParaRPr lang="en-US" sz="2000" dirty="0"/>
           </a:p>
@@ -20658,7 +22469,7 @@
                 <a:ea typeface="Calibri" pitchFamily="34" charset="-122"/>
                 <a:cs typeface="Calibri" pitchFamily="34" charset="-120"/>
               </a:rPr>
-              <a:t>Without the projector (Activity 4): describe landslides in the West Region.</a:t>
+              <a:t>Without the projector (Activity 4): describe Rhumsiki.</a:t>
             </a:r>
             <a:endParaRPr lang="en-US" sz="2000" dirty="0"/>
           </a:p>
@@ -20679,7 +22490,7 @@
                 <a:ea typeface="Calibri" pitchFamily="34" charset="-122"/>
                 <a:cs typeface="Calibri" pitchFamily="34" charset="-120"/>
               </a:rPr>
-              <a:t>Without the projector (Activity 5): show an old damaged wall.</a:t>
+              <a:t>Without the projector (Activity 5): look for cracks on the school walls.</a:t>
             </a:r>
             <a:endParaRPr lang="en-US" sz="2000" dirty="0"/>
           </a:p>
@@ -20727,7 +22538,7 @@
             <a:pPr algn="ctr"/>
             <a:fld id="{F7021451-1387-4CA6-816F-3879F97B5CBC}" type="slidenum">
               <a:rPr b="1" lang="en-US"/>
-              <a:t>53</a:t>
+              <a:t>57</a:t>
             </a:fld>
             <a:endParaRPr lang="en-US"/>
           </a:p>
@@ -20741,9 +22552,9 @@
 </p:sld>
 </file>
 
-<file path=ppt/slides/slide54.xml><?xml version="1.0" encoding="utf-8"?>
+<file path=ppt/slides/slide58.xml><?xml version="1.0" encoding="utf-8"?>
 <p:sld xmlns:a="http://schemas.openxmlformats.org/drawingml/2006/main" xmlns:r="http://schemas.openxmlformats.org/officeDocument/2006/relationships" xmlns:p="http://schemas.openxmlformats.org/presentationml/2006/main">
-  <p:cSld name="Slide 54">
+  <p:cSld name="Slide 58">
     <p:spTree>
       <p:nvGrpSpPr>
         <p:cNvPr id="1" name=""/>
@@ -20899,7 +22710,7 @@
                 <a:ea typeface="Calibri" pitchFamily="34" charset="-122"/>
                 <a:cs typeface="Calibri" pitchFamily="34" charset="-120"/>
               </a:rPr>
-              <a:t>National Geography Syllabus, MINESEC/IGE/IP-SS, 2019 — Module 2 (Geomorphology).</a:t>
+              <a:t>Geography Syllabus for Sixth Forms (Lower and Upper Sixth), MINESEC, 2019 — Module 2 (Geomorphology).</a:t>
             </a:r>
             <a:endParaRPr lang="en-US" sz="1800" dirty="0"/>
           </a:p>
@@ -20920,7 +22731,7 @@
                 <a:ea typeface="Calibri" pitchFamily="34" charset="-122"/>
                 <a:cs typeface="Calibri" pitchFamily="34" charset="-120"/>
               </a:rPr>
-              <a:t>Photo, Activity 2: “Bauxite mine near Itea, Greece” by Jason-Morrison, CC BY-NC 2.0, via Flickr (https://www.flickr.com/photos/8998833@N07/929316608)</a:t>
+              <a:t>Teacher's course notes: Mr KAMDEM E., Geomorphology (LSA), GBHS Garoua, 2026.</a:t>
             </a:r>
             <a:endParaRPr lang="en-US" sz="1800" dirty="0"/>
           </a:p>
@@ -20941,7 +22752,7 @@
                 <a:ea typeface="Calibri" pitchFamily="34" charset="-122"/>
                 <a:cs typeface="Calibri" pitchFamily="34" charset="-120"/>
               </a:rPr>
-              <a:t>Photo, Activity 3: “Laterite soil bricks in Richard Rebello's farm” by India Water Portal, CC BY-NC-SA 2.0, via Flickr (https://www.flickr.com/photos/21623815@N03/10720461943)</a:t>
+              <a:t>Photo, Activity 2: “Bauxite mine near Itea, Greece” by Jason-Morrison, CC BY-NC 2.0, via Flickr (https://www.flickr.com/photos/8998833@N07/929316608)</a:t>
             </a:r>
             <a:endParaRPr lang="en-US" sz="1800" dirty="0"/>
           </a:p>
@@ -20962,7 +22773,7 @@
                 <a:ea typeface="Calibri" pitchFamily="34" charset="-122"/>
                 <a:cs typeface="Calibri" pitchFamily="34" charset="-120"/>
               </a:rPr>
-              <a:t>Photo, Activity 4: “Siuslaw National Forest, landslide, road failure.jpg” by Forest Service Pacific Northwest Region, Public domain 1.0, via Flickr (https://www.flickr.com/photos/135886671@N08/36218241110)</a:t>
+              <a:t>Photo, Activity 3: “Cotton Fields, U.S. 65, Tensas Parish, Louisiana (4)” by Ken Lund, CC BY-SA 2.0, via Flickr (https://www.flickr.com/photos/75683070@N00/3934873451)</a:t>
             </a:r>
             <a:endParaRPr lang="en-US" sz="1800" dirty="0"/>
           </a:p>
@@ -20983,7 +22794,7 @@
                 <a:ea typeface="Calibri" pitchFamily="34" charset="-122"/>
                 <a:cs typeface="Calibri" pitchFamily="34" charset="-120"/>
               </a:rPr>
-              <a:t>Photo, Activity 5: “Moisturise Daily (Statue at Palladio's Teatro Olimpico), Vicenza” by flatworldsedge, CC BY-SA 2.0, via Flickr (https://www.flickr.com/photos/53196512@N07/5624073650)</a:t>
+              <a:t>Photo, Activity 4: “Rhumsiki peak, North Cameroon” by krishna.naudin, CC BY-SA 2.0, via Flickr (https://www.flickr.com/photos/141297921@N05/25989204581)</a:t>
             </a:r>
             <a:endParaRPr lang="en-US" sz="1800" dirty="0"/>
           </a:p>
@@ -21004,6 +22815,27 @@
                 <a:ea typeface="Calibri" pitchFamily="34" charset="-122"/>
                 <a:cs typeface="Calibri" pitchFamily="34" charset="-120"/>
               </a:rPr>
+              <a:t>Photo, Activity 5: “Cracked wall” by árticotropical, CC BY 2.0, via Flickr (https://www.flickr.com/photos/8581973@N02/521943309)</a:t>
+            </a:r>
+            <a:endParaRPr lang="en-US" sz="1800" dirty="0"/>
+          </a:p>
+          <a:p>
+            <a:pPr algn="l" marL="342900" indent="-342900">
+              <a:spcAft>
+                <a:spcPts val="800"/>
+              </a:spcAft>
+              <a:buSzPct val="100000"/>
+              <a:buChar char="•"/>
+            </a:pPr>
+            <a:r>
+              <a:rPr lang="en-US" sz="1800" dirty="0">
+                <a:solidFill>
+                  <a:srgbClr val="111111"/>
+                </a:solidFill>
+                <a:latin typeface="Calibri" pitchFamily="34" charset="0"/>
+                <a:ea typeface="Calibri" pitchFamily="34" charset="-122"/>
+                <a:cs typeface="Calibri" pitchFamily="34" charset="-120"/>
+              </a:rPr>
               <a:t>Diagrams and animations: drawn for this lesson (Geography Department).</a:t>
             </a:r>
             <a:endParaRPr lang="en-US" sz="1800" dirty="0"/>
@@ -21052,7 +22884,7 @@
             <a:pPr algn="ctr"/>
             <a:fld id="{F7021451-1387-4CA6-816F-3879F97B5CBC}" type="slidenum">
               <a:rPr b="1" lang="en-US"/>
-              <a:t>54</a:t>
+              <a:t>58</a:t>
             </a:fld>
             <a:endParaRPr lang="en-US"/>
           </a:p>
@@ -21470,7 +23302,7 @@
         <p:spPr>
           <a:xfrm>
             <a:off x="0" y="658368"/>
-            <a:ext cx="3840480" cy="5833872"/>
+            <a:ext cx="5120640" cy="5833872"/>
           </a:xfrm>
           <a:prstGeom prst="rect">
             <a:avLst/>
@@ -21485,8 +23317,8 @@
         </p:nvSpPr>
         <p:spPr>
           <a:xfrm>
-            <a:off x="4069080" y="1005840"/>
-            <a:ext cx="7802575" cy="731520"/>
+            <a:off x="5349240" y="1005840"/>
+            <a:ext cx="6522415" cy="731520"/>
           </a:xfrm>
           <a:prstGeom prst="rect">
             <a:avLst/>
@@ -21526,8 +23358,8 @@
         </p:nvSpPr>
         <p:spPr>
           <a:xfrm>
-            <a:off x="4069080" y="1783080"/>
-            <a:ext cx="7802575" cy="4663440"/>
+            <a:off x="5349240" y="1783080"/>
+            <a:ext cx="6522415" cy="4663440"/>
           </a:xfrm>
           <a:prstGeom prst="rect">
             <a:avLst/>
@@ -21576,7 +23408,7 @@
                 <a:ea typeface="Times New Roman" pitchFamily="34" charset="-122"/>
                 <a:cs typeface="Times New Roman" pitchFamily="34" charset="-120"/>
               </a:rPr>
-              <a:t>Identify the products of weathering used as resources.</a:t>
+              <a:t>Define regolith and soil.</a:t>
             </a:r>
             <a:endParaRPr lang="en-US" sz="4000" dirty="0"/>
           </a:p>
@@ -21598,7 +23430,7 @@
                 <a:ea typeface="Times New Roman" pitchFamily="34" charset="-122"/>
                 <a:cs typeface="Times New Roman" pitchFamily="34" charset="-120"/>
               </a:rPr>
-              <a:t>Explain the effects of weathering on the landscape.</a:t>
+              <a:t>Explain the economic importance of weathering products.</a:t>
             </a:r>
             <a:endParaRPr lang="en-US" sz="4000" dirty="0"/>
           </a:p>
@@ -21819,7 +23651,29 @@
                 <a:ea typeface="Times New Roman" pitchFamily="34" charset="-122"/>
                 <a:cs typeface="Times New Roman" pitchFamily="34" charset="-120"/>
               </a:rPr>
-              <a:t>Explain the effects of weathering on man.</a:t>
+              <a:t>Explain the positive effects of weathering.</a:t>
+            </a:r>
+            <a:endParaRPr lang="en-US" sz="4000" dirty="0"/>
+          </a:p>
+          <a:p>
+            <a:pPr algn="l" marL="342900" indent="-342900">
+              <a:spcAft>
+                <a:spcPts val="800"/>
+              </a:spcAft>
+              <a:buSzPct val="100000"/>
+              <a:buFont typeface="+mj-lt"/>
+              <a:buAutoNum type="arabicPeriod" startAt="1"/>
+            </a:pPr>
+            <a:r>
+              <a:rPr lang="en-US" sz="4000" dirty="0">
+                <a:solidFill>
+                  <a:srgbClr val="111111"/>
+                </a:solidFill>
+                <a:latin typeface="Times New Roman" pitchFamily="34" charset="0"/>
+                <a:ea typeface="Times New Roman" pitchFamily="34" charset="-122"/>
+                <a:cs typeface="Times New Roman" pitchFamily="34" charset="-120"/>
+              </a:rPr>
+              <a:t>Explain its negative effects.</a:t>
             </a:r>
             <a:endParaRPr lang="en-US" sz="4000" dirty="0"/>
           </a:p>
@@ -22039,7 +23893,7 @@
                 <a:ea typeface="Times New Roman" pitchFamily="34" charset="-122"/>
                 <a:cs typeface="Times New Roman" pitchFamily="34" charset="-120"/>
               </a:rPr>
-              <a:t>Weathering is strong in hot, wet climates.</a:t>
+              <a:t>Climate controls weathering.</a:t>
             </a:r>
             <a:endParaRPr lang="en-US" sz="4000" dirty="0"/>
           </a:p>
@@ -22060,7 +23914,28 @@
                 <a:ea typeface="Times New Roman" pitchFamily="34" charset="-122"/>
                 <a:cs typeface="Times New Roman" pitchFamily="34" charset="-120"/>
               </a:rPr>
-              <a:t>It produces a regolith.</a:t>
+              <a:t>Oxidation gives red soils.</a:t>
+            </a:r>
+            <a:endParaRPr lang="en-US" sz="4000" dirty="0"/>
+          </a:p>
+          <a:p>
+            <a:pPr algn="l" marL="342900" indent="-342900">
+              <a:spcAft>
+                <a:spcPts val="800"/>
+              </a:spcAft>
+              <a:buSzPct val="100000"/>
+              <a:buChar char="•"/>
+            </a:pPr>
+            <a:r>
+              <a:rPr lang="en-US" sz="4000" dirty="0">
+                <a:solidFill>
+                  <a:srgbClr val="111111"/>
+                </a:solidFill>
+                <a:latin typeface="Times New Roman" pitchFamily="34" charset="0"/>
+                <a:ea typeface="Times New Roman" pitchFamily="34" charset="-122"/>
+                <a:cs typeface="Times New Roman" pitchFamily="34" charset="-120"/>
+              </a:rPr>
+              <a:t>The North grows cotton, millet and sorghum.</a:t>
             </a:r>
             <a:endParaRPr lang="en-US" sz="4000" dirty="0"/>
           </a:p>

--- a/lecons/LSA/Geomorphology/13_LSA_GEOMO_L11_The_Impact_of_Weathering.pptx
+++ b/lecons/LSA/Geomorphology/13_LSA_GEOMO_L11_The_Impact_of_Weathering.pptx
@@ -63,9 +63,12 @@
     <p:sldId id="311" r:id="rId57"/>
     <p:sldId id="312" r:id="rId58"/>
     <p:sldId id="313" r:id="rId59"/>
+    <p:sldId id="314" r:id="rId60"/>
+    <p:sldId id="315" r:id="rId61"/>
+    <p:sldId id="316" r:id="rId62"/>
   </p:sldIdLst>
   <p:notesMasterIdLst>
-    <p:notesMasterId r:id="rId60"/>
+    <p:notesMasterId r:id="rId63"/>
   </p:notesMasterIdLst>
   <p:sldSz cx="12192000" cy="6858000"/>
   <p:notesSz cx="6858000" cy="12192000"/>
@@ -3199,7 +3202,7 @@
           <a:p>
             <a:r>
               <a:rPr lang="en-US" dirty="0"/>
-              <a:t>We continue with the definitions. On this slide we have Soil and Leaching. Write each point on a new line, with the key term first, and explain it in your own words when we revise.</a:t>
+              <a:t>We continue with the definitions. On this slide we have Soil, Inselberg and Leaching. Write each point on a new line, with the key term first, and explain it in your own words when we revise.</a:t>
             </a:r>
             <a:endParaRPr lang="en-US" dirty="0"/>
           </a:p>
@@ -3287,7 +3290,7 @@
           <a:p>
             <a:r>
               <a:rPr lang="en-US" dirty="0"/>
-              <a:t>Let us copy Products of Weathering as a Resource. The products of weathering are useful resources as follows. Copy the point on Regolith on the left, then draw the diagram on the right: a soil profile. Give it a title and label it clearly.</a:t>
+              <a:t>Let us copy Products of Weathering as a Resource. The products of weathering have the following economic importance. Copy the point on Soil for agriculture on the left, then draw the diagram on the right: a cotton field. Give it a title and label it clearly.</a:t>
             </a:r>
             <a:endParaRPr lang="en-US" dirty="0"/>
           </a:p>
@@ -3375,7 +3378,7 @@
           <a:p>
             <a:r>
               <a:rPr lang="en-US" dirty="0"/>
-              <a:t>Copy the point on Soil for agriculture on the left, then draw the diagram on the right: a cotton field. Give it a title and label it clearly.</a:t>
+              <a:t>We continue with Products of Weathering as a Resource. Copy the point on Construction materials: write the key term first, then its explanation.</a:t>
             </a:r>
             <a:endParaRPr lang="en-US" dirty="0"/>
           </a:p>
@@ -3551,7 +3554,7 @@
           <a:p>
             <a:r>
               <a:rPr lang="en-US" dirty="0"/>
-              <a:t>We continue with Products of Weathering as a Resource. On this slide we have Construction materials. Write each point on a new line, with the key term first, and explain it in your own words when we revise.</a:t>
+              <a:t>Copy the point on Mineral ores on the left, then draw the diagram on the right: bauxite. Give it a title and label it clearly.</a:t>
             </a:r>
             <a:endParaRPr lang="en-US" dirty="0"/>
           </a:p>
@@ -3639,7 +3642,7 @@
           <a:p>
             <a:r>
               <a:rPr lang="en-US" dirty="0"/>
-              <a:t>Copy the point on Mineral ores on the left, then draw the diagram on the right: bauxite. Give it a title and label it clearly.</a:t>
+              <a:t>We continue with Products of Weathering as a Resource. Copy the point on Groundwater storage: write the key term first, then its explanation.</a:t>
             </a:r>
             <a:endParaRPr lang="en-US" dirty="0"/>
           </a:p>
@@ -3727,7 +3730,7 @@
           <a:p>
             <a:r>
               <a:rPr lang="en-US" dirty="0"/>
-              <a:t>Let us copy Positive Effects. Weathering has the following positive effects. On this slide we have Creation of soil. Write each point on a new line, with the key term first, and explain it in your own words when we revise.</a:t>
+              <a:t>Let us copy Effects of Weathering on the Landscape. Weathering shapes the landscape in the following ways. Copy the point on Inselbergs and tors on the left, then draw the diagram on the right: an inselberg. Give it a title and label it clearly.</a:t>
             </a:r>
             <a:endParaRPr lang="en-US" dirty="0"/>
           </a:p>
@@ -3815,7 +3818,7 @@
           <a:p>
             <a:r>
               <a:rPr lang="en-US" dirty="0"/>
-              <a:t>Copy the point on Landscapes on the left, then draw the diagram on the right: landscape near Rhumsiki. Give it a title and label it clearly.</a:t>
+              <a:t>Copy the point on Rounded boulders and domes on the left, then draw the diagram on the right: the landscape of Rhumsiki. Give it a title and label it clearly.</a:t>
             </a:r>
             <a:endParaRPr lang="en-US" dirty="0"/>
           </a:p>
@@ -3903,7 +3906,7 @@
           <a:p>
             <a:r>
               <a:rPr lang="en-US" dirty="0"/>
-              <a:t>We continue with Positive Effects. On this slide we have Groundwater. Write each point on a new line, with the key term first, and explain it in your own words when we revise.</a:t>
+              <a:t>We continue with Effects of Weathering on the Landscape. Copy the point on Karst landscapes: write the key term first, then its explanation.</a:t>
             </a:r>
             <a:endParaRPr lang="en-US" dirty="0"/>
           </a:p>
@@ -3991,7 +3994,7 @@
           <a:p>
             <a:r>
               <a:rPr lang="en-US" dirty="0"/>
-              <a:t>Let us copy Negative Effects. Weathering has the following negative effects. Copy the point on Damage to structures on the left, then draw the diagram on the right: a weathered wall. Give it a title and label it clearly.</a:t>
+              <a:t>We continue with Effects of Weathering on the Landscape. Copy the point on Deep regolith and laterite: write the key term first, then its explanation.</a:t>
             </a:r>
             <a:endParaRPr lang="en-US" dirty="0"/>
           </a:p>
@@ -4079,7 +4082,7 @@
           <a:p>
             <a:r>
               <a:rPr lang="en-US" dirty="0"/>
-              <a:t>We continue with Negative Effects. On this slide we have Hazards and Leaching. Write each point on a new line, with the key term first, and explain it in your own words when we revise.</a:t>
+              <a:t>Let us copy Effects of Weathering on Man. Weathering affects man in the following ways. Copy the point on Farming and tourism: write the key term first, then its explanation.</a:t>
             </a:r>
             <a:endParaRPr lang="en-US" dirty="0"/>
           </a:p>
@@ -4167,7 +4170,7 @@
           <a:p>
             <a:r>
               <a:rPr lang="en-US" dirty="0"/>
-              <a:t>Now let us check what you have understood. Question 1: Give two economic uses of weathering products. Answer in your exercise book.</a:t>
+              <a:t>Copy the point on Damage to structures on the left, then draw the diagram on the right: a weathered wall. Give it a title and label it clearly.</a:t>
             </a:r>
             <a:endParaRPr lang="en-US" dirty="0"/>
           </a:p>
@@ -4255,7 +4258,7 @@
           <a:p>
             <a:r>
               <a:rPr lang="en-US" dirty="0"/>
-              <a:t>The expected answer is: soils for farming, sand and gravel for building, clay for bricks, bauxite ore (any two). If you got it right, well done.</a:t>
+              <a:t>We continue with Effects of Weathering on Man. Copy the point on Slope hazards: write the key term first, then its explanation.</a:t>
             </a:r>
             <a:endParaRPr lang="en-US" dirty="0"/>
           </a:p>
@@ -4343,7 +4346,7 @@
           <a:p>
             <a:r>
               <a:rPr lang="en-US" dirty="0"/>
-              <a:t>Now let us check what you have understood. Question 2: Give one positive and one negative effect of weathering. Answer in your exercise book.</a:t>
+              <a:t>Copy the point on Loss of soil fertility on the left, then draw the diagram on the right: the impacts of weathering. Give it a title and label it clearly.</a:t>
             </a:r>
             <a:endParaRPr lang="en-US" dirty="0"/>
           </a:p>
@@ -4519,7 +4522,7 @@
           <a:p>
             <a:r>
               <a:rPr lang="en-US" dirty="0"/>
-              <a:t>The expected answer is: positive: soil formation; negative: damage to buildings and roads. If you got it right, well done.</a:t>
+              <a:t>Now let us check what you have understood. Question 1: Give two economic uses of weathering products. Answer in your exercise book.</a:t>
             </a:r>
             <a:endParaRPr lang="en-US" dirty="0"/>
           </a:p>
@@ -4607,7 +4610,7 @@
           <a:p>
             <a:r>
               <a:rPr lang="en-US" dirty="0"/>
-              <a:t>For those who need more practice, fill in the blanks in your exercise book. The answers are: number 1, regolith; number 2, bauxite; number 3, leaching.</a:t>
+              <a:t>The expected answer is: soils for farming, sand and gravel for building, clay for bricks, bauxite ore (any two). If you got it right, well done.</a:t>
             </a:r>
             <a:endParaRPr lang="en-US" dirty="0"/>
           </a:p>
@@ -4695,7 +4698,7 @@
           <a:p>
             <a:r>
               <a:rPr lang="en-US" dirty="0"/>
-              <a:t>For your homework: Define mass wasting. We shall correct it at the beginning of our next lesson.</a:t>
+              <a:t>Now let us check what you have understood. Question 2: Give one positive and one negative effect of weathering. Answer in your exercise book.</a:t>
             </a:r>
             <a:endParaRPr lang="en-US" dirty="0"/>
           </a:p>
@@ -4783,7 +4786,7 @@
           <a:p>
             <a:r>
               <a:rPr lang="en-US" dirty="0"/>
-              <a:t>Our next lesson will be on Lesson 12: Mass Wasting (Movement). Thank you for your attention, and see you next time.</a:t>
+              <a:t>The expected answer is: positive: soil formation; negative: damage to buildings and roads. If you got it right, well done.</a:t>
             </a:r>
             <a:endParaRPr lang="en-US" dirty="0"/>
           </a:p>
@@ -4871,7 +4874,7 @@
           <a:p>
             <a:r>
               <a:rPr lang="en-US" dirty="0"/>
-              <a:t>Let us play the bilingual game. I say a word in English, and you give me the French word. Then we do the reverse.</a:t>
+              <a:t>For those who need more practice, fill in the blanks in your exercise book. The answers are: number 1, regolith; number 2, bauxite; number 3, leaching.</a:t>
             </a:r>
             <a:endParaRPr lang="en-US" dirty="0"/>
           </a:p>
@@ -4959,7 +4962,7 @@
           <a:p>
             <a:r>
               <a:rPr lang="en-US" dirty="0"/>
-              <a:t>I record this information in the official logbook of the class after the lesson.</a:t>
+              <a:t>For your homework: Define mass wasting. We shall correct it at the beginning of our next lesson.</a:t>
             </a:r>
             <a:endParaRPr lang="en-US" dirty="0"/>
           </a:p>
@@ -5047,7 +5050,7 @@
           <a:p>
             <a:r>
               <a:rPr lang="en-US" dirty="0"/>
-              <a:t>I complete the second page of the logbook: the matter taught, the evaluation, the homework and the attendance.</a:t>
+              <a:t>Our next lesson will be on Lesson 12: Mass Wasting (Movement). Thank you for your attention, and see you next time.</a:t>
             </a:r>
             <a:endParaRPr lang="en-US" dirty="0"/>
           </a:p>
@@ -5135,7 +5138,7 @@
           <a:p>
             <a:r>
               <a:rPr lang="en-US" dirty="0"/>
-              <a:t>This slide is for me, the teacher: it gives the timing of the lesson and what to do if the projector is not available.</a:t>
+              <a:t>Let us play the bilingual game. I say a word in English, and you give me the French word. Then we do the reverse.</a:t>
             </a:r>
             <a:endParaRPr lang="en-US" dirty="0"/>
           </a:p>
@@ -5223,7 +5226,7 @@
           <a:p>
             <a:r>
               <a:rPr lang="en-US" dirty="0"/>
-              <a:t>These are the references and picture credits used to prepare this lesson.</a:t>
+              <a:t>I record this information in the official logbook of the class after the lesson.</a:t>
             </a:r>
             <a:endParaRPr lang="en-US" dirty="0"/>
           </a:p>
@@ -5247,6 +5250,94 @@
             <a:fld id="{F7021451-1387-4CA6-816F-3879F97B5CBC}" type="slidenum">
               <a:rPr lang="en-US"/>
               <a:t>58</a:t>
+            </a:fld>
+            <a:endParaRPr lang="en-US"/>
+          </a:p>
+        </p:txBody>
+      </p:sp>
+    </p:spTree>
+    <p:extLst>
+      <p:ext uri="{BB962C8B-B14F-4D97-AF65-F5344CB8AC3E}">
+        <p14:creationId xmlns:p14="http://schemas.microsoft.com/office/powerpoint/2010/main" val="1024086991"/>
+      </p:ext>
+    </p:extLst>
+  </p:cSld>
+  <p:clrMapOvr>
+    <a:masterClrMapping/>
+  </p:clrMapOvr>
+</p:notes>
+</file>
+
+<file path=ppt/notesSlides/notesSlide59.xml><?xml version="1.0" encoding="utf-8"?>
+<p:notes xmlns:a="http://schemas.openxmlformats.org/drawingml/2006/main" xmlns:r="http://schemas.openxmlformats.org/officeDocument/2006/relationships" xmlns:p="http://schemas.openxmlformats.org/presentationml/2006/main">
+  <p:cSld>
+    <p:spTree>
+      <p:nvGrpSpPr>
+        <p:cNvPr id="1" name=""/>
+        <p:cNvGrpSpPr/>
+        <p:nvPr/>
+      </p:nvGrpSpPr>
+      <p:grpSpPr>
+        <a:xfrm>
+          <a:off x="0" y="0"/>
+          <a:ext cx="0" cy="0"/>
+          <a:chOff x="0" y="0"/>
+          <a:chExt cx="0" cy="0"/>
+        </a:xfrm>
+      </p:grpSpPr>
+      <p:sp>
+        <p:nvSpPr>
+          <p:cNvPr id="2" name="Slide Image Placeholder 1"/>
+          <p:cNvSpPr>
+            <a:spLocks noGrp="1" noRot="1" noChangeAspect="1"/>
+          </p:cNvSpPr>
+          <p:nvPr>
+            <p:ph type="sldImg"/>
+          </p:nvPr>
+        </p:nvSpPr>
+        <p:spPr/>
+      </p:sp>
+      <p:sp>
+        <p:nvSpPr>
+          <p:cNvPr id="3" name="Notes Placeholder 2"/>
+          <p:cNvSpPr>
+            <a:spLocks noGrp="1"/>
+          </p:cNvSpPr>
+          <p:nvPr>
+            <p:ph type="body" idx="1"/>
+          </p:nvPr>
+        </p:nvSpPr>
+        <p:spPr/>
+        <p:txBody>
+          <a:bodyPr/>
+          <a:lstStyle/>
+          <a:p>
+            <a:r>
+              <a:rPr lang="en-US" dirty="0"/>
+              <a:t>I complete the second page of the logbook: the matter taught, the evaluation, the homework and the attendance.</a:t>
+            </a:r>
+            <a:endParaRPr lang="en-US" dirty="0"/>
+          </a:p>
+        </p:txBody>
+      </p:sp>
+      <p:sp>
+        <p:nvSpPr>
+          <p:cNvPr id="4" name="Slide Number Placeholder 3"/>
+          <p:cNvSpPr>
+            <a:spLocks noGrp="1"/>
+          </p:cNvSpPr>
+          <p:nvPr>
+            <p:ph type="sldNum" sz="quarter" idx="10"/>
+          </p:nvPr>
+        </p:nvSpPr>
+        <p:spPr/>
+        <p:txBody>
+          <a:bodyPr/>
+          <a:lstStyle/>
+          <a:p>
+            <a:fld id="{F7021451-1387-4CA6-816F-3879F97B5CBC}" type="slidenum">
+              <a:rPr lang="en-US"/>
+              <a:t>59</a:t>
             </a:fld>
             <a:endParaRPr lang="en-US"/>
           </a:p>
@@ -5335,6 +5426,182 @@
             <a:fld id="{F7021451-1387-4CA6-816F-3879F97B5CBC}" type="slidenum">
               <a:rPr lang="en-US"/>
               <a:t>6</a:t>
+            </a:fld>
+            <a:endParaRPr lang="en-US"/>
+          </a:p>
+        </p:txBody>
+      </p:sp>
+    </p:spTree>
+    <p:extLst>
+      <p:ext uri="{BB962C8B-B14F-4D97-AF65-F5344CB8AC3E}">
+        <p14:creationId xmlns:p14="http://schemas.microsoft.com/office/powerpoint/2010/main" val="1024086991"/>
+      </p:ext>
+    </p:extLst>
+  </p:cSld>
+  <p:clrMapOvr>
+    <a:masterClrMapping/>
+  </p:clrMapOvr>
+</p:notes>
+</file>
+
+<file path=ppt/notesSlides/notesSlide60.xml><?xml version="1.0" encoding="utf-8"?>
+<p:notes xmlns:a="http://schemas.openxmlformats.org/drawingml/2006/main" xmlns:r="http://schemas.openxmlformats.org/officeDocument/2006/relationships" xmlns:p="http://schemas.openxmlformats.org/presentationml/2006/main">
+  <p:cSld>
+    <p:spTree>
+      <p:nvGrpSpPr>
+        <p:cNvPr id="1" name=""/>
+        <p:cNvGrpSpPr/>
+        <p:nvPr/>
+      </p:nvGrpSpPr>
+      <p:grpSpPr>
+        <a:xfrm>
+          <a:off x="0" y="0"/>
+          <a:ext cx="0" cy="0"/>
+          <a:chOff x="0" y="0"/>
+          <a:chExt cx="0" cy="0"/>
+        </a:xfrm>
+      </p:grpSpPr>
+      <p:sp>
+        <p:nvSpPr>
+          <p:cNvPr id="2" name="Slide Image Placeholder 1"/>
+          <p:cNvSpPr>
+            <a:spLocks noGrp="1" noRot="1" noChangeAspect="1"/>
+          </p:cNvSpPr>
+          <p:nvPr>
+            <p:ph type="sldImg"/>
+          </p:nvPr>
+        </p:nvSpPr>
+        <p:spPr/>
+      </p:sp>
+      <p:sp>
+        <p:nvSpPr>
+          <p:cNvPr id="3" name="Notes Placeholder 2"/>
+          <p:cNvSpPr>
+            <a:spLocks noGrp="1"/>
+          </p:cNvSpPr>
+          <p:nvPr>
+            <p:ph type="body" idx="1"/>
+          </p:nvPr>
+        </p:nvSpPr>
+        <p:spPr/>
+        <p:txBody>
+          <a:bodyPr/>
+          <a:lstStyle/>
+          <a:p>
+            <a:r>
+              <a:rPr lang="en-US" dirty="0"/>
+              <a:t>This slide is for me, the teacher: it gives the timing of the lesson and what to do if the projector is not available.</a:t>
+            </a:r>
+            <a:endParaRPr lang="en-US" dirty="0"/>
+          </a:p>
+        </p:txBody>
+      </p:sp>
+      <p:sp>
+        <p:nvSpPr>
+          <p:cNvPr id="4" name="Slide Number Placeholder 3"/>
+          <p:cNvSpPr>
+            <a:spLocks noGrp="1"/>
+          </p:cNvSpPr>
+          <p:nvPr>
+            <p:ph type="sldNum" sz="quarter" idx="10"/>
+          </p:nvPr>
+        </p:nvSpPr>
+        <p:spPr/>
+        <p:txBody>
+          <a:bodyPr/>
+          <a:lstStyle/>
+          <a:p>
+            <a:fld id="{F7021451-1387-4CA6-816F-3879F97B5CBC}" type="slidenum">
+              <a:rPr lang="en-US"/>
+              <a:t>60</a:t>
+            </a:fld>
+            <a:endParaRPr lang="en-US"/>
+          </a:p>
+        </p:txBody>
+      </p:sp>
+    </p:spTree>
+    <p:extLst>
+      <p:ext uri="{BB962C8B-B14F-4D97-AF65-F5344CB8AC3E}">
+        <p14:creationId xmlns:p14="http://schemas.microsoft.com/office/powerpoint/2010/main" val="1024086991"/>
+      </p:ext>
+    </p:extLst>
+  </p:cSld>
+  <p:clrMapOvr>
+    <a:masterClrMapping/>
+  </p:clrMapOvr>
+</p:notes>
+</file>
+
+<file path=ppt/notesSlides/notesSlide61.xml><?xml version="1.0" encoding="utf-8"?>
+<p:notes xmlns:a="http://schemas.openxmlformats.org/drawingml/2006/main" xmlns:r="http://schemas.openxmlformats.org/officeDocument/2006/relationships" xmlns:p="http://schemas.openxmlformats.org/presentationml/2006/main">
+  <p:cSld>
+    <p:spTree>
+      <p:nvGrpSpPr>
+        <p:cNvPr id="1" name=""/>
+        <p:cNvGrpSpPr/>
+        <p:nvPr/>
+      </p:nvGrpSpPr>
+      <p:grpSpPr>
+        <a:xfrm>
+          <a:off x="0" y="0"/>
+          <a:ext cx="0" cy="0"/>
+          <a:chOff x="0" y="0"/>
+          <a:chExt cx="0" cy="0"/>
+        </a:xfrm>
+      </p:grpSpPr>
+      <p:sp>
+        <p:nvSpPr>
+          <p:cNvPr id="2" name="Slide Image Placeholder 1"/>
+          <p:cNvSpPr>
+            <a:spLocks noGrp="1" noRot="1" noChangeAspect="1"/>
+          </p:cNvSpPr>
+          <p:nvPr>
+            <p:ph type="sldImg"/>
+          </p:nvPr>
+        </p:nvSpPr>
+        <p:spPr/>
+      </p:sp>
+      <p:sp>
+        <p:nvSpPr>
+          <p:cNvPr id="3" name="Notes Placeholder 2"/>
+          <p:cNvSpPr>
+            <a:spLocks noGrp="1"/>
+          </p:cNvSpPr>
+          <p:nvPr>
+            <p:ph type="body" idx="1"/>
+          </p:nvPr>
+        </p:nvSpPr>
+        <p:spPr/>
+        <p:txBody>
+          <a:bodyPr/>
+          <a:lstStyle/>
+          <a:p>
+            <a:r>
+              <a:rPr lang="en-US" dirty="0"/>
+              <a:t>These are the references and picture credits used to prepare this lesson.</a:t>
+            </a:r>
+            <a:endParaRPr lang="en-US" dirty="0"/>
+          </a:p>
+        </p:txBody>
+      </p:sp>
+      <p:sp>
+        <p:nvSpPr>
+          <p:cNvPr id="4" name="Slide Number Placeholder 3"/>
+          <p:cNvSpPr>
+            <a:spLocks noGrp="1"/>
+          </p:cNvSpPr>
+          <p:nvPr>
+            <p:ph type="sldNum" sz="quarter" idx="10"/>
+          </p:nvPr>
+        </p:nvSpPr>
+        <p:spPr/>
+        <p:txBody>
+          <a:bodyPr/>
+          <a:lstStyle/>
+          <a:p>
+            <a:fld id="{F7021451-1387-4CA6-816F-3879F97B5CBC}" type="slidenum">
+              <a:rPr lang="en-US"/>
+              <a:t>61</a:t>
             </a:fld>
             <a:endParaRPr lang="en-US"/>
           </a:p>
@@ -14584,7 +14851,7 @@
         <p:spPr>
           <a:xfrm>
             <a:off x="0" y="658368"/>
-            <a:ext cx="5120640" cy="5833872"/>
+            <a:ext cx="1463040" cy="5833872"/>
           </a:xfrm>
           <a:prstGeom prst="rect">
             <a:avLst/>
@@ -14599,8 +14866,8 @@
         </p:nvSpPr>
         <p:spPr>
           <a:xfrm>
-            <a:off x="5349240" y="1005840"/>
-            <a:ext cx="6522415" cy="731520"/>
+            <a:off x="1691640" y="1005840"/>
+            <a:ext cx="10180015" cy="731520"/>
           </a:xfrm>
           <a:prstGeom prst="rect">
             <a:avLst/>
@@ -14640,8 +14907,8 @@
         </p:nvSpPr>
         <p:spPr>
           <a:xfrm>
-            <a:off x="5349240" y="1783080"/>
-            <a:ext cx="6522415" cy="4663440"/>
+            <a:off x="1691640" y="1783080"/>
+            <a:ext cx="10180015" cy="4663440"/>
           </a:xfrm>
           <a:prstGeom prst="rect">
             <a:avLst/>
@@ -14686,6 +14953,43 @@
                 <a:cs typeface="Times New Roman" pitchFamily="34" charset="-120"/>
               </a:rPr>
               <a:t>It is the upper part of the regolith, mixed with water, air and humus, which supports plants.</a:t>
+            </a:r>
+            <a:endParaRPr lang="en-US" sz="4000" dirty="0"/>
+          </a:p>
+          <a:p>
+            <a:pPr algn="l" indent="0" marL="0">
+              <a:spcAft>
+                <a:spcPts val="800"/>
+              </a:spcAft>
+              <a:buNone/>
+            </a:pPr>
+            <a:r>
+              <a:rPr lang="en-US" sz="4000" b="1" dirty="0">
+                <a:solidFill>
+                  <a:srgbClr val="111111"/>
+                </a:solidFill>
+                <a:latin typeface="Times New Roman" pitchFamily="34" charset="0"/>
+                <a:ea typeface="Times New Roman" pitchFamily="34" charset="-122"/>
+                <a:cs typeface="Times New Roman" pitchFamily="34" charset="-120"/>
+              </a:rPr>
+              <a:t>Inselberg: </a:t>
+            </a:r>
+            <a:pPr algn="l" indent="0" marL="0">
+              <a:spcAft>
+                <a:spcPts val="800"/>
+              </a:spcAft>
+              <a:buNone/>
+            </a:pPr>
+            <a:r>
+              <a:rPr lang="en-US" sz="4000" dirty="0">
+                <a:solidFill>
+                  <a:srgbClr val="111111"/>
+                </a:solidFill>
+                <a:latin typeface="Times New Roman" pitchFamily="34" charset="0"/>
+                <a:ea typeface="Times New Roman" pitchFamily="34" charset="-122"/>
+                <a:cs typeface="Times New Roman" pitchFamily="34" charset="-120"/>
+              </a:rPr>
+              <a:t>It is an isolated hill of hard rock rising steeply from a plain.</a:t>
             </a:r>
             <a:endParaRPr lang="en-US" sz="4000" dirty="0"/>
           </a:p>
@@ -14890,7 +15194,7 @@
         <p:spPr>
           <a:xfrm>
             <a:off x="365760" y="1783080"/>
-            <a:ext cx="4846320" cy="4617720"/>
+            <a:ext cx="6035040" cy="4617720"/>
           </a:xfrm>
           <a:prstGeom prst="rect">
             <a:avLst/>
@@ -14909,7 +15213,7 @@
               <a:buNone/>
             </a:pPr>
             <a:r>
-              <a:rPr lang="en-US" sz="3600" i="1" dirty="0">
+              <a:rPr lang="en-US" sz="3000" i="1" dirty="0">
                 <a:solidFill>
                   <a:srgbClr val="111111"/>
                 </a:solidFill>
@@ -14917,9 +15221,9 @@
                 <a:ea typeface="Times New Roman" pitchFamily="34" charset="-122"/>
                 <a:cs typeface="Times New Roman" pitchFamily="34" charset="-120"/>
               </a:rPr>
-              <a:t>The products of weathering are useful resources as follows:</a:t>
-            </a:r>
-            <a:endParaRPr lang="en-US" sz="3600" dirty="0"/>
+              <a:t>The products of weathering have the following economic importance:</a:t>
+            </a:r>
+            <a:endParaRPr lang="en-US" sz="3000" dirty="0"/>
           </a:p>
           <a:p>
             <a:pPr algn="l" indent="0" marL="0">
@@ -14929,7 +15233,7 @@
               <a:buNone/>
             </a:pPr>
             <a:r>
-              <a:rPr lang="en-US" sz="3600" b="1" dirty="0">
+              <a:rPr lang="en-US" sz="3000" b="1" dirty="0">
                 <a:solidFill>
                   <a:srgbClr val="111111"/>
                 </a:solidFill>
@@ -14937,7 +15241,7 @@
                 <a:ea typeface="Times New Roman" pitchFamily="34" charset="-122"/>
                 <a:cs typeface="Times New Roman" pitchFamily="34" charset="-120"/>
               </a:rPr>
-              <a:t>Regolith: </a:t>
+              <a:t>Soil for agriculture: </a:t>
             </a:r>
             <a:pPr algn="l" indent="0" marL="0">
               <a:spcAft>
@@ -14946,7 +15250,7 @@
               <a:buNone/>
             </a:pPr>
             <a:r>
-              <a:rPr lang="en-US" sz="3600" dirty="0">
+              <a:rPr lang="en-US" sz="3000" dirty="0">
                 <a:solidFill>
                   <a:srgbClr val="111111"/>
                 </a:solidFill>
@@ -14954,15 +15258,15 @@
                 <a:ea typeface="Times New Roman" pitchFamily="34" charset="-122"/>
                 <a:cs typeface="Times New Roman" pitchFamily="34" charset="-120"/>
               </a:rPr>
-              <a:t>It is a few centimetres to hundreds of metres thick.</a:t>
-            </a:r>
-            <a:endParaRPr lang="en-US" sz="3600" dirty="0"/>
+              <a:t>Weathering produces the regolith, whose upper part becomes soil, the basis of all farming. In the North, cotton, millet, sorghum and groundnuts are grown on soils formed by the weathering of rocks.</a:t>
+            </a:r>
+            <a:endParaRPr lang="en-US" sz="3000" dirty="0"/>
           </a:p>
         </p:txBody>
       </p:sp>
       <p:pic>
         <p:nvPicPr>
-          <p:cNvPr id="5" name="Image 0" descr="/home/claude/f4/img/v2/soil_profile_big.png">    </p:cNvPr>
+          <p:cNvPr id="5" name="Image 0" descr="/home/claude/f4/img/v2/f2t_cotton_field.jpg">    </p:cNvPr>
           <p:cNvPicPr>
             <a:picLocks noChangeAspect="1"/>
           </p:cNvPicPr>
@@ -14976,8 +15280,8 @@
         </p:blipFill>
         <p:spPr>
           <a:xfrm>
-            <a:off x="5349240" y="2617506"/>
-            <a:ext cx="6659575" cy="2601397"/>
+            <a:off x="6537960" y="2400897"/>
+            <a:ext cx="5470855" cy="3034615"/>
           </a:xfrm>
           <a:prstGeom prst="rect">
             <a:avLst/>
@@ -14992,8 +15296,8 @@
         </p:nvSpPr>
         <p:spPr>
           <a:xfrm>
-            <a:off x="5349240" y="6089904"/>
-            <a:ext cx="6659575" cy="347472"/>
+            <a:off x="6537960" y="6089904"/>
+            <a:ext cx="5470855" cy="347472"/>
           </a:xfrm>
           <a:prstGeom prst="rect">
             <a:avLst/>
@@ -15017,7 +15321,7 @@
                 <a:ea typeface="Times New Roman" pitchFamily="34" charset="-122"/>
                 <a:cs typeface="Times New Roman" pitchFamily="34" charset="-120"/>
               </a:rPr>
-              <a:t>Illustration: a soil profile</a:t>
+              <a:t>Illustration: a cotton field</a:t>
             </a:r>
             <a:endParaRPr lang="en-US" sz="1600" dirty="0"/>
           </a:p>
@@ -15135,109 +15439,9 @@
           </a:p>
         </p:txBody>
       </p:sp>
-      <p:sp>
-        <p:nvSpPr>
-          <p:cNvPr id="3" name="Text 1"/>
-          <p:cNvSpPr/>
-          <p:nvPr/>
-        </p:nvSpPr>
-        <p:spPr>
-          <a:xfrm>
-            <a:off x="365760" y="1005840"/>
-            <a:ext cx="11460175" cy="731520"/>
-          </a:xfrm>
-          <a:prstGeom prst="rect">
-            <a:avLst/>
-          </a:prstGeom>
-          <a:noFill/>
-          <a:ln/>
-        </p:spPr>
-        <p:txBody>
-          <a:bodyPr wrap="square" lIns="0" tIns="0" rIns="0" bIns="0" rtlCol="0" anchor="ctr">
-            <a:normAutofit/>
-          </a:bodyPr>
-          <a:lstStyle/>
-          <a:p>
-            <a:pPr algn="ctr" indent="0" marL="0">
-              <a:buNone/>
-            </a:pPr>
-            <a:r>
-              <a:rPr lang="en-US" sz="3600" b="1" dirty="0">
-                <a:solidFill>
-                  <a:srgbClr val="990011"/>
-                </a:solidFill>
-                <a:latin typeface="Times New Roman" pitchFamily="34" charset="0"/>
-                <a:ea typeface="Times New Roman" pitchFamily="34" charset="-122"/>
-                <a:cs typeface="Times New Roman" pitchFamily="34" charset="-120"/>
-              </a:rPr>
-              <a:t>1. Products of Weathering as a Resource</a:t>
-            </a:r>
-            <a:endParaRPr lang="en-US" sz="3600" dirty="0"/>
-          </a:p>
-        </p:txBody>
-      </p:sp>
-      <p:sp>
-        <p:nvSpPr>
-          <p:cNvPr id="4" name="Text 2"/>
-          <p:cNvSpPr/>
-          <p:nvPr/>
-        </p:nvSpPr>
-        <p:spPr>
-          <a:xfrm>
-            <a:off x="365760" y="1783080"/>
-            <a:ext cx="4846320" cy="4617720"/>
-          </a:xfrm>
-          <a:prstGeom prst="rect">
-            <a:avLst/>
-          </a:prstGeom>
-          <a:noFill/>
-          <a:ln/>
-        </p:spPr>
-        <p:txBody>
-          <a:bodyPr wrap="square" lIns="0" tIns="0" rIns="0" bIns="0" rtlCol="0" anchor="t"/>
-          <a:lstStyle/>
-          <a:p>
-            <a:pPr algn="l" indent="0" marL="0">
-              <a:spcAft>
-                <a:spcPts val="800"/>
-              </a:spcAft>
-              <a:buNone/>
-            </a:pPr>
-            <a:r>
-              <a:rPr lang="en-US" sz="3600" b="1" dirty="0">
-                <a:solidFill>
-                  <a:srgbClr val="111111"/>
-                </a:solidFill>
-                <a:latin typeface="Times New Roman" pitchFamily="34" charset="0"/>
-                <a:ea typeface="Times New Roman" pitchFamily="34" charset="-122"/>
-                <a:cs typeface="Times New Roman" pitchFamily="34" charset="-120"/>
-              </a:rPr>
-              <a:t>Soil for agriculture: </a:t>
-            </a:r>
-            <a:pPr algn="l" indent="0" marL="0">
-              <a:spcAft>
-                <a:spcPts val="800"/>
-              </a:spcAft>
-              <a:buNone/>
-            </a:pPr>
-            <a:r>
-              <a:rPr lang="en-US" sz="3600" dirty="0">
-                <a:solidFill>
-                  <a:srgbClr val="111111"/>
-                </a:solidFill>
-                <a:latin typeface="Times New Roman" pitchFamily="34" charset="0"/>
-                <a:ea typeface="Times New Roman" pitchFamily="34" charset="-122"/>
-                <a:cs typeface="Times New Roman" pitchFamily="34" charset="-120"/>
-              </a:rPr>
-              <a:t>The North grows cotton, millet, sorghum and groundnuts on soils made by weathering.</a:t>
-            </a:r>
-            <a:endParaRPr lang="en-US" sz="3600" dirty="0"/>
-          </a:p>
-        </p:txBody>
-      </p:sp>
       <p:pic>
         <p:nvPicPr>
-          <p:cNvPr id="5" name="Image 0" descr="/home/claude/f4/img/v2/f2t_cotton_field.jpg">    </p:cNvPr>
+          <p:cNvPr id="3" name="Image 0" descr="/home/claude/f4/img/minesec_sheet.png">    </p:cNvPr>
           <p:cNvPicPr>
             <a:picLocks noChangeAspect="1"/>
           </p:cNvPicPr>
@@ -15251,8 +15455,8 @@
         </p:blipFill>
         <p:spPr>
           <a:xfrm>
-            <a:off x="5349240" y="2071212"/>
-            <a:ext cx="6659575" cy="3693983"/>
+            <a:off x="0" y="658368"/>
+            <a:ext cx="5120640" cy="5833872"/>
           </a:xfrm>
           <a:prstGeom prst="rect">
             <a:avLst/>
@@ -15261,14 +15465,14 @@
       </p:pic>
       <p:sp>
         <p:nvSpPr>
-          <p:cNvPr id="6" name="Text 3"/>
+          <p:cNvPr id="4" name="Text 1"/>
           <p:cNvSpPr/>
           <p:nvPr/>
         </p:nvSpPr>
         <p:spPr>
           <a:xfrm>
-            <a:off x="5349240" y="6089904"/>
-            <a:ext cx="6659575" cy="347472"/>
+            <a:off x="5349240" y="1005840"/>
+            <a:ext cx="6522415" cy="731520"/>
           </a:xfrm>
           <a:prstGeom prst="rect">
             <a:avLst/>
@@ -15277,24 +15481,85 @@
           <a:ln/>
         </p:spPr>
         <p:txBody>
-          <a:bodyPr wrap="square" lIns="0" tIns="0" rIns="0" bIns="0" rtlCol="0" anchor="ctr"/>
+          <a:bodyPr wrap="square" lIns="0" tIns="0" rIns="0" bIns="0" rtlCol="0" anchor="ctr">
+            <a:normAutofit/>
+          </a:bodyPr>
           <a:lstStyle/>
           <a:p>
             <a:pPr algn="ctr" indent="0" marL="0">
               <a:buNone/>
             </a:pPr>
             <a:r>
-              <a:rPr lang="en-US" sz="1600" i="1" dirty="0">
-                <a:solidFill>
-                  <a:srgbClr val="555555"/>
+              <a:rPr lang="en-US" sz="3600" b="1" dirty="0">
+                <a:solidFill>
+                  <a:srgbClr val="990011"/>
                 </a:solidFill>
                 <a:latin typeface="Times New Roman" pitchFamily="34" charset="0"/>
                 <a:ea typeface="Times New Roman" pitchFamily="34" charset="-122"/>
                 <a:cs typeface="Times New Roman" pitchFamily="34" charset="-120"/>
               </a:rPr>
-              <a:t>Illustration: a cotton field</a:t>
-            </a:r>
-            <a:endParaRPr lang="en-US" sz="1600" dirty="0"/>
+              <a:t>1. Products of Weathering as a Resource</a:t>
+            </a:r>
+            <a:endParaRPr lang="en-US" sz="3600" dirty="0"/>
+          </a:p>
+        </p:txBody>
+      </p:sp>
+      <p:sp>
+        <p:nvSpPr>
+          <p:cNvPr id="5" name="Text 2"/>
+          <p:cNvSpPr/>
+          <p:nvPr/>
+        </p:nvSpPr>
+        <p:spPr>
+          <a:xfrm>
+            <a:off x="5349240" y="1783080"/>
+            <a:ext cx="6522415" cy="4663440"/>
+          </a:xfrm>
+          <a:prstGeom prst="rect">
+            <a:avLst/>
+          </a:prstGeom>
+          <a:noFill/>
+          <a:ln/>
+        </p:spPr>
+        <p:txBody>
+          <a:bodyPr wrap="square" lIns="0" tIns="0" rIns="0" bIns="0" rtlCol="0" anchor="t"/>
+          <a:lstStyle/>
+          <a:p>
+            <a:pPr algn="l" indent="0" marL="0">
+              <a:spcAft>
+                <a:spcPts val="800"/>
+              </a:spcAft>
+              <a:buNone/>
+            </a:pPr>
+            <a:r>
+              <a:rPr lang="en-US" sz="4000" b="1" dirty="0">
+                <a:solidFill>
+                  <a:srgbClr val="111111"/>
+                </a:solidFill>
+                <a:latin typeface="Times New Roman" pitchFamily="34" charset="0"/>
+                <a:ea typeface="Times New Roman" pitchFamily="34" charset="-122"/>
+                <a:cs typeface="Times New Roman" pitchFamily="34" charset="-120"/>
+              </a:rPr>
+              <a:t>Construction materials: </a:t>
+            </a:r>
+            <a:pPr algn="l" indent="0" marL="0">
+              <a:spcAft>
+                <a:spcPts val="800"/>
+              </a:spcAft>
+              <a:buNone/>
+            </a:pPr>
+            <a:r>
+              <a:rPr lang="en-US" sz="4000" dirty="0">
+                <a:solidFill>
+                  <a:srgbClr val="111111"/>
+                </a:solidFill>
+                <a:latin typeface="Times New Roman" pitchFamily="34" charset="0"/>
+                <a:ea typeface="Times New Roman" pitchFamily="34" charset="-122"/>
+                <a:cs typeface="Times New Roman" pitchFamily="34" charset="-120"/>
+              </a:rPr>
+              <a:t>Weathering produces sand, gravel and clay. Sand and gravel are used to make concrete and roads, and clay is used to make bricks, tiles and pottery.</a:t>
+            </a:r>
+            <a:endParaRPr lang="en-US" sz="4000" dirty="0"/>
           </a:p>
         </p:txBody>
       </p:sp>
@@ -15649,9 +15914,109 @@
           </a:p>
         </p:txBody>
       </p:sp>
+      <p:sp>
+        <p:nvSpPr>
+          <p:cNvPr id="3" name="Text 1"/>
+          <p:cNvSpPr/>
+          <p:nvPr/>
+        </p:nvSpPr>
+        <p:spPr>
+          <a:xfrm>
+            <a:off x="365760" y="1005840"/>
+            <a:ext cx="11460175" cy="731520"/>
+          </a:xfrm>
+          <a:prstGeom prst="rect">
+            <a:avLst/>
+          </a:prstGeom>
+          <a:noFill/>
+          <a:ln/>
+        </p:spPr>
+        <p:txBody>
+          <a:bodyPr wrap="square" lIns="0" tIns="0" rIns="0" bIns="0" rtlCol="0" anchor="ctr">
+            <a:normAutofit/>
+          </a:bodyPr>
+          <a:lstStyle/>
+          <a:p>
+            <a:pPr algn="ctr" indent="0" marL="0">
+              <a:buNone/>
+            </a:pPr>
+            <a:r>
+              <a:rPr lang="en-US" sz="3600" b="1" dirty="0">
+                <a:solidFill>
+                  <a:srgbClr val="990011"/>
+                </a:solidFill>
+                <a:latin typeface="Times New Roman" pitchFamily="34" charset="0"/>
+                <a:ea typeface="Times New Roman" pitchFamily="34" charset="-122"/>
+                <a:cs typeface="Times New Roman" pitchFamily="34" charset="-120"/>
+              </a:rPr>
+              <a:t>1. Products of Weathering as a Resource</a:t>
+            </a:r>
+            <a:endParaRPr lang="en-US" sz="3600" dirty="0"/>
+          </a:p>
+        </p:txBody>
+      </p:sp>
+      <p:sp>
+        <p:nvSpPr>
+          <p:cNvPr id="4" name="Text 2"/>
+          <p:cNvSpPr/>
+          <p:nvPr/>
+        </p:nvSpPr>
+        <p:spPr>
+          <a:xfrm>
+            <a:off x="365760" y="1783080"/>
+            <a:ext cx="6035040" cy="4617720"/>
+          </a:xfrm>
+          <a:prstGeom prst="rect">
+            <a:avLst/>
+          </a:prstGeom>
+          <a:noFill/>
+          <a:ln/>
+        </p:spPr>
+        <p:txBody>
+          <a:bodyPr wrap="square" lIns="0" tIns="0" rIns="0" bIns="0" rtlCol="0" anchor="t"/>
+          <a:lstStyle/>
+          <a:p>
+            <a:pPr algn="l" indent="0" marL="0">
+              <a:spcAft>
+                <a:spcPts val="800"/>
+              </a:spcAft>
+              <a:buNone/>
+            </a:pPr>
+            <a:r>
+              <a:rPr lang="en-US" sz="3400" b="1" dirty="0">
+                <a:solidFill>
+                  <a:srgbClr val="111111"/>
+                </a:solidFill>
+                <a:latin typeface="Times New Roman" pitchFamily="34" charset="0"/>
+                <a:ea typeface="Times New Roman" pitchFamily="34" charset="-122"/>
+                <a:cs typeface="Times New Roman" pitchFamily="34" charset="-120"/>
+              </a:rPr>
+              <a:t>Mineral ores: </a:t>
+            </a:r>
+            <a:pPr algn="l" indent="0" marL="0">
+              <a:spcAft>
+                <a:spcPts val="800"/>
+              </a:spcAft>
+              <a:buNone/>
+            </a:pPr>
+            <a:r>
+              <a:rPr lang="en-US" sz="3400" dirty="0">
+                <a:solidFill>
+                  <a:srgbClr val="111111"/>
+                </a:solidFill>
+                <a:latin typeface="Times New Roman" pitchFamily="34" charset="0"/>
+                <a:ea typeface="Times New Roman" pitchFamily="34" charset="-122"/>
+                <a:cs typeface="Times New Roman" pitchFamily="34" charset="-120"/>
+              </a:rPr>
+              <a:t>Chemical weathering removes unwanted minerals and concentrates useful ones, such as bauxite and iron ore. The bauxite deposits of Minim-Martap in the Adamawa and Fongo-Tongo in the West formed in this way.</a:t>
+            </a:r>
+            <a:endParaRPr lang="en-US" sz="3400" dirty="0"/>
+          </a:p>
+        </p:txBody>
+      </p:sp>
       <p:pic>
         <p:nvPicPr>
-          <p:cNvPr id="3" name="Image 0" descr="/home/claude/f4/img/minesec_sheet.png">    </p:cNvPr>
+          <p:cNvPr id="5" name="Image 0" descr="/home/claude/f4/img/v2/lsa_bauxite.jpg">    </p:cNvPr>
           <p:cNvPicPr>
             <a:picLocks noChangeAspect="1"/>
           </p:cNvPicPr>
@@ -15665,8 +16030,8 @@
         </p:blipFill>
         <p:spPr>
           <a:xfrm>
-            <a:off x="0" y="658368"/>
-            <a:ext cx="5120640" cy="5833872"/>
+            <a:off x="6537960" y="2400897"/>
+            <a:ext cx="5470855" cy="3034615"/>
           </a:xfrm>
           <a:prstGeom prst="rect">
             <a:avLst/>
@@ -15675,14 +16040,14 @@
       </p:pic>
       <p:sp>
         <p:nvSpPr>
-          <p:cNvPr id="4" name="Text 1"/>
+          <p:cNvPr id="6" name="Text 3"/>
           <p:cNvSpPr/>
           <p:nvPr/>
         </p:nvSpPr>
         <p:spPr>
           <a:xfrm>
-            <a:off x="5349240" y="1005840"/>
-            <a:ext cx="6522415" cy="731520"/>
+            <a:off x="6537960" y="6089904"/>
+            <a:ext cx="5470855" cy="347472"/>
           </a:xfrm>
           <a:prstGeom prst="rect">
             <a:avLst/>
@@ -15691,85 +16056,24 @@
           <a:ln/>
         </p:spPr>
         <p:txBody>
-          <a:bodyPr wrap="square" lIns="0" tIns="0" rIns="0" bIns="0" rtlCol="0" anchor="ctr">
-            <a:normAutofit/>
-          </a:bodyPr>
+          <a:bodyPr wrap="square" lIns="0" tIns="0" rIns="0" bIns="0" rtlCol="0" anchor="ctr"/>
           <a:lstStyle/>
           <a:p>
             <a:pPr algn="ctr" indent="0" marL="0">
               <a:buNone/>
             </a:pPr>
             <a:r>
-              <a:rPr lang="en-US" sz="3600" b="1" dirty="0">
-                <a:solidFill>
-                  <a:srgbClr val="990011"/>
+              <a:rPr lang="en-US" sz="1600" i="1" dirty="0">
+                <a:solidFill>
+                  <a:srgbClr val="555555"/>
                 </a:solidFill>
                 <a:latin typeface="Times New Roman" pitchFamily="34" charset="0"/>
                 <a:ea typeface="Times New Roman" pitchFamily="34" charset="-122"/>
                 <a:cs typeface="Times New Roman" pitchFamily="34" charset="-120"/>
               </a:rPr>
-              <a:t>1. Products of Weathering as a Resource</a:t>
-            </a:r>
-            <a:endParaRPr lang="en-US" sz="3600" dirty="0"/>
-          </a:p>
-        </p:txBody>
-      </p:sp>
-      <p:sp>
-        <p:nvSpPr>
-          <p:cNvPr id="5" name="Text 2"/>
-          <p:cNvSpPr/>
-          <p:nvPr/>
-        </p:nvSpPr>
-        <p:spPr>
-          <a:xfrm>
-            <a:off x="5349240" y="1783080"/>
-            <a:ext cx="6522415" cy="4663440"/>
-          </a:xfrm>
-          <a:prstGeom prst="rect">
-            <a:avLst/>
-          </a:prstGeom>
-          <a:noFill/>
-          <a:ln/>
-        </p:spPr>
-        <p:txBody>
-          <a:bodyPr wrap="square" lIns="0" tIns="0" rIns="0" bIns="0" rtlCol="0" anchor="t"/>
-          <a:lstStyle/>
-          <a:p>
-            <a:pPr algn="l" indent="0" marL="0">
-              <a:spcAft>
-                <a:spcPts val="800"/>
-              </a:spcAft>
-              <a:buNone/>
-            </a:pPr>
-            <a:r>
-              <a:rPr lang="en-US" sz="4000" b="1" dirty="0">
-                <a:solidFill>
-                  <a:srgbClr val="111111"/>
-                </a:solidFill>
-                <a:latin typeface="Times New Roman" pitchFamily="34" charset="0"/>
-                <a:ea typeface="Times New Roman" pitchFamily="34" charset="-122"/>
-                <a:cs typeface="Times New Roman" pitchFamily="34" charset="-120"/>
-              </a:rPr>
-              <a:t>Construction materials: </a:t>
-            </a:r>
-            <a:pPr algn="l" indent="0" marL="0">
-              <a:spcAft>
-                <a:spcPts val="800"/>
-              </a:spcAft>
-              <a:buNone/>
-            </a:pPr>
-            <a:r>
-              <a:rPr lang="en-US" sz="4000" dirty="0">
-                <a:solidFill>
-                  <a:srgbClr val="111111"/>
-                </a:solidFill>
-                <a:latin typeface="Times New Roman" pitchFamily="34" charset="0"/>
-                <a:ea typeface="Times New Roman" pitchFamily="34" charset="-122"/>
-                <a:cs typeface="Times New Roman" pitchFamily="34" charset="-120"/>
-              </a:rPr>
-              <a:t>Sand and gravel make concrete and roads, and clay makes bricks.</a:t>
-            </a:r>
-            <a:endParaRPr lang="en-US" sz="4000" dirty="0"/>
+              <a:t>Illustration: bauxite</a:t>
+            </a:r>
+            <a:endParaRPr lang="en-US" sz="1600" dirty="0"/>
           </a:p>
         </p:txBody>
       </p:sp>
@@ -15885,109 +16189,9 @@
           </a:p>
         </p:txBody>
       </p:sp>
-      <p:sp>
-        <p:nvSpPr>
-          <p:cNvPr id="3" name="Text 1"/>
-          <p:cNvSpPr/>
-          <p:nvPr/>
-        </p:nvSpPr>
-        <p:spPr>
-          <a:xfrm>
-            <a:off x="365760" y="1005840"/>
-            <a:ext cx="11460175" cy="731520"/>
-          </a:xfrm>
-          <a:prstGeom prst="rect">
-            <a:avLst/>
-          </a:prstGeom>
-          <a:noFill/>
-          <a:ln/>
-        </p:spPr>
-        <p:txBody>
-          <a:bodyPr wrap="square" lIns="0" tIns="0" rIns="0" bIns="0" rtlCol="0" anchor="ctr">
-            <a:normAutofit/>
-          </a:bodyPr>
-          <a:lstStyle/>
-          <a:p>
-            <a:pPr algn="ctr" indent="0" marL="0">
-              <a:buNone/>
-            </a:pPr>
-            <a:r>
-              <a:rPr lang="en-US" sz="3600" b="1" dirty="0">
-                <a:solidFill>
-                  <a:srgbClr val="990011"/>
-                </a:solidFill>
-                <a:latin typeface="Times New Roman" pitchFamily="34" charset="0"/>
-                <a:ea typeface="Times New Roman" pitchFamily="34" charset="-122"/>
-                <a:cs typeface="Times New Roman" pitchFamily="34" charset="-120"/>
-              </a:rPr>
-              <a:t>1. Products of Weathering as a Resource</a:t>
-            </a:r>
-            <a:endParaRPr lang="en-US" sz="3600" dirty="0"/>
-          </a:p>
-        </p:txBody>
-      </p:sp>
-      <p:sp>
-        <p:nvSpPr>
-          <p:cNvPr id="4" name="Text 2"/>
-          <p:cNvSpPr/>
-          <p:nvPr/>
-        </p:nvSpPr>
-        <p:spPr>
-          <a:xfrm>
-            <a:off x="365760" y="1783080"/>
-            <a:ext cx="4846320" cy="4617720"/>
-          </a:xfrm>
-          <a:prstGeom prst="rect">
-            <a:avLst/>
-          </a:prstGeom>
-          <a:noFill/>
-          <a:ln/>
-        </p:spPr>
-        <p:txBody>
-          <a:bodyPr wrap="square" lIns="0" tIns="0" rIns="0" bIns="0" rtlCol="0" anchor="t"/>
-          <a:lstStyle/>
-          <a:p>
-            <a:pPr algn="l" indent="0" marL="0">
-              <a:spcAft>
-                <a:spcPts val="800"/>
-              </a:spcAft>
-              <a:buNone/>
-            </a:pPr>
-            <a:r>
-              <a:rPr lang="en-US" sz="3600" b="1" dirty="0">
-                <a:solidFill>
-                  <a:srgbClr val="111111"/>
-                </a:solidFill>
-                <a:latin typeface="Times New Roman" pitchFamily="34" charset="0"/>
-                <a:ea typeface="Times New Roman" pitchFamily="34" charset="-122"/>
-                <a:cs typeface="Times New Roman" pitchFamily="34" charset="-120"/>
-              </a:rPr>
-              <a:t>Mineral ores: </a:t>
-            </a:r>
-            <a:pPr algn="l" indent="0" marL="0">
-              <a:spcAft>
-                <a:spcPts val="800"/>
-              </a:spcAft>
-              <a:buNone/>
-            </a:pPr>
-            <a:r>
-              <a:rPr lang="en-US" sz="3600" dirty="0">
-                <a:solidFill>
-                  <a:srgbClr val="111111"/>
-                </a:solidFill>
-                <a:latin typeface="Times New Roman" pitchFamily="34" charset="0"/>
-                <a:ea typeface="Times New Roman" pitchFamily="34" charset="-122"/>
-                <a:cs typeface="Times New Roman" pitchFamily="34" charset="-120"/>
-              </a:rPr>
-              <a:t>Chemical weathering removes unwanted minerals and concentrates bauxite and iron, like the bauxite of Minim-Martap and Fongo-Tongo.</a:t>
-            </a:r>
-            <a:endParaRPr lang="en-US" sz="3600" dirty="0"/>
-          </a:p>
-        </p:txBody>
-      </p:sp>
       <p:pic>
         <p:nvPicPr>
-          <p:cNvPr id="5" name="Image 0" descr="/home/claude/f4/img/v2/lsa_bauxite.jpg">    </p:cNvPr>
+          <p:cNvPr id="3" name="Image 0" descr="/home/claude/f4/img/minesec_sheet.png">    </p:cNvPr>
           <p:cNvPicPr>
             <a:picLocks noChangeAspect="1"/>
           </p:cNvPicPr>
@@ -16001,8 +16205,8 @@
         </p:blipFill>
         <p:spPr>
           <a:xfrm>
-            <a:off x="5349240" y="2071212"/>
-            <a:ext cx="6659575" cy="3693983"/>
+            <a:off x="0" y="658368"/>
+            <a:ext cx="5120640" cy="5833872"/>
           </a:xfrm>
           <a:prstGeom prst="rect">
             <a:avLst/>
@@ -16011,14 +16215,14 @@
       </p:pic>
       <p:sp>
         <p:nvSpPr>
-          <p:cNvPr id="6" name="Text 3"/>
+          <p:cNvPr id="4" name="Text 1"/>
           <p:cNvSpPr/>
           <p:nvPr/>
         </p:nvSpPr>
         <p:spPr>
           <a:xfrm>
-            <a:off x="5349240" y="6089904"/>
-            <a:ext cx="6659575" cy="347472"/>
+            <a:off x="5349240" y="1005840"/>
+            <a:ext cx="6522415" cy="731520"/>
           </a:xfrm>
           <a:prstGeom prst="rect">
             <a:avLst/>
@@ -16027,24 +16231,85 @@
           <a:ln/>
         </p:spPr>
         <p:txBody>
-          <a:bodyPr wrap="square" lIns="0" tIns="0" rIns="0" bIns="0" rtlCol="0" anchor="ctr"/>
+          <a:bodyPr wrap="square" lIns="0" tIns="0" rIns="0" bIns="0" rtlCol="0" anchor="ctr">
+            <a:normAutofit/>
+          </a:bodyPr>
           <a:lstStyle/>
           <a:p>
             <a:pPr algn="ctr" indent="0" marL="0">
               <a:buNone/>
             </a:pPr>
             <a:r>
-              <a:rPr lang="en-US" sz="1600" i="1" dirty="0">
-                <a:solidFill>
-                  <a:srgbClr val="555555"/>
+              <a:rPr lang="en-US" sz="3600" b="1" dirty="0">
+                <a:solidFill>
+                  <a:srgbClr val="990011"/>
                 </a:solidFill>
                 <a:latin typeface="Times New Roman" pitchFamily="34" charset="0"/>
                 <a:ea typeface="Times New Roman" pitchFamily="34" charset="-122"/>
                 <a:cs typeface="Times New Roman" pitchFamily="34" charset="-120"/>
               </a:rPr>
-              <a:t>Illustration: bauxite</a:t>
-            </a:r>
-            <a:endParaRPr lang="en-US" sz="1600" dirty="0"/>
+              <a:t>1. Products of Weathering as a Resource</a:t>
+            </a:r>
+            <a:endParaRPr lang="en-US" sz="3600" dirty="0"/>
+          </a:p>
+        </p:txBody>
+      </p:sp>
+      <p:sp>
+        <p:nvSpPr>
+          <p:cNvPr id="5" name="Text 2"/>
+          <p:cNvSpPr/>
+          <p:nvPr/>
+        </p:nvSpPr>
+        <p:spPr>
+          <a:xfrm>
+            <a:off x="5349240" y="1783080"/>
+            <a:ext cx="6522415" cy="4663440"/>
+          </a:xfrm>
+          <a:prstGeom prst="rect">
+            <a:avLst/>
+          </a:prstGeom>
+          <a:noFill/>
+          <a:ln/>
+        </p:spPr>
+        <p:txBody>
+          <a:bodyPr wrap="square" lIns="0" tIns="0" rIns="0" bIns="0" rtlCol="0" anchor="t"/>
+          <a:lstStyle/>
+          <a:p>
+            <a:pPr algn="l" indent="0" marL="0">
+              <a:spcAft>
+                <a:spcPts val="800"/>
+              </a:spcAft>
+              <a:buNone/>
+            </a:pPr>
+            <a:r>
+              <a:rPr lang="en-US" sz="4000" b="1" dirty="0">
+                <a:solidFill>
+                  <a:srgbClr val="111111"/>
+                </a:solidFill>
+                <a:latin typeface="Times New Roman" pitchFamily="34" charset="0"/>
+                <a:ea typeface="Times New Roman" pitchFamily="34" charset="-122"/>
+                <a:cs typeface="Times New Roman" pitchFamily="34" charset="-120"/>
+              </a:rPr>
+              <a:t>Groundwater storage: </a:t>
+            </a:r>
+            <a:pPr algn="l" indent="0" marL="0">
+              <a:spcAft>
+                <a:spcPts val="800"/>
+              </a:spcAft>
+              <a:buNone/>
+            </a:pPr>
+            <a:r>
+              <a:rPr lang="en-US" sz="4000" dirty="0">
+                <a:solidFill>
+                  <a:srgbClr val="111111"/>
+                </a:solidFill>
+                <a:latin typeface="Times New Roman" pitchFamily="34" charset="0"/>
+                <a:ea typeface="Times New Roman" pitchFamily="34" charset="-122"/>
+                <a:cs typeface="Times New Roman" pitchFamily="34" charset="-120"/>
+              </a:rPr>
+              <a:t>The thick regolith is porous and stores rainwater like a sponge. It feeds the wells and boreholes that supply water to villages and towns.</a:t>
+            </a:r>
+            <a:endParaRPr lang="en-US" sz="4000" dirty="0"/>
           </a:p>
         </p:txBody>
       </p:sp>
@@ -16160,9 +16425,129 @@
           </a:p>
         </p:txBody>
       </p:sp>
+      <p:sp>
+        <p:nvSpPr>
+          <p:cNvPr id="3" name="Text 1"/>
+          <p:cNvSpPr/>
+          <p:nvPr/>
+        </p:nvSpPr>
+        <p:spPr>
+          <a:xfrm>
+            <a:off x="365760" y="1005840"/>
+            <a:ext cx="11460175" cy="731520"/>
+          </a:xfrm>
+          <a:prstGeom prst="rect">
+            <a:avLst/>
+          </a:prstGeom>
+          <a:noFill/>
+          <a:ln/>
+        </p:spPr>
+        <p:txBody>
+          <a:bodyPr wrap="square" lIns="0" tIns="0" rIns="0" bIns="0" rtlCol="0" anchor="ctr">
+            <a:normAutofit/>
+          </a:bodyPr>
+          <a:lstStyle/>
+          <a:p>
+            <a:pPr algn="ctr" indent="0" marL="0">
+              <a:buNone/>
+            </a:pPr>
+            <a:r>
+              <a:rPr lang="en-US" sz="3600" b="1" dirty="0">
+                <a:solidFill>
+                  <a:srgbClr val="990011"/>
+                </a:solidFill>
+                <a:latin typeface="Times New Roman" pitchFamily="34" charset="0"/>
+                <a:ea typeface="Times New Roman" pitchFamily="34" charset="-122"/>
+                <a:cs typeface="Times New Roman" pitchFamily="34" charset="-120"/>
+              </a:rPr>
+              <a:t>2. Effects of Weathering on the Landscape</a:t>
+            </a:r>
+            <a:endParaRPr lang="en-US" sz="3600" dirty="0"/>
+          </a:p>
+        </p:txBody>
+      </p:sp>
+      <p:sp>
+        <p:nvSpPr>
+          <p:cNvPr id="4" name="Text 2"/>
+          <p:cNvSpPr/>
+          <p:nvPr/>
+        </p:nvSpPr>
+        <p:spPr>
+          <a:xfrm>
+            <a:off x="365760" y="1783080"/>
+            <a:ext cx="6035040" cy="4617720"/>
+          </a:xfrm>
+          <a:prstGeom prst="rect">
+            <a:avLst/>
+          </a:prstGeom>
+          <a:noFill/>
+          <a:ln/>
+        </p:spPr>
+        <p:txBody>
+          <a:bodyPr wrap="square" lIns="0" tIns="0" rIns="0" bIns="0" rtlCol="0" anchor="t"/>
+          <a:lstStyle/>
+          <a:p>
+            <a:pPr algn="l" indent="0" marL="0">
+              <a:spcAft>
+                <a:spcPts val="800"/>
+              </a:spcAft>
+              <a:buNone/>
+            </a:pPr>
+            <a:r>
+              <a:rPr lang="en-US" sz="2800" i="1" dirty="0">
+                <a:solidFill>
+                  <a:srgbClr val="111111"/>
+                </a:solidFill>
+                <a:latin typeface="Times New Roman" pitchFamily="34" charset="0"/>
+                <a:ea typeface="Times New Roman" pitchFamily="34" charset="-122"/>
+                <a:cs typeface="Times New Roman" pitchFamily="34" charset="-120"/>
+              </a:rPr>
+              <a:t>Weathering shapes the landscape in the following ways:</a:t>
+            </a:r>
+            <a:endParaRPr lang="en-US" sz="2800" dirty="0"/>
+          </a:p>
+          <a:p>
+            <a:pPr algn="l" indent="0" marL="0">
+              <a:spcAft>
+                <a:spcPts val="800"/>
+              </a:spcAft>
+              <a:buNone/>
+            </a:pPr>
+            <a:r>
+              <a:rPr lang="en-US" sz="2800" b="1" dirty="0">
+                <a:solidFill>
+                  <a:srgbClr val="111111"/>
+                </a:solidFill>
+                <a:latin typeface="Times New Roman" pitchFamily="34" charset="0"/>
+                <a:ea typeface="Times New Roman" pitchFamily="34" charset="-122"/>
+                <a:cs typeface="Times New Roman" pitchFamily="34" charset="-120"/>
+              </a:rPr>
+              <a:t>Inselbergs and tors: </a:t>
+            </a:r>
+            <a:pPr algn="l" indent="0" marL="0">
+              <a:spcAft>
+                <a:spcPts val="800"/>
+              </a:spcAft>
+              <a:buNone/>
+            </a:pPr>
+            <a:r>
+              <a:rPr lang="en-US" sz="2800" dirty="0">
+                <a:solidFill>
+                  <a:srgbClr val="111111"/>
+                </a:solidFill>
+                <a:latin typeface="Times New Roman" pitchFamily="34" charset="0"/>
+                <a:ea typeface="Times New Roman" pitchFamily="34" charset="-122"/>
+                <a:cs typeface="Times New Roman" pitchFamily="34" charset="-120"/>
+              </a:rPr>
+              <a:t>Deep weathering attacks the jointed rock, and the weathered material is later removed, leaving hard blocks standing above the plain. These form inselbergs and piles of boulders called tors, common around Garoua and in the Mandara Mountains.</a:t>
+            </a:r>
+            <a:endParaRPr lang="en-US" sz="2800" dirty="0"/>
+          </a:p>
+        </p:txBody>
+      </p:sp>
       <p:pic>
         <p:nvPicPr>
-          <p:cNvPr id="3" name="Image 0" descr="/home/claude/f4/img/minesec_sheet.png">    </p:cNvPr>
+          <p:cNvPr id="5" name="Image 0" descr="/home/claude/f4/img/inselberg.jpg">    </p:cNvPr>
           <p:cNvPicPr>
             <a:picLocks noChangeAspect="1"/>
           </p:cNvPicPr>
@@ -16176,8 +16561,8 @@
         </p:blipFill>
         <p:spPr>
           <a:xfrm>
-            <a:off x="0" y="658368"/>
-            <a:ext cx="5120640" cy="5833872"/>
+            <a:off x="6537960" y="2391454"/>
+            <a:ext cx="5470855" cy="3053501"/>
           </a:xfrm>
           <a:prstGeom prst="rect">
             <a:avLst/>
@@ -16186,14 +16571,14 @@
       </p:pic>
       <p:sp>
         <p:nvSpPr>
-          <p:cNvPr id="4" name="Text 1"/>
+          <p:cNvPr id="6" name="Text 3"/>
           <p:cNvSpPr/>
           <p:nvPr/>
         </p:nvSpPr>
         <p:spPr>
           <a:xfrm>
-            <a:off x="5349240" y="1005840"/>
-            <a:ext cx="6522415" cy="731520"/>
+            <a:off x="6537960" y="6089904"/>
+            <a:ext cx="5470855" cy="347472"/>
           </a:xfrm>
           <a:prstGeom prst="rect">
             <a:avLst/>
@@ -16202,144 +16587,24 @@
           <a:ln/>
         </p:spPr>
         <p:txBody>
-          <a:bodyPr wrap="square" lIns="0" tIns="0" rIns="0" bIns="0" rtlCol="0" anchor="ctr">
-            <a:normAutofit/>
-          </a:bodyPr>
+          <a:bodyPr wrap="square" lIns="0" tIns="0" rIns="0" bIns="0" rtlCol="0" anchor="ctr"/>
           <a:lstStyle/>
           <a:p>
             <a:pPr algn="ctr" indent="0" marL="0">
               <a:buNone/>
             </a:pPr>
             <a:r>
-              <a:rPr lang="en-US" sz="3600" b="1" dirty="0">
-                <a:solidFill>
-                  <a:srgbClr val="990011"/>
+              <a:rPr lang="en-US" sz="1600" i="1" dirty="0">
+                <a:solidFill>
+                  <a:srgbClr val="555555"/>
                 </a:solidFill>
                 <a:latin typeface="Times New Roman" pitchFamily="34" charset="0"/>
                 <a:ea typeface="Times New Roman" pitchFamily="34" charset="-122"/>
                 <a:cs typeface="Times New Roman" pitchFamily="34" charset="-120"/>
               </a:rPr>
-              <a:t>2. Effects of Weathering on the Landscape and Man</a:t>
-            </a:r>
-            <a:endParaRPr lang="en-US" sz="3600" dirty="0"/>
-          </a:p>
-        </p:txBody>
-      </p:sp>
-      <p:sp>
-        <p:nvSpPr>
-          <p:cNvPr id="5" name="Text 2"/>
-          <p:cNvSpPr/>
-          <p:nvPr/>
-        </p:nvSpPr>
-        <p:spPr>
-          <a:xfrm>
-            <a:off x="5349240" y="1737360"/>
-            <a:ext cx="6522415" cy="457200"/>
-          </a:xfrm>
-          <a:prstGeom prst="rect">
-            <a:avLst/>
-          </a:prstGeom>
-          <a:noFill/>
-          <a:ln/>
-        </p:spPr>
-        <p:txBody>
-          <a:bodyPr wrap="square" lIns="0" tIns="0" rIns="0" bIns="0" rtlCol="0" anchor="ctr"/>
-          <a:lstStyle/>
-          <a:p>
-            <a:pPr algn="l" indent="0" marL="0">
-              <a:buNone/>
-            </a:pPr>
-            <a:r>
-              <a:rPr lang="en-US" sz="3200" b="1" dirty="0">
-                <a:solidFill>
-                  <a:srgbClr val="990011"/>
-                </a:solidFill>
-                <a:latin typeface="Times New Roman" pitchFamily="34" charset="0"/>
-                <a:ea typeface="Times New Roman" pitchFamily="34" charset="-122"/>
-                <a:cs typeface="Times New Roman" pitchFamily="34" charset="-120"/>
-              </a:rPr>
-              <a:t>A) Positive Effects</a:t>
-            </a:r>
-            <a:endParaRPr lang="en-US" sz="3200" dirty="0"/>
-          </a:p>
-        </p:txBody>
-      </p:sp>
-      <p:sp>
-        <p:nvSpPr>
-          <p:cNvPr id="6" name="Text 3"/>
-          <p:cNvSpPr/>
-          <p:nvPr/>
-        </p:nvSpPr>
-        <p:spPr>
-          <a:xfrm>
-            <a:off x="5349240" y="2240280"/>
-            <a:ext cx="6522415" cy="4206240"/>
-          </a:xfrm>
-          <a:prstGeom prst="rect">
-            <a:avLst/>
-          </a:prstGeom>
-          <a:noFill/>
-          <a:ln/>
-        </p:spPr>
-        <p:txBody>
-          <a:bodyPr wrap="square" lIns="0" tIns="0" rIns="0" bIns="0" rtlCol="0" anchor="t"/>
-          <a:lstStyle/>
-          <a:p>
-            <a:pPr algn="l" indent="0" marL="0">
-              <a:spcAft>
-                <a:spcPts val="800"/>
-              </a:spcAft>
-              <a:buNone/>
-            </a:pPr>
-            <a:r>
-              <a:rPr lang="en-US" sz="4000" i="1" dirty="0">
-                <a:solidFill>
-                  <a:srgbClr val="111111"/>
-                </a:solidFill>
-                <a:latin typeface="Times New Roman" pitchFamily="34" charset="0"/>
-                <a:ea typeface="Times New Roman" pitchFamily="34" charset="-122"/>
-                <a:cs typeface="Times New Roman" pitchFamily="34" charset="-120"/>
-              </a:rPr>
-              <a:t>Weathering has the following positive effects:</a:t>
-            </a:r>
-            <a:endParaRPr lang="en-US" sz="4000" dirty="0"/>
-          </a:p>
-          <a:p>
-            <a:pPr algn="l" indent="0" marL="0">
-              <a:spcAft>
-                <a:spcPts val="800"/>
-              </a:spcAft>
-              <a:buNone/>
-            </a:pPr>
-            <a:r>
-              <a:rPr lang="en-US" sz="4000" b="1" dirty="0">
-                <a:solidFill>
-                  <a:srgbClr val="111111"/>
-                </a:solidFill>
-                <a:latin typeface="Times New Roman" pitchFamily="34" charset="0"/>
-                <a:ea typeface="Times New Roman" pitchFamily="34" charset="-122"/>
-                <a:cs typeface="Times New Roman" pitchFamily="34" charset="-120"/>
-              </a:rPr>
-              <a:t>Creation of soil: </a:t>
-            </a:r>
-            <a:pPr algn="l" indent="0" marL="0">
-              <a:spcAft>
-                <a:spcPts val="800"/>
-              </a:spcAft>
-              <a:buNone/>
-            </a:pPr>
-            <a:r>
-              <a:rPr lang="en-US" sz="4000" dirty="0">
-                <a:solidFill>
-                  <a:srgbClr val="111111"/>
-                </a:solidFill>
-                <a:latin typeface="Times New Roman" pitchFamily="34" charset="0"/>
-                <a:ea typeface="Times New Roman" pitchFamily="34" charset="-122"/>
-                <a:cs typeface="Times New Roman" pitchFamily="34" charset="-120"/>
-              </a:rPr>
-              <a:t>It is the most important benefit, the basis of farming and land ecosystems.</a:t>
-            </a:r>
-            <a:endParaRPr lang="en-US" sz="4000" dirty="0"/>
+              <a:t>Illustration: an inselberg</a:t>
+            </a:r>
+            <a:endParaRPr lang="en-US" sz="1600" dirty="0"/>
           </a:p>
         </p:txBody>
       </p:sp>
@@ -16490,7 +16755,7 @@
                 <a:ea typeface="Times New Roman" pitchFamily="34" charset="-122"/>
                 <a:cs typeface="Times New Roman" pitchFamily="34" charset="-120"/>
               </a:rPr>
-              <a:t>2. Effects of Weathering on the Landscape and Man</a:t>
+              <a:t>2. Effects of Weathering on the Landscape</a:t>
             </a:r>
             <a:endParaRPr lang="en-US" sz="3600" dirty="0"/>
           </a:p>
@@ -16504,49 +16769,8 @@
         </p:nvSpPr>
         <p:spPr>
           <a:xfrm>
-            <a:off x="365760" y="1737360"/>
-            <a:ext cx="5120640" cy="457200"/>
-          </a:xfrm>
-          <a:prstGeom prst="rect">
-            <a:avLst/>
-          </a:prstGeom>
-          <a:noFill/>
-          <a:ln/>
-        </p:spPr>
-        <p:txBody>
-          <a:bodyPr wrap="square" lIns="0" tIns="0" rIns="0" bIns="0" rtlCol="0" anchor="ctr">
-            <a:normAutofit/>
-          </a:bodyPr>
-          <a:lstStyle/>
-          <a:p>
-            <a:pPr algn="l" indent="0" marL="0">
-              <a:buNone/>
-            </a:pPr>
-            <a:r>
-              <a:rPr lang="en-US" sz="3000" b="1" dirty="0">
-                <a:solidFill>
-                  <a:srgbClr val="990011"/>
-                </a:solidFill>
-                <a:latin typeface="Times New Roman" pitchFamily="34" charset="0"/>
-                <a:ea typeface="Times New Roman" pitchFamily="34" charset="-122"/>
-                <a:cs typeface="Times New Roman" pitchFamily="34" charset="-120"/>
-              </a:rPr>
-              <a:t>A) Positive Effects</a:t>
-            </a:r>
-            <a:endParaRPr lang="en-US" sz="3000" dirty="0"/>
-          </a:p>
-        </p:txBody>
-      </p:sp>
-      <p:sp>
-        <p:nvSpPr>
-          <p:cNvPr id="5" name="Text 3"/>
-          <p:cNvSpPr/>
-          <p:nvPr/>
-        </p:nvSpPr>
-        <p:spPr>
-          <a:xfrm>
-            <a:off x="365760" y="2240280"/>
-            <a:ext cx="4846320" cy="4160520"/>
+            <a:off x="365760" y="1783080"/>
+            <a:ext cx="6035040" cy="4617720"/>
           </a:xfrm>
           <a:prstGeom prst="rect">
             <a:avLst/>
@@ -16573,7 +16797,7 @@
                 <a:ea typeface="Times New Roman" pitchFamily="34" charset="-122"/>
                 <a:cs typeface="Times New Roman" pitchFamily="34" charset="-120"/>
               </a:rPr>
-              <a:t>Landscapes: </a:t>
+              <a:t>Rounded boulders and domes: </a:t>
             </a:r>
             <a:pPr algn="l" indent="0" marL="0">
               <a:spcAft>
@@ -16590,7 +16814,7 @@
                 <a:ea typeface="Times New Roman" pitchFamily="34" charset="-122"/>
                 <a:cs typeface="Times New Roman" pitchFamily="34" charset="-120"/>
               </a:rPr>
-              <a:t>Weathering carves inselbergs, domes and arches that attract tourists, like the landscapes of Rhumsiki.</a:t>
+              <a:t>Exfoliation and pressure release remove curved sheets of rock. They give rounded boulders and large bare domes of granite.</a:t>
             </a:r>
             <a:endParaRPr lang="en-US" sz="3600" dirty="0"/>
           </a:p>
@@ -16598,7 +16822,7 @@
       </p:sp>
       <p:pic>
         <p:nvPicPr>
-          <p:cNvPr id="6" name="Image 0" descr="/home/claude/f4/img/v2/lsa_mandara.jpg">    </p:cNvPr>
+          <p:cNvPr id="5" name="Image 0" descr="/home/claude/f4/img/v2/lsa_mandara.jpg">    </p:cNvPr>
           <p:cNvPicPr>
             <a:picLocks noChangeAspect="1"/>
           </p:cNvPicPr>
@@ -16612,8 +16836,8 @@
         </p:blipFill>
         <p:spPr>
           <a:xfrm>
-            <a:off x="5349240" y="3040233"/>
-            <a:ext cx="6659575" cy="1755943"/>
+            <a:off x="6537960" y="3196949"/>
+            <a:ext cx="5470855" cy="1442511"/>
           </a:xfrm>
           <a:prstGeom prst="rect">
             <a:avLst/>
@@ -16622,14 +16846,14 @@
       </p:pic>
       <p:sp>
         <p:nvSpPr>
-          <p:cNvPr id="7" name="Text 4"/>
+          <p:cNvPr id="6" name="Text 3"/>
           <p:cNvSpPr/>
           <p:nvPr/>
         </p:nvSpPr>
         <p:spPr>
           <a:xfrm>
-            <a:off x="5349240" y="6089904"/>
-            <a:ext cx="6659575" cy="347472"/>
+            <a:off x="6537960" y="6089904"/>
+            <a:ext cx="5470855" cy="347472"/>
           </a:xfrm>
           <a:prstGeom prst="rect">
             <a:avLst/>
@@ -16653,7 +16877,7 @@
                 <a:ea typeface="Times New Roman" pitchFamily="34" charset="-122"/>
                 <a:cs typeface="Times New Roman" pitchFamily="34" charset="-120"/>
               </a:rPr>
-              <a:t>Illustration: landscape near Rhumsiki</a:t>
+              <a:t>Illustration: the landscape of Rhumsiki</a:t>
             </a:r>
             <a:endParaRPr lang="en-US" sz="1600" dirty="0"/>
           </a:p>
@@ -16830,7 +17054,7 @@
                 <a:ea typeface="Times New Roman" pitchFamily="34" charset="-122"/>
                 <a:cs typeface="Times New Roman" pitchFamily="34" charset="-120"/>
               </a:rPr>
-              <a:t>2. Effects of Weathering on the Landscape and Man</a:t>
+              <a:t>2. Effects of Weathering on the Landscape</a:t>
             </a:r>
             <a:endParaRPr lang="en-US" sz="3600" dirty="0"/>
           </a:p>
@@ -16844,47 +17068,8 @@
         </p:nvSpPr>
         <p:spPr>
           <a:xfrm>
-            <a:off x="5349240" y="1737360"/>
-            <a:ext cx="6522415" cy="457200"/>
-          </a:xfrm>
-          <a:prstGeom prst="rect">
-            <a:avLst/>
-          </a:prstGeom>
-          <a:noFill/>
-          <a:ln/>
-        </p:spPr>
-        <p:txBody>
-          <a:bodyPr wrap="square" lIns="0" tIns="0" rIns="0" bIns="0" rtlCol="0" anchor="ctr"/>
-          <a:lstStyle/>
-          <a:p>
-            <a:pPr algn="l" indent="0" marL="0">
-              <a:buNone/>
-            </a:pPr>
-            <a:r>
-              <a:rPr lang="en-US" sz="3200" b="1" dirty="0">
-                <a:solidFill>
-                  <a:srgbClr val="990011"/>
-                </a:solidFill>
-                <a:latin typeface="Times New Roman" pitchFamily="34" charset="0"/>
-                <a:ea typeface="Times New Roman" pitchFamily="34" charset="-122"/>
-                <a:cs typeface="Times New Roman" pitchFamily="34" charset="-120"/>
-              </a:rPr>
-              <a:t>A) Positive Effects</a:t>
-            </a:r>
-            <a:endParaRPr lang="en-US" sz="3200" dirty="0"/>
-          </a:p>
-        </p:txBody>
-      </p:sp>
-      <p:sp>
-        <p:nvSpPr>
-          <p:cNvPr id="6" name="Text 3"/>
-          <p:cNvSpPr/>
-          <p:nvPr/>
-        </p:nvSpPr>
-        <p:spPr>
-          <a:xfrm>
-            <a:off x="5349240" y="2240280"/>
-            <a:ext cx="6522415" cy="4206240"/>
+            <a:off x="5349240" y="1783080"/>
+            <a:ext cx="6522415" cy="4663440"/>
           </a:xfrm>
           <a:prstGeom prst="rect">
             <a:avLst/>
@@ -16911,7 +17096,7 @@
                 <a:ea typeface="Times New Roman" pitchFamily="34" charset="-122"/>
                 <a:cs typeface="Times New Roman" pitchFamily="34" charset="-120"/>
               </a:rPr>
-              <a:t>Groundwater: </a:t>
+              <a:t>Karst landscapes: </a:t>
             </a:r>
             <a:pPr algn="l" indent="0" marL="0">
               <a:spcAft>
@@ -16928,7 +17113,7 @@
                 <a:ea typeface="Times New Roman" pitchFamily="34" charset="-122"/>
                 <a:cs typeface="Times New Roman" pitchFamily="34" charset="-120"/>
               </a:rPr>
-              <a:t>The regolith stores rainwater like a sponge, which feeds wells and boreholes.</a:t>
+              <a:t>The solution of limestone forms caves, sinkholes and bare rock pavements. Rivers may disappear underground in these regions.</a:t>
             </a:r>
             <a:endParaRPr lang="en-US" sz="4000" dirty="0"/>
           </a:p>
@@ -17046,170 +17231,9 @@
           </a:p>
         </p:txBody>
       </p:sp>
-      <p:sp>
-        <p:nvSpPr>
-          <p:cNvPr id="3" name="Text 1"/>
-          <p:cNvSpPr/>
-          <p:nvPr/>
-        </p:nvSpPr>
-        <p:spPr>
-          <a:xfrm>
-            <a:off x="365760" y="1005840"/>
-            <a:ext cx="11460175" cy="731520"/>
-          </a:xfrm>
-          <a:prstGeom prst="rect">
-            <a:avLst/>
-          </a:prstGeom>
-          <a:noFill/>
-          <a:ln/>
-        </p:spPr>
-        <p:txBody>
-          <a:bodyPr wrap="square" lIns="0" tIns="0" rIns="0" bIns="0" rtlCol="0" anchor="ctr">
-            <a:normAutofit/>
-          </a:bodyPr>
-          <a:lstStyle/>
-          <a:p>
-            <a:pPr algn="ctr" indent="0" marL="0">
-              <a:buNone/>
-            </a:pPr>
-            <a:r>
-              <a:rPr lang="en-US" sz="3600" b="1" dirty="0">
-                <a:solidFill>
-                  <a:srgbClr val="990011"/>
-                </a:solidFill>
-                <a:latin typeface="Times New Roman" pitchFamily="34" charset="0"/>
-                <a:ea typeface="Times New Roman" pitchFamily="34" charset="-122"/>
-                <a:cs typeface="Times New Roman" pitchFamily="34" charset="-120"/>
-              </a:rPr>
-              <a:t>2. Effects of Weathering on the Landscape and Man</a:t>
-            </a:r>
-            <a:endParaRPr lang="en-US" sz="3600" dirty="0"/>
-          </a:p>
-        </p:txBody>
-      </p:sp>
-      <p:sp>
-        <p:nvSpPr>
-          <p:cNvPr id="4" name="Text 2"/>
-          <p:cNvSpPr/>
-          <p:nvPr/>
-        </p:nvSpPr>
-        <p:spPr>
-          <a:xfrm>
-            <a:off x="365760" y="1737360"/>
-            <a:ext cx="5120640" cy="457200"/>
-          </a:xfrm>
-          <a:prstGeom prst="rect">
-            <a:avLst/>
-          </a:prstGeom>
-          <a:noFill/>
-          <a:ln/>
-        </p:spPr>
-        <p:txBody>
-          <a:bodyPr wrap="square" lIns="0" tIns="0" rIns="0" bIns="0" rtlCol="0" anchor="ctr">
-            <a:normAutofit/>
-          </a:bodyPr>
-          <a:lstStyle/>
-          <a:p>
-            <a:pPr algn="l" indent="0" marL="0">
-              <a:buNone/>
-            </a:pPr>
-            <a:r>
-              <a:rPr lang="en-US" sz="3000" b="1" dirty="0">
-                <a:solidFill>
-                  <a:srgbClr val="990011"/>
-                </a:solidFill>
-                <a:latin typeface="Times New Roman" pitchFamily="34" charset="0"/>
-                <a:ea typeface="Times New Roman" pitchFamily="34" charset="-122"/>
-                <a:cs typeface="Times New Roman" pitchFamily="34" charset="-120"/>
-              </a:rPr>
-              <a:t>B) Negative Effects</a:t>
-            </a:r>
-            <a:endParaRPr lang="en-US" sz="3000" dirty="0"/>
-          </a:p>
-        </p:txBody>
-      </p:sp>
-      <p:sp>
-        <p:nvSpPr>
-          <p:cNvPr id="5" name="Text 3"/>
-          <p:cNvSpPr/>
-          <p:nvPr/>
-        </p:nvSpPr>
-        <p:spPr>
-          <a:xfrm>
-            <a:off x="365760" y="2240280"/>
-            <a:ext cx="4846320" cy="4160520"/>
-          </a:xfrm>
-          <a:prstGeom prst="rect">
-            <a:avLst/>
-          </a:prstGeom>
-          <a:noFill/>
-          <a:ln/>
-        </p:spPr>
-        <p:txBody>
-          <a:bodyPr wrap="square" lIns="0" tIns="0" rIns="0" bIns="0" rtlCol="0" anchor="t"/>
-          <a:lstStyle/>
-          <a:p>
-            <a:pPr algn="l" indent="0" marL="0">
-              <a:spcAft>
-                <a:spcPts val="800"/>
-              </a:spcAft>
-              <a:buNone/>
-            </a:pPr>
-            <a:r>
-              <a:rPr lang="en-US" sz="3000" i="1" dirty="0">
-                <a:solidFill>
-                  <a:srgbClr val="111111"/>
-                </a:solidFill>
-                <a:latin typeface="Times New Roman" pitchFamily="34" charset="0"/>
-                <a:ea typeface="Times New Roman" pitchFamily="34" charset="-122"/>
-                <a:cs typeface="Times New Roman" pitchFamily="34" charset="-120"/>
-              </a:rPr>
-              <a:t>Weathering has the following negative effects:</a:t>
-            </a:r>
-            <a:endParaRPr lang="en-US" sz="3000" dirty="0"/>
-          </a:p>
-          <a:p>
-            <a:pPr algn="l" indent="0" marL="0">
-              <a:spcAft>
-                <a:spcPts val="800"/>
-              </a:spcAft>
-              <a:buNone/>
-            </a:pPr>
-            <a:r>
-              <a:rPr lang="en-US" sz="3000" b="1" dirty="0">
-                <a:solidFill>
-                  <a:srgbClr val="111111"/>
-                </a:solidFill>
-                <a:latin typeface="Times New Roman" pitchFamily="34" charset="0"/>
-                <a:ea typeface="Times New Roman" pitchFamily="34" charset="-122"/>
-                <a:cs typeface="Times New Roman" pitchFamily="34" charset="-120"/>
-              </a:rPr>
-              <a:t>Damage to structures: </a:t>
-            </a:r>
-            <a:pPr algn="l" indent="0" marL="0">
-              <a:spcAft>
-                <a:spcPts val="800"/>
-              </a:spcAft>
-              <a:buNone/>
-            </a:pPr>
-            <a:r>
-              <a:rPr lang="en-US" sz="3000" dirty="0">
-                <a:solidFill>
-                  <a:srgbClr val="111111"/>
-                </a:solidFill>
-                <a:latin typeface="Times New Roman" pitchFamily="34" charset="0"/>
-                <a:ea typeface="Times New Roman" pitchFamily="34" charset="-122"/>
-                <a:cs typeface="Times New Roman" pitchFamily="34" charset="-120"/>
-              </a:rPr>
-              <a:t>It cracks walls, makes potholes and weakens bridges and monuments, which are costly to repair.</a:t>
-            </a:r>
-            <a:endParaRPr lang="en-US" sz="3000" dirty="0"/>
-          </a:p>
-        </p:txBody>
-      </p:sp>
       <p:pic>
         <p:nvPicPr>
-          <p:cNvPr id="6" name="Image 0" descr="/home/claude/f4/img/v2/f4_oldwall.jpg">    </p:cNvPr>
+          <p:cNvPr id="3" name="Image 0" descr="/home/claude/f4/img/minesec_sheet.png">    </p:cNvPr>
           <p:cNvPicPr>
             <a:picLocks noChangeAspect="1"/>
           </p:cNvPicPr>
@@ -17223,8 +17247,8 @@
         </p:blipFill>
         <p:spPr>
           <a:xfrm>
-            <a:off x="5349240" y="2071212"/>
-            <a:ext cx="6659575" cy="3693983"/>
+            <a:off x="0" y="658368"/>
+            <a:ext cx="5120640" cy="5833872"/>
           </a:xfrm>
           <a:prstGeom prst="rect">
             <a:avLst/>
@@ -17233,14 +17257,14 @@
       </p:pic>
       <p:sp>
         <p:nvSpPr>
-          <p:cNvPr id="7" name="Text 4"/>
+          <p:cNvPr id="4" name="Text 1"/>
           <p:cNvSpPr/>
           <p:nvPr/>
         </p:nvSpPr>
         <p:spPr>
           <a:xfrm>
-            <a:off x="5349240" y="6089904"/>
-            <a:ext cx="6659575" cy="347472"/>
+            <a:off x="5349240" y="1005840"/>
+            <a:ext cx="6522415" cy="731520"/>
           </a:xfrm>
           <a:prstGeom prst="rect">
             <a:avLst/>
@@ -17249,24 +17273,85 @@
           <a:ln/>
         </p:spPr>
         <p:txBody>
-          <a:bodyPr wrap="square" lIns="0" tIns="0" rIns="0" bIns="0" rtlCol="0" anchor="ctr"/>
+          <a:bodyPr wrap="square" lIns="0" tIns="0" rIns="0" bIns="0" rtlCol="0" anchor="ctr">
+            <a:normAutofit/>
+          </a:bodyPr>
           <a:lstStyle/>
           <a:p>
             <a:pPr algn="ctr" indent="0" marL="0">
               <a:buNone/>
             </a:pPr>
             <a:r>
-              <a:rPr lang="en-US" sz="1600" i="1" dirty="0">
-                <a:solidFill>
-                  <a:srgbClr val="555555"/>
+              <a:rPr lang="en-US" sz="3600" b="1" dirty="0">
+                <a:solidFill>
+                  <a:srgbClr val="990011"/>
                 </a:solidFill>
                 <a:latin typeface="Times New Roman" pitchFamily="34" charset="0"/>
                 <a:ea typeface="Times New Roman" pitchFamily="34" charset="-122"/>
                 <a:cs typeface="Times New Roman" pitchFamily="34" charset="-120"/>
               </a:rPr>
-              <a:t>Illustration: a weathered wall</a:t>
-            </a:r>
-            <a:endParaRPr lang="en-US" sz="1600" dirty="0"/>
+              <a:t>2. Effects of Weathering on the Landscape</a:t>
+            </a:r>
+            <a:endParaRPr lang="en-US" sz="3600" dirty="0"/>
+          </a:p>
+        </p:txBody>
+      </p:sp>
+      <p:sp>
+        <p:nvSpPr>
+          <p:cNvPr id="5" name="Text 2"/>
+          <p:cNvSpPr/>
+          <p:nvPr/>
+        </p:nvSpPr>
+        <p:spPr>
+          <a:xfrm>
+            <a:off x="5349240" y="1783080"/>
+            <a:ext cx="6522415" cy="4663440"/>
+          </a:xfrm>
+          <a:prstGeom prst="rect">
+            <a:avLst/>
+          </a:prstGeom>
+          <a:noFill/>
+          <a:ln/>
+        </p:spPr>
+        <p:txBody>
+          <a:bodyPr wrap="square" lIns="0" tIns="0" rIns="0" bIns="0" rtlCol="0" anchor="t"/>
+          <a:lstStyle/>
+          <a:p>
+            <a:pPr algn="l" indent="0" marL="0">
+              <a:spcAft>
+                <a:spcPts val="800"/>
+              </a:spcAft>
+              <a:buNone/>
+            </a:pPr>
+            <a:r>
+              <a:rPr lang="en-US" sz="4000" b="1" dirty="0">
+                <a:solidFill>
+                  <a:srgbClr val="111111"/>
+                </a:solidFill>
+                <a:latin typeface="Times New Roman" pitchFamily="34" charset="0"/>
+                <a:ea typeface="Times New Roman" pitchFamily="34" charset="-122"/>
+                <a:cs typeface="Times New Roman" pitchFamily="34" charset="-120"/>
+              </a:rPr>
+              <a:t>Deep regolith and laterite: </a:t>
+            </a:r>
+            <a:pPr algn="l" indent="0" marL="0">
+              <a:spcAft>
+                <a:spcPts val="800"/>
+              </a:spcAft>
+              <a:buNone/>
+            </a:pPr>
+            <a:r>
+              <a:rPr lang="en-US" sz="4000" dirty="0">
+                <a:solidFill>
+                  <a:srgbClr val="111111"/>
+                </a:solidFill>
+                <a:latin typeface="Times New Roman" pitchFamily="34" charset="0"/>
+                <a:ea typeface="Times New Roman" pitchFamily="34" charset="-122"/>
+                <a:cs typeface="Times New Roman" pitchFamily="34" charset="-120"/>
+              </a:rPr>
+              <a:t>In hot, wet regions, weathering can reach tens of metres deep. Iron oxides can harden into laterite crusts that form flat-topped hills.</a:t>
+            </a:r>
+            <a:endParaRPr lang="en-US" sz="4000" dirty="0"/>
           </a:p>
         </p:txBody>
       </p:sp>
@@ -17399,7 +17484,7 @@
         <p:spPr>
           <a:xfrm>
             <a:off x="0" y="658368"/>
-            <a:ext cx="5120640" cy="5833872"/>
+            <a:ext cx="2468880" cy="5833872"/>
           </a:xfrm>
           <a:prstGeom prst="rect">
             <a:avLst/>
@@ -17414,8 +17499,8 @@
         </p:nvSpPr>
         <p:spPr>
           <a:xfrm>
-            <a:off x="5349240" y="1005840"/>
-            <a:ext cx="6522415" cy="731520"/>
+            <a:off x="2697480" y="1005840"/>
+            <a:ext cx="9174175" cy="731520"/>
           </a:xfrm>
           <a:prstGeom prst="rect">
             <a:avLst/>
@@ -17441,7 +17526,7 @@
                 <a:ea typeface="Times New Roman" pitchFamily="34" charset="-122"/>
                 <a:cs typeface="Times New Roman" pitchFamily="34" charset="-120"/>
               </a:rPr>
-              <a:t>2. Effects of Weathering on the Landscape and Man</a:t>
+              <a:t>3. Effects of Weathering on Man</a:t>
             </a:r>
             <a:endParaRPr lang="en-US" sz="3600" dirty="0"/>
           </a:p>
@@ -17455,47 +17540,8 @@
         </p:nvSpPr>
         <p:spPr>
           <a:xfrm>
-            <a:off x="5349240" y="1737360"/>
-            <a:ext cx="6522415" cy="457200"/>
-          </a:xfrm>
-          <a:prstGeom prst="rect">
-            <a:avLst/>
-          </a:prstGeom>
-          <a:noFill/>
-          <a:ln/>
-        </p:spPr>
-        <p:txBody>
-          <a:bodyPr wrap="square" lIns="0" tIns="0" rIns="0" bIns="0" rtlCol="0" anchor="ctr"/>
-          <a:lstStyle/>
-          <a:p>
-            <a:pPr algn="l" indent="0" marL="0">
-              <a:buNone/>
-            </a:pPr>
-            <a:r>
-              <a:rPr lang="en-US" sz="3200" b="1" dirty="0">
-                <a:solidFill>
-                  <a:srgbClr val="990011"/>
-                </a:solidFill>
-                <a:latin typeface="Times New Roman" pitchFamily="34" charset="0"/>
-                <a:ea typeface="Times New Roman" pitchFamily="34" charset="-122"/>
-                <a:cs typeface="Times New Roman" pitchFamily="34" charset="-120"/>
-              </a:rPr>
-              <a:t>B) Negative Effects</a:t>
-            </a:r>
-            <a:endParaRPr lang="en-US" sz="3200" dirty="0"/>
-          </a:p>
-        </p:txBody>
-      </p:sp>
-      <p:sp>
-        <p:nvSpPr>
-          <p:cNvPr id="6" name="Text 3"/>
-          <p:cNvSpPr/>
-          <p:nvPr/>
-        </p:nvSpPr>
-        <p:spPr>
-          <a:xfrm>
-            <a:off x="5349240" y="2240280"/>
-            <a:ext cx="6522415" cy="4206240"/>
+            <a:off x="2697480" y="1783080"/>
+            <a:ext cx="9174175" cy="4663440"/>
           </a:xfrm>
           <a:prstGeom prst="rect">
             <a:avLst/>
@@ -17514,7 +17560,7 @@
               <a:buNone/>
             </a:pPr>
             <a:r>
-              <a:rPr lang="en-US" sz="4000" b="1" dirty="0">
+              <a:rPr lang="en-US" sz="4000" i="1" dirty="0">
                 <a:solidFill>
                   <a:srgbClr val="111111"/>
                 </a:solidFill>
@@ -17522,8 +17568,11 @@
                 <a:ea typeface="Times New Roman" pitchFamily="34" charset="-122"/>
                 <a:cs typeface="Times New Roman" pitchFamily="34" charset="-120"/>
               </a:rPr>
-              <a:t>Hazards: </a:t>
-            </a:r>
+              <a:t>Weathering affects man in the following ways:</a:t>
+            </a:r>
+            <a:endParaRPr lang="en-US" sz="4000" dirty="0"/>
+          </a:p>
+          <a:p>
             <a:pPr algn="l" indent="0" marL="0">
               <a:spcAft>
                 <a:spcPts val="800"/>
@@ -17531,7 +17580,7 @@
               <a:buNone/>
             </a:pPr>
             <a:r>
-              <a:rPr lang="en-US" sz="4000" dirty="0">
+              <a:rPr lang="en-US" sz="4000" b="1" dirty="0">
                 <a:solidFill>
                   <a:srgbClr val="111111"/>
                 </a:solidFill>
@@ -17539,11 +17588,8 @@
                 <a:ea typeface="Times New Roman" pitchFamily="34" charset="-122"/>
                 <a:cs typeface="Times New Roman" pitchFamily="34" charset="-120"/>
               </a:rPr>
-              <a:t>Weathered rocks on steep slopes cause landslides and rockfalls.</a:t>
-            </a:r>
-            <a:endParaRPr lang="en-US" sz="4000" dirty="0"/>
-          </a:p>
-          <a:p>
+              <a:t>Farming and tourism: </a:t>
+            </a:r>
             <a:pPr algn="l" indent="0" marL="0">
               <a:spcAft>
                 <a:spcPts val="800"/>
@@ -17551,7 +17597,7 @@
               <a:buNone/>
             </a:pPr>
             <a:r>
-              <a:rPr lang="en-US" sz="4000" b="1" dirty="0">
+              <a:rPr lang="en-US" sz="4000" dirty="0">
                 <a:solidFill>
                   <a:srgbClr val="111111"/>
                 </a:solidFill>
@@ -17559,24 +17605,7 @@
                 <a:ea typeface="Times New Roman" pitchFamily="34" charset="-122"/>
                 <a:cs typeface="Times New Roman" pitchFamily="34" charset="-120"/>
               </a:rPr>
-              <a:t>Leaching: </a:t>
-            </a:r>
-            <a:pPr algn="l" indent="0" marL="0">
-              <a:spcAft>
-                <a:spcPts val="800"/>
-              </a:spcAft>
-              <a:buNone/>
-            </a:pPr>
-            <a:r>
-              <a:rPr lang="en-US" sz="4000" dirty="0">
-                <a:solidFill>
-                  <a:srgbClr val="111111"/>
-                </a:solidFill>
-                <a:latin typeface="Times New Roman" pitchFamily="34" charset="0"/>
-                <a:ea typeface="Times New Roman" pitchFamily="34" charset="-122"/>
-                <a:cs typeface="Times New Roman" pitchFamily="34" charset="-120"/>
-              </a:rPr>
-              <a:t>Heavy rain washes nutrients deep into the soil and reduces fertility.</a:t>
+              <a:t>Weathering creates the soils that feed the population. Its landforms, such as the inselbergs and volcanic necks of Rhumsiki, attract tourists and bring income.</a:t>
             </a:r>
             <a:endParaRPr lang="en-US" sz="4000" dirty="0"/>
           </a:p>
@@ -17688,15 +17717,115 @@
                 <a:ea typeface="Calibri" pitchFamily="34" charset="-122"/>
                 <a:cs typeface="Calibri" pitchFamily="34" charset="-120"/>
               </a:rPr>
-              <a:t>FORMATIVE EVALUATION</a:t>
+              <a:t>BOARD SUMMARY</a:t>
             </a:r>
             <a:endParaRPr lang="en-US" sz="1400" dirty="0"/>
+          </a:p>
+        </p:txBody>
+      </p:sp>
+      <p:sp>
+        <p:nvSpPr>
+          <p:cNvPr id="3" name="Text 1"/>
+          <p:cNvSpPr/>
+          <p:nvPr/>
+        </p:nvSpPr>
+        <p:spPr>
+          <a:xfrm>
+            <a:off x="365760" y="1005840"/>
+            <a:ext cx="11460175" cy="731520"/>
+          </a:xfrm>
+          <a:prstGeom prst="rect">
+            <a:avLst/>
+          </a:prstGeom>
+          <a:noFill/>
+          <a:ln/>
+        </p:spPr>
+        <p:txBody>
+          <a:bodyPr wrap="square" lIns="0" tIns="0" rIns="0" bIns="0" rtlCol="0" anchor="ctr">
+            <a:normAutofit/>
+          </a:bodyPr>
+          <a:lstStyle/>
+          <a:p>
+            <a:pPr algn="ctr" indent="0" marL="0">
+              <a:buNone/>
+            </a:pPr>
+            <a:r>
+              <a:rPr lang="en-US" sz="3600" b="1" dirty="0">
+                <a:solidFill>
+                  <a:srgbClr val="990011"/>
+                </a:solidFill>
+                <a:latin typeface="Times New Roman" pitchFamily="34" charset="0"/>
+                <a:ea typeface="Times New Roman" pitchFamily="34" charset="-122"/>
+                <a:cs typeface="Times New Roman" pitchFamily="34" charset="-120"/>
+              </a:rPr>
+              <a:t>3. Effects of Weathering on Man</a:t>
+            </a:r>
+            <a:endParaRPr lang="en-US" sz="3600" dirty="0"/>
+          </a:p>
+        </p:txBody>
+      </p:sp>
+      <p:sp>
+        <p:nvSpPr>
+          <p:cNvPr id="4" name="Text 2"/>
+          <p:cNvSpPr/>
+          <p:nvPr/>
+        </p:nvSpPr>
+        <p:spPr>
+          <a:xfrm>
+            <a:off x="365760" y="1783080"/>
+            <a:ext cx="6035040" cy="4617720"/>
+          </a:xfrm>
+          <a:prstGeom prst="rect">
+            <a:avLst/>
+          </a:prstGeom>
+          <a:noFill/>
+          <a:ln/>
+        </p:spPr>
+        <p:txBody>
+          <a:bodyPr wrap="square" lIns="0" tIns="0" rIns="0" bIns="0" rtlCol="0" anchor="t"/>
+          <a:lstStyle/>
+          <a:p>
+            <a:pPr algn="l" indent="0" marL="0">
+              <a:spcAft>
+                <a:spcPts val="800"/>
+              </a:spcAft>
+              <a:buNone/>
+            </a:pPr>
+            <a:r>
+              <a:rPr lang="en-US" sz="3600" b="1" dirty="0">
+                <a:solidFill>
+                  <a:srgbClr val="111111"/>
+                </a:solidFill>
+                <a:latin typeface="Times New Roman" pitchFamily="34" charset="0"/>
+                <a:ea typeface="Times New Roman" pitchFamily="34" charset="-122"/>
+                <a:cs typeface="Times New Roman" pitchFamily="34" charset="-120"/>
+              </a:rPr>
+              <a:t>Damage to structures: </a:t>
+            </a:r>
+            <a:pPr algn="l" indent="0" marL="0">
+              <a:spcAft>
+                <a:spcPts val="800"/>
+              </a:spcAft>
+              <a:buNone/>
+            </a:pPr>
+            <a:r>
+              <a:rPr lang="en-US" sz="3600" dirty="0">
+                <a:solidFill>
+                  <a:srgbClr val="111111"/>
+                </a:solidFill>
+                <a:latin typeface="Times New Roman" pitchFamily="34" charset="0"/>
+                <a:ea typeface="Times New Roman" pitchFamily="34" charset="-122"/>
+                <a:cs typeface="Times New Roman" pitchFamily="34" charset="-120"/>
+              </a:rPr>
+              <a:t>Weathering cracks walls, makes potholes in roads and weakens bridges and monuments. Their repair costs a lot of money every year.</a:t>
+            </a:r>
+            <a:endParaRPr lang="en-US" sz="3600" dirty="0"/>
           </a:p>
         </p:txBody>
       </p:sp>
       <p:pic>
         <p:nvPicPr>
-          <p:cNvPr id="3" name="Image 0" descr="/home/claude/f4/img/minesec_sheet.png">    </p:cNvPr>
+          <p:cNvPr id="5" name="Image 0" descr="/home/claude/f4/img/v2/f4_oldwall.jpg">    </p:cNvPr>
           <p:cNvPicPr>
             <a:picLocks noChangeAspect="1"/>
           </p:cNvPicPr>
@@ -17710,8 +17839,8 @@
         </p:blipFill>
         <p:spPr>
           <a:xfrm>
-            <a:off x="0" y="658368"/>
-            <a:ext cx="5120640" cy="5833872"/>
+            <a:off x="6537960" y="2400897"/>
+            <a:ext cx="5470855" cy="3034615"/>
           </a:xfrm>
           <a:prstGeom prst="rect">
             <a:avLst/>
@@ -17720,14 +17849,14 @@
       </p:pic>
       <p:sp>
         <p:nvSpPr>
-          <p:cNvPr id="4" name="Text 1"/>
+          <p:cNvPr id="6" name="Text 3"/>
           <p:cNvSpPr/>
           <p:nvPr/>
         </p:nvSpPr>
         <p:spPr>
           <a:xfrm>
-            <a:off x="5349240" y="1005840"/>
-            <a:ext cx="6522415" cy="731520"/>
+            <a:off x="6537960" y="6089904"/>
+            <a:ext cx="5470855" cy="347472"/>
           </a:xfrm>
           <a:prstGeom prst="rect">
             <a:avLst/>
@@ -17736,68 +17865,24 @@
           <a:ln/>
         </p:spPr>
         <p:txBody>
-          <a:bodyPr wrap="square" lIns="0" tIns="0" rIns="0" bIns="0" rtlCol="0" anchor="ctr">
-            <a:normAutofit/>
-          </a:bodyPr>
+          <a:bodyPr wrap="square" lIns="0" tIns="0" rIns="0" bIns="0" rtlCol="0" anchor="ctr"/>
           <a:lstStyle/>
           <a:p>
             <a:pPr algn="ctr" indent="0" marL="0">
               <a:buNone/>
             </a:pPr>
             <a:r>
-              <a:rPr lang="en-US" sz="3600" b="1" dirty="0">
-                <a:solidFill>
-                  <a:srgbClr val="990011"/>
+              <a:rPr lang="en-US" sz="1600" i="1" dirty="0">
+                <a:solidFill>
+                  <a:srgbClr val="555555"/>
                 </a:solidFill>
                 <a:latin typeface="Times New Roman" pitchFamily="34" charset="0"/>
                 <a:ea typeface="Times New Roman" pitchFamily="34" charset="-122"/>
                 <a:cs typeface="Times New Roman" pitchFamily="34" charset="-120"/>
               </a:rPr>
-              <a:t>Evaluation 1</a:t>
-            </a:r>
-            <a:endParaRPr lang="en-US" sz="3600" dirty="0"/>
-          </a:p>
-        </p:txBody>
-      </p:sp>
-      <p:sp>
-        <p:nvSpPr>
-          <p:cNvPr id="5" name="Text 2"/>
-          <p:cNvSpPr/>
-          <p:nvPr/>
-        </p:nvSpPr>
-        <p:spPr>
-          <a:xfrm>
-            <a:off x="5349240" y="1783080"/>
-            <a:ext cx="6522415" cy="4663440"/>
-          </a:xfrm>
-          <a:prstGeom prst="rect">
-            <a:avLst/>
-          </a:prstGeom>
-          <a:noFill/>
-          <a:ln/>
-        </p:spPr>
-        <p:txBody>
-          <a:bodyPr wrap="square" lIns="0" tIns="0" rIns="0" bIns="0" rtlCol="0" anchor="t"/>
-          <a:lstStyle/>
-          <a:p>
-            <a:pPr algn="l" indent="0" marL="0">
-              <a:spcAft>
-                <a:spcPts val="800"/>
-              </a:spcAft>
-              <a:buNone/>
-            </a:pPr>
-            <a:r>
-              <a:rPr lang="en-US" sz="4000" dirty="0">
-                <a:solidFill>
-                  <a:srgbClr val="111111"/>
-                </a:solidFill>
-                <a:latin typeface="Times New Roman" pitchFamily="34" charset="0"/>
-                <a:ea typeface="Times New Roman" pitchFamily="34" charset="-122"/>
-                <a:cs typeface="Times New Roman" pitchFamily="34" charset="-120"/>
-              </a:rPr>
-              <a:t>Give two economic uses of weathering products.</a:t>
-            </a:r>
-            <a:endParaRPr lang="en-US" sz="4000" dirty="0"/>
+              <a:t>Illustration: a weathered wall</a:t>
+            </a:r>
+            <a:endParaRPr lang="en-US" sz="1600" dirty="0"/>
           </a:p>
         </p:txBody>
       </p:sp>
@@ -17907,7 +17992,7 @@
                 <a:ea typeface="Calibri" pitchFamily="34" charset="-122"/>
                 <a:cs typeface="Calibri" pitchFamily="34" charset="-120"/>
               </a:rPr>
-              <a:t>FORMATIVE EVALUATION</a:t>
+              <a:t>BOARD SUMMARY</a:t>
             </a:r>
             <a:endParaRPr lang="en-US" sz="1400" dirty="0"/>
           </a:p>
@@ -17972,7 +18057,7 @@
                 <a:ea typeface="Times New Roman" pitchFamily="34" charset="-122"/>
                 <a:cs typeface="Times New Roman" pitchFamily="34" charset="-120"/>
               </a:rPr>
-              <a:t>Expected Answer</a:t>
+              <a:t>3. Effects of Weathering on Man</a:t>
             </a:r>
             <a:endParaRPr lang="en-US" sz="3600" dirty="0"/>
           </a:p>
@@ -18006,7 +18091,7 @@
               <a:buNone/>
             </a:pPr>
             <a:r>
-              <a:rPr lang="en-US" sz="4000" dirty="0">
+              <a:rPr lang="en-US" sz="4000" b="1" dirty="0">
                 <a:solidFill>
                   <a:srgbClr val="111111"/>
                 </a:solidFill>
@@ -18014,7 +18099,24 @@
                 <a:ea typeface="Times New Roman" pitchFamily="34" charset="-122"/>
                 <a:cs typeface="Times New Roman" pitchFamily="34" charset="-120"/>
               </a:rPr>
-              <a:t>Soils for farming, sand and gravel for building, clay for bricks, bauxite ore (any two).</a:t>
+              <a:t>Slope hazards: </a:t>
+            </a:r>
+            <a:pPr algn="l" indent="0" marL="0">
+              <a:spcAft>
+                <a:spcPts val="800"/>
+              </a:spcAft>
+              <a:buNone/>
+            </a:pPr>
+            <a:r>
+              <a:rPr lang="en-US" sz="4000" dirty="0">
+                <a:solidFill>
+                  <a:srgbClr val="111111"/>
+                </a:solidFill>
+                <a:latin typeface="Times New Roman" pitchFamily="34" charset="0"/>
+                <a:ea typeface="Times New Roman" pitchFamily="34" charset="-122"/>
+                <a:cs typeface="Times New Roman" pitchFamily="34" charset="-120"/>
+              </a:rPr>
+              <a:t>Deeply weathered rock on steep slopes becomes weak and unstable. It favours landslides and rockfalls, as in the Western Highlands during the rainy season.</a:t>
             </a:r>
             <a:endParaRPr lang="en-US" sz="4000" dirty="0"/>
           </a:p>
@@ -18126,15 +18228,115 @@
                 <a:ea typeface="Calibri" pitchFamily="34" charset="-122"/>
                 <a:cs typeface="Calibri" pitchFamily="34" charset="-120"/>
               </a:rPr>
-              <a:t>FORMATIVE EVALUATION</a:t>
+              <a:t>BOARD SUMMARY</a:t>
             </a:r>
             <a:endParaRPr lang="en-US" sz="1400" dirty="0"/>
+          </a:p>
+        </p:txBody>
+      </p:sp>
+      <p:sp>
+        <p:nvSpPr>
+          <p:cNvPr id="3" name="Text 1"/>
+          <p:cNvSpPr/>
+          <p:nvPr/>
+        </p:nvSpPr>
+        <p:spPr>
+          <a:xfrm>
+            <a:off x="365760" y="1005840"/>
+            <a:ext cx="11460175" cy="731520"/>
+          </a:xfrm>
+          <a:prstGeom prst="rect">
+            <a:avLst/>
+          </a:prstGeom>
+          <a:noFill/>
+          <a:ln/>
+        </p:spPr>
+        <p:txBody>
+          <a:bodyPr wrap="square" lIns="0" tIns="0" rIns="0" bIns="0" rtlCol="0" anchor="ctr">
+            <a:normAutofit/>
+          </a:bodyPr>
+          <a:lstStyle/>
+          <a:p>
+            <a:pPr algn="ctr" indent="0" marL="0">
+              <a:buNone/>
+            </a:pPr>
+            <a:r>
+              <a:rPr lang="en-US" sz="3600" b="1" dirty="0">
+                <a:solidFill>
+                  <a:srgbClr val="990011"/>
+                </a:solidFill>
+                <a:latin typeface="Times New Roman" pitchFamily="34" charset="0"/>
+                <a:ea typeface="Times New Roman" pitchFamily="34" charset="-122"/>
+                <a:cs typeface="Times New Roman" pitchFamily="34" charset="-120"/>
+              </a:rPr>
+              <a:t>3. Effects of Weathering on Man</a:t>
+            </a:r>
+            <a:endParaRPr lang="en-US" sz="3600" dirty="0"/>
+          </a:p>
+        </p:txBody>
+      </p:sp>
+      <p:sp>
+        <p:nvSpPr>
+          <p:cNvPr id="4" name="Text 2"/>
+          <p:cNvSpPr/>
+          <p:nvPr/>
+        </p:nvSpPr>
+        <p:spPr>
+          <a:xfrm>
+            <a:off x="365760" y="1783080"/>
+            <a:ext cx="6035040" cy="4617720"/>
+          </a:xfrm>
+          <a:prstGeom prst="rect">
+            <a:avLst/>
+          </a:prstGeom>
+          <a:noFill/>
+          <a:ln/>
+        </p:spPr>
+        <p:txBody>
+          <a:bodyPr wrap="square" lIns="0" tIns="0" rIns="0" bIns="0" rtlCol="0" anchor="t"/>
+          <a:lstStyle/>
+          <a:p>
+            <a:pPr algn="l" indent="0" marL="0">
+              <a:spcAft>
+                <a:spcPts val="800"/>
+              </a:spcAft>
+              <a:buNone/>
+            </a:pPr>
+            <a:r>
+              <a:rPr lang="en-US" sz="3600" b="1" dirty="0">
+                <a:solidFill>
+                  <a:srgbClr val="111111"/>
+                </a:solidFill>
+                <a:latin typeface="Times New Roman" pitchFamily="34" charset="0"/>
+                <a:ea typeface="Times New Roman" pitchFamily="34" charset="-122"/>
+                <a:cs typeface="Times New Roman" pitchFamily="34" charset="-120"/>
+              </a:rPr>
+              <a:t>Loss of soil fertility: </a:t>
+            </a:r>
+            <a:pPr algn="l" indent="0" marL="0">
+              <a:spcAft>
+                <a:spcPts val="800"/>
+              </a:spcAft>
+              <a:buNone/>
+            </a:pPr>
+            <a:r>
+              <a:rPr lang="en-US" sz="3600" dirty="0">
+                <a:solidFill>
+                  <a:srgbClr val="111111"/>
+                </a:solidFill>
+                <a:latin typeface="Times New Roman" pitchFamily="34" charset="0"/>
+                <a:ea typeface="Times New Roman" pitchFamily="34" charset="-122"/>
+                <a:cs typeface="Times New Roman" pitchFamily="34" charset="-120"/>
+              </a:rPr>
+              <a:t>In hot, wet regions, intense weathering and leaching wash the nutrients out of the soil. Laterite crusts also form hard layers that are difficult to cultivate.</a:t>
+            </a:r>
+            <a:endParaRPr lang="en-US" sz="3600" dirty="0"/>
           </a:p>
         </p:txBody>
       </p:sp>
       <p:pic>
         <p:nvPicPr>
-          <p:cNvPr id="3" name="Image 0" descr="/home/claude/f4/img/minesec_sheet.png">    </p:cNvPr>
+          <p:cNvPr id="5" name="Image 0" descr="/home/claude/f4/img/v2/geo2_wimpact.png">    </p:cNvPr>
           <p:cNvPicPr>
             <a:picLocks noChangeAspect="1"/>
           </p:cNvPicPr>
@@ -18148,8 +18350,8 @@
         </p:blipFill>
         <p:spPr>
           <a:xfrm>
-            <a:off x="0" y="658368"/>
-            <a:ext cx="5120640" cy="5833872"/>
+            <a:off x="6537960" y="2849678"/>
+            <a:ext cx="5470855" cy="2137053"/>
           </a:xfrm>
           <a:prstGeom prst="rect">
             <a:avLst/>
@@ -18158,14 +18360,14 @@
       </p:pic>
       <p:sp>
         <p:nvSpPr>
-          <p:cNvPr id="4" name="Text 1"/>
+          <p:cNvPr id="6" name="Text 3"/>
           <p:cNvSpPr/>
           <p:nvPr/>
         </p:nvSpPr>
         <p:spPr>
           <a:xfrm>
-            <a:off x="5349240" y="1005840"/>
-            <a:ext cx="6522415" cy="731520"/>
+            <a:off x="6537960" y="6089904"/>
+            <a:ext cx="5470855" cy="347472"/>
           </a:xfrm>
           <a:prstGeom prst="rect">
             <a:avLst/>
@@ -18174,68 +18376,24 @@
           <a:ln/>
         </p:spPr>
         <p:txBody>
-          <a:bodyPr wrap="square" lIns="0" tIns="0" rIns="0" bIns="0" rtlCol="0" anchor="ctr">
-            <a:normAutofit/>
-          </a:bodyPr>
+          <a:bodyPr wrap="square" lIns="0" tIns="0" rIns="0" bIns="0" rtlCol="0" anchor="ctr"/>
           <a:lstStyle/>
           <a:p>
             <a:pPr algn="ctr" indent="0" marL="0">
               <a:buNone/>
             </a:pPr>
             <a:r>
-              <a:rPr lang="en-US" sz="3600" b="1" dirty="0">
-                <a:solidFill>
-                  <a:srgbClr val="990011"/>
+              <a:rPr lang="en-US" sz="1600" i="1" dirty="0">
+                <a:solidFill>
+                  <a:srgbClr val="555555"/>
                 </a:solidFill>
                 <a:latin typeface="Times New Roman" pitchFamily="34" charset="0"/>
                 <a:ea typeface="Times New Roman" pitchFamily="34" charset="-122"/>
                 <a:cs typeface="Times New Roman" pitchFamily="34" charset="-120"/>
               </a:rPr>
-              <a:t>Evaluation 2</a:t>
-            </a:r>
-            <a:endParaRPr lang="en-US" sz="3600" dirty="0"/>
-          </a:p>
-        </p:txBody>
-      </p:sp>
-      <p:sp>
-        <p:nvSpPr>
-          <p:cNvPr id="5" name="Text 2"/>
-          <p:cNvSpPr/>
-          <p:nvPr/>
-        </p:nvSpPr>
-        <p:spPr>
-          <a:xfrm>
-            <a:off x="5349240" y="1783080"/>
-            <a:ext cx="6522415" cy="4663440"/>
-          </a:xfrm>
-          <a:prstGeom prst="rect">
-            <a:avLst/>
-          </a:prstGeom>
-          <a:noFill/>
-          <a:ln/>
-        </p:spPr>
-        <p:txBody>
-          <a:bodyPr wrap="square" lIns="0" tIns="0" rIns="0" bIns="0" rtlCol="0" anchor="t"/>
-          <a:lstStyle/>
-          <a:p>
-            <a:pPr algn="l" indent="0" marL="0">
-              <a:spcAft>
-                <a:spcPts val="800"/>
-              </a:spcAft>
-              <a:buNone/>
-            </a:pPr>
-            <a:r>
-              <a:rPr lang="en-US" sz="4000" dirty="0">
-                <a:solidFill>
-                  <a:srgbClr val="111111"/>
-                </a:solidFill>
-                <a:latin typeface="Times New Roman" pitchFamily="34" charset="0"/>
-                <a:ea typeface="Times New Roman" pitchFamily="34" charset="-122"/>
-                <a:cs typeface="Times New Roman" pitchFamily="34" charset="-120"/>
-              </a:rPr>
-              <a:t>Give one positive and one negative effect of weathering.</a:t>
-            </a:r>
-            <a:endParaRPr lang="en-US" sz="4000" dirty="0"/>
+              <a:t>Illustration: the impacts of weathering</a:t>
+            </a:r>
+            <a:endParaRPr lang="en-US" sz="1600" dirty="0"/>
           </a:p>
         </p:txBody>
       </p:sp>
@@ -18629,7 +18787,7 @@
                 <a:ea typeface="Times New Roman" pitchFamily="34" charset="-122"/>
                 <a:cs typeface="Times New Roman" pitchFamily="34" charset="-120"/>
               </a:rPr>
-              <a:t>Expected Answer</a:t>
+              <a:t>Evaluation 1</a:t>
             </a:r>
             <a:endParaRPr lang="en-US" sz="3600" dirty="0"/>
           </a:p>
@@ -18671,7 +18829,7 @@
                 <a:ea typeface="Times New Roman" pitchFamily="34" charset="-122"/>
                 <a:cs typeface="Times New Roman" pitchFamily="34" charset="-120"/>
               </a:rPr>
-              <a:t>Positive: soil formation; negative: damage to buildings and roads.</a:t>
+              <a:t>Give two economic uses of weathering products.</a:t>
             </a:r>
             <a:endParaRPr lang="en-US" sz="4000" dirty="0"/>
           </a:p>
@@ -18783,7 +18941,7 @@
                 <a:ea typeface="Calibri" pitchFamily="34" charset="-122"/>
                 <a:cs typeface="Calibri" pitchFamily="34" charset="-120"/>
               </a:rPr>
-              <a:t>REMEDIATION</a:t>
+              <a:t>FORMATIVE EVALUATION</a:t>
             </a:r>
             <a:endParaRPr lang="en-US" sz="1400" dirty="0"/>
           </a:p>
@@ -18806,7 +18964,7 @@
         <p:spPr>
           <a:xfrm>
             <a:off x="0" y="658368"/>
-            <a:ext cx="3840480" cy="5833872"/>
+            <a:ext cx="5120640" cy="5833872"/>
           </a:xfrm>
           <a:prstGeom prst="rect">
             <a:avLst/>
@@ -18821,8 +18979,8 @@
         </p:nvSpPr>
         <p:spPr>
           <a:xfrm>
-            <a:off x="4069080" y="1005840"/>
-            <a:ext cx="7802575" cy="731520"/>
+            <a:off x="5349240" y="1005840"/>
+            <a:ext cx="6522415" cy="731520"/>
           </a:xfrm>
           <a:prstGeom prst="rect">
             <a:avLst/>
@@ -18848,7 +19006,7 @@
                 <a:ea typeface="Times New Roman" pitchFamily="34" charset="-122"/>
                 <a:cs typeface="Times New Roman" pitchFamily="34" charset="-120"/>
               </a:rPr>
-              <a:t>Remediation</a:t>
+              <a:t>Expected Answer</a:t>
             </a:r>
             <a:endParaRPr lang="en-US" sz="3600" dirty="0"/>
           </a:p>
@@ -18862,8 +19020,8 @@
         </p:nvSpPr>
         <p:spPr>
           <a:xfrm>
-            <a:off x="4069080" y="1783080"/>
-            <a:ext cx="7802575" cy="4663440"/>
+            <a:off x="5349240" y="1783080"/>
+            <a:ext cx="6522415" cy="4663440"/>
           </a:xfrm>
           <a:prstGeom prst="rect">
             <a:avLst/>
@@ -18882,7 +19040,7 @@
               <a:buNone/>
             </a:pPr>
             <a:r>
-              <a:rPr lang="en-US" sz="4000" b="1" dirty="0">
+              <a:rPr lang="en-US" sz="4000" dirty="0">
                 <a:solidFill>
                   <a:srgbClr val="111111"/>
                 </a:solidFill>
@@ -18890,73 +19048,7 @@
                 <a:ea typeface="Times New Roman" pitchFamily="34" charset="-122"/>
                 <a:cs typeface="Times New Roman" pitchFamily="34" charset="-120"/>
               </a:rPr>
-              <a:t>Fill in the blanks:</a:t>
-            </a:r>
-            <a:endParaRPr lang="en-US" sz="4000" dirty="0"/>
-          </a:p>
-          <a:p>
-            <a:pPr algn="l" marL="342900" indent="-342900">
-              <a:spcAft>
-                <a:spcPts val="800"/>
-              </a:spcAft>
-              <a:buSzPct val="100000"/>
-              <a:buFont typeface="+mj-lt"/>
-              <a:buAutoNum type="arabicPeriod" startAt="1"/>
-            </a:pPr>
-            <a:r>
-              <a:rPr lang="en-US" sz="4000" dirty="0">
-                <a:solidFill>
-                  <a:srgbClr val="111111"/>
-                </a:solidFill>
-                <a:latin typeface="Times New Roman" pitchFamily="34" charset="0"/>
-                <a:ea typeface="Times New Roman" pitchFamily="34" charset="-122"/>
-                <a:cs typeface="Times New Roman" pitchFamily="34" charset="-120"/>
-              </a:rPr>
-              <a:t>The loose layer above the bedrock is the ______.</a:t>
-            </a:r>
-            <a:endParaRPr lang="en-US" sz="4000" dirty="0"/>
-          </a:p>
-          <a:p>
-            <a:pPr algn="l" marL="342900" indent="-342900">
-              <a:spcAft>
-                <a:spcPts val="800"/>
-              </a:spcAft>
-              <a:buSzPct val="100000"/>
-              <a:buFont typeface="+mj-lt"/>
-              <a:buAutoNum type="arabicPeriod" startAt="1"/>
-            </a:pPr>
-            <a:r>
-              <a:rPr lang="en-US" sz="4000" dirty="0">
-                <a:solidFill>
-                  <a:srgbClr val="111111"/>
-                </a:solidFill>
-                <a:latin typeface="Times New Roman" pitchFamily="34" charset="0"/>
-                <a:ea typeface="Times New Roman" pitchFamily="34" charset="-122"/>
-                <a:cs typeface="Times New Roman" pitchFamily="34" charset="-120"/>
-              </a:rPr>
-              <a:t>Aluminium comes from ______.</a:t>
-            </a:r>
-            <a:endParaRPr lang="en-US" sz="4000" dirty="0"/>
-          </a:p>
-          <a:p>
-            <a:pPr algn="l" marL="342900" indent="-342900">
-              <a:spcAft>
-                <a:spcPts val="800"/>
-              </a:spcAft>
-              <a:buSzPct val="100000"/>
-              <a:buFont typeface="+mj-lt"/>
-              <a:buAutoNum type="arabicPeriod" startAt="1"/>
-            </a:pPr>
-            <a:r>
-              <a:rPr lang="en-US" sz="4000" dirty="0">
-                <a:solidFill>
-                  <a:srgbClr val="111111"/>
-                </a:solidFill>
-                <a:latin typeface="Times New Roman" pitchFamily="34" charset="0"/>
-                <a:ea typeface="Times New Roman" pitchFamily="34" charset="-122"/>
-                <a:cs typeface="Times New Roman" pitchFamily="34" charset="-120"/>
-              </a:rPr>
-              <a:t>The washing of nutrients down the soil is ______.</a:t>
+              <a:t>Soils for farming, sand and gravel for building, clay for bricks, bauxite ore (any two).</a:t>
             </a:r>
             <a:endParaRPr lang="en-US" sz="4000" dirty="0"/>
           </a:p>
@@ -19068,7 +19160,7 @@
                 <a:ea typeface="Calibri" pitchFamily="34" charset="-122"/>
                 <a:cs typeface="Calibri" pitchFamily="34" charset="-120"/>
               </a:rPr>
-              <a:t>HOMEWORK</a:t>
+              <a:t>FORMATIVE EVALUATION</a:t>
             </a:r>
             <a:endParaRPr lang="en-US" sz="1400" dirty="0"/>
           </a:p>
@@ -19133,7 +19225,7 @@
                 <a:ea typeface="Times New Roman" pitchFamily="34" charset="-122"/>
                 <a:cs typeface="Times New Roman" pitchFamily="34" charset="-120"/>
               </a:rPr>
-              <a:t>Homework</a:t>
+              <a:t>Evaluation 2</a:t>
             </a:r>
             <a:endParaRPr lang="en-US" sz="3600" dirty="0"/>
           </a:p>
@@ -19175,7 +19267,7 @@
                 <a:ea typeface="Times New Roman" pitchFamily="34" charset="-122"/>
                 <a:cs typeface="Times New Roman" pitchFamily="34" charset="-120"/>
               </a:rPr>
-              <a:t>Define mass wasting.</a:t>
+              <a:t>Give one positive and one negative effect of weathering.</a:t>
             </a:r>
             <a:endParaRPr lang="en-US" sz="4000" dirty="0"/>
           </a:p>
@@ -19287,7 +19379,7 @@
                 <a:ea typeface="Calibri" pitchFamily="34" charset="-122"/>
                 <a:cs typeface="Calibri" pitchFamily="34" charset="-120"/>
               </a:rPr>
-              <a:t>NEXT LESSON</a:t>
+              <a:t>FORMATIVE EVALUATION</a:t>
             </a:r>
             <a:endParaRPr lang="en-US" sz="1400" dirty="0"/>
           </a:p>
@@ -19352,7 +19444,7 @@
                 <a:ea typeface="Times New Roman" pitchFamily="34" charset="-122"/>
                 <a:cs typeface="Times New Roman" pitchFamily="34" charset="-120"/>
               </a:rPr>
-              <a:t>Next Lesson</a:t>
+              <a:t>Expected Answer</a:t>
             </a:r>
             <a:endParaRPr lang="en-US" sz="3600" dirty="0"/>
           </a:p>
@@ -19376,17 +19468,17 @@
           <a:ln/>
         </p:spPr>
         <p:txBody>
-          <a:bodyPr wrap="square" lIns="0" tIns="0" rIns="0" bIns="0" rtlCol="0" anchor="ctr"/>
-          <a:lstStyle/>
-          <a:p>
-            <a:pPr algn="ctr" indent="0" marL="0">
+          <a:bodyPr wrap="square" lIns="0" tIns="0" rIns="0" bIns="0" rtlCol="0" anchor="t"/>
+          <a:lstStyle/>
+          <a:p>
+            <a:pPr algn="l" indent="0" marL="0">
               <a:spcAft>
                 <a:spcPts val="800"/>
               </a:spcAft>
               <a:buNone/>
             </a:pPr>
             <a:r>
-              <a:rPr lang="en-US" sz="4000" b="1" dirty="0">
+              <a:rPr lang="en-US" sz="4000" dirty="0">
                 <a:solidFill>
                   <a:srgbClr val="111111"/>
                 </a:solidFill>
@@ -19394,27 +19486,7 @@
                 <a:ea typeface="Times New Roman" pitchFamily="34" charset="-122"/>
                 <a:cs typeface="Times New Roman" pitchFamily="34" charset="-120"/>
               </a:rPr>
-              <a:t>Our next lesson will be on:</a:t>
-            </a:r>
-            <a:endParaRPr lang="en-US" sz="4000" dirty="0"/>
-          </a:p>
-          <a:p>
-            <a:pPr algn="ctr" indent="0" marL="0">
-              <a:spcAft>
-                <a:spcPts val="800"/>
-              </a:spcAft>
-              <a:buNone/>
-            </a:pPr>
-            <a:r>
-              <a:rPr lang="en-US" sz="4000" b="1" dirty="0">
-                <a:solidFill>
-                  <a:srgbClr val="990011"/>
-                </a:solidFill>
-                <a:latin typeface="Times New Roman" pitchFamily="34" charset="0"/>
-                <a:ea typeface="Times New Roman" pitchFamily="34" charset="-122"/>
-                <a:cs typeface="Times New Roman" pitchFamily="34" charset="-120"/>
-              </a:rPr>
-              <a:t>Lesson 12: Mass Wasting (Movement)</a:t>
+              <a:t>Positive: soil formation; negative: damage to buildings and roads.</a:t>
             </a:r>
             <a:endParaRPr lang="en-US" sz="4000" dirty="0"/>
           </a:p>
@@ -19526,6 +19598,749 @@
                 <a:ea typeface="Calibri" pitchFamily="34" charset="-122"/>
                 <a:cs typeface="Calibri" pitchFamily="34" charset="-120"/>
               </a:rPr>
+              <a:t>REMEDIATION</a:t>
+            </a:r>
+            <a:endParaRPr lang="en-US" sz="1400" dirty="0"/>
+          </a:p>
+        </p:txBody>
+      </p:sp>
+      <p:pic>
+        <p:nvPicPr>
+          <p:cNvPr id="3" name="Image 0" descr="/home/claude/f4/img/minesec_sheet.png">    </p:cNvPr>
+          <p:cNvPicPr>
+            <a:picLocks noChangeAspect="1"/>
+          </p:cNvPicPr>
+          <p:nvPr/>
+        </p:nvPicPr>
+        <p:blipFill>
+          <a:blip r:embed="rId1"/>
+          <a:stretch>
+            <a:fillRect/>
+          </a:stretch>
+        </p:blipFill>
+        <p:spPr>
+          <a:xfrm>
+            <a:off x="0" y="658368"/>
+            <a:ext cx="3840480" cy="5833872"/>
+          </a:xfrm>
+          <a:prstGeom prst="rect">
+            <a:avLst/>
+          </a:prstGeom>
+        </p:spPr>
+      </p:pic>
+      <p:sp>
+        <p:nvSpPr>
+          <p:cNvPr id="4" name="Text 1"/>
+          <p:cNvSpPr/>
+          <p:nvPr/>
+        </p:nvSpPr>
+        <p:spPr>
+          <a:xfrm>
+            <a:off x="4069080" y="1005840"/>
+            <a:ext cx="7802575" cy="731520"/>
+          </a:xfrm>
+          <a:prstGeom prst="rect">
+            <a:avLst/>
+          </a:prstGeom>
+          <a:noFill/>
+          <a:ln/>
+        </p:spPr>
+        <p:txBody>
+          <a:bodyPr wrap="square" lIns="0" tIns="0" rIns="0" bIns="0" rtlCol="0" anchor="ctr">
+            <a:normAutofit/>
+          </a:bodyPr>
+          <a:lstStyle/>
+          <a:p>
+            <a:pPr algn="ctr" indent="0" marL="0">
+              <a:buNone/>
+            </a:pPr>
+            <a:r>
+              <a:rPr lang="en-US" sz="3600" b="1" dirty="0">
+                <a:solidFill>
+                  <a:srgbClr val="990011"/>
+                </a:solidFill>
+                <a:latin typeface="Times New Roman" pitchFamily="34" charset="0"/>
+                <a:ea typeface="Times New Roman" pitchFamily="34" charset="-122"/>
+                <a:cs typeface="Times New Roman" pitchFamily="34" charset="-120"/>
+              </a:rPr>
+              <a:t>Remediation</a:t>
+            </a:r>
+            <a:endParaRPr lang="en-US" sz="3600" dirty="0"/>
+          </a:p>
+        </p:txBody>
+      </p:sp>
+      <p:sp>
+        <p:nvSpPr>
+          <p:cNvPr id="5" name="Text 2"/>
+          <p:cNvSpPr/>
+          <p:nvPr/>
+        </p:nvSpPr>
+        <p:spPr>
+          <a:xfrm>
+            <a:off x="4069080" y="1783080"/>
+            <a:ext cx="7802575" cy="4663440"/>
+          </a:xfrm>
+          <a:prstGeom prst="rect">
+            <a:avLst/>
+          </a:prstGeom>
+          <a:noFill/>
+          <a:ln/>
+        </p:spPr>
+        <p:txBody>
+          <a:bodyPr wrap="square" lIns="0" tIns="0" rIns="0" bIns="0" rtlCol="0" anchor="t"/>
+          <a:lstStyle/>
+          <a:p>
+            <a:pPr algn="l" indent="0" marL="0">
+              <a:spcAft>
+                <a:spcPts val="800"/>
+              </a:spcAft>
+              <a:buNone/>
+            </a:pPr>
+            <a:r>
+              <a:rPr lang="en-US" sz="4000" b="1" dirty="0">
+                <a:solidFill>
+                  <a:srgbClr val="111111"/>
+                </a:solidFill>
+                <a:latin typeface="Times New Roman" pitchFamily="34" charset="0"/>
+                <a:ea typeface="Times New Roman" pitchFamily="34" charset="-122"/>
+                <a:cs typeface="Times New Roman" pitchFamily="34" charset="-120"/>
+              </a:rPr>
+              <a:t>Fill in the blanks:</a:t>
+            </a:r>
+            <a:endParaRPr lang="en-US" sz="4000" dirty="0"/>
+          </a:p>
+          <a:p>
+            <a:pPr algn="l" marL="342900" indent="-342900">
+              <a:spcAft>
+                <a:spcPts val="800"/>
+              </a:spcAft>
+              <a:buSzPct val="100000"/>
+              <a:buFont typeface="+mj-lt"/>
+              <a:buAutoNum type="arabicPeriod" startAt="1"/>
+            </a:pPr>
+            <a:r>
+              <a:rPr lang="en-US" sz="4000" dirty="0">
+                <a:solidFill>
+                  <a:srgbClr val="111111"/>
+                </a:solidFill>
+                <a:latin typeface="Times New Roman" pitchFamily="34" charset="0"/>
+                <a:ea typeface="Times New Roman" pitchFamily="34" charset="-122"/>
+                <a:cs typeface="Times New Roman" pitchFamily="34" charset="-120"/>
+              </a:rPr>
+              <a:t>The loose layer above the bedrock is the ______.</a:t>
+            </a:r>
+            <a:endParaRPr lang="en-US" sz="4000" dirty="0"/>
+          </a:p>
+          <a:p>
+            <a:pPr algn="l" marL="342900" indent="-342900">
+              <a:spcAft>
+                <a:spcPts val="800"/>
+              </a:spcAft>
+              <a:buSzPct val="100000"/>
+              <a:buFont typeface="+mj-lt"/>
+              <a:buAutoNum type="arabicPeriod" startAt="1"/>
+            </a:pPr>
+            <a:r>
+              <a:rPr lang="en-US" sz="4000" dirty="0">
+                <a:solidFill>
+                  <a:srgbClr val="111111"/>
+                </a:solidFill>
+                <a:latin typeface="Times New Roman" pitchFamily="34" charset="0"/>
+                <a:ea typeface="Times New Roman" pitchFamily="34" charset="-122"/>
+                <a:cs typeface="Times New Roman" pitchFamily="34" charset="-120"/>
+              </a:rPr>
+              <a:t>Aluminium comes from ______.</a:t>
+            </a:r>
+            <a:endParaRPr lang="en-US" sz="4000" dirty="0"/>
+          </a:p>
+          <a:p>
+            <a:pPr algn="l" marL="342900" indent="-342900">
+              <a:spcAft>
+                <a:spcPts val="800"/>
+              </a:spcAft>
+              <a:buSzPct val="100000"/>
+              <a:buFont typeface="+mj-lt"/>
+              <a:buAutoNum type="arabicPeriod" startAt="1"/>
+            </a:pPr>
+            <a:r>
+              <a:rPr lang="en-US" sz="4000" dirty="0">
+                <a:solidFill>
+                  <a:srgbClr val="111111"/>
+                </a:solidFill>
+                <a:latin typeface="Times New Roman" pitchFamily="34" charset="0"/>
+                <a:ea typeface="Times New Roman" pitchFamily="34" charset="-122"/>
+                <a:cs typeface="Times New Roman" pitchFamily="34" charset="-120"/>
+              </a:rPr>
+              <a:t>The washing of nutrients down the soil is ______.</a:t>
+            </a:r>
+            <a:endParaRPr lang="en-US" sz="4000" dirty="0"/>
+          </a:p>
+        </p:txBody>
+      </p:sp>
+      <p:sp>
+        <p:nvSpPr>
+          <p:cNvPr id="25" name="Slide Number Placeholder 0"/>
+          <p:cNvSpPr>
+            <a:spLocks noGrp="1"/>
+          </p:cNvSpPr>
+          <p:nvPr>
+            <p:ph type="sldNum" sz="quarter" idx="4294967295"/>
+          </p:nvPr>
+        </p:nvSpPr>
+        <p:spPr>
+          <a:xfrm>
+            <a:off x="27432" y="91440"/>
+            <a:ext cx="585216" cy="475488"/>
+          </a:xfrm>
+          <a:prstGeom prst="rect">
+            <a:avLst/>
+          </a:prstGeom>
+          <a:extLst>
+            <a:ext uri="{C572A759-6A51-4108-AA02-DFA0A04FC94B}">
+              <ma14:wrappingTextBoxFlag xmlns:ma14="http://schemas.microsoft.com/office/mac/drawingml/2011/main" val="0"/>
+            </a:ext>
+          </a:extLst>
+        </p:spPr>
+        <p:txBody>
+          <a:bodyPr/>
+          <a:lstStyle>
+            <a:lvl1pPr>
+              <a:defRPr sz="2000">
+                <a:solidFill>
+                  <a:srgbClr val="FFFFFF"/>
+                </a:solidFill>
+                <a:latin typeface="Calibri"/>
+                <a:ea typeface="Calibri"/>
+                <a:cs typeface="Calibri"/>
+              </a:defRPr>
+            </a:lvl1pPr>
+          </a:lstStyle>
+          <a:p>
+            <a:pPr algn="ctr"/>
+            <a:fld id="{F7021451-1387-4CA6-816F-3879F97B5CBC}" type="slidenum">
+              <a:rPr b="1" lang="en-US"/>
+              <a:t>54</a:t>
+            </a:fld>
+            <a:endParaRPr lang="en-US"/>
+          </a:p>
+        </p:txBody>
+      </p:sp>
+    </p:spTree>
+  </p:cSld>
+  <p:clrMapOvr>
+    <a:masterClrMapping/>
+  </p:clrMapOvr>
+</p:sld>
+</file>
+
+<file path=ppt/slides/slide55.xml><?xml version="1.0" encoding="utf-8"?>
+<p:sld xmlns:a="http://schemas.openxmlformats.org/drawingml/2006/main" xmlns:r="http://schemas.openxmlformats.org/officeDocument/2006/relationships" xmlns:p="http://schemas.openxmlformats.org/presentationml/2006/main">
+  <p:cSld name="Slide 55">
+    <p:spTree>
+      <p:nvGrpSpPr>
+        <p:cNvPr id="1" name=""/>
+        <p:cNvGrpSpPr/>
+        <p:nvPr/>
+      </p:nvGrpSpPr>
+      <p:grpSpPr>
+        <a:xfrm>
+          <a:off x="0" y="0"/>
+          <a:ext cx="0" cy="0"/>
+          <a:chOff x="0" y="0"/>
+          <a:chExt cx="0" cy="0"/>
+        </a:xfrm>
+      </p:grpSpPr>
+      <p:sp>
+        <p:nvSpPr>
+          <p:cNvPr id="2" name="Text 0"/>
+          <p:cNvSpPr/>
+          <p:nvPr/>
+        </p:nvSpPr>
+        <p:spPr>
+          <a:xfrm>
+            <a:off x="457200" y="713232"/>
+            <a:ext cx="11368735" cy="274320"/>
+          </a:xfrm>
+          <a:prstGeom prst="rect">
+            <a:avLst/>
+          </a:prstGeom>
+          <a:noFill/>
+          <a:ln/>
+        </p:spPr>
+        <p:txBody>
+          <a:bodyPr wrap="square" lIns="0" tIns="0" rIns="0" bIns="0" rtlCol="0" anchor="ctr"/>
+          <a:lstStyle/>
+          <a:p>
+            <a:pPr algn="r" indent="0" marL="0">
+              <a:buNone/>
+            </a:pPr>
+            <a:r>
+              <a:rPr lang="en-US" sz="1400" b="1" dirty="0">
+                <a:solidFill>
+                  <a:srgbClr val="1C3F6E"/>
+                </a:solidFill>
+                <a:latin typeface="Calibri" pitchFamily="34" charset="0"/>
+                <a:ea typeface="Calibri" pitchFamily="34" charset="-122"/>
+                <a:cs typeface="Calibri" pitchFamily="34" charset="-120"/>
+              </a:rPr>
+              <a:t>HOMEWORK</a:t>
+            </a:r>
+            <a:endParaRPr lang="en-US" sz="1400" dirty="0"/>
+          </a:p>
+        </p:txBody>
+      </p:sp>
+      <p:pic>
+        <p:nvPicPr>
+          <p:cNvPr id="3" name="Image 0" descr="/home/claude/f4/img/minesec_sheet.png">    </p:cNvPr>
+          <p:cNvPicPr>
+            <a:picLocks noChangeAspect="1"/>
+          </p:cNvPicPr>
+          <p:nvPr/>
+        </p:nvPicPr>
+        <p:blipFill>
+          <a:blip r:embed="rId1"/>
+          <a:stretch>
+            <a:fillRect/>
+          </a:stretch>
+        </p:blipFill>
+        <p:spPr>
+          <a:xfrm>
+            <a:off x="0" y="658368"/>
+            <a:ext cx="5120640" cy="5833872"/>
+          </a:xfrm>
+          <a:prstGeom prst="rect">
+            <a:avLst/>
+          </a:prstGeom>
+        </p:spPr>
+      </p:pic>
+      <p:sp>
+        <p:nvSpPr>
+          <p:cNvPr id="4" name="Text 1"/>
+          <p:cNvSpPr/>
+          <p:nvPr/>
+        </p:nvSpPr>
+        <p:spPr>
+          <a:xfrm>
+            <a:off x="5349240" y="1005840"/>
+            <a:ext cx="6522415" cy="731520"/>
+          </a:xfrm>
+          <a:prstGeom prst="rect">
+            <a:avLst/>
+          </a:prstGeom>
+          <a:noFill/>
+          <a:ln/>
+        </p:spPr>
+        <p:txBody>
+          <a:bodyPr wrap="square" lIns="0" tIns="0" rIns="0" bIns="0" rtlCol="0" anchor="ctr">
+            <a:normAutofit/>
+          </a:bodyPr>
+          <a:lstStyle/>
+          <a:p>
+            <a:pPr algn="ctr" indent="0" marL="0">
+              <a:buNone/>
+            </a:pPr>
+            <a:r>
+              <a:rPr lang="en-US" sz="3600" b="1" dirty="0">
+                <a:solidFill>
+                  <a:srgbClr val="990011"/>
+                </a:solidFill>
+                <a:latin typeface="Times New Roman" pitchFamily="34" charset="0"/>
+                <a:ea typeface="Times New Roman" pitchFamily="34" charset="-122"/>
+                <a:cs typeface="Times New Roman" pitchFamily="34" charset="-120"/>
+              </a:rPr>
+              <a:t>Homework</a:t>
+            </a:r>
+            <a:endParaRPr lang="en-US" sz="3600" dirty="0"/>
+          </a:p>
+        </p:txBody>
+      </p:sp>
+      <p:sp>
+        <p:nvSpPr>
+          <p:cNvPr id="5" name="Text 2"/>
+          <p:cNvSpPr/>
+          <p:nvPr/>
+        </p:nvSpPr>
+        <p:spPr>
+          <a:xfrm>
+            <a:off x="5349240" y="1783080"/>
+            <a:ext cx="6522415" cy="4663440"/>
+          </a:xfrm>
+          <a:prstGeom prst="rect">
+            <a:avLst/>
+          </a:prstGeom>
+          <a:noFill/>
+          <a:ln/>
+        </p:spPr>
+        <p:txBody>
+          <a:bodyPr wrap="square" lIns="0" tIns="0" rIns="0" bIns="0" rtlCol="0" anchor="t"/>
+          <a:lstStyle/>
+          <a:p>
+            <a:pPr algn="l" indent="0" marL="0">
+              <a:spcAft>
+                <a:spcPts val="800"/>
+              </a:spcAft>
+              <a:buNone/>
+            </a:pPr>
+            <a:r>
+              <a:rPr lang="en-US" sz="4000" dirty="0">
+                <a:solidFill>
+                  <a:srgbClr val="111111"/>
+                </a:solidFill>
+                <a:latin typeface="Times New Roman" pitchFamily="34" charset="0"/>
+                <a:ea typeface="Times New Roman" pitchFamily="34" charset="-122"/>
+                <a:cs typeface="Times New Roman" pitchFamily="34" charset="-120"/>
+              </a:rPr>
+              <a:t>Define mass wasting.</a:t>
+            </a:r>
+            <a:endParaRPr lang="en-US" sz="4000" dirty="0"/>
+          </a:p>
+        </p:txBody>
+      </p:sp>
+      <p:sp>
+        <p:nvSpPr>
+          <p:cNvPr id="25" name="Slide Number Placeholder 0"/>
+          <p:cNvSpPr>
+            <a:spLocks noGrp="1"/>
+          </p:cNvSpPr>
+          <p:nvPr>
+            <p:ph type="sldNum" sz="quarter" idx="4294967295"/>
+          </p:nvPr>
+        </p:nvSpPr>
+        <p:spPr>
+          <a:xfrm>
+            <a:off x="27432" y="91440"/>
+            <a:ext cx="585216" cy="475488"/>
+          </a:xfrm>
+          <a:prstGeom prst="rect">
+            <a:avLst/>
+          </a:prstGeom>
+          <a:extLst>
+            <a:ext uri="{C572A759-6A51-4108-AA02-DFA0A04FC94B}">
+              <ma14:wrappingTextBoxFlag xmlns:ma14="http://schemas.microsoft.com/office/mac/drawingml/2011/main" val="0"/>
+            </a:ext>
+          </a:extLst>
+        </p:spPr>
+        <p:txBody>
+          <a:bodyPr/>
+          <a:lstStyle>
+            <a:lvl1pPr>
+              <a:defRPr sz="2000">
+                <a:solidFill>
+                  <a:srgbClr val="FFFFFF"/>
+                </a:solidFill>
+                <a:latin typeface="Calibri"/>
+                <a:ea typeface="Calibri"/>
+                <a:cs typeface="Calibri"/>
+              </a:defRPr>
+            </a:lvl1pPr>
+          </a:lstStyle>
+          <a:p>
+            <a:pPr algn="ctr"/>
+            <a:fld id="{F7021451-1387-4CA6-816F-3879F97B5CBC}" type="slidenum">
+              <a:rPr b="1" lang="en-US"/>
+              <a:t>55</a:t>
+            </a:fld>
+            <a:endParaRPr lang="en-US"/>
+          </a:p>
+        </p:txBody>
+      </p:sp>
+    </p:spTree>
+  </p:cSld>
+  <p:clrMapOvr>
+    <a:masterClrMapping/>
+  </p:clrMapOvr>
+</p:sld>
+</file>
+
+<file path=ppt/slides/slide56.xml><?xml version="1.0" encoding="utf-8"?>
+<p:sld xmlns:a="http://schemas.openxmlformats.org/drawingml/2006/main" xmlns:r="http://schemas.openxmlformats.org/officeDocument/2006/relationships" xmlns:p="http://schemas.openxmlformats.org/presentationml/2006/main">
+  <p:cSld name="Slide 56">
+    <p:spTree>
+      <p:nvGrpSpPr>
+        <p:cNvPr id="1" name=""/>
+        <p:cNvGrpSpPr/>
+        <p:nvPr/>
+      </p:nvGrpSpPr>
+      <p:grpSpPr>
+        <a:xfrm>
+          <a:off x="0" y="0"/>
+          <a:ext cx="0" cy="0"/>
+          <a:chOff x="0" y="0"/>
+          <a:chExt cx="0" cy="0"/>
+        </a:xfrm>
+      </p:grpSpPr>
+      <p:sp>
+        <p:nvSpPr>
+          <p:cNvPr id="2" name="Text 0"/>
+          <p:cNvSpPr/>
+          <p:nvPr/>
+        </p:nvSpPr>
+        <p:spPr>
+          <a:xfrm>
+            <a:off x="457200" y="713232"/>
+            <a:ext cx="11368735" cy="274320"/>
+          </a:xfrm>
+          <a:prstGeom prst="rect">
+            <a:avLst/>
+          </a:prstGeom>
+          <a:noFill/>
+          <a:ln/>
+        </p:spPr>
+        <p:txBody>
+          <a:bodyPr wrap="square" lIns="0" tIns="0" rIns="0" bIns="0" rtlCol="0" anchor="ctr"/>
+          <a:lstStyle/>
+          <a:p>
+            <a:pPr algn="r" indent="0" marL="0">
+              <a:buNone/>
+            </a:pPr>
+            <a:r>
+              <a:rPr lang="en-US" sz="1400" b="1" dirty="0">
+                <a:solidFill>
+                  <a:srgbClr val="1C3F6E"/>
+                </a:solidFill>
+                <a:latin typeface="Calibri" pitchFamily="34" charset="0"/>
+                <a:ea typeface="Calibri" pitchFamily="34" charset="-122"/>
+                <a:cs typeface="Calibri" pitchFamily="34" charset="-120"/>
+              </a:rPr>
+              <a:t>NEXT LESSON</a:t>
+            </a:r>
+            <a:endParaRPr lang="en-US" sz="1400" dirty="0"/>
+          </a:p>
+        </p:txBody>
+      </p:sp>
+      <p:pic>
+        <p:nvPicPr>
+          <p:cNvPr id="3" name="Image 0" descr="/home/claude/f4/img/minesec_sheet.png">    </p:cNvPr>
+          <p:cNvPicPr>
+            <a:picLocks noChangeAspect="1"/>
+          </p:cNvPicPr>
+          <p:nvPr/>
+        </p:nvPicPr>
+        <p:blipFill>
+          <a:blip r:embed="rId1"/>
+          <a:stretch>
+            <a:fillRect/>
+          </a:stretch>
+        </p:blipFill>
+        <p:spPr>
+          <a:xfrm>
+            <a:off x="0" y="658368"/>
+            <a:ext cx="5120640" cy="5833872"/>
+          </a:xfrm>
+          <a:prstGeom prst="rect">
+            <a:avLst/>
+          </a:prstGeom>
+        </p:spPr>
+      </p:pic>
+      <p:sp>
+        <p:nvSpPr>
+          <p:cNvPr id="4" name="Text 1"/>
+          <p:cNvSpPr/>
+          <p:nvPr/>
+        </p:nvSpPr>
+        <p:spPr>
+          <a:xfrm>
+            <a:off x="5349240" y="1005840"/>
+            <a:ext cx="6522415" cy="731520"/>
+          </a:xfrm>
+          <a:prstGeom prst="rect">
+            <a:avLst/>
+          </a:prstGeom>
+          <a:noFill/>
+          <a:ln/>
+        </p:spPr>
+        <p:txBody>
+          <a:bodyPr wrap="square" lIns="0" tIns="0" rIns="0" bIns="0" rtlCol="0" anchor="ctr">
+            <a:normAutofit/>
+          </a:bodyPr>
+          <a:lstStyle/>
+          <a:p>
+            <a:pPr algn="ctr" indent="0" marL="0">
+              <a:buNone/>
+            </a:pPr>
+            <a:r>
+              <a:rPr lang="en-US" sz="3600" b="1" dirty="0">
+                <a:solidFill>
+                  <a:srgbClr val="990011"/>
+                </a:solidFill>
+                <a:latin typeface="Times New Roman" pitchFamily="34" charset="0"/>
+                <a:ea typeface="Times New Roman" pitchFamily="34" charset="-122"/>
+                <a:cs typeface="Times New Roman" pitchFamily="34" charset="-120"/>
+              </a:rPr>
+              <a:t>Next Lesson</a:t>
+            </a:r>
+            <a:endParaRPr lang="en-US" sz="3600" dirty="0"/>
+          </a:p>
+        </p:txBody>
+      </p:sp>
+      <p:sp>
+        <p:nvSpPr>
+          <p:cNvPr id="5" name="Text 2"/>
+          <p:cNvSpPr/>
+          <p:nvPr/>
+        </p:nvSpPr>
+        <p:spPr>
+          <a:xfrm>
+            <a:off x="5349240" y="1783080"/>
+            <a:ext cx="6522415" cy="4663440"/>
+          </a:xfrm>
+          <a:prstGeom prst="rect">
+            <a:avLst/>
+          </a:prstGeom>
+          <a:noFill/>
+          <a:ln/>
+        </p:spPr>
+        <p:txBody>
+          <a:bodyPr wrap="square" lIns="0" tIns="0" rIns="0" bIns="0" rtlCol="0" anchor="ctr"/>
+          <a:lstStyle/>
+          <a:p>
+            <a:pPr algn="ctr" indent="0" marL="0">
+              <a:spcAft>
+                <a:spcPts val="800"/>
+              </a:spcAft>
+              <a:buNone/>
+            </a:pPr>
+            <a:r>
+              <a:rPr lang="en-US" sz="4000" b="1" dirty="0">
+                <a:solidFill>
+                  <a:srgbClr val="111111"/>
+                </a:solidFill>
+                <a:latin typeface="Times New Roman" pitchFamily="34" charset="0"/>
+                <a:ea typeface="Times New Roman" pitchFamily="34" charset="-122"/>
+                <a:cs typeface="Times New Roman" pitchFamily="34" charset="-120"/>
+              </a:rPr>
+              <a:t>Our next lesson will be on:</a:t>
+            </a:r>
+            <a:endParaRPr lang="en-US" sz="4000" dirty="0"/>
+          </a:p>
+          <a:p>
+            <a:pPr algn="ctr" indent="0" marL="0">
+              <a:spcAft>
+                <a:spcPts val="800"/>
+              </a:spcAft>
+              <a:buNone/>
+            </a:pPr>
+            <a:r>
+              <a:rPr lang="en-US" sz="4000" b="1" dirty="0">
+                <a:solidFill>
+                  <a:srgbClr val="990011"/>
+                </a:solidFill>
+                <a:latin typeface="Times New Roman" pitchFamily="34" charset="0"/>
+                <a:ea typeface="Times New Roman" pitchFamily="34" charset="-122"/>
+                <a:cs typeface="Times New Roman" pitchFamily="34" charset="-120"/>
+              </a:rPr>
+              <a:t>Lesson 12: Mass Wasting (Movement)</a:t>
+            </a:r>
+            <a:endParaRPr lang="en-US" sz="4000" dirty="0"/>
+          </a:p>
+        </p:txBody>
+      </p:sp>
+      <p:sp>
+        <p:nvSpPr>
+          <p:cNvPr id="25" name="Slide Number Placeholder 0"/>
+          <p:cNvSpPr>
+            <a:spLocks noGrp="1"/>
+          </p:cNvSpPr>
+          <p:nvPr>
+            <p:ph type="sldNum" sz="quarter" idx="4294967295"/>
+          </p:nvPr>
+        </p:nvSpPr>
+        <p:spPr>
+          <a:xfrm>
+            <a:off x="27432" y="91440"/>
+            <a:ext cx="585216" cy="475488"/>
+          </a:xfrm>
+          <a:prstGeom prst="rect">
+            <a:avLst/>
+          </a:prstGeom>
+          <a:extLst>
+            <a:ext uri="{C572A759-6A51-4108-AA02-DFA0A04FC94B}">
+              <ma14:wrappingTextBoxFlag xmlns:ma14="http://schemas.microsoft.com/office/mac/drawingml/2011/main" val="0"/>
+            </a:ext>
+          </a:extLst>
+        </p:spPr>
+        <p:txBody>
+          <a:bodyPr/>
+          <a:lstStyle>
+            <a:lvl1pPr>
+              <a:defRPr sz="2000">
+                <a:solidFill>
+                  <a:srgbClr val="FFFFFF"/>
+                </a:solidFill>
+                <a:latin typeface="Calibri"/>
+                <a:ea typeface="Calibri"/>
+                <a:cs typeface="Calibri"/>
+              </a:defRPr>
+            </a:lvl1pPr>
+          </a:lstStyle>
+          <a:p>
+            <a:pPr algn="ctr"/>
+            <a:fld id="{F7021451-1387-4CA6-816F-3879F97B5CBC}" type="slidenum">
+              <a:rPr b="1" lang="en-US"/>
+              <a:t>56</a:t>
+            </a:fld>
+            <a:endParaRPr lang="en-US"/>
+          </a:p>
+        </p:txBody>
+      </p:sp>
+    </p:spTree>
+  </p:cSld>
+  <p:clrMapOvr>
+    <a:masterClrMapping/>
+  </p:clrMapOvr>
+</p:sld>
+</file>
+
+<file path=ppt/slides/slide57.xml><?xml version="1.0" encoding="utf-8"?>
+<p:sld xmlns:a="http://schemas.openxmlformats.org/drawingml/2006/main" xmlns:r="http://schemas.openxmlformats.org/officeDocument/2006/relationships" xmlns:p="http://schemas.openxmlformats.org/presentationml/2006/main">
+  <p:cSld name="Slide 57">
+    <p:spTree>
+      <p:nvGrpSpPr>
+        <p:cNvPr id="1" name=""/>
+        <p:cNvGrpSpPr/>
+        <p:nvPr/>
+      </p:nvGrpSpPr>
+      <p:grpSpPr>
+        <a:xfrm>
+          <a:off x="0" y="0"/>
+          <a:ext cx="0" cy="0"/>
+          <a:chOff x="0" y="0"/>
+          <a:chExt cx="0" cy="0"/>
+        </a:xfrm>
+      </p:grpSpPr>
+      <p:sp>
+        <p:nvSpPr>
+          <p:cNvPr id="2" name="Text 0"/>
+          <p:cNvSpPr/>
+          <p:nvPr/>
+        </p:nvSpPr>
+        <p:spPr>
+          <a:xfrm>
+            <a:off x="457200" y="713232"/>
+            <a:ext cx="11368735" cy="274320"/>
+          </a:xfrm>
+          <a:prstGeom prst="rect">
+            <a:avLst/>
+          </a:prstGeom>
+          <a:noFill/>
+          <a:ln/>
+        </p:spPr>
+        <p:txBody>
+          <a:bodyPr wrap="square" lIns="0" tIns="0" rIns="0" bIns="0" rtlCol="0" anchor="ctr"/>
+          <a:lstStyle/>
+          <a:p>
+            <a:pPr algn="r" indent="0" marL="0">
+              <a:buNone/>
+            </a:pPr>
+            <a:r>
+              <a:rPr lang="en-US" sz="1400" b="1" dirty="0">
+                <a:solidFill>
+                  <a:srgbClr val="1C3F6E"/>
+                </a:solidFill>
+                <a:latin typeface="Calibri" pitchFamily="34" charset="0"/>
+                <a:ea typeface="Calibri" pitchFamily="34" charset="-122"/>
+                <a:cs typeface="Calibri" pitchFamily="34" charset="-120"/>
+              </a:rPr>
               <a:t>BILINGUAL GAME</a:t>
             </a:r>
             <a:endParaRPr lang="en-US" sz="1400" dirty="0"/>
@@ -19573,7 +20388,7 @@
       </p:sp>
       <p:graphicFrame>
         <p:nvGraphicFramePr>
-          <p:cNvPr id="55" name="Table 0"/>
+          <p:cNvPr id="58" name="Table 0"/>
           <p:cNvGraphicFramePr>
             <a:graphicFrameLocks noGrp="1"/>
           </p:cNvGraphicFramePr>
@@ -20609,7 +21424,7 @@
             <a:pPr algn="ctr"/>
             <a:fld id="{F7021451-1387-4CA6-816F-3879F97B5CBC}" type="slidenum">
               <a:rPr b="1" lang="en-US"/>
-              <a:t>54</a:t>
+              <a:t>57</a:t>
             </a:fld>
             <a:endParaRPr lang="en-US"/>
           </a:p>
@@ -20623,9 +21438,9 @@
 </p:sld>
 </file>
 
-<file path=ppt/slides/slide55.xml><?xml version="1.0" encoding="utf-8"?>
+<file path=ppt/slides/slide58.xml><?xml version="1.0" encoding="utf-8"?>
 <p:sld xmlns:a="http://schemas.openxmlformats.org/drawingml/2006/main" xmlns:r="http://schemas.openxmlformats.org/officeDocument/2006/relationships" xmlns:p="http://schemas.openxmlformats.org/presentationml/2006/main">
-  <p:cSld name="Slide 55">
+  <p:cSld name="Slide 58">
     <p:spTree>
       <p:nvGrpSpPr>
         <p:cNvPr id="1" name=""/>
@@ -20720,7 +21535,7 @@
       </p:sp>
       <p:graphicFrame>
         <p:nvGraphicFramePr>
-          <p:cNvPr id="56" name="Table 0"/>
+          <p:cNvPr id="59" name="Table 0"/>
           <p:cNvGraphicFramePr>
             <a:graphicFrameLocks noGrp="1"/>
           </p:cNvGraphicFramePr>
@@ -21342,7 +22157,7 @@
             <a:pPr algn="ctr"/>
             <a:fld id="{F7021451-1387-4CA6-816F-3879F97B5CBC}" type="slidenum">
               <a:rPr b="1" lang="en-US"/>
-              <a:t>55</a:t>
+              <a:t>58</a:t>
             </a:fld>
             <a:endParaRPr lang="en-US"/>
           </a:p>
@@ -21356,9 +22171,9 @@
 </p:sld>
 </file>
 
-<file path=ppt/slides/slide56.xml><?xml version="1.0" encoding="utf-8"?>
+<file path=ppt/slides/slide59.xml><?xml version="1.0" encoding="utf-8"?>
 <p:sld xmlns:a="http://schemas.openxmlformats.org/drawingml/2006/main" xmlns:r="http://schemas.openxmlformats.org/officeDocument/2006/relationships" xmlns:p="http://schemas.openxmlformats.org/presentationml/2006/main">
-  <p:cSld name="Slide 56">
+  <p:cSld name="Slide 59">
     <p:spTree>
       <p:nvGrpSpPr>
         <p:cNvPr id="1" name=""/>
@@ -21453,7 +22268,7 @@
       </p:sp>
       <p:graphicFrame>
         <p:nvGraphicFramePr>
-          <p:cNvPr id="57" name="Table 0"/>
+          <p:cNvPr id="60" name="Table 0"/>
           <p:cNvGraphicFramePr>
             <a:graphicFrameLocks noGrp="1"/>
           </p:cNvGraphicFramePr>
@@ -21563,7 +22378,7 @@
                           <a:ea typeface="Calibri" pitchFamily="34" charset="-122"/>
                           <a:cs typeface="Calibri" pitchFamily="34" charset="-120"/>
                         </a:rPr>
-                        <a:t>DEFINITIONS; Products of Weathering as a Resource; Positive Effects; Negative Effects.</a:t>
+                        <a:t>DEFINITIONS; Products of Weathering as a Resource; Effects of Weathering on the Landscape; Effects of Weathering on Man.</a:t>
                       </a:r>
                       <a:endParaRPr lang="en-US" sz="1600" dirty="0">
                         <a:latin typeface="Calibri" charset="0"/>
@@ -22213,678 +23028,7 @@
             <a:pPr algn="ctr"/>
             <a:fld id="{F7021451-1387-4CA6-816F-3879F97B5CBC}" type="slidenum">
               <a:rPr b="1" lang="en-US"/>
-              <a:t>56</a:t>
-            </a:fld>
-            <a:endParaRPr lang="en-US"/>
-          </a:p>
-        </p:txBody>
-      </p:sp>
-    </p:spTree>
-  </p:cSld>
-  <p:clrMapOvr>
-    <a:masterClrMapping/>
-  </p:clrMapOvr>
-</p:sld>
-</file>
-
-<file path=ppt/slides/slide57.xml><?xml version="1.0" encoding="utf-8"?>
-<p:sld xmlns:a="http://schemas.openxmlformats.org/drawingml/2006/main" xmlns:r="http://schemas.openxmlformats.org/officeDocument/2006/relationships" xmlns:p="http://schemas.openxmlformats.org/presentationml/2006/main">
-  <p:cSld name="Slide 57">
-    <p:spTree>
-      <p:nvGrpSpPr>
-        <p:cNvPr id="1" name=""/>
-        <p:cNvGrpSpPr/>
-        <p:nvPr/>
-      </p:nvGrpSpPr>
-      <p:grpSpPr>
-        <a:xfrm>
-          <a:off x="0" y="0"/>
-          <a:ext cx="0" cy="0"/>
-          <a:chOff x="0" y="0"/>
-          <a:chExt cx="0" cy="0"/>
-        </a:xfrm>
-      </p:grpSpPr>
-      <p:sp>
-        <p:nvSpPr>
-          <p:cNvPr id="2" name="Text 0"/>
-          <p:cNvSpPr/>
-          <p:nvPr/>
-        </p:nvSpPr>
-        <p:spPr>
-          <a:xfrm>
-            <a:off x="457200" y="713232"/>
-            <a:ext cx="11368735" cy="274320"/>
-          </a:xfrm>
-          <a:prstGeom prst="rect">
-            <a:avLst/>
-          </a:prstGeom>
-          <a:noFill/>
-          <a:ln/>
-        </p:spPr>
-        <p:txBody>
-          <a:bodyPr wrap="square" lIns="0" tIns="0" rIns="0" bIns="0" rtlCol="0" anchor="ctr"/>
-          <a:lstStyle/>
-          <a:p>
-            <a:pPr algn="r" indent="0" marL="0">
-              <a:buNone/>
-            </a:pPr>
-            <a:r>
-              <a:rPr lang="en-US" sz="1400" b="1" dirty="0">
-                <a:solidFill>
-                  <a:srgbClr val="1C3F6E"/>
-                </a:solidFill>
-                <a:latin typeface="Calibri" pitchFamily="34" charset="0"/>
-                <a:ea typeface="Calibri" pitchFamily="34" charset="-122"/>
-                <a:cs typeface="Calibri" pitchFamily="34" charset="-120"/>
-              </a:rPr>
-              <a:t>TEACHER'S NOTE</a:t>
-            </a:r>
-            <a:endParaRPr lang="en-US" sz="1400" dirty="0"/>
-          </a:p>
-        </p:txBody>
-      </p:sp>
-      <p:pic>
-        <p:nvPicPr>
-          <p:cNvPr id="3" name="Image 0" descr="/home/claude/f4/img/minesec_sheet.png">    </p:cNvPr>
-          <p:cNvPicPr>
-            <a:picLocks noChangeAspect="1"/>
-          </p:cNvPicPr>
-          <p:nvPr/>
-        </p:nvPicPr>
-        <p:blipFill>
-          <a:blip r:embed="rId1"/>
-          <a:stretch>
-            <a:fillRect/>
-          </a:stretch>
-        </p:blipFill>
-        <p:spPr>
-          <a:xfrm>
-            <a:off x="0" y="658368"/>
-            <a:ext cx="3840480" cy="5833872"/>
-          </a:xfrm>
-          <a:prstGeom prst="rect">
-            <a:avLst/>
-          </a:prstGeom>
-        </p:spPr>
-      </p:pic>
-      <p:sp>
-        <p:nvSpPr>
-          <p:cNvPr id="4" name="Text 1"/>
-          <p:cNvSpPr/>
-          <p:nvPr/>
-        </p:nvSpPr>
-        <p:spPr>
-          <a:xfrm>
-            <a:off x="4069080" y="1005840"/>
-            <a:ext cx="7802575" cy="731520"/>
-          </a:xfrm>
-          <a:prstGeom prst="rect">
-            <a:avLst/>
-          </a:prstGeom>
-          <a:noFill/>
-          <a:ln/>
-        </p:spPr>
-        <p:txBody>
-          <a:bodyPr wrap="square" lIns="0" tIns="0" rIns="0" bIns="0" rtlCol="0" anchor="ctr">
-            <a:normAutofit/>
-          </a:bodyPr>
-          <a:lstStyle/>
-          <a:p>
-            <a:pPr algn="ctr" indent="0" marL="0">
-              <a:buNone/>
-            </a:pPr>
-            <a:r>
-              <a:rPr lang="en-US" sz="3600" b="1" dirty="0">
-                <a:solidFill>
-                  <a:srgbClr val="990011"/>
-                </a:solidFill>
-                <a:latin typeface="Times New Roman" pitchFamily="34" charset="0"/>
-                <a:ea typeface="Times New Roman" pitchFamily="34" charset="-122"/>
-                <a:cs typeface="Times New Roman" pitchFamily="34" charset="-120"/>
-              </a:rPr>
-              <a:t>Teacher's Note</a:t>
-            </a:r>
-            <a:endParaRPr lang="en-US" sz="3600" dirty="0"/>
-          </a:p>
-        </p:txBody>
-      </p:sp>
-      <p:sp>
-        <p:nvSpPr>
-          <p:cNvPr id="5" name="Text 2"/>
-          <p:cNvSpPr/>
-          <p:nvPr/>
-        </p:nvSpPr>
-        <p:spPr>
-          <a:xfrm>
-            <a:off x="4069080" y="1783080"/>
-            <a:ext cx="7802575" cy="4663440"/>
-          </a:xfrm>
-          <a:prstGeom prst="rect">
-            <a:avLst/>
-          </a:prstGeom>
-          <a:noFill/>
-          <a:ln/>
-        </p:spPr>
-        <p:txBody>
-          <a:bodyPr wrap="square" lIns="0" tIns="0" rIns="0" bIns="0" rtlCol="0" anchor="t"/>
-          <a:lstStyle/>
-          <a:p>
-            <a:pPr algn="l" marL="342900" indent="-342900">
-              <a:spcAft>
-                <a:spcPts val="800"/>
-              </a:spcAft>
-              <a:buSzPct val="100000"/>
-              <a:buChar char="•"/>
-            </a:pPr>
-            <a:r>
-              <a:rPr lang="en-US" sz="2000" dirty="0">
-                <a:solidFill>
-                  <a:srgbClr val="111111"/>
-                </a:solidFill>
-                <a:latin typeface="Calibri" pitchFamily="34" charset="0"/>
-                <a:ea typeface="Calibri" pitchFamily="34" charset="-122"/>
-                <a:cs typeface="Calibri" pitchFamily="34" charset="-120"/>
-              </a:rPr>
-              <a:t>Timing: Homework correction, plan, objectives 8 min | Recall, situation, action 10 min | 5 activities 30 min | Board summary (copying) 30 min | Evaluation, remediation 10 min | Homework, next lesson 5 min | Logbook 7 min</a:t>
-            </a:r>
-            <a:endParaRPr lang="en-US" sz="2000" dirty="0"/>
-          </a:p>
-          <a:p>
-            <a:pPr algn="l" marL="342900" indent="-342900">
-              <a:spcAft>
-                <a:spcPts val="800"/>
-              </a:spcAft>
-              <a:buSzPct val="100000"/>
-              <a:buChar char="•"/>
-            </a:pPr>
-            <a:r>
-              <a:rPr lang="en-US" sz="2000" dirty="0">
-                <a:solidFill>
-                  <a:srgbClr val="111111"/>
-                </a:solidFill>
-                <a:latin typeface="Calibri" pitchFamily="34" charset="0"/>
-                <a:ea typeface="Calibri" pitchFamily="34" charset="-122"/>
-                <a:cs typeface="Calibri" pitchFamily="34" charset="-120"/>
-              </a:rPr>
-              <a:t>Without the projector (Activity 1): draw a soil profile.</a:t>
-            </a:r>
-            <a:endParaRPr lang="en-US" sz="2000" dirty="0"/>
-          </a:p>
-          <a:p>
-            <a:pPr algn="l" marL="342900" indent="-342900">
-              <a:spcAft>
-                <a:spcPts val="800"/>
-              </a:spcAft>
-              <a:buSzPct val="100000"/>
-              <a:buChar char="•"/>
-            </a:pPr>
-            <a:r>
-              <a:rPr lang="en-US" sz="2000" dirty="0">
-                <a:solidFill>
-                  <a:srgbClr val="111111"/>
-                </a:solidFill>
-                <a:latin typeface="Calibri" pitchFamily="34" charset="0"/>
-                <a:ea typeface="Calibri" pitchFamily="34" charset="-122"/>
-                <a:cs typeface="Calibri" pitchFamily="34" charset="-120"/>
-              </a:rPr>
-              <a:t>Without the projector (Activity 2): name the bauxite of Minim-Martap.</a:t>
-            </a:r>
-            <a:endParaRPr lang="en-US" sz="2000" dirty="0"/>
-          </a:p>
-          <a:p>
-            <a:pPr algn="l" marL="342900" indent="-342900">
-              <a:spcAft>
-                <a:spcPts val="800"/>
-              </a:spcAft>
-              <a:buSzPct val="100000"/>
-              <a:buChar char="•"/>
-            </a:pPr>
-            <a:r>
-              <a:rPr lang="en-US" sz="2000" dirty="0">
-                <a:solidFill>
-                  <a:srgbClr val="111111"/>
-                </a:solidFill>
-                <a:latin typeface="Calibri" pitchFamily="34" charset="0"/>
-                <a:ea typeface="Calibri" pitchFamily="34" charset="-122"/>
-                <a:cs typeface="Calibri" pitchFamily="34" charset="-120"/>
-              </a:rPr>
-              <a:t>Without the projector (Activity 3): name crops of the North.</a:t>
-            </a:r>
-            <a:endParaRPr lang="en-US" sz="2000" dirty="0"/>
-          </a:p>
-          <a:p>
-            <a:pPr algn="l" marL="342900" indent="-342900">
-              <a:spcAft>
-                <a:spcPts val="800"/>
-              </a:spcAft>
-              <a:buSzPct val="100000"/>
-              <a:buChar char="•"/>
-            </a:pPr>
-            <a:r>
-              <a:rPr lang="en-US" sz="2000" dirty="0">
-                <a:solidFill>
-                  <a:srgbClr val="111111"/>
-                </a:solidFill>
-                <a:latin typeface="Calibri" pitchFamily="34" charset="0"/>
-                <a:ea typeface="Calibri" pitchFamily="34" charset="-122"/>
-                <a:cs typeface="Calibri" pitchFamily="34" charset="-120"/>
-              </a:rPr>
-              <a:t>Without the projector (Activity 4): describe Rhumsiki.</a:t>
-            </a:r>
-            <a:endParaRPr lang="en-US" sz="2000" dirty="0"/>
-          </a:p>
-          <a:p>
-            <a:pPr algn="l" marL="342900" indent="-342900">
-              <a:spcAft>
-                <a:spcPts val="800"/>
-              </a:spcAft>
-              <a:buSzPct val="100000"/>
-              <a:buChar char="•"/>
-            </a:pPr>
-            <a:r>
-              <a:rPr lang="en-US" sz="2000" dirty="0">
-                <a:solidFill>
-                  <a:srgbClr val="111111"/>
-                </a:solidFill>
-                <a:latin typeface="Calibri" pitchFamily="34" charset="0"/>
-                <a:ea typeface="Calibri" pitchFamily="34" charset="-122"/>
-                <a:cs typeface="Calibri" pitchFamily="34" charset="-120"/>
-              </a:rPr>
-              <a:t>Without the projector (Activity 5): look for cracks on the school walls.</a:t>
-            </a:r>
-            <a:endParaRPr lang="en-US" sz="2000" dirty="0"/>
-          </a:p>
-        </p:txBody>
-      </p:sp>
-      <p:sp>
-        <p:nvSpPr>
-          <p:cNvPr id="25" name="Slide Number Placeholder 0"/>
-          <p:cNvSpPr>
-            <a:spLocks noGrp="1"/>
-          </p:cNvSpPr>
-          <p:nvPr>
-            <p:ph type="sldNum" sz="quarter" idx="4294967295"/>
-          </p:nvPr>
-        </p:nvSpPr>
-        <p:spPr>
-          <a:xfrm>
-            <a:off x="27432" y="91440"/>
-            <a:ext cx="585216" cy="475488"/>
-          </a:xfrm>
-          <a:prstGeom prst="rect">
-            <a:avLst/>
-          </a:prstGeom>
-          <a:extLst>
-            <a:ext uri="{C572A759-6A51-4108-AA02-DFA0A04FC94B}">
-              <ma14:wrappingTextBoxFlag xmlns:ma14="http://schemas.microsoft.com/office/mac/drawingml/2011/main" val="0"/>
-            </a:ext>
-          </a:extLst>
-        </p:spPr>
-        <p:txBody>
-          <a:bodyPr/>
-          <a:lstStyle>
-            <a:lvl1pPr>
-              <a:defRPr sz="2000">
-                <a:solidFill>
-                  <a:srgbClr val="FFFFFF"/>
-                </a:solidFill>
-                <a:latin typeface="Calibri"/>
-                <a:ea typeface="Calibri"/>
-                <a:cs typeface="Calibri"/>
-              </a:defRPr>
-            </a:lvl1pPr>
-          </a:lstStyle>
-          <a:p>
-            <a:pPr algn="ctr"/>
-            <a:fld id="{F7021451-1387-4CA6-816F-3879F97B5CBC}" type="slidenum">
-              <a:rPr b="1" lang="en-US"/>
-              <a:t>57</a:t>
-            </a:fld>
-            <a:endParaRPr lang="en-US"/>
-          </a:p>
-        </p:txBody>
-      </p:sp>
-    </p:spTree>
-  </p:cSld>
-  <p:clrMapOvr>
-    <a:masterClrMapping/>
-  </p:clrMapOvr>
-</p:sld>
-</file>
-
-<file path=ppt/slides/slide58.xml><?xml version="1.0" encoding="utf-8"?>
-<p:sld xmlns:a="http://schemas.openxmlformats.org/drawingml/2006/main" xmlns:r="http://schemas.openxmlformats.org/officeDocument/2006/relationships" xmlns:p="http://schemas.openxmlformats.org/presentationml/2006/main">
-  <p:cSld name="Slide 58">
-    <p:spTree>
-      <p:nvGrpSpPr>
-        <p:cNvPr id="1" name=""/>
-        <p:cNvGrpSpPr/>
-        <p:nvPr/>
-      </p:nvGrpSpPr>
-      <p:grpSpPr>
-        <a:xfrm>
-          <a:off x="0" y="0"/>
-          <a:ext cx="0" cy="0"/>
-          <a:chOff x="0" y="0"/>
-          <a:chExt cx="0" cy="0"/>
-        </a:xfrm>
-      </p:grpSpPr>
-      <p:sp>
-        <p:nvSpPr>
-          <p:cNvPr id="2" name="Text 0"/>
-          <p:cNvSpPr/>
-          <p:nvPr/>
-        </p:nvSpPr>
-        <p:spPr>
-          <a:xfrm>
-            <a:off x="457200" y="713232"/>
-            <a:ext cx="11368735" cy="274320"/>
-          </a:xfrm>
-          <a:prstGeom prst="rect">
-            <a:avLst/>
-          </a:prstGeom>
-          <a:noFill/>
-          <a:ln/>
-        </p:spPr>
-        <p:txBody>
-          <a:bodyPr wrap="square" lIns="0" tIns="0" rIns="0" bIns="0" rtlCol="0" anchor="ctr"/>
-          <a:lstStyle/>
-          <a:p>
-            <a:pPr algn="r" indent="0" marL="0">
-              <a:buNone/>
-            </a:pPr>
-            <a:r>
-              <a:rPr lang="en-US" sz="1400" b="1" dirty="0">
-                <a:solidFill>
-                  <a:srgbClr val="1C3F6E"/>
-                </a:solidFill>
-                <a:latin typeface="Calibri" pitchFamily="34" charset="0"/>
-                <a:ea typeface="Calibri" pitchFamily="34" charset="-122"/>
-                <a:cs typeface="Calibri" pitchFamily="34" charset="-120"/>
-              </a:rPr>
-              <a:t>REFERENCES</a:t>
-            </a:r>
-            <a:endParaRPr lang="en-US" sz="1400" dirty="0"/>
-          </a:p>
-        </p:txBody>
-      </p:sp>
-      <p:pic>
-        <p:nvPicPr>
-          <p:cNvPr id="3" name="Image 0" descr="/home/claude/f4/img/minesec_sheet.png">    </p:cNvPr>
-          <p:cNvPicPr>
-            <a:picLocks noChangeAspect="1"/>
-          </p:cNvPicPr>
-          <p:nvPr/>
-        </p:nvPicPr>
-        <p:blipFill>
-          <a:blip r:embed="rId1"/>
-          <a:stretch>
-            <a:fillRect/>
-          </a:stretch>
-        </p:blipFill>
-        <p:spPr>
-          <a:xfrm>
-            <a:off x="0" y="658368"/>
-            <a:ext cx="2468880" cy="5833872"/>
-          </a:xfrm>
-          <a:prstGeom prst="rect">
-            <a:avLst/>
-          </a:prstGeom>
-        </p:spPr>
-      </p:pic>
-      <p:sp>
-        <p:nvSpPr>
-          <p:cNvPr id="4" name="Text 1"/>
-          <p:cNvSpPr/>
-          <p:nvPr/>
-        </p:nvSpPr>
-        <p:spPr>
-          <a:xfrm>
-            <a:off x="2697480" y="1005840"/>
-            <a:ext cx="9174175" cy="731520"/>
-          </a:xfrm>
-          <a:prstGeom prst="rect">
-            <a:avLst/>
-          </a:prstGeom>
-          <a:noFill/>
-          <a:ln/>
-        </p:spPr>
-        <p:txBody>
-          <a:bodyPr wrap="square" lIns="0" tIns="0" rIns="0" bIns="0" rtlCol="0" anchor="ctr">
-            <a:normAutofit/>
-          </a:bodyPr>
-          <a:lstStyle/>
-          <a:p>
-            <a:pPr algn="ctr" indent="0" marL="0">
-              <a:buNone/>
-            </a:pPr>
-            <a:r>
-              <a:rPr lang="en-US" sz="3600" b="1" dirty="0">
-                <a:solidFill>
-                  <a:srgbClr val="990011"/>
-                </a:solidFill>
-                <a:latin typeface="Times New Roman" pitchFamily="34" charset="0"/>
-                <a:ea typeface="Times New Roman" pitchFamily="34" charset="-122"/>
-                <a:cs typeface="Times New Roman" pitchFamily="34" charset="-120"/>
-              </a:rPr>
-              <a:t>References</a:t>
-            </a:r>
-            <a:endParaRPr lang="en-US" sz="3600" dirty="0"/>
-          </a:p>
-        </p:txBody>
-      </p:sp>
-      <p:sp>
-        <p:nvSpPr>
-          <p:cNvPr id="5" name="Text 2"/>
-          <p:cNvSpPr/>
-          <p:nvPr/>
-        </p:nvSpPr>
-        <p:spPr>
-          <a:xfrm>
-            <a:off x="2697480" y="1783080"/>
-            <a:ext cx="9174175" cy="4663440"/>
-          </a:xfrm>
-          <a:prstGeom prst="rect">
-            <a:avLst/>
-          </a:prstGeom>
-          <a:noFill/>
-          <a:ln/>
-        </p:spPr>
-        <p:txBody>
-          <a:bodyPr wrap="square" lIns="0" tIns="0" rIns="0" bIns="0" rtlCol="0" anchor="t"/>
-          <a:lstStyle/>
-          <a:p>
-            <a:pPr algn="l" marL="342900" indent="-342900">
-              <a:spcAft>
-                <a:spcPts val="800"/>
-              </a:spcAft>
-              <a:buSzPct val="100000"/>
-              <a:buChar char="•"/>
-            </a:pPr>
-            <a:r>
-              <a:rPr lang="en-US" sz="1800" dirty="0">
-                <a:solidFill>
-                  <a:srgbClr val="111111"/>
-                </a:solidFill>
-                <a:latin typeface="Calibri" pitchFamily="34" charset="0"/>
-                <a:ea typeface="Calibri" pitchFamily="34" charset="-122"/>
-                <a:cs typeface="Calibri" pitchFamily="34" charset="-120"/>
-              </a:rPr>
-              <a:t>Geography Syllabus for Sixth Forms (Lower and Upper Sixth), MINESEC, 2019 — Module 2 (Geomorphology).</a:t>
-            </a:r>
-            <a:endParaRPr lang="en-US" sz="1800" dirty="0"/>
-          </a:p>
-          <a:p>
-            <a:pPr algn="l" marL="342900" indent="-342900">
-              <a:spcAft>
-                <a:spcPts val="800"/>
-              </a:spcAft>
-              <a:buSzPct val="100000"/>
-              <a:buChar char="•"/>
-            </a:pPr>
-            <a:r>
-              <a:rPr lang="en-US" sz="1800" dirty="0">
-                <a:solidFill>
-                  <a:srgbClr val="111111"/>
-                </a:solidFill>
-                <a:latin typeface="Calibri" pitchFamily="34" charset="0"/>
-                <a:ea typeface="Calibri" pitchFamily="34" charset="-122"/>
-                <a:cs typeface="Calibri" pitchFamily="34" charset="-120"/>
-              </a:rPr>
-              <a:t>Teacher's course notes: Mr KAMDEM E., Geomorphology (LSA), GBHS Garoua, 2026.</a:t>
-            </a:r>
-            <a:endParaRPr lang="en-US" sz="1800" dirty="0"/>
-          </a:p>
-          <a:p>
-            <a:pPr algn="l" marL="342900" indent="-342900">
-              <a:spcAft>
-                <a:spcPts val="800"/>
-              </a:spcAft>
-              <a:buSzPct val="100000"/>
-              <a:buChar char="•"/>
-            </a:pPr>
-            <a:r>
-              <a:rPr lang="en-US" sz="1800" dirty="0">
-                <a:solidFill>
-                  <a:srgbClr val="111111"/>
-                </a:solidFill>
-                <a:latin typeface="Calibri" pitchFamily="34" charset="0"/>
-                <a:ea typeface="Calibri" pitchFamily="34" charset="-122"/>
-                <a:cs typeface="Calibri" pitchFamily="34" charset="-120"/>
-              </a:rPr>
-              <a:t>Photo, Activity 2: “Bauxite mine near Itea, Greece” by Jason-Morrison, CC BY-NC 2.0, via Flickr (https://www.flickr.com/photos/8998833@N07/929316608)</a:t>
-            </a:r>
-            <a:endParaRPr lang="en-US" sz="1800" dirty="0"/>
-          </a:p>
-          <a:p>
-            <a:pPr algn="l" marL="342900" indent="-342900">
-              <a:spcAft>
-                <a:spcPts val="800"/>
-              </a:spcAft>
-              <a:buSzPct val="100000"/>
-              <a:buChar char="•"/>
-            </a:pPr>
-            <a:r>
-              <a:rPr lang="en-US" sz="1800" dirty="0">
-                <a:solidFill>
-                  <a:srgbClr val="111111"/>
-                </a:solidFill>
-                <a:latin typeface="Calibri" pitchFamily="34" charset="0"/>
-                <a:ea typeface="Calibri" pitchFamily="34" charset="-122"/>
-                <a:cs typeface="Calibri" pitchFamily="34" charset="-120"/>
-              </a:rPr>
-              <a:t>Photo, Activity 3: “Cotton Fields, U.S. 65, Tensas Parish, Louisiana (4)” by Ken Lund, CC BY-SA 2.0, via Flickr (https://www.flickr.com/photos/75683070@N00/3934873451)</a:t>
-            </a:r>
-            <a:endParaRPr lang="en-US" sz="1800" dirty="0"/>
-          </a:p>
-          <a:p>
-            <a:pPr algn="l" marL="342900" indent="-342900">
-              <a:spcAft>
-                <a:spcPts val="800"/>
-              </a:spcAft>
-              <a:buSzPct val="100000"/>
-              <a:buChar char="•"/>
-            </a:pPr>
-            <a:r>
-              <a:rPr lang="en-US" sz="1800" dirty="0">
-                <a:solidFill>
-                  <a:srgbClr val="111111"/>
-                </a:solidFill>
-                <a:latin typeface="Calibri" pitchFamily="34" charset="0"/>
-                <a:ea typeface="Calibri" pitchFamily="34" charset="-122"/>
-                <a:cs typeface="Calibri" pitchFamily="34" charset="-120"/>
-              </a:rPr>
-              <a:t>Photo, Activity 4: “Rhumsiki peak, North Cameroon” by krishna.naudin, CC BY-SA 2.0, via Flickr (https://www.flickr.com/photos/141297921@N05/25989204581)</a:t>
-            </a:r>
-            <a:endParaRPr lang="en-US" sz="1800" dirty="0"/>
-          </a:p>
-          <a:p>
-            <a:pPr algn="l" marL="342900" indent="-342900">
-              <a:spcAft>
-                <a:spcPts val="800"/>
-              </a:spcAft>
-              <a:buSzPct val="100000"/>
-              <a:buChar char="•"/>
-            </a:pPr>
-            <a:r>
-              <a:rPr lang="en-US" sz="1800" dirty="0">
-                <a:solidFill>
-                  <a:srgbClr val="111111"/>
-                </a:solidFill>
-                <a:latin typeface="Calibri" pitchFamily="34" charset="0"/>
-                <a:ea typeface="Calibri" pitchFamily="34" charset="-122"/>
-                <a:cs typeface="Calibri" pitchFamily="34" charset="-120"/>
-              </a:rPr>
-              <a:t>Photo, Activity 5: “Cracked wall” by árticotropical, CC BY 2.0, via Flickr (https://www.flickr.com/photos/8581973@N02/521943309)</a:t>
-            </a:r>
-            <a:endParaRPr lang="en-US" sz="1800" dirty="0"/>
-          </a:p>
-          <a:p>
-            <a:pPr algn="l" marL="342900" indent="-342900">
-              <a:spcAft>
-                <a:spcPts val="800"/>
-              </a:spcAft>
-              <a:buSzPct val="100000"/>
-              <a:buChar char="•"/>
-            </a:pPr>
-            <a:r>
-              <a:rPr lang="en-US" sz="1800" dirty="0">
-                <a:solidFill>
-                  <a:srgbClr val="111111"/>
-                </a:solidFill>
-                <a:latin typeface="Calibri" pitchFamily="34" charset="0"/>
-                <a:ea typeface="Calibri" pitchFamily="34" charset="-122"/>
-                <a:cs typeface="Calibri" pitchFamily="34" charset="-120"/>
-              </a:rPr>
-              <a:t>Diagrams and animations: drawn for this lesson (Geography Department).</a:t>
-            </a:r>
-            <a:endParaRPr lang="en-US" sz="1800" dirty="0"/>
-          </a:p>
-        </p:txBody>
-      </p:sp>
-      <p:sp>
-        <p:nvSpPr>
-          <p:cNvPr id="25" name="Slide Number Placeholder 0"/>
-          <p:cNvSpPr>
-            <a:spLocks noGrp="1"/>
-          </p:cNvSpPr>
-          <p:nvPr>
-            <p:ph type="sldNum" sz="quarter" idx="4294967295"/>
-          </p:nvPr>
-        </p:nvSpPr>
-        <p:spPr>
-          <a:xfrm>
-            <a:off x="27432" y="91440"/>
-            <a:ext cx="585216" cy="475488"/>
-          </a:xfrm>
-          <a:prstGeom prst="rect">
-            <a:avLst/>
-          </a:prstGeom>
-          <a:extLst>
-            <a:ext uri="{C572A759-6A51-4108-AA02-DFA0A04FC94B}">
-              <ma14:wrappingTextBoxFlag xmlns:ma14="http://schemas.microsoft.com/office/mac/drawingml/2011/main" val="0"/>
-            </a:ext>
-          </a:extLst>
-        </p:spPr>
-        <p:txBody>
-          <a:bodyPr/>
-          <a:lstStyle>
-            <a:lvl1pPr>
-              <a:defRPr sz="2000">
-                <a:solidFill>
-                  <a:srgbClr val="FFFFFF"/>
-                </a:solidFill>
-                <a:latin typeface="Calibri"/>
-                <a:ea typeface="Calibri"/>
-                <a:cs typeface="Calibri"/>
-              </a:defRPr>
-            </a:lvl1pPr>
-          </a:lstStyle>
-          <a:p>
-            <a:pPr algn="ctr"/>
-            <a:fld id="{F7021451-1387-4CA6-816F-3879F97B5CBC}" type="slidenum">
-              <a:rPr b="1" lang="en-US"/>
-              <a:t>58</a:t>
+              <a:t>59</a:t>
             </a:fld>
             <a:endParaRPr lang="en-US"/>
           </a:p>
@@ -23216,6 +23360,677 @@
             <a:fld id="{F7021451-1387-4CA6-816F-3879F97B5CBC}" type="slidenum">
               <a:rPr b="1" lang="en-US"/>
               <a:t>6</a:t>
+            </a:fld>
+            <a:endParaRPr lang="en-US"/>
+          </a:p>
+        </p:txBody>
+      </p:sp>
+    </p:spTree>
+  </p:cSld>
+  <p:clrMapOvr>
+    <a:masterClrMapping/>
+  </p:clrMapOvr>
+</p:sld>
+</file>
+
+<file path=ppt/slides/slide60.xml><?xml version="1.0" encoding="utf-8"?>
+<p:sld xmlns:a="http://schemas.openxmlformats.org/drawingml/2006/main" xmlns:r="http://schemas.openxmlformats.org/officeDocument/2006/relationships" xmlns:p="http://schemas.openxmlformats.org/presentationml/2006/main">
+  <p:cSld name="Slide 60">
+    <p:spTree>
+      <p:nvGrpSpPr>
+        <p:cNvPr id="1" name=""/>
+        <p:cNvGrpSpPr/>
+        <p:nvPr/>
+      </p:nvGrpSpPr>
+      <p:grpSpPr>
+        <a:xfrm>
+          <a:off x="0" y="0"/>
+          <a:ext cx="0" cy="0"/>
+          <a:chOff x="0" y="0"/>
+          <a:chExt cx="0" cy="0"/>
+        </a:xfrm>
+      </p:grpSpPr>
+      <p:sp>
+        <p:nvSpPr>
+          <p:cNvPr id="2" name="Text 0"/>
+          <p:cNvSpPr/>
+          <p:nvPr/>
+        </p:nvSpPr>
+        <p:spPr>
+          <a:xfrm>
+            <a:off x="457200" y="713232"/>
+            <a:ext cx="11368735" cy="274320"/>
+          </a:xfrm>
+          <a:prstGeom prst="rect">
+            <a:avLst/>
+          </a:prstGeom>
+          <a:noFill/>
+          <a:ln/>
+        </p:spPr>
+        <p:txBody>
+          <a:bodyPr wrap="square" lIns="0" tIns="0" rIns="0" bIns="0" rtlCol="0" anchor="ctr"/>
+          <a:lstStyle/>
+          <a:p>
+            <a:pPr algn="r" indent="0" marL="0">
+              <a:buNone/>
+            </a:pPr>
+            <a:r>
+              <a:rPr lang="en-US" sz="1400" b="1" dirty="0">
+                <a:solidFill>
+                  <a:srgbClr val="1C3F6E"/>
+                </a:solidFill>
+                <a:latin typeface="Calibri" pitchFamily="34" charset="0"/>
+                <a:ea typeface="Calibri" pitchFamily="34" charset="-122"/>
+                <a:cs typeface="Calibri" pitchFamily="34" charset="-120"/>
+              </a:rPr>
+              <a:t>TEACHER'S NOTE</a:t>
+            </a:r>
+            <a:endParaRPr lang="en-US" sz="1400" dirty="0"/>
+          </a:p>
+        </p:txBody>
+      </p:sp>
+      <p:pic>
+        <p:nvPicPr>
+          <p:cNvPr id="3" name="Image 0" descr="/home/claude/f4/img/minesec_sheet.png">    </p:cNvPr>
+          <p:cNvPicPr>
+            <a:picLocks noChangeAspect="1"/>
+          </p:cNvPicPr>
+          <p:nvPr/>
+        </p:nvPicPr>
+        <p:blipFill>
+          <a:blip r:embed="rId1"/>
+          <a:stretch>
+            <a:fillRect/>
+          </a:stretch>
+        </p:blipFill>
+        <p:spPr>
+          <a:xfrm>
+            <a:off x="0" y="658368"/>
+            <a:ext cx="3840480" cy="5833872"/>
+          </a:xfrm>
+          <a:prstGeom prst="rect">
+            <a:avLst/>
+          </a:prstGeom>
+        </p:spPr>
+      </p:pic>
+      <p:sp>
+        <p:nvSpPr>
+          <p:cNvPr id="4" name="Text 1"/>
+          <p:cNvSpPr/>
+          <p:nvPr/>
+        </p:nvSpPr>
+        <p:spPr>
+          <a:xfrm>
+            <a:off x="4069080" y="1005840"/>
+            <a:ext cx="7802575" cy="731520"/>
+          </a:xfrm>
+          <a:prstGeom prst="rect">
+            <a:avLst/>
+          </a:prstGeom>
+          <a:noFill/>
+          <a:ln/>
+        </p:spPr>
+        <p:txBody>
+          <a:bodyPr wrap="square" lIns="0" tIns="0" rIns="0" bIns="0" rtlCol="0" anchor="ctr">
+            <a:normAutofit/>
+          </a:bodyPr>
+          <a:lstStyle/>
+          <a:p>
+            <a:pPr algn="ctr" indent="0" marL="0">
+              <a:buNone/>
+            </a:pPr>
+            <a:r>
+              <a:rPr lang="en-US" sz="3600" b="1" dirty="0">
+                <a:solidFill>
+                  <a:srgbClr val="990011"/>
+                </a:solidFill>
+                <a:latin typeface="Times New Roman" pitchFamily="34" charset="0"/>
+                <a:ea typeface="Times New Roman" pitchFamily="34" charset="-122"/>
+                <a:cs typeface="Times New Roman" pitchFamily="34" charset="-120"/>
+              </a:rPr>
+              <a:t>Teacher's Note</a:t>
+            </a:r>
+            <a:endParaRPr lang="en-US" sz="3600" dirty="0"/>
+          </a:p>
+        </p:txBody>
+      </p:sp>
+      <p:sp>
+        <p:nvSpPr>
+          <p:cNvPr id="5" name="Text 2"/>
+          <p:cNvSpPr/>
+          <p:nvPr/>
+        </p:nvSpPr>
+        <p:spPr>
+          <a:xfrm>
+            <a:off x="4069080" y="1783080"/>
+            <a:ext cx="7802575" cy="4663440"/>
+          </a:xfrm>
+          <a:prstGeom prst="rect">
+            <a:avLst/>
+          </a:prstGeom>
+          <a:noFill/>
+          <a:ln/>
+        </p:spPr>
+        <p:txBody>
+          <a:bodyPr wrap="square" lIns="0" tIns="0" rIns="0" bIns="0" rtlCol="0" anchor="t"/>
+          <a:lstStyle/>
+          <a:p>
+            <a:pPr algn="l" marL="342900" indent="-342900">
+              <a:spcAft>
+                <a:spcPts val="800"/>
+              </a:spcAft>
+              <a:buSzPct val="100000"/>
+              <a:buChar char="•"/>
+            </a:pPr>
+            <a:r>
+              <a:rPr lang="en-US" sz="2000" dirty="0">
+                <a:solidFill>
+                  <a:srgbClr val="111111"/>
+                </a:solidFill>
+                <a:latin typeface="Calibri" pitchFamily="34" charset="0"/>
+                <a:ea typeface="Calibri" pitchFamily="34" charset="-122"/>
+                <a:cs typeface="Calibri" pitchFamily="34" charset="-120"/>
+              </a:rPr>
+              <a:t>Timing: Homework correction, plan, objectives 8 min | Recall, situation, action 10 min | 5 activities 30 min | Board summary (copying) 30 min | Evaluation, remediation 10 min | Homework, next lesson 5 min | Logbook 7 min</a:t>
+            </a:r>
+            <a:endParaRPr lang="en-US" sz="2000" dirty="0"/>
+          </a:p>
+          <a:p>
+            <a:pPr algn="l" marL="342900" indent="-342900">
+              <a:spcAft>
+                <a:spcPts val="800"/>
+              </a:spcAft>
+              <a:buSzPct val="100000"/>
+              <a:buChar char="•"/>
+            </a:pPr>
+            <a:r>
+              <a:rPr lang="en-US" sz="2000" dirty="0">
+                <a:solidFill>
+                  <a:srgbClr val="111111"/>
+                </a:solidFill>
+                <a:latin typeface="Calibri" pitchFamily="34" charset="0"/>
+                <a:ea typeface="Calibri" pitchFamily="34" charset="-122"/>
+                <a:cs typeface="Calibri" pitchFamily="34" charset="-120"/>
+              </a:rPr>
+              <a:t>Without the projector (Activity 1): draw a soil profile.</a:t>
+            </a:r>
+            <a:endParaRPr lang="en-US" sz="2000" dirty="0"/>
+          </a:p>
+          <a:p>
+            <a:pPr algn="l" marL="342900" indent="-342900">
+              <a:spcAft>
+                <a:spcPts val="800"/>
+              </a:spcAft>
+              <a:buSzPct val="100000"/>
+              <a:buChar char="•"/>
+            </a:pPr>
+            <a:r>
+              <a:rPr lang="en-US" sz="2000" dirty="0">
+                <a:solidFill>
+                  <a:srgbClr val="111111"/>
+                </a:solidFill>
+                <a:latin typeface="Calibri" pitchFamily="34" charset="0"/>
+                <a:ea typeface="Calibri" pitchFamily="34" charset="-122"/>
+                <a:cs typeface="Calibri" pitchFamily="34" charset="-120"/>
+              </a:rPr>
+              <a:t>Without the projector (Activity 2): name the bauxite of Minim-Martap.</a:t>
+            </a:r>
+            <a:endParaRPr lang="en-US" sz="2000" dirty="0"/>
+          </a:p>
+          <a:p>
+            <a:pPr algn="l" marL="342900" indent="-342900">
+              <a:spcAft>
+                <a:spcPts val="800"/>
+              </a:spcAft>
+              <a:buSzPct val="100000"/>
+              <a:buChar char="•"/>
+            </a:pPr>
+            <a:r>
+              <a:rPr lang="en-US" sz="2000" dirty="0">
+                <a:solidFill>
+                  <a:srgbClr val="111111"/>
+                </a:solidFill>
+                <a:latin typeface="Calibri" pitchFamily="34" charset="0"/>
+                <a:ea typeface="Calibri" pitchFamily="34" charset="-122"/>
+                <a:cs typeface="Calibri" pitchFamily="34" charset="-120"/>
+              </a:rPr>
+              <a:t>Without the projector (Activity 3): name crops of the North.</a:t>
+            </a:r>
+            <a:endParaRPr lang="en-US" sz="2000" dirty="0"/>
+          </a:p>
+          <a:p>
+            <a:pPr algn="l" marL="342900" indent="-342900">
+              <a:spcAft>
+                <a:spcPts val="800"/>
+              </a:spcAft>
+              <a:buSzPct val="100000"/>
+              <a:buChar char="•"/>
+            </a:pPr>
+            <a:r>
+              <a:rPr lang="en-US" sz="2000" dirty="0">
+                <a:solidFill>
+                  <a:srgbClr val="111111"/>
+                </a:solidFill>
+                <a:latin typeface="Calibri" pitchFamily="34" charset="0"/>
+                <a:ea typeface="Calibri" pitchFamily="34" charset="-122"/>
+                <a:cs typeface="Calibri" pitchFamily="34" charset="-120"/>
+              </a:rPr>
+              <a:t>Without the projector (Activity 4): describe Rhumsiki.</a:t>
+            </a:r>
+            <a:endParaRPr lang="en-US" sz="2000" dirty="0"/>
+          </a:p>
+          <a:p>
+            <a:pPr algn="l" marL="342900" indent="-342900">
+              <a:spcAft>
+                <a:spcPts val="800"/>
+              </a:spcAft>
+              <a:buSzPct val="100000"/>
+              <a:buChar char="•"/>
+            </a:pPr>
+            <a:r>
+              <a:rPr lang="en-US" sz="2000" dirty="0">
+                <a:solidFill>
+                  <a:srgbClr val="111111"/>
+                </a:solidFill>
+                <a:latin typeface="Calibri" pitchFamily="34" charset="0"/>
+                <a:ea typeface="Calibri" pitchFamily="34" charset="-122"/>
+                <a:cs typeface="Calibri" pitchFamily="34" charset="-120"/>
+              </a:rPr>
+              <a:t>Without the projector (Activity 5): look for cracks on the school walls.</a:t>
+            </a:r>
+            <a:endParaRPr lang="en-US" sz="2000" dirty="0"/>
+          </a:p>
+        </p:txBody>
+      </p:sp>
+      <p:sp>
+        <p:nvSpPr>
+          <p:cNvPr id="25" name="Slide Number Placeholder 0"/>
+          <p:cNvSpPr>
+            <a:spLocks noGrp="1"/>
+          </p:cNvSpPr>
+          <p:nvPr>
+            <p:ph type="sldNum" sz="quarter" idx="4294967295"/>
+          </p:nvPr>
+        </p:nvSpPr>
+        <p:spPr>
+          <a:xfrm>
+            <a:off x="27432" y="91440"/>
+            <a:ext cx="585216" cy="475488"/>
+          </a:xfrm>
+          <a:prstGeom prst="rect">
+            <a:avLst/>
+          </a:prstGeom>
+          <a:extLst>
+            <a:ext uri="{C572A759-6A51-4108-AA02-DFA0A04FC94B}">
+              <ma14:wrappingTextBoxFlag xmlns:ma14="http://schemas.microsoft.com/office/mac/drawingml/2011/main" val="0"/>
+            </a:ext>
+          </a:extLst>
+        </p:spPr>
+        <p:txBody>
+          <a:bodyPr/>
+          <a:lstStyle>
+            <a:lvl1pPr>
+              <a:defRPr sz="2000">
+                <a:solidFill>
+                  <a:srgbClr val="FFFFFF"/>
+                </a:solidFill>
+                <a:latin typeface="Calibri"/>
+                <a:ea typeface="Calibri"/>
+                <a:cs typeface="Calibri"/>
+              </a:defRPr>
+            </a:lvl1pPr>
+          </a:lstStyle>
+          <a:p>
+            <a:pPr algn="ctr"/>
+            <a:fld id="{F7021451-1387-4CA6-816F-3879F97B5CBC}" type="slidenum">
+              <a:rPr b="1" lang="en-US"/>
+              <a:t>60</a:t>
+            </a:fld>
+            <a:endParaRPr lang="en-US"/>
+          </a:p>
+        </p:txBody>
+      </p:sp>
+    </p:spTree>
+  </p:cSld>
+  <p:clrMapOvr>
+    <a:masterClrMapping/>
+  </p:clrMapOvr>
+</p:sld>
+</file>
+
+<file path=ppt/slides/slide61.xml><?xml version="1.0" encoding="utf-8"?>
+<p:sld xmlns:a="http://schemas.openxmlformats.org/drawingml/2006/main" xmlns:r="http://schemas.openxmlformats.org/officeDocument/2006/relationships" xmlns:p="http://schemas.openxmlformats.org/presentationml/2006/main">
+  <p:cSld name="Slide 61">
+    <p:spTree>
+      <p:nvGrpSpPr>
+        <p:cNvPr id="1" name=""/>
+        <p:cNvGrpSpPr/>
+        <p:nvPr/>
+      </p:nvGrpSpPr>
+      <p:grpSpPr>
+        <a:xfrm>
+          <a:off x="0" y="0"/>
+          <a:ext cx="0" cy="0"/>
+          <a:chOff x="0" y="0"/>
+          <a:chExt cx="0" cy="0"/>
+        </a:xfrm>
+      </p:grpSpPr>
+      <p:sp>
+        <p:nvSpPr>
+          <p:cNvPr id="2" name="Text 0"/>
+          <p:cNvSpPr/>
+          <p:nvPr/>
+        </p:nvSpPr>
+        <p:spPr>
+          <a:xfrm>
+            <a:off x="457200" y="713232"/>
+            <a:ext cx="11368735" cy="274320"/>
+          </a:xfrm>
+          <a:prstGeom prst="rect">
+            <a:avLst/>
+          </a:prstGeom>
+          <a:noFill/>
+          <a:ln/>
+        </p:spPr>
+        <p:txBody>
+          <a:bodyPr wrap="square" lIns="0" tIns="0" rIns="0" bIns="0" rtlCol="0" anchor="ctr"/>
+          <a:lstStyle/>
+          <a:p>
+            <a:pPr algn="r" indent="0" marL="0">
+              <a:buNone/>
+            </a:pPr>
+            <a:r>
+              <a:rPr lang="en-US" sz="1400" b="1" dirty="0">
+                <a:solidFill>
+                  <a:srgbClr val="1C3F6E"/>
+                </a:solidFill>
+                <a:latin typeface="Calibri" pitchFamily="34" charset="0"/>
+                <a:ea typeface="Calibri" pitchFamily="34" charset="-122"/>
+                <a:cs typeface="Calibri" pitchFamily="34" charset="-120"/>
+              </a:rPr>
+              <a:t>REFERENCES</a:t>
+            </a:r>
+            <a:endParaRPr lang="en-US" sz="1400" dirty="0"/>
+          </a:p>
+        </p:txBody>
+      </p:sp>
+      <p:pic>
+        <p:nvPicPr>
+          <p:cNvPr id="3" name="Image 0" descr="/home/claude/f4/img/minesec_sheet.png">    </p:cNvPr>
+          <p:cNvPicPr>
+            <a:picLocks noChangeAspect="1"/>
+          </p:cNvPicPr>
+          <p:nvPr/>
+        </p:nvPicPr>
+        <p:blipFill>
+          <a:blip r:embed="rId1"/>
+          <a:stretch>
+            <a:fillRect/>
+          </a:stretch>
+        </p:blipFill>
+        <p:spPr>
+          <a:xfrm>
+            <a:off x="0" y="658368"/>
+            <a:ext cx="2468880" cy="5833872"/>
+          </a:xfrm>
+          <a:prstGeom prst="rect">
+            <a:avLst/>
+          </a:prstGeom>
+        </p:spPr>
+      </p:pic>
+      <p:sp>
+        <p:nvSpPr>
+          <p:cNvPr id="4" name="Text 1"/>
+          <p:cNvSpPr/>
+          <p:nvPr/>
+        </p:nvSpPr>
+        <p:spPr>
+          <a:xfrm>
+            <a:off x="2697480" y="1005840"/>
+            <a:ext cx="9174175" cy="731520"/>
+          </a:xfrm>
+          <a:prstGeom prst="rect">
+            <a:avLst/>
+          </a:prstGeom>
+          <a:noFill/>
+          <a:ln/>
+        </p:spPr>
+        <p:txBody>
+          <a:bodyPr wrap="square" lIns="0" tIns="0" rIns="0" bIns="0" rtlCol="0" anchor="ctr">
+            <a:normAutofit/>
+          </a:bodyPr>
+          <a:lstStyle/>
+          <a:p>
+            <a:pPr algn="ctr" indent="0" marL="0">
+              <a:buNone/>
+            </a:pPr>
+            <a:r>
+              <a:rPr lang="en-US" sz="3600" b="1" dirty="0">
+                <a:solidFill>
+                  <a:srgbClr val="990011"/>
+                </a:solidFill>
+                <a:latin typeface="Times New Roman" pitchFamily="34" charset="0"/>
+                <a:ea typeface="Times New Roman" pitchFamily="34" charset="-122"/>
+                <a:cs typeface="Times New Roman" pitchFamily="34" charset="-120"/>
+              </a:rPr>
+              <a:t>References</a:t>
+            </a:r>
+            <a:endParaRPr lang="en-US" sz="3600" dirty="0"/>
+          </a:p>
+        </p:txBody>
+      </p:sp>
+      <p:sp>
+        <p:nvSpPr>
+          <p:cNvPr id="5" name="Text 2"/>
+          <p:cNvSpPr/>
+          <p:nvPr/>
+        </p:nvSpPr>
+        <p:spPr>
+          <a:xfrm>
+            <a:off x="2697480" y="1783080"/>
+            <a:ext cx="9174175" cy="4663440"/>
+          </a:xfrm>
+          <a:prstGeom prst="rect">
+            <a:avLst/>
+          </a:prstGeom>
+          <a:noFill/>
+          <a:ln/>
+        </p:spPr>
+        <p:txBody>
+          <a:bodyPr wrap="square" lIns="0" tIns="0" rIns="0" bIns="0" rtlCol="0" anchor="t"/>
+          <a:lstStyle/>
+          <a:p>
+            <a:pPr algn="l" marL="342900" indent="-342900">
+              <a:spcAft>
+                <a:spcPts val="800"/>
+              </a:spcAft>
+              <a:buSzPct val="100000"/>
+              <a:buChar char="•"/>
+            </a:pPr>
+            <a:r>
+              <a:rPr lang="en-US" sz="1800" dirty="0">
+                <a:solidFill>
+                  <a:srgbClr val="111111"/>
+                </a:solidFill>
+                <a:latin typeface="Calibri" pitchFamily="34" charset="0"/>
+                <a:ea typeface="Calibri" pitchFamily="34" charset="-122"/>
+                <a:cs typeface="Calibri" pitchFamily="34" charset="-120"/>
+              </a:rPr>
+              <a:t>Geography Syllabus for Sixth Forms (Lower and Upper Sixth), MINESEC, 2019 — Module 2 (Geomorphology).</a:t>
+            </a:r>
+            <a:endParaRPr lang="en-US" sz="1800" dirty="0"/>
+          </a:p>
+          <a:p>
+            <a:pPr algn="l" marL="342900" indent="-342900">
+              <a:spcAft>
+                <a:spcPts val="800"/>
+              </a:spcAft>
+              <a:buSzPct val="100000"/>
+              <a:buChar char="•"/>
+            </a:pPr>
+            <a:r>
+              <a:rPr lang="en-US" sz="1800" dirty="0">
+                <a:solidFill>
+                  <a:srgbClr val="111111"/>
+                </a:solidFill>
+                <a:latin typeface="Calibri" pitchFamily="34" charset="0"/>
+                <a:ea typeface="Calibri" pitchFamily="34" charset="-122"/>
+                <a:cs typeface="Calibri" pitchFamily="34" charset="-120"/>
+              </a:rPr>
+              <a:t>Teacher's course notes: Mr KAMDEM E., Geomorphology (LSA), GBHS Garoua, 2026.</a:t>
+            </a:r>
+            <a:endParaRPr lang="en-US" sz="1800" dirty="0"/>
+          </a:p>
+          <a:p>
+            <a:pPr algn="l" marL="342900" indent="-342900">
+              <a:spcAft>
+                <a:spcPts val="800"/>
+              </a:spcAft>
+              <a:buSzPct val="100000"/>
+              <a:buChar char="•"/>
+            </a:pPr>
+            <a:r>
+              <a:rPr lang="en-US" sz="1800" dirty="0">
+                <a:solidFill>
+                  <a:srgbClr val="111111"/>
+                </a:solidFill>
+                <a:latin typeface="Calibri" pitchFamily="34" charset="0"/>
+                <a:ea typeface="Calibri" pitchFamily="34" charset="-122"/>
+                <a:cs typeface="Calibri" pitchFamily="34" charset="-120"/>
+              </a:rPr>
+              <a:t>Photo, Activity 2: “Bauxite mine near Itea, Greece” by Jason-Morrison, CC BY-NC 2.0, via Flickr (https://www.flickr.com/photos/8998833@N07/929316608)</a:t>
+            </a:r>
+            <a:endParaRPr lang="en-US" sz="1800" dirty="0"/>
+          </a:p>
+          <a:p>
+            <a:pPr algn="l" marL="342900" indent="-342900">
+              <a:spcAft>
+                <a:spcPts val="800"/>
+              </a:spcAft>
+              <a:buSzPct val="100000"/>
+              <a:buChar char="•"/>
+            </a:pPr>
+            <a:r>
+              <a:rPr lang="en-US" sz="1800" dirty="0">
+                <a:solidFill>
+                  <a:srgbClr val="111111"/>
+                </a:solidFill>
+                <a:latin typeface="Calibri" pitchFamily="34" charset="0"/>
+                <a:ea typeface="Calibri" pitchFamily="34" charset="-122"/>
+                <a:cs typeface="Calibri" pitchFamily="34" charset="-120"/>
+              </a:rPr>
+              <a:t>Photo, Activity 3: “Cotton Fields, U.S. 65, Tensas Parish, Louisiana (4)” by Ken Lund, CC BY-SA 2.0, via Flickr (https://www.flickr.com/photos/75683070@N00/3934873451)</a:t>
+            </a:r>
+            <a:endParaRPr lang="en-US" sz="1800" dirty="0"/>
+          </a:p>
+          <a:p>
+            <a:pPr algn="l" marL="342900" indent="-342900">
+              <a:spcAft>
+                <a:spcPts val="800"/>
+              </a:spcAft>
+              <a:buSzPct val="100000"/>
+              <a:buChar char="•"/>
+            </a:pPr>
+            <a:r>
+              <a:rPr lang="en-US" sz="1800" dirty="0">
+                <a:solidFill>
+                  <a:srgbClr val="111111"/>
+                </a:solidFill>
+                <a:latin typeface="Calibri" pitchFamily="34" charset="0"/>
+                <a:ea typeface="Calibri" pitchFamily="34" charset="-122"/>
+                <a:cs typeface="Calibri" pitchFamily="34" charset="-120"/>
+              </a:rPr>
+              <a:t>Photo, Activity 4: “Rhumsiki peak, North Cameroon” by krishna.naudin, CC BY-SA 2.0, via Flickr (https://www.flickr.com/photos/141297921@N05/25989204581)</a:t>
+            </a:r>
+            <a:endParaRPr lang="en-US" sz="1800" dirty="0"/>
+          </a:p>
+          <a:p>
+            <a:pPr algn="l" marL="342900" indent="-342900">
+              <a:spcAft>
+                <a:spcPts val="800"/>
+              </a:spcAft>
+              <a:buSzPct val="100000"/>
+              <a:buChar char="•"/>
+            </a:pPr>
+            <a:r>
+              <a:rPr lang="en-US" sz="1800" dirty="0">
+                <a:solidFill>
+                  <a:srgbClr val="111111"/>
+                </a:solidFill>
+                <a:latin typeface="Calibri" pitchFamily="34" charset="0"/>
+                <a:ea typeface="Calibri" pitchFamily="34" charset="-122"/>
+                <a:cs typeface="Calibri" pitchFamily="34" charset="-120"/>
+              </a:rPr>
+              <a:t>Photo, Activity 5: “Cracked wall” by árticotropical, CC BY 2.0, via Flickr (https://www.flickr.com/photos/8581973@N02/521943309)</a:t>
+            </a:r>
+            <a:endParaRPr lang="en-US" sz="1800" dirty="0"/>
+          </a:p>
+          <a:p>
+            <a:pPr algn="l" marL="342900" indent="-342900">
+              <a:spcAft>
+                <a:spcPts val="800"/>
+              </a:spcAft>
+              <a:buSzPct val="100000"/>
+              <a:buChar char="•"/>
+            </a:pPr>
+            <a:r>
+              <a:rPr lang="en-US" sz="1800" dirty="0">
+                <a:solidFill>
+                  <a:srgbClr val="111111"/>
+                </a:solidFill>
+                <a:latin typeface="Calibri" pitchFamily="34" charset="0"/>
+                <a:ea typeface="Calibri" pitchFamily="34" charset="-122"/>
+                <a:cs typeface="Calibri" pitchFamily="34" charset="-120"/>
+              </a:rPr>
+              <a:t>Diagrams and animations: drawn for this lesson (Geography Department).</a:t>
+            </a:r>
+            <a:endParaRPr lang="en-US" sz="1800" dirty="0"/>
+          </a:p>
+        </p:txBody>
+      </p:sp>
+      <p:sp>
+        <p:nvSpPr>
+          <p:cNvPr id="25" name="Slide Number Placeholder 0"/>
+          <p:cNvSpPr>
+            <a:spLocks noGrp="1"/>
+          </p:cNvSpPr>
+          <p:nvPr>
+            <p:ph type="sldNum" sz="quarter" idx="4294967295"/>
+          </p:nvPr>
+        </p:nvSpPr>
+        <p:spPr>
+          <a:xfrm>
+            <a:off x="27432" y="91440"/>
+            <a:ext cx="585216" cy="475488"/>
+          </a:xfrm>
+          <a:prstGeom prst="rect">
+            <a:avLst/>
+          </a:prstGeom>
+          <a:extLst>
+            <a:ext uri="{C572A759-6A51-4108-AA02-DFA0A04FC94B}">
+              <ma14:wrappingTextBoxFlag xmlns:ma14="http://schemas.microsoft.com/office/mac/drawingml/2011/main" val="0"/>
+            </a:ext>
+          </a:extLst>
+        </p:spPr>
+        <p:txBody>
+          <a:bodyPr/>
+          <a:lstStyle>
+            <a:lvl1pPr>
+              <a:defRPr sz="2000">
+                <a:solidFill>
+                  <a:srgbClr val="FFFFFF"/>
+                </a:solidFill>
+                <a:latin typeface="Calibri"/>
+                <a:ea typeface="Calibri"/>
+                <a:cs typeface="Calibri"/>
+              </a:defRPr>
+            </a:lvl1pPr>
+          </a:lstStyle>
+          <a:p>
+            <a:pPr algn="ctr"/>
+            <a:fld id="{F7021451-1387-4CA6-816F-3879F97B5CBC}" type="slidenum">
+              <a:rPr b="1" lang="en-US"/>
+              <a:t>61</a:t>
             </a:fld>
             <a:endParaRPr lang="en-US"/>
           </a:p>
